--- a/docs/presentacion_tfm_15min_v4.pptx
+++ b/docs/presentacion_tfm_15min_v4.pptx
@@ -523,6 +523,6844 @@
 </pc:chgInfo>
 </file>
 
+<file path=ppt/diagrams/colors1.xml><?xml version="1.0" encoding="utf-8"?>
+<dgm:colorsDef xmlns:dgm="http://schemas.openxmlformats.org/drawingml/2006/diagram" xmlns:a="http://schemas.openxmlformats.org/drawingml/2006/main" uniqueId="urn:microsoft.com/office/officeart/2005/8/colors/accent1_2">
+  <dgm:title val=""/>
+  <dgm:desc val=""/>
+  <dgm:catLst>
+    <dgm:cat type="accent1" pri="11200"/>
+  </dgm:catLst>
+  <dgm:styleLbl name="node0">
+    <dgm:fillClrLst meth="repeat">
+      <a:schemeClr val="accent1"/>
+    </dgm:fillClrLst>
+    <dgm:linClrLst meth="repeat">
+      <a:schemeClr val="lt1"/>
+    </dgm:linClrLst>
+    <dgm:effectClrLst/>
+    <dgm:txLinClrLst/>
+    <dgm:txFillClrLst/>
+    <dgm:txEffectClrLst/>
+  </dgm:styleLbl>
+  <dgm:styleLbl name="alignNode1">
+    <dgm:fillClrLst meth="repeat">
+      <a:schemeClr val="accent1"/>
+    </dgm:fillClrLst>
+    <dgm:linClrLst meth="repeat">
+      <a:schemeClr val="accent1"/>
+    </dgm:linClrLst>
+    <dgm:effectClrLst/>
+    <dgm:txLinClrLst/>
+    <dgm:txFillClrLst/>
+    <dgm:txEffectClrLst/>
+  </dgm:styleLbl>
+  <dgm:styleLbl name="node1">
+    <dgm:fillClrLst meth="repeat">
+      <a:schemeClr val="accent1"/>
+    </dgm:fillClrLst>
+    <dgm:linClrLst meth="repeat">
+      <a:schemeClr val="lt1"/>
+    </dgm:linClrLst>
+    <dgm:effectClrLst/>
+    <dgm:txLinClrLst/>
+    <dgm:txFillClrLst/>
+    <dgm:txEffectClrLst/>
+  </dgm:styleLbl>
+  <dgm:styleLbl name="lnNode1">
+    <dgm:fillClrLst meth="repeat">
+      <a:schemeClr val="accent1"/>
+    </dgm:fillClrLst>
+    <dgm:linClrLst meth="repeat">
+      <a:schemeClr val="lt1"/>
+    </dgm:linClrLst>
+    <dgm:effectClrLst/>
+    <dgm:txLinClrLst/>
+    <dgm:txFillClrLst/>
+    <dgm:txEffectClrLst/>
+  </dgm:styleLbl>
+  <dgm:styleLbl name="vennNode1">
+    <dgm:fillClrLst meth="repeat">
+      <a:schemeClr val="accent1">
+        <a:alpha val="50000"/>
+      </a:schemeClr>
+    </dgm:fillClrLst>
+    <dgm:linClrLst meth="repeat">
+      <a:schemeClr val="lt1"/>
+    </dgm:linClrLst>
+    <dgm:effectClrLst/>
+    <dgm:txLinClrLst/>
+    <dgm:txFillClrLst/>
+    <dgm:txEffectClrLst/>
+  </dgm:styleLbl>
+  <dgm:styleLbl name="node2">
+    <dgm:fillClrLst meth="repeat">
+      <a:schemeClr val="accent1"/>
+    </dgm:fillClrLst>
+    <dgm:linClrLst meth="repeat">
+      <a:schemeClr val="lt1"/>
+    </dgm:linClrLst>
+    <dgm:effectClrLst/>
+    <dgm:txLinClrLst/>
+    <dgm:txFillClrLst/>
+    <dgm:txEffectClrLst/>
+  </dgm:styleLbl>
+  <dgm:styleLbl name="node3">
+    <dgm:fillClrLst meth="repeat">
+      <a:schemeClr val="accent1"/>
+    </dgm:fillClrLst>
+    <dgm:linClrLst meth="repeat">
+      <a:schemeClr val="lt1"/>
+    </dgm:linClrLst>
+    <dgm:effectClrLst/>
+    <dgm:txLinClrLst/>
+    <dgm:txFillClrLst/>
+    <dgm:txEffectClrLst/>
+  </dgm:styleLbl>
+  <dgm:styleLbl name="node4">
+    <dgm:fillClrLst meth="repeat">
+      <a:schemeClr val="accent1"/>
+    </dgm:fillClrLst>
+    <dgm:linClrLst meth="repeat">
+      <a:schemeClr val="lt1"/>
+    </dgm:linClrLst>
+    <dgm:effectClrLst/>
+    <dgm:txLinClrLst/>
+    <dgm:txFillClrLst/>
+    <dgm:txEffectClrLst/>
+  </dgm:styleLbl>
+  <dgm:styleLbl name="fgImgPlace1">
+    <dgm:fillClrLst meth="repeat">
+      <a:schemeClr val="accent1">
+        <a:tint val="50000"/>
+      </a:schemeClr>
+    </dgm:fillClrLst>
+    <dgm:linClrLst meth="repeat">
+      <a:schemeClr val="lt1"/>
+    </dgm:linClrLst>
+    <dgm:effectClrLst/>
+    <dgm:txLinClrLst/>
+    <dgm:txFillClrLst meth="repeat">
+      <a:schemeClr val="lt1"/>
+    </dgm:txFillClrLst>
+    <dgm:txEffectClrLst/>
+  </dgm:styleLbl>
+  <dgm:styleLbl name="alignImgPlace1">
+    <dgm:fillClrLst meth="repeat">
+      <a:schemeClr val="accent1">
+        <a:tint val="50000"/>
+      </a:schemeClr>
+    </dgm:fillClrLst>
+    <dgm:linClrLst meth="repeat">
+      <a:schemeClr val="lt1"/>
+    </dgm:linClrLst>
+    <dgm:effectClrLst/>
+    <dgm:txLinClrLst/>
+    <dgm:txFillClrLst meth="repeat">
+      <a:schemeClr val="lt1"/>
+    </dgm:txFillClrLst>
+    <dgm:txEffectClrLst/>
+  </dgm:styleLbl>
+  <dgm:styleLbl name="bgImgPlace1">
+    <dgm:fillClrLst meth="repeat">
+      <a:schemeClr val="accent1">
+        <a:tint val="50000"/>
+      </a:schemeClr>
+    </dgm:fillClrLst>
+    <dgm:linClrLst meth="repeat">
+      <a:schemeClr val="lt1"/>
+    </dgm:linClrLst>
+    <dgm:effectClrLst/>
+    <dgm:txLinClrLst/>
+    <dgm:txFillClrLst meth="repeat">
+      <a:schemeClr val="lt1"/>
+    </dgm:txFillClrLst>
+    <dgm:txEffectClrLst/>
+  </dgm:styleLbl>
+  <dgm:styleLbl name="sibTrans2D1">
+    <dgm:fillClrLst meth="repeat">
+      <a:schemeClr val="accent1">
+        <a:tint val="60000"/>
+      </a:schemeClr>
+    </dgm:fillClrLst>
+    <dgm:linClrLst meth="repeat">
+      <a:schemeClr val="accent1">
+        <a:tint val="60000"/>
+      </a:schemeClr>
+    </dgm:linClrLst>
+    <dgm:effectClrLst/>
+    <dgm:txLinClrLst/>
+    <dgm:txFillClrLst/>
+    <dgm:txEffectClrLst/>
+  </dgm:styleLbl>
+  <dgm:styleLbl name="fgSibTrans2D1">
+    <dgm:fillClrLst meth="repeat">
+      <a:schemeClr val="accent1">
+        <a:tint val="60000"/>
+      </a:schemeClr>
+    </dgm:fillClrLst>
+    <dgm:linClrLst meth="repeat">
+      <a:schemeClr val="accent1">
+        <a:tint val="60000"/>
+      </a:schemeClr>
+    </dgm:linClrLst>
+    <dgm:effectClrLst/>
+    <dgm:txLinClrLst/>
+    <dgm:txFillClrLst/>
+    <dgm:txEffectClrLst/>
+  </dgm:styleLbl>
+  <dgm:styleLbl name="bgSibTrans2D1">
+    <dgm:fillClrLst meth="repeat">
+      <a:schemeClr val="accent1">
+        <a:tint val="60000"/>
+      </a:schemeClr>
+    </dgm:fillClrLst>
+    <dgm:linClrLst meth="repeat">
+      <a:schemeClr val="accent1">
+        <a:tint val="60000"/>
+      </a:schemeClr>
+    </dgm:linClrLst>
+    <dgm:effectClrLst/>
+    <dgm:txLinClrLst/>
+    <dgm:txFillClrLst/>
+    <dgm:txEffectClrLst/>
+  </dgm:styleLbl>
+  <dgm:styleLbl name="sibTrans1D1">
+    <dgm:fillClrLst meth="repeat">
+      <a:schemeClr val="accent1"/>
+    </dgm:fillClrLst>
+    <dgm:linClrLst meth="repeat">
+      <a:schemeClr val="accent1"/>
+    </dgm:linClrLst>
+    <dgm:effectClrLst/>
+    <dgm:txLinClrLst/>
+    <dgm:txFillClrLst meth="repeat">
+      <a:schemeClr val="tx1"/>
+    </dgm:txFillClrLst>
+    <dgm:txEffectClrLst/>
+  </dgm:styleLbl>
+  <dgm:styleLbl name="callout">
+    <dgm:fillClrLst meth="repeat">
+      <a:schemeClr val="accent1"/>
+    </dgm:fillClrLst>
+    <dgm:linClrLst meth="repeat">
+      <a:schemeClr val="accent1">
+        <a:tint val="50000"/>
+      </a:schemeClr>
+    </dgm:linClrLst>
+    <dgm:effectClrLst/>
+    <dgm:txLinClrLst/>
+    <dgm:txFillClrLst meth="repeat">
+      <a:schemeClr val="tx1"/>
+    </dgm:txFillClrLst>
+    <dgm:txEffectClrLst/>
+  </dgm:styleLbl>
+  <dgm:styleLbl name="asst0">
+    <dgm:fillClrLst meth="repeat">
+      <a:schemeClr val="accent1"/>
+    </dgm:fillClrLst>
+    <dgm:linClrLst meth="repeat">
+      <a:schemeClr val="lt1"/>
+    </dgm:linClrLst>
+    <dgm:effectClrLst/>
+    <dgm:txLinClrLst/>
+    <dgm:txFillClrLst/>
+    <dgm:txEffectClrLst/>
+  </dgm:styleLbl>
+  <dgm:styleLbl name="asst1">
+    <dgm:fillClrLst meth="repeat">
+      <a:schemeClr val="accent1"/>
+    </dgm:fillClrLst>
+    <dgm:linClrLst meth="repeat">
+      <a:schemeClr val="lt1"/>
+    </dgm:linClrLst>
+    <dgm:effectClrLst/>
+    <dgm:txLinClrLst/>
+    <dgm:txFillClrLst/>
+    <dgm:txEffectClrLst/>
+  </dgm:styleLbl>
+  <dgm:styleLbl name="asst2">
+    <dgm:fillClrLst meth="repeat">
+      <a:schemeClr val="accent1"/>
+    </dgm:fillClrLst>
+    <dgm:linClrLst meth="repeat">
+      <a:schemeClr val="lt1"/>
+    </dgm:linClrLst>
+    <dgm:effectClrLst/>
+    <dgm:txLinClrLst/>
+    <dgm:txFillClrLst/>
+    <dgm:txEffectClrLst/>
+  </dgm:styleLbl>
+  <dgm:styleLbl name="asst3">
+    <dgm:fillClrLst meth="repeat">
+      <a:schemeClr val="accent1"/>
+    </dgm:fillClrLst>
+    <dgm:linClrLst meth="repeat">
+      <a:schemeClr val="lt1"/>
+    </dgm:linClrLst>
+    <dgm:effectClrLst/>
+    <dgm:txLinClrLst/>
+    <dgm:txFillClrLst/>
+    <dgm:txEffectClrLst/>
+  </dgm:styleLbl>
+  <dgm:styleLbl name="asst4">
+    <dgm:fillClrLst meth="repeat">
+      <a:schemeClr val="accent1"/>
+    </dgm:fillClrLst>
+    <dgm:linClrLst meth="repeat">
+      <a:schemeClr val="lt1"/>
+    </dgm:linClrLst>
+    <dgm:effectClrLst/>
+    <dgm:txLinClrLst/>
+    <dgm:txFillClrLst/>
+    <dgm:txEffectClrLst/>
+  </dgm:styleLbl>
+  <dgm:styleLbl name="parChTrans2D1">
+    <dgm:fillClrLst meth="repeat">
+      <a:schemeClr val="accent1">
+        <a:tint val="60000"/>
+      </a:schemeClr>
+    </dgm:fillClrLst>
+    <dgm:linClrLst meth="repeat">
+      <a:schemeClr val="accent1">
+        <a:tint val="60000"/>
+      </a:schemeClr>
+    </dgm:linClrLst>
+    <dgm:effectClrLst/>
+    <dgm:txLinClrLst/>
+    <dgm:txFillClrLst meth="repeat">
+      <a:schemeClr val="lt1"/>
+    </dgm:txFillClrLst>
+    <dgm:txEffectClrLst/>
+  </dgm:styleLbl>
+  <dgm:styleLbl name="parChTrans2D2">
+    <dgm:fillClrLst meth="repeat">
+      <a:schemeClr val="accent1"/>
+    </dgm:fillClrLst>
+    <dgm:linClrLst meth="repeat">
+      <a:schemeClr val="accent1"/>
+    </dgm:linClrLst>
+    <dgm:effectClrLst/>
+    <dgm:txLinClrLst/>
+    <dgm:txFillClrLst meth="repeat">
+      <a:schemeClr val="lt1"/>
+    </dgm:txFillClrLst>
+    <dgm:txEffectClrLst/>
+  </dgm:styleLbl>
+  <dgm:styleLbl name="parChTrans2D3">
+    <dgm:fillClrLst meth="repeat">
+      <a:schemeClr val="accent1"/>
+    </dgm:fillClrLst>
+    <dgm:linClrLst meth="repeat">
+      <a:schemeClr val="accent1"/>
+    </dgm:linClrLst>
+    <dgm:effectClrLst/>
+    <dgm:txLinClrLst/>
+    <dgm:txFillClrLst meth="repeat">
+      <a:schemeClr val="lt1"/>
+    </dgm:txFillClrLst>
+    <dgm:txEffectClrLst/>
+  </dgm:styleLbl>
+  <dgm:styleLbl name="parChTrans2D4">
+    <dgm:fillClrLst meth="repeat">
+      <a:schemeClr val="accent1"/>
+    </dgm:fillClrLst>
+    <dgm:linClrLst meth="repeat">
+      <a:schemeClr val="accent1"/>
+    </dgm:linClrLst>
+    <dgm:effectClrLst/>
+    <dgm:txLinClrLst/>
+    <dgm:txFillClrLst meth="repeat">
+      <a:schemeClr val="lt1"/>
+    </dgm:txFillClrLst>
+    <dgm:txEffectClrLst/>
+  </dgm:styleLbl>
+  <dgm:styleLbl name="parChTrans1D1">
+    <dgm:fillClrLst meth="repeat">
+      <a:schemeClr val="accent1"/>
+    </dgm:fillClrLst>
+    <dgm:linClrLst meth="repeat">
+      <a:schemeClr val="accent1">
+        <a:shade val="60000"/>
+      </a:schemeClr>
+    </dgm:linClrLst>
+    <dgm:effectClrLst/>
+    <dgm:txLinClrLst/>
+    <dgm:txFillClrLst meth="repeat">
+      <a:schemeClr val="tx1"/>
+    </dgm:txFillClrLst>
+    <dgm:txEffectClrLst/>
+  </dgm:styleLbl>
+  <dgm:styleLbl name="parChTrans1D2">
+    <dgm:fillClrLst meth="repeat">
+      <a:schemeClr val="accent1"/>
+    </dgm:fillClrLst>
+    <dgm:linClrLst meth="repeat">
+      <a:schemeClr val="accent1">
+        <a:shade val="60000"/>
+      </a:schemeClr>
+    </dgm:linClrLst>
+    <dgm:effectClrLst/>
+    <dgm:txLinClrLst/>
+    <dgm:txFillClrLst meth="repeat">
+      <a:schemeClr val="tx1"/>
+    </dgm:txFillClrLst>
+    <dgm:txEffectClrLst/>
+  </dgm:styleLbl>
+  <dgm:styleLbl name="parChTrans1D3">
+    <dgm:fillClrLst meth="repeat">
+      <a:schemeClr val="accent1"/>
+    </dgm:fillClrLst>
+    <dgm:linClrLst meth="repeat">
+      <a:schemeClr val="accent1">
+        <a:shade val="80000"/>
+      </a:schemeClr>
+    </dgm:linClrLst>
+    <dgm:effectClrLst/>
+    <dgm:txLinClrLst/>
+    <dgm:txFillClrLst meth="repeat">
+      <a:schemeClr val="tx1"/>
+    </dgm:txFillClrLst>
+    <dgm:txEffectClrLst/>
+  </dgm:styleLbl>
+  <dgm:styleLbl name="parChTrans1D4">
+    <dgm:fillClrLst meth="repeat">
+      <a:schemeClr val="accent1"/>
+    </dgm:fillClrLst>
+    <dgm:linClrLst meth="repeat">
+      <a:schemeClr val="accent1">
+        <a:shade val="80000"/>
+      </a:schemeClr>
+    </dgm:linClrLst>
+    <dgm:effectClrLst/>
+    <dgm:txLinClrLst/>
+    <dgm:txFillClrLst meth="repeat">
+      <a:schemeClr val="tx1"/>
+    </dgm:txFillClrLst>
+    <dgm:txEffectClrLst/>
+  </dgm:styleLbl>
+  <dgm:styleLbl name="fgAcc1">
+    <dgm:fillClrLst meth="repeat">
+      <a:schemeClr val="lt1">
+        <a:alpha val="90000"/>
+      </a:schemeClr>
+    </dgm:fillClrLst>
+    <dgm:linClrLst meth="repeat">
+      <a:schemeClr val="accent1"/>
+    </dgm:linClrLst>
+    <dgm:effectClrLst/>
+    <dgm:txLinClrLst/>
+    <dgm:txFillClrLst meth="repeat">
+      <a:schemeClr val="dk1"/>
+    </dgm:txFillClrLst>
+    <dgm:txEffectClrLst/>
+  </dgm:styleLbl>
+  <dgm:styleLbl name="conFgAcc1">
+    <dgm:fillClrLst meth="repeat">
+      <a:schemeClr val="lt1">
+        <a:alpha val="90000"/>
+      </a:schemeClr>
+    </dgm:fillClrLst>
+    <dgm:linClrLst meth="repeat">
+      <a:schemeClr val="accent1"/>
+    </dgm:linClrLst>
+    <dgm:effectClrLst/>
+    <dgm:txLinClrLst/>
+    <dgm:txFillClrLst meth="repeat">
+      <a:schemeClr val="dk1"/>
+    </dgm:txFillClrLst>
+    <dgm:txEffectClrLst/>
+  </dgm:styleLbl>
+  <dgm:styleLbl name="alignAcc1">
+    <dgm:fillClrLst meth="repeat">
+      <a:schemeClr val="lt1">
+        <a:alpha val="90000"/>
+      </a:schemeClr>
+    </dgm:fillClrLst>
+    <dgm:linClrLst meth="repeat">
+      <a:schemeClr val="accent1"/>
+    </dgm:linClrLst>
+    <dgm:effectClrLst/>
+    <dgm:txLinClrLst/>
+    <dgm:txFillClrLst meth="repeat">
+      <a:schemeClr val="dk1"/>
+    </dgm:txFillClrLst>
+    <dgm:txEffectClrLst/>
+  </dgm:styleLbl>
+  <dgm:styleLbl name="trAlignAcc1">
+    <dgm:fillClrLst meth="repeat">
+      <a:schemeClr val="lt1">
+        <a:alpha val="40000"/>
+      </a:schemeClr>
+    </dgm:fillClrLst>
+    <dgm:linClrLst meth="repeat">
+      <a:schemeClr val="accent1"/>
+    </dgm:linClrLst>
+    <dgm:effectClrLst/>
+    <dgm:txLinClrLst/>
+    <dgm:txFillClrLst meth="repeat">
+      <a:schemeClr val="dk1"/>
+    </dgm:txFillClrLst>
+    <dgm:txEffectClrLst/>
+  </dgm:styleLbl>
+  <dgm:styleLbl name="bgAcc1">
+    <dgm:fillClrLst meth="repeat">
+      <a:schemeClr val="lt1">
+        <a:alpha val="90000"/>
+      </a:schemeClr>
+    </dgm:fillClrLst>
+    <dgm:linClrLst meth="repeat">
+      <a:schemeClr val="accent1"/>
+    </dgm:linClrLst>
+    <dgm:effectClrLst/>
+    <dgm:txLinClrLst/>
+    <dgm:txFillClrLst meth="repeat">
+      <a:schemeClr val="dk1"/>
+    </dgm:txFillClrLst>
+    <dgm:txEffectClrLst/>
+  </dgm:styleLbl>
+  <dgm:styleLbl name="solidFgAcc1">
+    <dgm:fillClrLst meth="repeat">
+      <a:schemeClr val="lt1"/>
+    </dgm:fillClrLst>
+    <dgm:linClrLst meth="repeat">
+      <a:schemeClr val="accent1"/>
+    </dgm:linClrLst>
+    <dgm:effectClrLst/>
+    <dgm:txLinClrLst/>
+    <dgm:txFillClrLst meth="repeat">
+      <a:schemeClr val="dk1"/>
+    </dgm:txFillClrLst>
+    <dgm:txEffectClrLst/>
+  </dgm:styleLbl>
+  <dgm:styleLbl name="solidAlignAcc1">
+    <dgm:fillClrLst meth="repeat">
+      <a:schemeClr val="lt1"/>
+    </dgm:fillClrLst>
+    <dgm:linClrLst meth="repeat">
+      <a:schemeClr val="accent1"/>
+    </dgm:linClrLst>
+    <dgm:effectClrLst/>
+    <dgm:txLinClrLst/>
+    <dgm:txFillClrLst meth="repeat">
+      <a:schemeClr val="dk1"/>
+    </dgm:txFillClrLst>
+    <dgm:txEffectClrLst/>
+  </dgm:styleLbl>
+  <dgm:styleLbl name="solidBgAcc1">
+    <dgm:fillClrLst meth="repeat">
+      <a:schemeClr val="lt1"/>
+    </dgm:fillClrLst>
+    <dgm:linClrLst meth="repeat">
+      <a:schemeClr val="accent1"/>
+    </dgm:linClrLst>
+    <dgm:effectClrLst/>
+    <dgm:txLinClrLst/>
+    <dgm:txFillClrLst meth="repeat">
+      <a:schemeClr val="dk1"/>
+    </dgm:txFillClrLst>
+    <dgm:txEffectClrLst/>
+  </dgm:styleLbl>
+  <dgm:styleLbl name="fgAccFollowNode1">
+    <dgm:fillClrLst meth="repeat">
+      <a:schemeClr val="accent1">
+        <a:alpha val="90000"/>
+        <a:tint val="40000"/>
+      </a:schemeClr>
+    </dgm:fillClrLst>
+    <dgm:linClrLst meth="repeat">
+      <a:schemeClr val="accent1">
+        <a:alpha val="90000"/>
+        <a:tint val="40000"/>
+      </a:schemeClr>
+    </dgm:linClrLst>
+    <dgm:effectClrLst/>
+    <dgm:txLinClrLst/>
+    <dgm:txFillClrLst meth="repeat">
+      <a:schemeClr val="dk1"/>
+    </dgm:txFillClrLst>
+    <dgm:txEffectClrLst/>
+  </dgm:styleLbl>
+  <dgm:styleLbl name="alignAccFollowNode1">
+    <dgm:fillClrLst meth="repeat">
+      <a:schemeClr val="accent1">
+        <a:alpha val="90000"/>
+        <a:tint val="40000"/>
+      </a:schemeClr>
+    </dgm:fillClrLst>
+    <dgm:linClrLst meth="repeat">
+      <a:schemeClr val="accent1">
+        <a:alpha val="90000"/>
+        <a:tint val="40000"/>
+      </a:schemeClr>
+    </dgm:linClrLst>
+    <dgm:effectClrLst/>
+    <dgm:txLinClrLst/>
+    <dgm:txFillClrLst meth="repeat">
+      <a:schemeClr val="dk1"/>
+    </dgm:txFillClrLst>
+    <dgm:txEffectClrLst/>
+  </dgm:styleLbl>
+  <dgm:styleLbl name="bgAccFollowNode1">
+    <dgm:fillClrLst meth="repeat">
+      <a:schemeClr val="accent1">
+        <a:alpha val="90000"/>
+        <a:tint val="40000"/>
+      </a:schemeClr>
+    </dgm:fillClrLst>
+    <dgm:linClrLst meth="repeat">
+      <a:schemeClr val="accent1">
+        <a:alpha val="90000"/>
+        <a:tint val="40000"/>
+      </a:schemeClr>
+    </dgm:linClrLst>
+    <dgm:effectClrLst/>
+    <dgm:txLinClrLst/>
+    <dgm:txFillClrLst meth="repeat">
+      <a:schemeClr val="dk1"/>
+    </dgm:txFillClrLst>
+    <dgm:txEffectClrLst/>
+  </dgm:styleLbl>
+  <dgm:styleLbl name="fgAcc0">
+    <dgm:fillClrLst meth="repeat">
+      <a:schemeClr val="lt1">
+        <a:alpha val="90000"/>
+      </a:schemeClr>
+    </dgm:fillClrLst>
+    <dgm:linClrLst meth="repeat">
+      <a:schemeClr val="accent1"/>
+    </dgm:linClrLst>
+    <dgm:effectClrLst/>
+    <dgm:txLinClrLst/>
+    <dgm:txFillClrLst meth="repeat">
+      <a:schemeClr val="dk1"/>
+    </dgm:txFillClrLst>
+    <dgm:txEffectClrLst/>
+  </dgm:styleLbl>
+  <dgm:styleLbl name="fgAcc2">
+    <dgm:fillClrLst meth="repeat">
+      <a:schemeClr val="lt1">
+        <a:alpha val="90000"/>
+      </a:schemeClr>
+    </dgm:fillClrLst>
+    <dgm:linClrLst meth="repeat">
+      <a:schemeClr val="accent1"/>
+    </dgm:linClrLst>
+    <dgm:effectClrLst/>
+    <dgm:txLinClrLst/>
+    <dgm:txFillClrLst meth="repeat">
+      <a:schemeClr val="dk1"/>
+    </dgm:txFillClrLst>
+    <dgm:txEffectClrLst/>
+  </dgm:styleLbl>
+  <dgm:styleLbl name="fgAcc3">
+    <dgm:fillClrLst meth="repeat">
+      <a:schemeClr val="lt1">
+        <a:alpha val="90000"/>
+      </a:schemeClr>
+    </dgm:fillClrLst>
+    <dgm:linClrLst meth="repeat">
+      <a:schemeClr val="accent1"/>
+    </dgm:linClrLst>
+    <dgm:effectClrLst/>
+    <dgm:txLinClrLst/>
+    <dgm:txFillClrLst meth="repeat">
+      <a:schemeClr val="dk1"/>
+    </dgm:txFillClrLst>
+    <dgm:txEffectClrLst/>
+  </dgm:styleLbl>
+  <dgm:styleLbl name="fgAcc4">
+    <dgm:fillClrLst meth="repeat">
+      <a:schemeClr val="lt1">
+        <a:alpha val="90000"/>
+      </a:schemeClr>
+    </dgm:fillClrLst>
+    <dgm:linClrLst meth="repeat">
+      <a:schemeClr val="accent1"/>
+    </dgm:linClrLst>
+    <dgm:effectClrLst/>
+    <dgm:txLinClrLst/>
+    <dgm:txFillClrLst meth="repeat">
+      <a:schemeClr val="dk1"/>
+    </dgm:txFillClrLst>
+    <dgm:txEffectClrLst/>
+  </dgm:styleLbl>
+  <dgm:styleLbl name="bgShp">
+    <dgm:fillClrLst meth="repeat">
+      <a:schemeClr val="accent1">
+        <a:tint val="40000"/>
+      </a:schemeClr>
+    </dgm:fillClrLst>
+    <dgm:linClrLst meth="repeat">
+      <a:schemeClr val="accent1"/>
+    </dgm:linClrLst>
+    <dgm:effectClrLst/>
+    <dgm:txLinClrLst/>
+    <dgm:txFillClrLst meth="repeat">
+      <a:schemeClr val="dk1"/>
+    </dgm:txFillClrLst>
+    <dgm:txEffectClrLst/>
+  </dgm:styleLbl>
+  <dgm:styleLbl name="dkBgShp">
+    <dgm:fillClrLst meth="repeat">
+      <a:schemeClr val="accent1">
+        <a:shade val="80000"/>
+      </a:schemeClr>
+    </dgm:fillClrLst>
+    <dgm:linClrLst meth="repeat">
+      <a:schemeClr val="accent1"/>
+    </dgm:linClrLst>
+    <dgm:effectClrLst/>
+    <dgm:txLinClrLst/>
+    <dgm:txFillClrLst meth="repeat">
+      <a:schemeClr val="lt1"/>
+    </dgm:txFillClrLst>
+    <dgm:txEffectClrLst/>
+  </dgm:styleLbl>
+  <dgm:styleLbl name="trBgShp">
+    <dgm:fillClrLst meth="repeat">
+      <a:schemeClr val="accent1">
+        <a:tint val="50000"/>
+        <a:alpha val="40000"/>
+      </a:schemeClr>
+    </dgm:fillClrLst>
+    <dgm:linClrLst meth="repeat">
+      <a:schemeClr val="accent1"/>
+    </dgm:linClrLst>
+    <dgm:effectClrLst/>
+    <dgm:txLinClrLst/>
+    <dgm:txFillClrLst meth="repeat">
+      <a:schemeClr val="lt1"/>
+    </dgm:txFillClrLst>
+    <dgm:txEffectClrLst/>
+  </dgm:styleLbl>
+  <dgm:styleLbl name="fgShp">
+    <dgm:fillClrLst meth="repeat">
+      <a:schemeClr val="accent1">
+        <a:tint val="60000"/>
+      </a:schemeClr>
+    </dgm:fillClrLst>
+    <dgm:linClrLst meth="repeat">
+      <a:schemeClr val="lt1"/>
+    </dgm:linClrLst>
+    <dgm:effectClrLst/>
+    <dgm:txLinClrLst/>
+    <dgm:txFillClrLst meth="repeat">
+      <a:schemeClr val="dk1"/>
+    </dgm:txFillClrLst>
+    <dgm:txEffectClrLst/>
+  </dgm:styleLbl>
+  <dgm:styleLbl name="revTx">
+    <dgm:fillClrLst meth="repeat">
+      <a:schemeClr val="lt1">
+        <a:alpha val="0"/>
+      </a:schemeClr>
+    </dgm:fillClrLst>
+    <dgm:linClrLst meth="repeat">
+      <a:schemeClr val="dk1">
+        <a:alpha val="0"/>
+      </a:schemeClr>
+    </dgm:linClrLst>
+    <dgm:effectClrLst/>
+    <dgm:txLinClrLst/>
+    <dgm:txFillClrLst meth="repeat">
+      <a:schemeClr val="tx1"/>
+    </dgm:txFillClrLst>
+    <dgm:txEffectClrLst/>
+  </dgm:styleLbl>
+</dgm:colorsDef>
+</file>
+
+<file path=ppt/diagrams/colors2.xml><?xml version="1.0" encoding="utf-8"?>
+<dgm:colorsDef xmlns:dgm="http://schemas.openxmlformats.org/drawingml/2006/diagram" xmlns:a="http://schemas.openxmlformats.org/drawingml/2006/main" uniqueId="urn:microsoft.com/office/officeart/2005/8/colors/accent1_2">
+  <dgm:title val=""/>
+  <dgm:desc val=""/>
+  <dgm:catLst>
+    <dgm:cat type="accent1" pri="11200"/>
+  </dgm:catLst>
+  <dgm:styleLbl name="node0">
+    <dgm:fillClrLst meth="repeat">
+      <a:schemeClr val="accent1"/>
+    </dgm:fillClrLst>
+    <dgm:linClrLst meth="repeat">
+      <a:schemeClr val="lt1"/>
+    </dgm:linClrLst>
+    <dgm:effectClrLst/>
+    <dgm:txLinClrLst/>
+    <dgm:txFillClrLst/>
+    <dgm:txEffectClrLst/>
+  </dgm:styleLbl>
+  <dgm:styleLbl name="alignNode1">
+    <dgm:fillClrLst meth="repeat">
+      <a:schemeClr val="accent1"/>
+    </dgm:fillClrLst>
+    <dgm:linClrLst meth="repeat">
+      <a:schemeClr val="accent1"/>
+    </dgm:linClrLst>
+    <dgm:effectClrLst/>
+    <dgm:txLinClrLst/>
+    <dgm:txFillClrLst/>
+    <dgm:txEffectClrLst/>
+  </dgm:styleLbl>
+  <dgm:styleLbl name="node1">
+    <dgm:fillClrLst meth="repeat">
+      <a:schemeClr val="accent1"/>
+    </dgm:fillClrLst>
+    <dgm:linClrLst meth="repeat">
+      <a:schemeClr val="lt1"/>
+    </dgm:linClrLst>
+    <dgm:effectClrLst/>
+    <dgm:txLinClrLst/>
+    <dgm:txFillClrLst/>
+    <dgm:txEffectClrLst/>
+  </dgm:styleLbl>
+  <dgm:styleLbl name="lnNode1">
+    <dgm:fillClrLst meth="repeat">
+      <a:schemeClr val="accent1"/>
+    </dgm:fillClrLst>
+    <dgm:linClrLst meth="repeat">
+      <a:schemeClr val="lt1"/>
+    </dgm:linClrLst>
+    <dgm:effectClrLst/>
+    <dgm:txLinClrLst/>
+    <dgm:txFillClrLst/>
+    <dgm:txEffectClrLst/>
+  </dgm:styleLbl>
+  <dgm:styleLbl name="vennNode1">
+    <dgm:fillClrLst meth="repeat">
+      <a:schemeClr val="accent1">
+        <a:alpha val="50000"/>
+      </a:schemeClr>
+    </dgm:fillClrLst>
+    <dgm:linClrLst meth="repeat">
+      <a:schemeClr val="lt1"/>
+    </dgm:linClrLst>
+    <dgm:effectClrLst/>
+    <dgm:txLinClrLst/>
+    <dgm:txFillClrLst/>
+    <dgm:txEffectClrLst/>
+  </dgm:styleLbl>
+  <dgm:styleLbl name="node2">
+    <dgm:fillClrLst meth="repeat">
+      <a:schemeClr val="accent1"/>
+    </dgm:fillClrLst>
+    <dgm:linClrLst meth="repeat">
+      <a:schemeClr val="lt1"/>
+    </dgm:linClrLst>
+    <dgm:effectClrLst/>
+    <dgm:txLinClrLst/>
+    <dgm:txFillClrLst/>
+    <dgm:txEffectClrLst/>
+  </dgm:styleLbl>
+  <dgm:styleLbl name="node3">
+    <dgm:fillClrLst meth="repeat">
+      <a:schemeClr val="accent1"/>
+    </dgm:fillClrLst>
+    <dgm:linClrLst meth="repeat">
+      <a:schemeClr val="lt1"/>
+    </dgm:linClrLst>
+    <dgm:effectClrLst/>
+    <dgm:txLinClrLst/>
+    <dgm:txFillClrLst/>
+    <dgm:txEffectClrLst/>
+  </dgm:styleLbl>
+  <dgm:styleLbl name="node4">
+    <dgm:fillClrLst meth="repeat">
+      <a:schemeClr val="accent1"/>
+    </dgm:fillClrLst>
+    <dgm:linClrLst meth="repeat">
+      <a:schemeClr val="lt1"/>
+    </dgm:linClrLst>
+    <dgm:effectClrLst/>
+    <dgm:txLinClrLst/>
+    <dgm:txFillClrLst/>
+    <dgm:txEffectClrLst/>
+  </dgm:styleLbl>
+  <dgm:styleLbl name="fgImgPlace1">
+    <dgm:fillClrLst meth="repeat">
+      <a:schemeClr val="accent1">
+        <a:tint val="50000"/>
+      </a:schemeClr>
+    </dgm:fillClrLst>
+    <dgm:linClrLst meth="repeat">
+      <a:schemeClr val="lt1"/>
+    </dgm:linClrLst>
+    <dgm:effectClrLst/>
+    <dgm:txLinClrLst/>
+    <dgm:txFillClrLst meth="repeat">
+      <a:schemeClr val="lt1"/>
+    </dgm:txFillClrLst>
+    <dgm:txEffectClrLst/>
+  </dgm:styleLbl>
+  <dgm:styleLbl name="alignImgPlace1">
+    <dgm:fillClrLst meth="repeat">
+      <a:schemeClr val="accent1">
+        <a:tint val="50000"/>
+      </a:schemeClr>
+    </dgm:fillClrLst>
+    <dgm:linClrLst meth="repeat">
+      <a:schemeClr val="lt1"/>
+    </dgm:linClrLst>
+    <dgm:effectClrLst/>
+    <dgm:txLinClrLst/>
+    <dgm:txFillClrLst meth="repeat">
+      <a:schemeClr val="lt1"/>
+    </dgm:txFillClrLst>
+    <dgm:txEffectClrLst/>
+  </dgm:styleLbl>
+  <dgm:styleLbl name="bgImgPlace1">
+    <dgm:fillClrLst meth="repeat">
+      <a:schemeClr val="accent1">
+        <a:tint val="50000"/>
+      </a:schemeClr>
+    </dgm:fillClrLst>
+    <dgm:linClrLst meth="repeat">
+      <a:schemeClr val="lt1"/>
+    </dgm:linClrLst>
+    <dgm:effectClrLst/>
+    <dgm:txLinClrLst/>
+    <dgm:txFillClrLst meth="repeat">
+      <a:schemeClr val="lt1"/>
+    </dgm:txFillClrLst>
+    <dgm:txEffectClrLst/>
+  </dgm:styleLbl>
+  <dgm:styleLbl name="sibTrans2D1">
+    <dgm:fillClrLst meth="repeat">
+      <a:schemeClr val="accent1">
+        <a:tint val="60000"/>
+      </a:schemeClr>
+    </dgm:fillClrLst>
+    <dgm:linClrLst meth="repeat">
+      <a:schemeClr val="accent1">
+        <a:tint val="60000"/>
+      </a:schemeClr>
+    </dgm:linClrLst>
+    <dgm:effectClrLst/>
+    <dgm:txLinClrLst/>
+    <dgm:txFillClrLst/>
+    <dgm:txEffectClrLst/>
+  </dgm:styleLbl>
+  <dgm:styleLbl name="fgSibTrans2D1">
+    <dgm:fillClrLst meth="repeat">
+      <a:schemeClr val="accent1">
+        <a:tint val="60000"/>
+      </a:schemeClr>
+    </dgm:fillClrLst>
+    <dgm:linClrLst meth="repeat">
+      <a:schemeClr val="accent1">
+        <a:tint val="60000"/>
+      </a:schemeClr>
+    </dgm:linClrLst>
+    <dgm:effectClrLst/>
+    <dgm:txLinClrLst/>
+    <dgm:txFillClrLst/>
+    <dgm:txEffectClrLst/>
+  </dgm:styleLbl>
+  <dgm:styleLbl name="bgSibTrans2D1">
+    <dgm:fillClrLst meth="repeat">
+      <a:schemeClr val="accent1">
+        <a:tint val="60000"/>
+      </a:schemeClr>
+    </dgm:fillClrLst>
+    <dgm:linClrLst meth="repeat">
+      <a:schemeClr val="accent1">
+        <a:tint val="60000"/>
+      </a:schemeClr>
+    </dgm:linClrLst>
+    <dgm:effectClrLst/>
+    <dgm:txLinClrLst/>
+    <dgm:txFillClrLst/>
+    <dgm:txEffectClrLst/>
+  </dgm:styleLbl>
+  <dgm:styleLbl name="sibTrans1D1">
+    <dgm:fillClrLst meth="repeat">
+      <a:schemeClr val="accent1"/>
+    </dgm:fillClrLst>
+    <dgm:linClrLst meth="repeat">
+      <a:schemeClr val="accent1"/>
+    </dgm:linClrLst>
+    <dgm:effectClrLst/>
+    <dgm:txLinClrLst/>
+    <dgm:txFillClrLst meth="repeat">
+      <a:schemeClr val="tx1"/>
+    </dgm:txFillClrLst>
+    <dgm:txEffectClrLst/>
+  </dgm:styleLbl>
+  <dgm:styleLbl name="callout">
+    <dgm:fillClrLst meth="repeat">
+      <a:schemeClr val="accent1"/>
+    </dgm:fillClrLst>
+    <dgm:linClrLst meth="repeat">
+      <a:schemeClr val="accent1">
+        <a:tint val="50000"/>
+      </a:schemeClr>
+    </dgm:linClrLst>
+    <dgm:effectClrLst/>
+    <dgm:txLinClrLst/>
+    <dgm:txFillClrLst meth="repeat">
+      <a:schemeClr val="tx1"/>
+    </dgm:txFillClrLst>
+    <dgm:txEffectClrLst/>
+  </dgm:styleLbl>
+  <dgm:styleLbl name="asst0">
+    <dgm:fillClrLst meth="repeat">
+      <a:schemeClr val="accent1"/>
+    </dgm:fillClrLst>
+    <dgm:linClrLst meth="repeat">
+      <a:schemeClr val="lt1"/>
+    </dgm:linClrLst>
+    <dgm:effectClrLst/>
+    <dgm:txLinClrLst/>
+    <dgm:txFillClrLst/>
+    <dgm:txEffectClrLst/>
+  </dgm:styleLbl>
+  <dgm:styleLbl name="asst1">
+    <dgm:fillClrLst meth="repeat">
+      <a:schemeClr val="accent1"/>
+    </dgm:fillClrLst>
+    <dgm:linClrLst meth="repeat">
+      <a:schemeClr val="lt1"/>
+    </dgm:linClrLst>
+    <dgm:effectClrLst/>
+    <dgm:txLinClrLst/>
+    <dgm:txFillClrLst/>
+    <dgm:txEffectClrLst/>
+  </dgm:styleLbl>
+  <dgm:styleLbl name="asst2">
+    <dgm:fillClrLst meth="repeat">
+      <a:schemeClr val="accent1"/>
+    </dgm:fillClrLst>
+    <dgm:linClrLst meth="repeat">
+      <a:schemeClr val="lt1"/>
+    </dgm:linClrLst>
+    <dgm:effectClrLst/>
+    <dgm:txLinClrLst/>
+    <dgm:txFillClrLst/>
+    <dgm:txEffectClrLst/>
+  </dgm:styleLbl>
+  <dgm:styleLbl name="asst3">
+    <dgm:fillClrLst meth="repeat">
+      <a:schemeClr val="accent1"/>
+    </dgm:fillClrLst>
+    <dgm:linClrLst meth="repeat">
+      <a:schemeClr val="lt1"/>
+    </dgm:linClrLst>
+    <dgm:effectClrLst/>
+    <dgm:txLinClrLst/>
+    <dgm:txFillClrLst/>
+    <dgm:txEffectClrLst/>
+  </dgm:styleLbl>
+  <dgm:styleLbl name="asst4">
+    <dgm:fillClrLst meth="repeat">
+      <a:schemeClr val="accent1"/>
+    </dgm:fillClrLst>
+    <dgm:linClrLst meth="repeat">
+      <a:schemeClr val="lt1"/>
+    </dgm:linClrLst>
+    <dgm:effectClrLst/>
+    <dgm:txLinClrLst/>
+    <dgm:txFillClrLst/>
+    <dgm:txEffectClrLst/>
+  </dgm:styleLbl>
+  <dgm:styleLbl name="parChTrans2D1">
+    <dgm:fillClrLst meth="repeat">
+      <a:schemeClr val="accent1">
+        <a:tint val="60000"/>
+      </a:schemeClr>
+    </dgm:fillClrLst>
+    <dgm:linClrLst meth="repeat">
+      <a:schemeClr val="accent1">
+        <a:tint val="60000"/>
+      </a:schemeClr>
+    </dgm:linClrLst>
+    <dgm:effectClrLst/>
+    <dgm:txLinClrLst/>
+    <dgm:txFillClrLst meth="repeat">
+      <a:schemeClr val="lt1"/>
+    </dgm:txFillClrLst>
+    <dgm:txEffectClrLst/>
+  </dgm:styleLbl>
+  <dgm:styleLbl name="parChTrans2D2">
+    <dgm:fillClrLst meth="repeat">
+      <a:schemeClr val="accent1"/>
+    </dgm:fillClrLst>
+    <dgm:linClrLst meth="repeat">
+      <a:schemeClr val="accent1"/>
+    </dgm:linClrLst>
+    <dgm:effectClrLst/>
+    <dgm:txLinClrLst/>
+    <dgm:txFillClrLst meth="repeat">
+      <a:schemeClr val="lt1"/>
+    </dgm:txFillClrLst>
+    <dgm:txEffectClrLst/>
+  </dgm:styleLbl>
+  <dgm:styleLbl name="parChTrans2D3">
+    <dgm:fillClrLst meth="repeat">
+      <a:schemeClr val="accent1"/>
+    </dgm:fillClrLst>
+    <dgm:linClrLst meth="repeat">
+      <a:schemeClr val="accent1"/>
+    </dgm:linClrLst>
+    <dgm:effectClrLst/>
+    <dgm:txLinClrLst/>
+    <dgm:txFillClrLst meth="repeat">
+      <a:schemeClr val="lt1"/>
+    </dgm:txFillClrLst>
+    <dgm:txEffectClrLst/>
+  </dgm:styleLbl>
+  <dgm:styleLbl name="parChTrans2D4">
+    <dgm:fillClrLst meth="repeat">
+      <a:schemeClr val="accent1"/>
+    </dgm:fillClrLst>
+    <dgm:linClrLst meth="repeat">
+      <a:schemeClr val="accent1"/>
+    </dgm:linClrLst>
+    <dgm:effectClrLst/>
+    <dgm:txLinClrLst/>
+    <dgm:txFillClrLst meth="repeat">
+      <a:schemeClr val="lt1"/>
+    </dgm:txFillClrLst>
+    <dgm:txEffectClrLst/>
+  </dgm:styleLbl>
+  <dgm:styleLbl name="parChTrans1D1">
+    <dgm:fillClrLst meth="repeat">
+      <a:schemeClr val="accent1"/>
+    </dgm:fillClrLst>
+    <dgm:linClrLst meth="repeat">
+      <a:schemeClr val="accent1">
+        <a:shade val="60000"/>
+      </a:schemeClr>
+    </dgm:linClrLst>
+    <dgm:effectClrLst/>
+    <dgm:txLinClrLst/>
+    <dgm:txFillClrLst meth="repeat">
+      <a:schemeClr val="tx1"/>
+    </dgm:txFillClrLst>
+    <dgm:txEffectClrLst/>
+  </dgm:styleLbl>
+  <dgm:styleLbl name="parChTrans1D2">
+    <dgm:fillClrLst meth="repeat">
+      <a:schemeClr val="accent1"/>
+    </dgm:fillClrLst>
+    <dgm:linClrLst meth="repeat">
+      <a:schemeClr val="accent1">
+        <a:shade val="60000"/>
+      </a:schemeClr>
+    </dgm:linClrLst>
+    <dgm:effectClrLst/>
+    <dgm:txLinClrLst/>
+    <dgm:txFillClrLst meth="repeat">
+      <a:schemeClr val="tx1"/>
+    </dgm:txFillClrLst>
+    <dgm:txEffectClrLst/>
+  </dgm:styleLbl>
+  <dgm:styleLbl name="parChTrans1D3">
+    <dgm:fillClrLst meth="repeat">
+      <a:schemeClr val="accent1"/>
+    </dgm:fillClrLst>
+    <dgm:linClrLst meth="repeat">
+      <a:schemeClr val="accent1">
+        <a:shade val="80000"/>
+      </a:schemeClr>
+    </dgm:linClrLst>
+    <dgm:effectClrLst/>
+    <dgm:txLinClrLst/>
+    <dgm:txFillClrLst meth="repeat">
+      <a:schemeClr val="tx1"/>
+    </dgm:txFillClrLst>
+    <dgm:txEffectClrLst/>
+  </dgm:styleLbl>
+  <dgm:styleLbl name="parChTrans1D4">
+    <dgm:fillClrLst meth="repeat">
+      <a:schemeClr val="accent1"/>
+    </dgm:fillClrLst>
+    <dgm:linClrLst meth="repeat">
+      <a:schemeClr val="accent1">
+        <a:shade val="80000"/>
+      </a:schemeClr>
+    </dgm:linClrLst>
+    <dgm:effectClrLst/>
+    <dgm:txLinClrLst/>
+    <dgm:txFillClrLst meth="repeat">
+      <a:schemeClr val="tx1"/>
+    </dgm:txFillClrLst>
+    <dgm:txEffectClrLst/>
+  </dgm:styleLbl>
+  <dgm:styleLbl name="fgAcc1">
+    <dgm:fillClrLst meth="repeat">
+      <a:schemeClr val="lt1">
+        <a:alpha val="90000"/>
+      </a:schemeClr>
+    </dgm:fillClrLst>
+    <dgm:linClrLst meth="repeat">
+      <a:schemeClr val="accent1"/>
+    </dgm:linClrLst>
+    <dgm:effectClrLst/>
+    <dgm:txLinClrLst/>
+    <dgm:txFillClrLst meth="repeat">
+      <a:schemeClr val="dk1"/>
+    </dgm:txFillClrLst>
+    <dgm:txEffectClrLst/>
+  </dgm:styleLbl>
+  <dgm:styleLbl name="conFgAcc1">
+    <dgm:fillClrLst meth="repeat">
+      <a:schemeClr val="lt1">
+        <a:alpha val="90000"/>
+      </a:schemeClr>
+    </dgm:fillClrLst>
+    <dgm:linClrLst meth="repeat">
+      <a:schemeClr val="accent1"/>
+    </dgm:linClrLst>
+    <dgm:effectClrLst/>
+    <dgm:txLinClrLst/>
+    <dgm:txFillClrLst meth="repeat">
+      <a:schemeClr val="dk1"/>
+    </dgm:txFillClrLst>
+    <dgm:txEffectClrLst/>
+  </dgm:styleLbl>
+  <dgm:styleLbl name="alignAcc1">
+    <dgm:fillClrLst meth="repeat">
+      <a:schemeClr val="lt1">
+        <a:alpha val="90000"/>
+      </a:schemeClr>
+    </dgm:fillClrLst>
+    <dgm:linClrLst meth="repeat">
+      <a:schemeClr val="accent1"/>
+    </dgm:linClrLst>
+    <dgm:effectClrLst/>
+    <dgm:txLinClrLst/>
+    <dgm:txFillClrLst meth="repeat">
+      <a:schemeClr val="dk1"/>
+    </dgm:txFillClrLst>
+    <dgm:txEffectClrLst/>
+  </dgm:styleLbl>
+  <dgm:styleLbl name="trAlignAcc1">
+    <dgm:fillClrLst meth="repeat">
+      <a:schemeClr val="lt1">
+        <a:alpha val="40000"/>
+      </a:schemeClr>
+    </dgm:fillClrLst>
+    <dgm:linClrLst meth="repeat">
+      <a:schemeClr val="accent1"/>
+    </dgm:linClrLst>
+    <dgm:effectClrLst/>
+    <dgm:txLinClrLst/>
+    <dgm:txFillClrLst meth="repeat">
+      <a:schemeClr val="dk1"/>
+    </dgm:txFillClrLst>
+    <dgm:txEffectClrLst/>
+  </dgm:styleLbl>
+  <dgm:styleLbl name="bgAcc1">
+    <dgm:fillClrLst meth="repeat">
+      <a:schemeClr val="lt1">
+        <a:alpha val="90000"/>
+      </a:schemeClr>
+    </dgm:fillClrLst>
+    <dgm:linClrLst meth="repeat">
+      <a:schemeClr val="accent1"/>
+    </dgm:linClrLst>
+    <dgm:effectClrLst/>
+    <dgm:txLinClrLst/>
+    <dgm:txFillClrLst meth="repeat">
+      <a:schemeClr val="dk1"/>
+    </dgm:txFillClrLst>
+    <dgm:txEffectClrLst/>
+  </dgm:styleLbl>
+  <dgm:styleLbl name="solidFgAcc1">
+    <dgm:fillClrLst meth="repeat">
+      <a:schemeClr val="lt1"/>
+    </dgm:fillClrLst>
+    <dgm:linClrLst meth="repeat">
+      <a:schemeClr val="accent1"/>
+    </dgm:linClrLst>
+    <dgm:effectClrLst/>
+    <dgm:txLinClrLst/>
+    <dgm:txFillClrLst meth="repeat">
+      <a:schemeClr val="dk1"/>
+    </dgm:txFillClrLst>
+    <dgm:txEffectClrLst/>
+  </dgm:styleLbl>
+  <dgm:styleLbl name="solidAlignAcc1">
+    <dgm:fillClrLst meth="repeat">
+      <a:schemeClr val="lt1"/>
+    </dgm:fillClrLst>
+    <dgm:linClrLst meth="repeat">
+      <a:schemeClr val="accent1"/>
+    </dgm:linClrLst>
+    <dgm:effectClrLst/>
+    <dgm:txLinClrLst/>
+    <dgm:txFillClrLst meth="repeat">
+      <a:schemeClr val="dk1"/>
+    </dgm:txFillClrLst>
+    <dgm:txEffectClrLst/>
+  </dgm:styleLbl>
+  <dgm:styleLbl name="solidBgAcc1">
+    <dgm:fillClrLst meth="repeat">
+      <a:schemeClr val="lt1"/>
+    </dgm:fillClrLst>
+    <dgm:linClrLst meth="repeat">
+      <a:schemeClr val="accent1"/>
+    </dgm:linClrLst>
+    <dgm:effectClrLst/>
+    <dgm:txLinClrLst/>
+    <dgm:txFillClrLst meth="repeat">
+      <a:schemeClr val="dk1"/>
+    </dgm:txFillClrLst>
+    <dgm:txEffectClrLst/>
+  </dgm:styleLbl>
+  <dgm:styleLbl name="fgAccFollowNode1">
+    <dgm:fillClrLst meth="repeat">
+      <a:schemeClr val="accent1">
+        <a:alpha val="90000"/>
+        <a:tint val="40000"/>
+      </a:schemeClr>
+    </dgm:fillClrLst>
+    <dgm:linClrLst meth="repeat">
+      <a:schemeClr val="accent1">
+        <a:alpha val="90000"/>
+        <a:tint val="40000"/>
+      </a:schemeClr>
+    </dgm:linClrLst>
+    <dgm:effectClrLst/>
+    <dgm:txLinClrLst/>
+    <dgm:txFillClrLst meth="repeat">
+      <a:schemeClr val="dk1"/>
+    </dgm:txFillClrLst>
+    <dgm:txEffectClrLst/>
+  </dgm:styleLbl>
+  <dgm:styleLbl name="alignAccFollowNode1">
+    <dgm:fillClrLst meth="repeat">
+      <a:schemeClr val="accent1">
+        <a:alpha val="90000"/>
+        <a:tint val="40000"/>
+      </a:schemeClr>
+    </dgm:fillClrLst>
+    <dgm:linClrLst meth="repeat">
+      <a:schemeClr val="accent1">
+        <a:alpha val="90000"/>
+        <a:tint val="40000"/>
+      </a:schemeClr>
+    </dgm:linClrLst>
+    <dgm:effectClrLst/>
+    <dgm:txLinClrLst/>
+    <dgm:txFillClrLst meth="repeat">
+      <a:schemeClr val="dk1"/>
+    </dgm:txFillClrLst>
+    <dgm:txEffectClrLst/>
+  </dgm:styleLbl>
+  <dgm:styleLbl name="bgAccFollowNode1">
+    <dgm:fillClrLst meth="repeat">
+      <a:schemeClr val="accent1">
+        <a:alpha val="90000"/>
+        <a:tint val="40000"/>
+      </a:schemeClr>
+    </dgm:fillClrLst>
+    <dgm:linClrLst meth="repeat">
+      <a:schemeClr val="accent1">
+        <a:alpha val="90000"/>
+        <a:tint val="40000"/>
+      </a:schemeClr>
+    </dgm:linClrLst>
+    <dgm:effectClrLst/>
+    <dgm:txLinClrLst/>
+    <dgm:txFillClrLst meth="repeat">
+      <a:schemeClr val="dk1"/>
+    </dgm:txFillClrLst>
+    <dgm:txEffectClrLst/>
+  </dgm:styleLbl>
+  <dgm:styleLbl name="fgAcc0">
+    <dgm:fillClrLst meth="repeat">
+      <a:schemeClr val="lt1">
+        <a:alpha val="90000"/>
+      </a:schemeClr>
+    </dgm:fillClrLst>
+    <dgm:linClrLst meth="repeat">
+      <a:schemeClr val="accent1"/>
+    </dgm:linClrLst>
+    <dgm:effectClrLst/>
+    <dgm:txLinClrLst/>
+    <dgm:txFillClrLst meth="repeat">
+      <a:schemeClr val="dk1"/>
+    </dgm:txFillClrLst>
+    <dgm:txEffectClrLst/>
+  </dgm:styleLbl>
+  <dgm:styleLbl name="fgAcc2">
+    <dgm:fillClrLst meth="repeat">
+      <a:schemeClr val="lt1">
+        <a:alpha val="90000"/>
+      </a:schemeClr>
+    </dgm:fillClrLst>
+    <dgm:linClrLst meth="repeat">
+      <a:schemeClr val="accent1"/>
+    </dgm:linClrLst>
+    <dgm:effectClrLst/>
+    <dgm:txLinClrLst/>
+    <dgm:txFillClrLst meth="repeat">
+      <a:schemeClr val="dk1"/>
+    </dgm:txFillClrLst>
+    <dgm:txEffectClrLst/>
+  </dgm:styleLbl>
+  <dgm:styleLbl name="fgAcc3">
+    <dgm:fillClrLst meth="repeat">
+      <a:schemeClr val="lt1">
+        <a:alpha val="90000"/>
+      </a:schemeClr>
+    </dgm:fillClrLst>
+    <dgm:linClrLst meth="repeat">
+      <a:schemeClr val="accent1"/>
+    </dgm:linClrLst>
+    <dgm:effectClrLst/>
+    <dgm:txLinClrLst/>
+    <dgm:txFillClrLst meth="repeat">
+      <a:schemeClr val="dk1"/>
+    </dgm:txFillClrLst>
+    <dgm:txEffectClrLst/>
+  </dgm:styleLbl>
+  <dgm:styleLbl name="fgAcc4">
+    <dgm:fillClrLst meth="repeat">
+      <a:schemeClr val="lt1">
+        <a:alpha val="90000"/>
+      </a:schemeClr>
+    </dgm:fillClrLst>
+    <dgm:linClrLst meth="repeat">
+      <a:schemeClr val="accent1"/>
+    </dgm:linClrLst>
+    <dgm:effectClrLst/>
+    <dgm:txLinClrLst/>
+    <dgm:txFillClrLst meth="repeat">
+      <a:schemeClr val="dk1"/>
+    </dgm:txFillClrLst>
+    <dgm:txEffectClrLst/>
+  </dgm:styleLbl>
+  <dgm:styleLbl name="bgShp">
+    <dgm:fillClrLst meth="repeat">
+      <a:schemeClr val="accent1">
+        <a:tint val="40000"/>
+      </a:schemeClr>
+    </dgm:fillClrLst>
+    <dgm:linClrLst meth="repeat">
+      <a:schemeClr val="accent1"/>
+    </dgm:linClrLst>
+    <dgm:effectClrLst/>
+    <dgm:txLinClrLst/>
+    <dgm:txFillClrLst meth="repeat">
+      <a:schemeClr val="dk1"/>
+    </dgm:txFillClrLst>
+    <dgm:txEffectClrLst/>
+  </dgm:styleLbl>
+  <dgm:styleLbl name="dkBgShp">
+    <dgm:fillClrLst meth="repeat">
+      <a:schemeClr val="accent1">
+        <a:shade val="80000"/>
+      </a:schemeClr>
+    </dgm:fillClrLst>
+    <dgm:linClrLst meth="repeat">
+      <a:schemeClr val="accent1"/>
+    </dgm:linClrLst>
+    <dgm:effectClrLst/>
+    <dgm:txLinClrLst/>
+    <dgm:txFillClrLst meth="repeat">
+      <a:schemeClr val="lt1"/>
+    </dgm:txFillClrLst>
+    <dgm:txEffectClrLst/>
+  </dgm:styleLbl>
+  <dgm:styleLbl name="trBgShp">
+    <dgm:fillClrLst meth="repeat">
+      <a:schemeClr val="accent1">
+        <a:tint val="50000"/>
+        <a:alpha val="40000"/>
+      </a:schemeClr>
+    </dgm:fillClrLst>
+    <dgm:linClrLst meth="repeat">
+      <a:schemeClr val="accent1"/>
+    </dgm:linClrLst>
+    <dgm:effectClrLst/>
+    <dgm:txLinClrLst/>
+    <dgm:txFillClrLst meth="repeat">
+      <a:schemeClr val="lt1"/>
+    </dgm:txFillClrLst>
+    <dgm:txEffectClrLst/>
+  </dgm:styleLbl>
+  <dgm:styleLbl name="fgShp">
+    <dgm:fillClrLst meth="repeat">
+      <a:schemeClr val="accent1">
+        <a:tint val="60000"/>
+      </a:schemeClr>
+    </dgm:fillClrLst>
+    <dgm:linClrLst meth="repeat">
+      <a:schemeClr val="lt1"/>
+    </dgm:linClrLst>
+    <dgm:effectClrLst/>
+    <dgm:txLinClrLst/>
+    <dgm:txFillClrLst meth="repeat">
+      <a:schemeClr val="dk1"/>
+    </dgm:txFillClrLst>
+    <dgm:txEffectClrLst/>
+  </dgm:styleLbl>
+  <dgm:styleLbl name="revTx">
+    <dgm:fillClrLst meth="repeat">
+      <a:schemeClr val="lt1">
+        <a:alpha val="0"/>
+      </a:schemeClr>
+    </dgm:fillClrLst>
+    <dgm:linClrLst meth="repeat">
+      <a:schemeClr val="dk1">
+        <a:alpha val="0"/>
+      </a:schemeClr>
+    </dgm:linClrLst>
+    <dgm:effectClrLst/>
+    <dgm:txLinClrLst/>
+    <dgm:txFillClrLst meth="repeat">
+      <a:schemeClr val="tx1"/>
+    </dgm:txFillClrLst>
+    <dgm:txEffectClrLst/>
+  </dgm:styleLbl>
+</dgm:colorsDef>
+</file>
+
+<file path=ppt/diagrams/data1.xml><?xml version="1.0" encoding="utf-8"?>
+<dgm:dataModel xmlns:dgm="http://schemas.openxmlformats.org/drawingml/2006/diagram" xmlns:a="http://schemas.openxmlformats.org/drawingml/2006/main">
+  <dgm:ptLst>
+    <dgm:pt modelId="{60565D13-3160-4200-A24F-53039DEC4A3B}" type="doc">
+      <dgm:prSet loTypeId="urn:microsoft.com/office/officeart/2018/2/layout/IconVerticalSolidList" loCatId="icon" qsTypeId="urn:microsoft.com/office/officeart/2005/8/quickstyle/simple1" qsCatId="simple" csTypeId="urn:microsoft.com/office/officeart/2005/8/colors/accent1_2" csCatId="accent1" phldr="1"/>
+      <dgm:spPr/>
+      <dgm:t>
+        <a:bodyPr/>
+        <a:lstStyle/>
+        <a:p>
+          <a:endParaRPr lang="en-US"/>
+        </a:p>
+      </dgm:t>
+    </dgm:pt>
+    <dgm:pt modelId="{7B9610FE-2C20-427F-80C6-E8CC4D1FA966}">
+      <dgm:prSet/>
+      <dgm:spPr/>
+      <dgm:t>
+        <a:bodyPr/>
+        <a:lstStyle/>
+        <a:p>
+          <a:pPr>
+            <a:lnSpc>
+              <a:spcPct val="100000"/>
+            </a:lnSpc>
+          </a:pPr>
+          <a:r>
+            <a:rPr lang="es-ES"/>
+            <a:t>Ámbito financiero particularidades propias, FinBERT o BloombergGPT</a:t>
+          </a:r>
+          <a:endParaRPr lang="en-US"/>
+        </a:p>
+      </dgm:t>
+    </dgm:pt>
+    <dgm:pt modelId="{2A0C3EDE-FA55-493D-8E58-350B4D6AD344}" type="parTrans" cxnId="{B2E86BB0-5154-494C-9502-5BC5F022F872}">
+      <dgm:prSet/>
+      <dgm:spPr/>
+      <dgm:t>
+        <a:bodyPr/>
+        <a:lstStyle/>
+        <a:p>
+          <a:endParaRPr lang="en-US"/>
+        </a:p>
+      </dgm:t>
+    </dgm:pt>
+    <dgm:pt modelId="{325E71CD-0A10-4D42-8865-1E45BC6D9417}" type="sibTrans" cxnId="{B2E86BB0-5154-494C-9502-5BC5F022F872}">
+      <dgm:prSet/>
+      <dgm:spPr/>
+      <dgm:t>
+        <a:bodyPr/>
+        <a:lstStyle/>
+        <a:p>
+          <a:endParaRPr lang="en-US"/>
+        </a:p>
+      </dgm:t>
+    </dgm:pt>
+    <dgm:pt modelId="{BAF6BE00-2CB6-4668-8E37-D8EB4F17333D}">
+      <dgm:prSet/>
+      <dgm:spPr/>
+      <dgm:t>
+        <a:bodyPr/>
+        <a:lstStyle/>
+        <a:p>
+          <a:pPr>
+            <a:lnSpc>
+              <a:spcPct val="100000"/>
+            </a:lnSpc>
+          </a:pPr>
+          <a:r>
+            <a:rPr lang="es-ES"/>
+            <a:t>Arquitecturas con agentes: separar tareas y combinar modelos</a:t>
+          </a:r>
+          <a:endParaRPr lang="en-US"/>
+        </a:p>
+      </dgm:t>
+    </dgm:pt>
+    <dgm:pt modelId="{F625DAFA-1A75-471D-A401-9CA80F1CF9E6}" type="parTrans" cxnId="{0BDC96E8-EF53-4680-AC0B-F05E53592DFE}">
+      <dgm:prSet/>
+      <dgm:spPr/>
+      <dgm:t>
+        <a:bodyPr/>
+        <a:lstStyle/>
+        <a:p>
+          <a:endParaRPr lang="en-US"/>
+        </a:p>
+      </dgm:t>
+    </dgm:pt>
+    <dgm:pt modelId="{D556A70D-229E-417A-B257-A437A8EDE9DA}" type="sibTrans" cxnId="{0BDC96E8-EF53-4680-AC0B-F05E53592DFE}">
+      <dgm:prSet/>
+      <dgm:spPr/>
+      <dgm:t>
+        <a:bodyPr/>
+        <a:lstStyle/>
+        <a:p>
+          <a:endParaRPr lang="en-US"/>
+        </a:p>
+      </dgm:t>
+    </dgm:pt>
+    <dgm:pt modelId="{D2956E3C-4B42-4BFB-814F-0CAB96AB7060}">
+      <dgm:prSet/>
+      <dgm:spPr/>
+      <dgm:t>
+        <a:bodyPr/>
+        <a:lstStyle/>
+        <a:p>
+          <a:pPr>
+            <a:lnSpc>
+              <a:spcPct val="100000"/>
+            </a:lnSpc>
+          </a:pPr>
+          <a:r>
+            <a:rPr lang="es-ES"/>
+            <a:t>Generación de código permite apoyar respuesta en cálculos observables</a:t>
+          </a:r>
+          <a:endParaRPr lang="en-US"/>
+        </a:p>
+      </dgm:t>
+    </dgm:pt>
+    <dgm:pt modelId="{576BA24B-A8BE-4A15-9338-812D99DD410C}" type="parTrans" cxnId="{11A1B9E5-EA2D-4264-83BF-B311707DE491}">
+      <dgm:prSet/>
+      <dgm:spPr/>
+      <dgm:t>
+        <a:bodyPr/>
+        <a:lstStyle/>
+        <a:p>
+          <a:endParaRPr lang="en-US"/>
+        </a:p>
+      </dgm:t>
+    </dgm:pt>
+    <dgm:pt modelId="{49BCC915-8C1C-43A3-87F4-052B973B8356}" type="sibTrans" cxnId="{11A1B9E5-EA2D-4264-83BF-B311707DE491}">
+      <dgm:prSet/>
+      <dgm:spPr/>
+      <dgm:t>
+        <a:bodyPr/>
+        <a:lstStyle/>
+        <a:p>
+          <a:endParaRPr lang="en-US"/>
+        </a:p>
+      </dgm:t>
+    </dgm:pt>
+    <dgm:pt modelId="{887A3FB8-C8AB-4555-8A63-18B3A2254C7A}" type="pres">
+      <dgm:prSet presAssocID="{60565D13-3160-4200-A24F-53039DEC4A3B}" presName="root" presStyleCnt="0">
+        <dgm:presLayoutVars>
+          <dgm:dir/>
+          <dgm:resizeHandles val="exact"/>
+        </dgm:presLayoutVars>
+      </dgm:prSet>
+      <dgm:spPr/>
+    </dgm:pt>
+    <dgm:pt modelId="{E5F580B5-1CB4-4C06-8A8F-CE5E420E854E}" type="pres">
+      <dgm:prSet presAssocID="{7B9610FE-2C20-427F-80C6-E8CC4D1FA966}" presName="compNode" presStyleCnt="0"/>
+      <dgm:spPr/>
+    </dgm:pt>
+    <dgm:pt modelId="{6209FA50-2E4A-4EBB-93D1-FD1C9B86FFA9}" type="pres">
+      <dgm:prSet presAssocID="{7B9610FE-2C20-427F-80C6-E8CC4D1FA966}" presName="bgRect" presStyleLbl="bgShp" presStyleIdx="0" presStyleCnt="3"/>
+      <dgm:spPr/>
+    </dgm:pt>
+    <dgm:pt modelId="{38EA3626-45E4-4E85-A212-06E43AAEC79F}" type="pres">
+      <dgm:prSet presAssocID="{7B9610FE-2C20-427F-80C6-E8CC4D1FA966}" presName="iconRect" presStyleLbl="node1" presStyleIdx="0" presStyleCnt="3"/>
+      <dgm:spPr>
+        <a:blipFill>
+          <a:blip xmlns:r="http://schemas.openxmlformats.org/officeDocument/2006/relationships">
+            <a:extLst>
+              <a:ext uri="{28A0092B-C50C-407E-A947-70E740481C1C}">
+                <a14:useLocalDpi xmlns:a14="http://schemas.microsoft.com/office/drawing/2010/main" val="0"/>
+              </a:ext>
+              <a:ext uri="{96DAC541-7B7A-43D3-8B79-37D633B846F1}">
+                <asvg:svgBlip xmlns:asvg="http://schemas.microsoft.com/office/drawing/2016/SVG/main" r:embed="rId1"/>
+              </a:ext>
+            </a:extLst>
+          </a:blip>
+          <a:stretch>
+            <a:fillRect/>
+          </a:stretch>
+        </a:blipFill>
+      </dgm:spPr>
+      <dgm:extLst>
+        <a:ext uri="{E40237B7-FDA0-4F09-8148-C483321AD2D9}">
+          <dgm14:cNvPr xmlns:dgm14="http://schemas.microsoft.com/office/drawing/2010/diagram" id="0" name="" descr="Rublo"/>
+        </a:ext>
+      </dgm:extLst>
+    </dgm:pt>
+    <dgm:pt modelId="{DF3A77CD-1704-4C62-AC4F-C8E51BD2665F}" type="pres">
+      <dgm:prSet presAssocID="{7B9610FE-2C20-427F-80C6-E8CC4D1FA966}" presName="spaceRect" presStyleCnt="0"/>
+      <dgm:spPr/>
+    </dgm:pt>
+    <dgm:pt modelId="{2C56B0F7-8790-4F16-8FC7-0BA5426B67FA}" type="pres">
+      <dgm:prSet presAssocID="{7B9610FE-2C20-427F-80C6-E8CC4D1FA966}" presName="parTx" presStyleLbl="revTx" presStyleIdx="0" presStyleCnt="3">
+        <dgm:presLayoutVars>
+          <dgm:chMax val="0"/>
+          <dgm:chPref val="0"/>
+        </dgm:presLayoutVars>
+      </dgm:prSet>
+      <dgm:spPr/>
+    </dgm:pt>
+    <dgm:pt modelId="{3621655F-FCFF-44AC-92EA-98DF3009968B}" type="pres">
+      <dgm:prSet presAssocID="{325E71CD-0A10-4D42-8865-1E45BC6D9417}" presName="sibTrans" presStyleCnt="0"/>
+      <dgm:spPr/>
+    </dgm:pt>
+    <dgm:pt modelId="{B0353BF3-233B-4C56-895E-FBE8F2FE966E}" type="pres">
+      <dgm:prSet presAssocID="{BAF6BE00-2CB6-4668-8E37-D8EB4F17333D}" presName="compNode" presStyleCnt="0"/>
+      <dgm:spPr/>
+    </dgm:pt>
+    <dgm:pt modelId="{14DCB071-223E-4CB2-AABA-B86298341860}" type="pres">
+      <dgm:prSet presAssocID="{BAF6BE00-2CB6-4668-8E37-D8EB4F17333D}" presName="bgRect" presStyleLbl="bgShp" presStyleIdx="1" presStyleCnt="3"/>
+      <dgm:spPr/>
+    </dgm:pt>
+    <dgm:pt modelId="{095D5098-B5FB-4E88-8168-4CF30955674C}" type="pres">
+      <dgm:prSet presAssocID="{BAF6BE00-2CB6-4668-8E37-D8EB4F17333D}" presName="iconRect" presStyleLbl="node1" presStyleIdx="1" presStyleCnt="3"/>
+      <dgm:spPr>
+        <a:blipFill>
+          <a:blip xmlns:r="http://schemas.openxmlformats.org/officeDocument/2006/relationships">
+            <a:extLst>
+              <a:ext uri="{28A0092B-C50C-407E-A947-70E740481C1C}">
+                <a14:useLocalDpi xmlns:a14="http://schemas.microsoft.com/office/drawing/2010/main" val="0"/>
+              </a:ext>
+              <a:ext uri="{96DAC541-7B7A-43D3-8B79-37D633B846F1}">
+                <asvg:svgBlip xmlns:asvg="http://schemas.microsoft.com/office/drawing/2016/SVG/main" r:embed="rId2"/>
+              </a:ext>
+            </a:extLst>
+          </a:blip>
+          <a:stretch>
+            <a:fillRect/>
+          </a:stretch>
+        </a:blipFill>
+      </dgm:spPr>
+      <dgm:extLst>
+        <a:ext uri="{E40237B7-FDA0-4F09-8148-C483321AD2D9}">
+          <dgm14:cNvPr xmlns:dgm14="http://schemas.microsoft.com/office/drawing/2010/diagram" id="0" name="" descr="Marca de verificación"/>
+        </a:ext>
+      </dgm:extLst>
+    </dgm:pt>
+    <dgm:pt modelId="{F9358088-53F2-4CBE-A81F-B0261D7189D0}" type="pres">
+      <dgm:prSet presAssocID="{BAF6BE00-2CB6-4668-8E37-D8EB4F17333D}" presName="spaceRect" presStyleCnt="0"/>
+      <dgm:spPr/>
+    </dgm:pt>
+    <dgm:pt modelId="{85C21F44-41CE-47D9-BABA-06058595905F}" type="pres">
+      <dgm:prSet presAssocID="{BAF6BE00-2CB6-4668-8E37-D8EB4F17333D}" presName="parTx" presStyleLbl="revTx" presStyleIdx="1" presStyleCnt="3">
+        <dgm:presLayoutVars>
+          <dgm:chMax val="0"/>
+          <dgm:chPref val="0"/>
+        </dgm:presLayoutVars>
+      </dgm:prSet>
+      <dgm:spPr/>
+    </dgm:pt>
+    <dgm:pt modelId="{30BE0932-BFBF-4E8C-9116-1EC514600DD3}" type="pres">
+      <dgm:prSet presAssocID="{D556A70D-229E-417A-B257-A437A8EDE9DA}" presName="sibTrans" presStyleCnt="0"/>
+      <dgm:spPr/>
+    </dgm:pt>
+    <dgm:pt modelId="{3C3C5E95-60B0-43A4-BBFE-E6C5703814DD}" type="pres">
+      <dgm:prSet presAssocID="{D2956E3C-4B42-4BFB-814F-0CAB96AB7060}" presName="compNode" presStyleCnt="0"/>
+      <dgm:spPr/>
+    </dgm:pt>
+    <dgm:pt modelId="{88547637-DC38-4F9A-A948-CCD737C6F5BF}" type="pres">
+      <dgm:prSet presAssocID="{D2956E3C-4B42-4BFB-814F-0CAB96AB7060}" presName="bgRect" presStyleLbl="bgShp" presStyleIdx="2" presStyleCnt="3"/>
+      <dgm:spPr/>
+    </dgm:pt>
+    <dgm:pt modelId="{C4CA0B51-D89C-4B46-94D4-89D456D849EE}" type="pres">
+      <dgm:prSet presAssocID="{D2956E3C-4B42-4BFB-814F-0CAB96AB7060}" presName="iconRect" presStyleLbl="node1" presStyleIdx="2" presStyleCnt="3"/>
+      <dgm:spPr>
+        <a:blipFill>
+          <a:blip xmlns:r="http://schemas.openxmlformats.org/officeDocument/2006/relationships">
+            <a:extLst>
+              <a:ext uri="{28A0092B-C50C-407E-A947-70E740481C1C}">
+                <a14:useLocalDpi xmlns:a14="http://schemas.microsoft.com/office/drawing/2010/main" val="0"/>
+              </a:ext>
+              <a:ext uri="{96DAC541-7B7A-43D3-8B79-37D633B846F1}">
+                <asvg:svgBlip xmlns:asvg="http://schemas.microsoft.com/office/drawing/2016/SVG/main" r:embed="rId3"/>
+              </a:ext>
+            </a:extLst>
+          </a:blip>
+          <a:stretch>
+            <a:fillRect/>
+          </a:stretch>
+        </a:blipFill>
+      </dgm:spPr>
+      <dgm:extLst>
+        <a:ext uri="{E40237B7-FDA0-4F09-8148-C483321AD2D9}">
+          <dgm14:cNvPr xmlns:dgm14="http://schemas.microsoft.com/office/drawing/2010/diagram" id="0" name="" descr="Head with Gears"/>
+        </a:ext>
+      </dgm:extLst>
+    </dgm:pt>
+    <dgm:pt modelId="{04FD7B90-8000-4DA4-92F6-EBDD68F97540}" type="pres">
+      <dgm:prSet presAssocID="{D2956E3C-4B42-4BFB-814F-0CAB96AB7060}" presName="spaceRect" presStyleCnt="0"/>
+      <dgm:spPr/>
+    </dgm:pt>
+    <dgm:pt modelId="{B6A8BB1C-7DCE-4985-91DB-CA398B3E0FB3}" type="pres">
+      <dgm:prSet presAssocID="{D2956E3C-4B42-4BFB-814F-0CAB96AB7060}" presName="parTx" presStyleLbl="revTx" presStyleIdx="2" presStyleCnt="3">
+        <dgm:presLayoutVars>
+          <dgm:chMax val="0"/>
+          <dgm:chPref val="0"/>
+        </dgm:presLayoutVars>
+      </dgm:prSet>
+      <dgm:spPr/>
+    </dgm:pt>
+  </dgm:ptLst>
+  <dgm:cxnLst>
+    <dgm:cxn modelId="{F7D04310-3E28-4CAA-96B5-898BF36EF31C}" type="presOf" srcId="{60565D13-3160-4200-A24F-53039DEC4A3B}" destId="{887A3FB8-C8AB-4555-8A63-18B3A2254C7A}" srcOrd="0" destOrd="0" presId="urn:microsoft.com/office/officeart/2018/2/layout/IconVerticalSolidList"/>
+    <dgm:cxn modelId="{D15103A6-C2B7-4359-B9A8-8B5EC97207B5}" type="presOf" srcId="{D2956E3C-4B42-4BFB-814F-0CAB96AB7060}" destId="{B6A8BB1C-7DCE-4985-91DB-CA398B3E0FB3}" srcOrd="0" destOrd="0" presId="urn:microsoft.com/office/officeart/2018/2/layout/IconVerticalSolidList"/>
+    <dgm:cxn modelId="{639A70AA-45FC-417C-B8E5-A3B1419D400B}" type="presOf" srcId="{BAF6BE00-2CB6-4668-8E37-D8EB4F17333D}" destId="{85C21F44-41CE-47D9-BABA-06058595905F}" srcOrd="0" destOrd="0" presId="urn:microsoft.com/office/officeart/2018/2/layout/IconVerticalSolidList"/>
+    <dgm:cxn modelId="{B2E86BB0-5154-494C-9502-5BC5F022F872}" srcId="{60565D13-3160-4200-A24F-53039DEC4A3B}" destId="{7B9610FE-2C20-427F-80C6-E8CC4D1FA966}" srcOrd="0" destOrd="0" parTransId="{2A0C3EDE-FA55-493D-8E58-350B4D6AD344}" sibTransId="{325E71CD-0A10-4D42-8865-1E45BC6D9417}"/>
+    <dgm:cxn modelId="{50CF4BB1-C924-412F-8505-95636AF677EE}" type="presOf" srcId="{7B9610FE-2C20-427F-80C6-E8CC4D1FA966}" destId="{2C56B0F7-8790-4F16-8FC7-0BA5426B67FA}" srcOrd="0" destOrd="0" presId="urn:microsoft.com/office/officeart/2018/2/layout/IconVerticalSolidList"/>
+    <dgm:cxn modelId="{11A1B9E5-EA2D-4264-83BF-B311707DE491}" srcId="{60565D13-3160-4200-A24F-53039DEC4A3B}" destId="{D2956E3C-4B42-4BFB-814F-0CAB96AB7060}" srcOrd="2" destOrd="0" parTransId="{576BA24B-A8BE-4A15-9338-812D99DD410C}" sibTransId="{49BCC915-8C1C-43A3-87F4-052B973B8356}"/>
+    <dgm:cxn modelId="{0BDC96E8-EF53-4680-AC0B-F05E53592DFE}" srcId="{60565D13-3160-4200-A24F-53039DEC4A3B}" destId="{BAF6BE00-2CB6-4668-8E37-D8EB4F17333D}" srcOrd="1" destOrd="0" parTransId="{F625DAFA-1A75-471D-A401-9CA80F1CF9E6}" sibTransId="{D556A70D-229E-417A-B257-A437A8EDE9DA}"/>
+    <dgm:cxn modelId="{87958115-C839-4600-9C1A-645B2F8E7584}" type="presParOf" srcId="{887A3FB8-C8AB-4555-8A63-18B3A2254C7A}" destId="{E5F580B5-1CB4-4C06-8A8F-CE5E420E854E}" srcOrd="0" destOrd="0" presId="urn:microsoft.com/office/officeart/2018/2/layout/IconVerticalSolidList"/>
+    <dgm:cxn modelId="{0239B8E3-52F3-480D-9E3F-BC7117538F0A}" type="presParOf" srcId="{E5F580B5-1CB4-4C06-8A8F-CE5E420E854E}" destId="{6209FA50-2E4A-4EBB-93D1-FD1C9B86FFA9}" srcOrd="0" destOrd="0" presId="urn:microsoft.com/office/officeart/2018/2/layout/IconVerticalSolidList"/>
+    <dgm:cxn modelId="{43896ACD-3D1E-4DEB-B47B-A00C80747857}" type="presParOf" srcId="{E5F580B5-1CB4-4C06-8A8F-CE5E420E854E}" destId="{38EA3626-45E4-4E85-A212-06E43AAEC79F}" srcOrd="1" destOrd="0" presId="urn:microsoft.com/office/officeart/2018/2/layout/IconVerticalSolidList"/>
+    <dgm:cxn modelId="{DC5C1412-302F-4E80-8534-9A9AEC6873B7}" type="presParOf" srcId="{E5F580B5-1CB4-4C06-8A8F-CE5E420E854E}" destId="{DF3A77CD-1704-4C62-AC4F-C8E51BD2665F}" srcOrd="2" destOrd="0" presId="urn:microsoft.com/office/officeart/2018/2/layout/IconVerticalSolidList"/>
+    <dgm:cxn modelId="{C8FB356C-4159-4DB9-8C7F-23DB7DF292B5}" type="presParOf" srcId="{E5F580B5-1CB4-4C06-8A8F-CE5E420E854E}" destId="{2C56B0F7-8790-4F16-8FC7-0BA5426B67FA}" srcOrd="3" destOrd="0" presId="urn:microsoft.com/office/officeart/2018/2/layout/IconVerticalSolidList"/>
+    <dgm:cxn modelId="{AEBCE96F-71CF-4241-8907-AECA07A5F737}" type="presParOf" srcId="{887A3FB8-C8AB-4555-8A63-18B3A2254C7A}" destId="{3621655F-FCFF-44AC-92EA-98DF3009968B}" srcOrd="1" destOrd="0" presId="urn:microsoft.com/office/officeart/2018/2/layout/IconVerticalSolidList"/>
+    <dgm:cxn modelId="{E3A852C2-C4D5-44A0-9BCD-7F843BA42E70}" type="presParOf" srcId="{887A3FB8-C8AB-4555-8A63-18B3A2254C7A}" destId="{B0353BF3-233B-4C56-895E-FBE8F2FE966E}" srcOrd="2" destOrd="0" presId="urn:microsoft.com/office/officeart/2018/2/layout/IconVerticalSolidList"/>
+    <dgm:cxn modelId="{54A77676-907B-4041-A0F6-87D4C011B7D5}" type="presParOf" srcId="{B0353BF3-233B-4C56-895E-FBE8F2FE966E}" destId="{14DCB071-223E-4CB2-AABA-B86298341860}" srcOrd="0" destOrd="0" presId="urn:microsoft.com/office/officeart/2018/2/layout/IconVerticalSolidList"/>
+    <dgm:cxn modelId="{D5C8EAB2-4843-4EBB-BBC9-A3BE0D789476}" type="presParOf" srcId="{B0353BF3-233B-4C56-895E-FBE8F2FE966E}" destId="{095D5098-B5FB-4E88-8168-4CF30955674C}" srcOrd="1" destOrd="0" presId="urn:microsoft.com/office/officeart/2018/2/layout/IconVerticalSolidList"/>
+    <dgm:cxn modelId="{3949C23D-D3B8-40B6-AC9F-1E6C93DF97D9}" type="presParOf" srcId="{B0353BF3-233B-4C56-895E-FBE8F2FE966E}" destId="{F9358088-53F2-4CBE-A81F-B0261D7189D0}" srcOrd="2" destOrd="0" presId="urn:microsoft.com/office/officeart/2018/2/layout/IconVerticalSolidList"/>
+    <dgm:cxn modelId="{CE29BB3D-0EE4-4183-A2CD-7EB97D7A8E13}" type="presParOf" srcId="{B0353BF3-233B-4C56-895E-FBE8F2FE966E}" destId="{85C21F44-41CE-47D9-BABA-06058595905F}" srcOrd="3" destOrd="0" presId="urn:microsoft.com/office/officeart/2018/2/layout/IconVerticalSolidList"/>
+    <dgm:cxn modelId="{1E7FAD0C-CA0D-4D27-9F75-8CF834D76B3D}" type="presParOf" srcId="{887A3FB8-C8AB-4555-8A63-18B3A2254C7A}" destId="{30BE0932-BFBF-4E8C-9116-1EC514600DD3}" srcOrd="3" destOrd="0" presId="urn:microsoft.com/office/officeart/2018/2/layout/IconVerticalSolidList"/>
+    <dgm:cxn modelId="{65B04AD6-81B9-48D0-894F-14786AB49603}" type="presParOf" srcId="{887A3FB8-C8AB-4555-8A63-18B3A2254C7A}" destId="{3C3C5E95-60B0-43A4-BBFE-E6C5703814DD}" srcOrd="4" destOrd="0" presId="urn:microsoft.com/office/officeart/2018/2/layout/IconVerticalSolidList"/>
+    <dgm:cxn modelId="{457739BB-EA87-41AA-8481-C8AB14A92FD5}" type="presParOf" srcId="{3C3C5E95-60B0-43A4-BBFE-E6C5703814DD}" destId="{88547637-DC38-4F9A-A948-CCD737C6F5BF}" srcOrd="0" destOrd="0" presId="urn:microsoft.com/office/officeart/2018/2/layout/IconVerticalSolidList"/>
+    <dgm:cxn modelId="{B3B485D4-D09C-4738-B8CD-7E28A9DFD543}" type="presParOf" srcId="{3C3C5E95-60B0-43A4-BBFE-E6C5703814DD}" destId="{C4CA0B51-D89C-4B46-94D4-89D456D849EE}" srcOrd="1" destOrd="0" presId="urn:microsoft.com/office/officeart/2018/2/layout/IconVerticalSolidList"/>
+    <dgm:cxn modelId="{7ADEDEC8-CB58-4367-9F6F-146579E51589}" type="presParOf" srcId="{3C3C5E95-60B0-43A4-BBFE-E6C5703814DD}" destId="{04FD7B90-8000-4DA4-92F6-EBDD68F97540}" srcOrd="2" destOrd="0" presId="urn:microsoft.com/office/officeart/2018/2/layout/IconVerticalSolidList"/>
+    <dgm:cxn modelId="{A6C87C43-B5F6-4B03-A11F-AA047F8C01C3}" type="presParOf" srcId="{3C3C5E95-60B0-43A4-BBFE-E6C5703814DD}" destId="{B6A8BB1C-7DCE-4985-91DB-CA398B3E0FB3}" srcOrd="3" destOrd="0" presId="urn:microsoft.com/office/officeart/2018/2/layout/IconVerticalSolidList"/>
+  </dgm:cxnLst>
+  <dgm:bg/>
+  <dgm:whole/>
+  <dgm:extLst>
+    <a:ext uri="http://schemas.microsoft.com/office/drawing/2008/diagram">
+      <dsp:dataModelExt xmlns:dsp="http://schemas.microsoft.com/office/drawing/2008/diagram" relId="rId7" minVer="http://schemas.openxmlformats.org/drawingml/2006/diagram"/>
+    </a:ext>
+  </dgm:extLst>
+</dgm:dataModel>
+</file>
+
+<file path=ppt/diagrams/data2.xml><?xml version="1.0" encoding="utf-8"?>
+<dgm:dataModel xmlns:dgm="http://schemas.openxmlformats.org/drawingml/2006/diagram" xmlns:a="http://schemas.openxmlformats.org/drawingml/2006/main">
+  <dgm:ptLst>
+    <dgm:pt modelId="{8FDB0886-292F-44AC-854B-750D64582871}" type="doc">
+      <dgm:prSet loTypeId="urn:microsoft.com/office/officeart/2018/2/layout/IconVerticalSolidList" loCatId="icon" qsTypeId="urn:microsoft.com/office/officeart/2005/8/quickstyle/simple1" qsCatId="simple" csTypeId="urn:microsoft.com/office/officeart/2005/8/colors/accent1_2" csCatId="accent1" phldr="1"/>
+      <dgm:spPr/>
+      <dgm:t>
+        <a:bodyPr/>
+        <a:lstStyle/>
+        <a:p>
+          <a:endParaRPr lang="en-US"/>
+        </a:p>
+      </dgm:t>
+    </dgm:pt>
+    <dgm:pt modelId="{D6BCAD8F-63AA-4CD2-AB59-099C7E3C729C}">
+      <dgm:prSet/>
+      <dgm:spPr/>
+      <dgm:t>
+        <a:bodyPr/>
+        <a:lstStyle/>
+        <a:p>
+          <a:pPr>
+            <a:lnSpc>
+              <a:spcPct val="100000"/>
+            </a:lnSpc>
+          </a:pPr>
+          <a:r>
+            <a:rPr lang="es-ES" dirty="0"/>
+            <a:t>1. Consulta</a:t>
+          </a:r>
+          <a:endParaRPr lang="en-US" dirty="0"/>
+        </a:p>
+      </dgm:t>
+    </dgm:pt>
+    <dgm:pt modelId="{BADA598E-D9C3-4B88-88F4-52836F467915}" type="parTrans" cxnId="{11E09070-BF9F-40ED-8979-77E77736171C}">
+      <dgm:prSet/>
+      <dgm:spPr/>
+      <dgm:t>
+        <a:bodyPr/>
+        <a:lstStyle/>
+        <a:p>
+          <a:endParaRPr lang="en-US"/>
+        </a:p>
+      </dgm:t>
+    </dgm:pt>
+    <dgm:pt modelId="{8E8CB0F4-2CD7-4DA2-A0BB-A6C61778579D}" type="sibTrans" cxnId="{11E09070-BF9F-40ED-8979-77E77736171C}">
+      <dgm:prSet/>
+      <dgm:spPr/>
+      <dgm:t>
+        <a:bodyPr/>
+        <a:lstStyle/>
+        <a:p>
+          <a:endParaRPr lang="en-US"/>
+        </a:p>
+      </dgm:t>
+    </dgm:pt>
+    <dgm:pt modelId="{37A07D0B-3508-42F6-A5B9-8D3B88522005}">
+      <dgm:prSet/>
+      <dgm:spPr/>
+      <dgm:t>
+        <a:bodyPr/>
+        <a:lstStyle/>
+        <a:p>
+          <a:pPr>
+            <a:lnSpc>
+              <a:spcPct val="100000"/>
+            </a:lnSpc>
+          </a:pPr>
+          <a:r>
+            <a:rPr lang="es-ES" dirty="0"/>
+            <a:t>2. Validación</a:t>
+          </a:r>
+          <a:endParaRPr lang="en-US" dirty="0"/>
+        </a:p>
+      </dgm:t>
+    </dgm:pt>
+    <dgm:pt modelId="{FD2BF2EB-67CA-4D8F-A486-8ACCA10D3819}" type="parTrans" cxnId="{72CFE871-AF2D-4D00-993D-0FA091B62F4C}">
+      <dgm:prSet/>
+      <dgm:spPr/>
+      <dgm:t>
+        <a:bodyPr/>
+        <a:lstStyle/>
+        <a:p>
+          <a:endParaRPr lang="en-US"/>
+        </a:p>
+      </dgm:t>
+    </dgm:pt>
+    <dgm:pt modelId="{B924C114-DA05-4B05-91C5-7ABDFCEAAEE1}" type="sibTrans" cxnId="{72CFE871-AF2D-4D00-993D-0FA091B62F4C}">
+      <dgm:prSet/>
+      <dgm:spPr/>
+      <dgm:t>
+        <a:bodyPr/>
+        <a:lstStyle/>
+        <a:p>
+          <a:endParaRPr lang="en-US"/>
+        </a:p>
+      </dgm:t>
+    </dgm:pt>
+    <dgm:pt modelId="{6A3BF7C3-034D-4A00-BFD4-5701BBEB8B04}">
+      <dgm:prSet/>
+      <dgm:spPr/>
+      <dgm:t>
+        <a:bodyPr/>
+        <a:lstStyle/>
+        <a:p>
+          <a:pPr>
+            <a:lnSpc>
+              <a:spcPct val="100000"/>
+            </a:lnSpc>
+          </a:pPr>
+          <a:r>
+            <a:rPr lang="es-ES"/>
+            <a:t>3. Resolucion de datos</a:t>
+          </a:r>
+          <a:endParaRPr lang="en-US"/>
+        </a:p>
+      </dgm:t>
+    </dgm:pt>
+    <dgm:pt modelId="{3DE1E7C9-642E-4DEC-AD87-C37957513B99}" type="parTrans" cxnId="{CF4C416F-09D4-4625-8DB9-8F895A570BA9}">
+      <dgm:prSet/>
+      <dgm:spPr/>
+      <dgm:t>
+        <a:bodyPr/>
+        <a:lstStyle/>
+        <a:p>
+          <a:endParaRPr lang="en-US"/>
+        </a:p>
+      </dgm:t>
+    </dgm:pt>
+    <dgm:pt modelId="{8C94980F-F379-4DFA-AE25-2AD9BCEA22DE}" type="sibTrans" cxnId="{CF4C416F-09D4-4625-8DB9-8F895A570BA9}">
+      <dgm:prSet/>
+      <dgm:spPr/>
+      <dgm:t>
+        <a:bodyPr/>
+        <a:lstStyle/>
+        <a:p>
+          <a:endParaRPr lang="en-US"/>
+        </a:p>
+      </dgm:t>
+    </dgm:pt>
+    <dgm:pt modelId="{5DF44757-E4A8-4B0D-9A86-1949644812F4}">
+      <dgm:prSet/>
+      <dgm:spPr/>
+      <dgm:t>
+        <a:bodyPr/>
+        <a:lstStyle/>
+        <a:p>
+          <a:pPr>
+            <a:lnSpc>
+              <a:spcPct val="100000"/>
+            </a:lnSpc>
+          </a:pPr>
+          <a:r>
+            <a:rPr lang="es-ES"/>
+            <a:t>4. Planificacion analítica</a:t>
+          </a:r>
+          <a:endParaRPr lang="en-US"/>
+        </a:p>
+      </dgm:t>
+    </dgm:pt>
+    <dgm:pt modelId="{39C9382B-E9E4-44BA-AC55-128A50E0EB82}" type="parTrans" cxnId="{C253A6E1-31D1-4AD6-B7B3-3AF4D0C5C910}">
+      <dgm:prSet/>
+      <dgm:spPr/>
+      <dgm:t>
+        <a:bodyPr/>
+        <a:lstStyle/>
+        <a:p>
+          <a:endParaRPr lang="en-US"/>
+        </a:p>
+      </dgm:t>
+    </dgm:pt>
+    <dgm:pt modelId="{2EDBE248-B0CC-47CB-A937-6FB992AA8D1B}" type="sibTrans" cxnId="{C253A6E1-31D1-4AD6-B7B3-3AF4D0C5C910}">
+      <dgm:prSet/>
+      <dgm:spPr/>
+      <dgm:t>
+        <a:bodyPr/>
+        <a:lstStyle/>
+        <a:p>
+          <a:endParaRPr lang="en-US"/>
+        </a:p>
+      </dgm:t>
+    </dgm:pt>
+    <dgm:pt modelId="{237792B9-22AE-4C6B-9F9B-AA5A6C39D14B}">
+      <dgm:prSet/>
+      <dgm:spPr/>
+      <dgm:t>
+        <a:bodyPr/>
+        <a:lstStyle/>
+        <a:p>
+          <a:pPr>
+            <a:lnSpc>
+              <a:spcPct val="100000"/>
+            </a:lnSpc>
+          </a:pPr>
+          <a:r>
+            <a:rPr lang="es-ES"/>
+            <a:t>5. Generacion de código</a:t>
+          </a:r>
+          <a:endParaRPr lang="en-US"/>
+        </a:p>
+      </dgm:t>
+    </dgm:pt>
+    <dgm:pt modelId="{AD44202E-A939-46BC-BA5E-324452042EBA}" type="parTrans" cxnId="{F9F59621-E982-4426-A3E6-01C96E90D9D1}">
+      <dgm:prSet/>
+      <dgm:spPr/>
+      <dgm:t>
+        <a:bodyPr/>
+        <a:lstStyle/>
+        <a:p>
+          <a:endParaRPr lang="en-US"/>
+        </a:p>
+      </dgm:t>
+    </dgm:pt>
+    <dgm:pt modelId="{7E6B485D-6925-4B32-AFFA-57C217D8F8C8}" type="sibTrans" cxnId="{F9F59621-E982-4426-A3E6-01C96E90D9D1}">
+      <dgm:prSet/>
+      <dgm:spPr/>
+      <dgm:t>
+        <a:bodyPr/>
+        <a:lstStyle/>
+        <a:p>
+          <a:endParaRPr lang="en-US"/>
+        </a:p>
+      </dgm:t>
+    </dgm:pt>
+    <dgm:pt modelId="{91817FF6-7E2E-4B64-BE6E-82ED021A7311}">
+      <dgm:prSet/>
+      <dgm:spPr/>
+      <dgm:t>
+        <a:bodyPr/>
+        <a:lstStyle/>
+        <a:p>
+          <a:pPr>
+            <a:lnSpc>
+              <a:spcPct val="100000"/>
+            </a:lnSpc>
+          </a:pPr>
+          <a:r>
+            <a:rPr lang="es-ES"/>
+            <a:t>6. Ejecuta</a:t>
+          </a:r>
+          <a:endParaRPr lang="en-US"/>
+        </a:p>
+      </dgm:t>
+    </dgm:pt>
+    <dgm:pt modelId="{89A598BE-991F-4EDA-9F68-FE7BB7A16F69}" type="parTrans" cxnId="{A1F5E2A2-FAF4-4C5A-B271-6CDD89226684}">
+      <dgm:prSet/>
+      <dgm:spPr/>
+      <dgm:t>
+        <a:bodyPr/>
+        <a:lstStyle/>
+        <a:p>
+          <a:endParaRPr lang="en-US"/>
+        </a:p>
+      </dgm:t>
+    </dgm:pt>
+    <dgm:pt modelId="{99FAE7B8-8743-46BA-9247-0108F2664EA1}" type="sibTrans" cxnId="{A1F5E2A2-FAF4-4C5A-B271-6CDD89226684}">
+      <dgm:prSet/>
+      <dgm:spPr/>
+      <dgm:t>
+        <a:bodyPr/>
+        <a:lstStyle/>
+        <a:p>
+          <a:endParaRPr lang="en-US"/>
+        </a:p>
+      </dgm:t>
+    </dgm:pt>
+    <dgm:pt modelId="{9B9AA99B-9689-4367-B103-5BF72DC9B1C8}">
+      <dgm:prSet/>
+      <dgm:spPr/>
+      <dgm:t>
+        <a:bodyPr/>
+        <a:lstStyle/>
+        <a:p>
+          <a:pPr>
+            <a:lnSpc>
+              <a:spcPct val="100000"/>
+            </a:lnSpc>
+          </a:pPr>
+          <a:r>
+            <a:rPr lang="es-ES" dirty="0"/>
+            <a:t>7. Interpretación de consulta</a:t>
+          </a:r>
+          <a:endParaRPr lang="en-US" dirty="0"/>
+        </a:p>
+      </dgm:t>
+    </dgm:pt>
+    <dgm:pt modelId="{8A9F27AD-B6D9-44B4-B42B-392CE6ACAEF3}" type="parTrans" cxnId="{4716B66A-8C4B-41DC-945E-9238C7BC83BD}">
+      <dgm:prSet/>
+      <dgm:spPr/>
+      <dgm:t>
+        <a:bodyPr/>
+        <a:lstStyle/>
+        <a:p>
+          <a:endParaRPr lang="en-US"/>
+        </a:p>
+      </dgm:t>
+    </dgm:pt>
+    <dgm:pt modelId="{01681013-659A-41E5-AE7A-7A1F5270EF5B}" type="sibTrans" cxnId="{4716B66A-8C4B-41DC-945E-9238C7BC83BD}">
+      <dgm:prSet/>
+      <dgm:spPr/>
+      <dgm:t>
+        <a:bodyPr/>
+        <a:lstStyle/>
+        <a:p>
+          <a:endParaRPr lang="en-US"/>
+        </a:p>
+      </dgm:t>
+    </dgm:pt>
+    <dgm:pt modelId="{1B2C1D22-EE69-4277-A201-8853487C4A30}" type="pres">
+      <dgm:prSet presAssocID="{8FDB0886-292F-44AC-854B-750D64582871}" presName="root" presStyleCnt="0">
+        <dgm:presLayoutVars>
+          <dgm:dir/>
+          <dgm:resizeHandles val="exact"/>
+        </dgm:presLayoutVars>
+      </dgm:prSet>
+      <dgm:spPr/>
+    </dgm:pt>
+    <dgm:pt modelId="{85370A5C-B80C-49E4-B607-045A1128E9A2}" type="pres">
+      <dgm:prSet presAssocID="{D6BCAD8F-63AA-4CD2-AB59-099C7E3C729C}" presName="compNode" presStyleCnt="0"/>
+      <dgm:spPr/>
+    </dgm:pt>
+    <dgm:pt modelId="{14E6579C-3E19-41AE-866B-753BC0F62D93}" type="pres">
+      <dgm:prSet presAssocID="{D6BCAD8F-63AA-4CD2-AB59-099C7E3C729C}" presName="bgRect" presStyleLbl="bgShp" presStyleIdx="0" presStyleCnt="7"/>
+      <dgm:spPr/>
+    </dgm:pt>
+    <dgm:pt modelId="{C8F68A96-47C1-4CFD-8292-1258E3250CAA}" type="pres">
+      <dgm:prSet presAssocID="{D6BCAD8F-63AA-4CD2-AB59-099C7E3C729C}" presName="iconRect" presStyleLbl="node1" presStyleIdx="0" presStyleCnt="7"/>
+      <dgm:spPr>
+        <a:blipFill>
+          <a:blip xmlns:r="http://schemas.openxmlformats.org/officeDocument/2006/relationships">
+            <a:extLst>
+              <a:ext uri="{28A0092B-C50C-407E-A947-70E740481C1C}">
+                <a14:useLocalDpi xmlns:a14="http://schemas.microsoft.com/office/drawing/2010/main" val="0"/>
+              </a:ext>
+              <a:ext uri="{96DAC541-7B7A-43D3-8B79-37D633B846F1}">
+                <asvg:svgBlip xmlns:asvg="http://schemas.microsoft.com/office/drawing/2016/SVG/main" r:embed="rId1"/>
+              </a:ext>
+            </a:extLst>
+          </a:blip>
+          <a:stretch>
+            <a:fillRect/>
+          </a:stretch>
+        </a:blipFill>
+      </dgm:spPr>
+      <dgm:extLst>
+        <a:ext uri="{E40237B7-FDA0-4F09-8148-C483321AD2D9}">
+          <dgm14:cNvPr xmlns:dgm14="http://schemas.microsoft.com/office/drawing/2010/diagram" id="0" name="" descr="Magnifying glass"/>
+        </a:ext>
+      </dgm:extLst>
+    </dgm:pt>
+    <dgm:pt modelId="{FB14D7DA-3F31-49C8-B468-9F86E961400F}" type="pres">
+      <dgm:prSet presAssocID="{D6BCAD8F-63AA-4CD2-AB59-099C7E3C729C}" presName="spaceRect" presStyleCnt="0"/>
+      <dgm:spPr/>
+    </dgm:pt>
+    <dgm:pt modelId="{AC04EAD7-4EBC-4F3A-8F0F-DDB354AEDD2B}" type="pres">
+      <dgm:prSet presAssocID="{D6BCAD8F-63AA-4CD2-AB59-099C7E3C729C}" presName="parTx" presStyleLbl="revTx" presStyleIdx="0" presStyleCnt="7">
+        <dgm:presLayoutVars>
+          <dgm:chMax val="0"/>
+          <dgm:chPref val="0"/>
+        </dgm:presLayoutVars>
+      </dgm:prSet>
+      <dgm:spPr/>
+    </dgm:pt>
+    <dgm:pt modelId="{BA7ABD63-B038-484D-8007-8309B749ECEB}" type="pres">
+      <dgm:prSet presAssocID="{8E8CB0F4-2CD7-4DA2-A0BB-A6C61778579D}" presName="sibTrans" presStyleCnt="0"/>
+      <dgm:spPr/>
+    </dgm:pt>
+    <dgm:pt modelId="{4BC43810-5360-4DDD-93D7-59A2D60D3A7A}" type="pres">
+      <dgm:prSet presAssocID="{37A07D0B-3508-42F6-A5B9-8D3B88522005}" presName="compNode" presStyleCnt="0"/>
+      <dgm:spPr/>
+    </dgm:pt>
+    <dgm:pt modelId="{756F0C1B-8BB0-418C-AED3-D3ABC9F21A57}" type="pres">
+      <dgm:prSet presAssocID="{37A07D0B-3508-42F6-A5B9-8D3B88522005}" presName="bgRect" presStyleLbl="bgShp" presStyleIdx="1" presStyleCnt="7"/>
+      <dgm:spPr/>
+    </dgm:pt>
+    <dgm:pt modelId="{F78D7037-BAA7-4CF6-938F-4EF2D9774758}" type="pres">
+      <dgm:prSet presAssocID="{37A07D0B-3508-42F6-A5B9-8D3B88522005}" presName="iconRect" presStyleLbl="node1" presStyleIdx="1" presStyleCnt="7"/>
+      <dgm:spPr>
+        <a:blipFill>
+          <a:blip xmlns:r="http://schemas.openxmlformats.org/officeDocument/2006/relationships">
+            <a:extLst>
+              <a:ext uri="{28A0092B-C50C-407E-A947-70E740481C1C}">
+                <a14:useLocalDpi xmlns:a14="http://schemas.microsoft.com/office/drawing/2010/main" val="0"/>
+              </a:ext>
+              <a:ext uri="{96DAC541-7B7A-43D3-8B79-37D633B846F1}">
+                <asvg:svgBlip xmlns:asvg="http://schemas.microsoft.com/office/drawing/2016/SVG/main" r:embed="rId2"/>
+              </a:ext>
+            </a:extLst>
+          </a:blip>
+          <a:stretch>
+            <a:fillRect/>
+          </a:stretch>
+        </a:blipFill>
+      </dgm:spPr>
+      <dgm:extLst>
+        <a:ext uri="{E40237B7-FDA0-4F09-8148-C483321AD2D9}">
+          <dgm14:cNvPr xmlns:dgm14="http://schemas.microsoft.com/office/drawing/2010/diagram" id="0" name="" descr="Marca de verificación"/>
+        </a:ext>
+      </dgm:extLst>
+    </dgm:pt>
+    <dgm:pt modelId="{DC71B258-597B-4A4B-988D-DCF8BFF78E94}" type="pres">
+      <dgm:prSet presAssocID="{37A07D0B-3508-42F6-A5B9-8D3B88522005}" presName="spaceRect" presStyleCnt="0"/>
+      <dgm:spPr/>
+    </dgm:pt>
+    <dgm:pt modelId="{C5DAECE9-2613-4838-921E-4164BF1E1EFE}" type="pres">
+      <dgm:prSet presAssocID="{37A07D0B-3508-42F6-A5B9-8D3B88522005}" presName="parTx" presStyleLbl="revTx" presStyleIdx="1" presStyleCnt="7">
+        <dgm:presLayoutVars>
+          <dgm:chMax val="0"/>
+          <dgm:chPref val="0"/>
+        </dgm:presLayoutVars>
+      </dgm:prSet>
+      <dgm:spPr/>
+    </dgm:pt>
+    <dgm:pt modelId="{D9A2C0D3-9F3E-46BF-8F5E-21F0AD315C11}" type="pres">
+      <dgm:prSet presAssocID="{B924C114-DA05-4B05-91C5-7ABDFCEAAEE1}" presName="sibTrans" presStyleCnt="0"/>
+      <dgm:spPr/>
+    </dgm:pt>
+    <dgm:pt modelId="{C85AF081-350F-42F5-8B6A-5E8A55983093}" type="pres">
+      <dgm:prSet presAssocID="{6A3BF7C3-034D-4A00-BFD4-5701BBEB8B04}" presName="compNode" presStyleCnt="0"/>
+      <dgm:spPr/>
+    </dgm:pt>
+    <dgm:pt modelId="{5BC95C9D-44D5-46DA-8F61-3F588CA87C51}" type="pres">
+      <dgm:prSet presAssocID="{6A3BF7C3-034D-4A00-BFD4-5701BBEB8B04}" presName="bgRect" presStyleLbl="bgShp" presStyleIdx="2" presStyleCnt="7"/>
+      <dgm:spPr/>
+    </dgm:pt>
+    <dgm:pt modelId="{66E5ED8F-8360-4FDB-9634-0E1D5FE2F66B}" type="pres">
+      <dgm:prSet presAssocID="{6A3BF7C3-034D-4A00-BFD4-5701BBEB8B04}" presName="iconRect" presStyleLbl="node1" presStyleIdx="2" presStyleCnt="7"/>
+      <dgm:spPr>
+        <a:blipFill>
+          <a:blip xmlns:r="http://schemas.openxmlformats.org/officeDocument/2006/relationships">
+            <a:extLst>
+              <a:ext uri="{28A0092B-C50C-407E-A947-70E740481C1C}">
+                <a14:useLocalDpi xmlns:a14="http://schemas.microsoft.com/office/drawing/2010/main" val="0"/>
+              </a:ext>
+              <a:ext uri="{96DAC541-7B7A-43D3-8B79-37D633B846F1}">
+                <asvg:svgBlip xmlns:asvg="http://schemas.microsoft.com/office/drawing/2016/SVG/main" r:embed="rId3"/>
+              </a:ext>
+            </a:extLst>
+          </a:blip>
+          <a:stretch>
+            <a:fillRect/>
+          </a:stretch>
+        </a:blipFill>
+      </dgm:spPr>
+      <dgm:extLst>
+        <a:ext uri="{E40237B7-FDA0-4F09-8148-C483321AD2D9}">
+          <dgm14:cNvPr xmlns:dgm14="http://schemas.microsoft.com/office/drawing/2010/diagram" id="0" name="" descr="Pie chart"/>
+        </a:ext>
+      </dgm:extLst>
+    </dgm:pt>
+    <dgm:pt modelId="{3D949ACD-1F5F-4FC3-82E2-030CBFF70C49}" type="pres">
+      <dgm:prSet presAssocID="{6A3BF7C3-034D-4A00-BFD4-5701BBEB8B04}" presName="spaceRect" presStyleCnt="0"/>
+      <dgm:spPr/>
+    </dgm:pt>
+    <dgm:pt modelId="{48C9CB7C-91B2-4126-9347-D5BC89ED2836}" type="pres">
+      <dgm:prSet presAssocID="{6A3BF7C3-034D-4A00-BFD4-5701BBEB8B04}" presName="parTx" presStyleLbl="revTx" presStyleIdx="2" presStyleCnt="7">
+        <dgm:presLayoutVars>
+          <dgm:chMax val="0"/>
+          <dgm:chPref val="0"/>
+        </dgm:presLayoutVars>
+      </dgm:prSet>
+      <dgm:spPr/>
+    </dgm:pt>
+    <dgm:pt modelId="{6D7AD63B-CE31-4C0D-9219-8C37D2F5692E}" type="pres">
+      <dgm:prSet presAssocID="{8C94980F-F379-4DFA-AE25-2AD9BCEA22DE}" presName="sibTrans" presStyleCnt="0"/>
+      <dgm:spPr/>
+    </dgm:pt>
+    <dgm:pt modelId="{7A716C0F-F258-46EA-9390-903205B06056}" type="pres">
+      <dgm:prSet presAssocID="{5DF44757-E4A8-4B0D-9A86-1949644812F4}" presName="compNode" presStyleCnt="0"/>
+      <dgm:spPr/>
+    </dgm:pt>
+    <dgm:pt modelId="{237C8F08-8C0C-4449-B9F6-6E949D40C75A}" type="pres">
+      <dgm:prSet presAssocID="{5DF44757-E4A8-4B0D-9A86-1949644812F4}" presName="bgRect" presStyleLbl="bgShp" presStyleIdx="3" presStyleCnt="7"/>
+      <dgm:spPr/>
+    </dgm:pt>
+    <dgm:pt modelId="{A314EBC4-D7A8-4F77-9166-61284BD65D95}" type="pres">
+      <dgm:prSet presAssocID="{5DF44757-E4A8-4B0D-9A86-1949644812F4}" presName="iconRect" presStyleLbl="node1" presStyleIdx="3" presStyleCnt="7"/>
+      <dgm:spPr>
+        <a:blipFill>
+          <a:blip xmlns:r="http://schemas.openxmlformats.org/officeDocument/2006/relationships">
+            <a:extLst>
+              <a:ext uri="{28A0092B-C50C-407E-A947-70E740481C1C}">
+                <a14:useLocalDpi xmlns:a14="http://schemas.microsoft.com/office/drawing/2010/main" val="0"/>
+              </a:ext>
+              <a:ext uri="{96DAC541-7B7A-43D3-8B79-37D633B846F1}">
+                <asvg:svgBlip xmlns:asvg="http://schemas.microsoft.com/office/drawing/2016/SVG/main" r:embed="rId4"/>
+              </a:ext>
+            </a:extLst>
+          </a:blip>
+          <a:stretch>
+            <a:fillRect/>
+          </a:stretch>
+        </a:blipFill>
+      </dgm:spPr>
+      <dgm:extLst>
+        <a:ext uri="{E40237B7-FDA0-4F09-8148-C483321AD2D9}">
+          <dgm14:cNvPr xmlns:dgm14="http://schemas.microsoft.com/office/drawing/2010/diagram" id="0" name="" descr="Bar chart"/>
+        </a:ext>
+      </dgm:extLst>
+    </dgm:pt>
+    <dgm:pt modelId="{4427C3A4-FFDE-4614-A7C3-359513924316}" type="pres">
+      <dgm:prSet presAssocID="{5DF44757-E4A8-4B0D-9A86-1949644812F4}" presName="spaceRect" presStyleCnt="0"/>
+      <dgm:spPr/>
+    </dgm:pt>
+    <dgm:pt modelId="{49361EBA-B677-416C-9A05-006E21C6AA69}" type="pres">
+      <dgm:prSet presAssocID="{5DF44757-E4A8-4B0D-9A86-1949644812F4}" presName="parTx" presStyleLbl="revTx" presStyleIdx="3" presStyleCnt="7">
+        <dgm:presLayoutVars>
+          <dgm:chMax val="0"/>
+          <dgm:chPref val="0"/>
+        </dgm:presLayoutVars>
+      </dgm:prSet>
+      <dgm:spPr/>
+    </dgm:pt>
+    <dgm:pt modelId="{EF22EDA4-7A71-403D-8ED5-3F85BDB0EB03}" type="pres">
+      <dgm:prSet presAssocID="{2EDBE248-B0CC-47CB-A937-6FB992AA8D1B}" presName="sibTrans" presStyleCnt="0"/>
+      <dgm:spPr/>
+    </dgm:pt>
+    <dgm:pt modelId="{8CDF518C-1F0D-4A09-8597-A98F16B08EC3}" type="pres">
+      <dgm:prSet presAssocID="{237792B9-22AE-4C6B-9F9B-AA5A6C39D14B}" presName="compNode" presStyleCnt="0"/>
+      <dgm:spPr/>
+    </dgm:pt>
+    <dgm:pt modelId="{7AF8E85C-E302-408E-9FD6-F8A5FDCAFF51}" type="pres">
+      <dgm:prSet presAssocID="{237792B9-22AE-4C6B-9F9B-AA5A6C39D14B}" presName="bgRect" presStyleLbl="bgShp" presStyleIdx="4" presStyleCnt="7"/>
+      <dgm:spPr/>
+    </dgm:pt>
+    <dgm:pt modelId="{C4BF7FC4-A9CA-46A0-B226-DEA231F2348B}" type="pres">
+      <dgm:prSet presAssocID="{237792B9-22AE-4C6B-9F9B-AA5A6C39D14B}" presName="iconRect" presStyleLbl="node1" presStyleIdx="4" presStyleCnt="7"/>
+      <dgm:spPr>
+        <a:blipFill>
+          <a:blip xmlns:r="http://schemas.openxmlformats.org/officeDocument/2006/relationships">
+            <a:extLst>
+              <a:ext uri="{28A0092B-C50C-407E-A947-70E740481C1C}">
+                <a14:useLocalDpi xmlns:a14="http://schemas.microsoft.com/office/drawing/2010/main" val="0"/>
+              </a:ext>
+              <a:ext uri="{96DAC541-7B7A-43D3-8B79-37D633B846F1}">
+                <asvg:svgBlip xmlns:asvg="http://schemas.microsoft.com/office/drawing/2016/SVG/main" r:embed="rId5"/>
+              </a:ext>
+            </a:extLst>
+          </a:blip>
+          <a:stretch>
+            <a:fillRect/>
+          </a:stretch>
+        </a:blipFill>
+      </dgm:spPr>
+      <dgm:extLst>
+        <a:ext uri="{E40237B7-FDA0-4F09-8148-C483321AD2D9}">
+          <dgm14:cNvPr xmlns:dgm14="http://schemas.microsoft.com/office/drawing/2010/diagram" id="0" name="" descr="Código de barras"/>
+        </a:ext>
+      </dgm:extLst>
+    </dgm:pt>
+    <dgm:pt modelId="{202633C6-FDFC-4450-83FC-B446EADFFF5F}" type="pres">
+      <dgm:prSet presAssocID="{237792B9-22AE-4C6B-9F9B-AA5A6C39D14B}" presName="spaceRect" presStyleCnt="0"/>
+      <dgm:spPr/>
+    </dgm:pt>
+    <dgm:pt modelId="{C33B42A8-691E-4300-A8DC-B5D23341F01A}" type="pres">
+      <dgm:prSet presAssocID="{237792B9-22AE-4C6B-9F9B-AA5A6C39D14B}" presName="parTx" presStyleLbl="revTx" presStyleIdx="4" presStyleCnt="7">
+        <dgm:presLayoutVars>
+          <dgm:chMax val="0"/>
+          <dgm:chPref val="0"/>
+        </dgm:presLayoutVars>
+      </dgm:prSet>
+      <dgm:spPr/>
+    </dgm:pt>
+    <dgm:pt modelId="{5B883B70-65E1-4556-9C41-CB6B7E3CDC01}" type="pres">
+      <dgm:prSet presAssocID="{7E6B485D-6925-4B32-AFFA-57C217D8F8C8}" presName="sibTrans" presStyleCnt="0"/>
+      <dgm:spPr/>
+    </dgm:pt>
+    <dgm:pt modelId="{E88FA586-B9F4-4976-AD0B-012A9B09C188}" type="pres">
+      <dgm:prSet presAssocID="{91817FF6-7E2E-4B64-BE6E-82ED021A7311}" presName="compNode" presStyleCnt="0"/>
+      <dgm:spPr/>
+    </dgm:pt>
+    <dgm:pt modelId="{F511A0DD-00BC-4FE4-8A42-393B9B047BAB}" type="pres">
+      <dgm:prSet presAssocID="{91817FF6-7E2E-4B64-BE6E-82ED021A7311}" presName="bgRect" presStyleLbl="bgShp" presStyleIdx="5" presStyleCnt="7"/>
+      <dgm:spPr/>
+    </dgm:pt>
+    <dgm:pt modelId="{007EEF87-C7EC-4FBD-A25B-8AA4F2D3EDB8}" type="pres">
+      <dgm:prSet presAssocID="{91817FF6-7E2E-4B64-BE6E-82ED021A7311}" presName="iconRect" presStyleLbl="node1" presStyleIdx="5" presStyleCnt="7"/>
+      <dgm:spPr>
+        <a:blipFill>
+          <a:blip xmlns:r="http://schemas.openxmlformats.org/officeDocument/2006/relationships">
+            <a:extLst>
+              <a:ext uri="{28A0092B-C50C-407E-A947-70E740481C1C}">
+                <a14:useLocalDpi xmlns:a14="http://schemas.microsoft.com/office/drawing/2010/main" val="0"/>
+              </a:ext>
+              <a:ext uri="{96DAC541-7B7A-43D3-8B79-37D633B846F1}">
+                <asvg:svgBlip xmlns:asvg="http://schemas.microsoft.com/office/drawing/2016/SVG/main" r:embed="rId6"/>
+              </a:ext>
+            </a:extLst>
+          </a:blip>
+          <a:stretch>
+            <a:fillRect/>
+          </a:stretch>
+        </a:blipFill>
+      </dgm:spPr>
+      <dgm:extLst>
+        <a:ext uri="{E40237B7-FDA0-4F09-8148-C483321AD2D9}">
+          <dgm14:cNvPr xmlns:dgm14="http://schemas.microsoft.com/office/drawing/2010/diagram" id="0" name="" descr="Cuaderno de estrategias"/>
+        </a:ext>
+      </dgm:extLst>
+    </dgm:pt>
+    <dgm:pt modelId="{6E8762B6-F42D-4707-B5BF-8BF2A631AFF0}" type="pres">
+      <dgm:prSet presAssocID="{91817FF6-7E2E-4B64-BE6E-82ED021A7311}" presName="spaceRect" presStyleCnt="0"/>
+      <dgm:spPr/>
+    </dgm:pt>
+    <dgm:pt modelId="{95B1FD20-A8E8-415C-991D-E009863C752E}" type="pres">
+      <dgm:prSet presAssocID="{91817FF6-7E2E-4B64-BE6E-82ED021A7311}" presName="parTx" presStyleLbl="revTx" presStyleIdx="5" presStyleCnt="7">
+        <dgm:presLayoutVars>
+          <dgm:chMax val="0"/>
+          <dgm:chPref val="0"/>
+        </dgm:presLayoutVars>
+      </dgm:prSet>
+      <dgm:spPr/>
+    </dgm:pt>
+    <dgm:pt modelId="{57FA7E9F-28BF-45CF-BCFD-DB77168FB5CA}" type="pres">
+      <dgm:prSet presAssocID="{99FAE7B8-8743-46BA-9247-0108F2664EA1}" presName="sibTrans" presStyleCnt="0"/>
+      <dgm:spPr/>
+    </dgm:pt>
+    <dgm:pt modelId="{B44BACD7-5A33-4BFC-BD0C-C2B404BB24A1}" type="pres">
+      <dgm:prSet presAssocID="{9B9AA99B-9689-4367-B103-5BF72DC9B1C8}" presName="compNode" presStyleCnt="0"/>
+      <dgm:spPr/>
+    </dgm:pt>
+    <dgm:pt modelId="{9C1DBC89-ADCF-4330-A9CF-98215C0B818F}" type="pres">
+      <dgm:prSet presAssocID="{9B9AA99B-9689-4367-B103-5BF72DC9B1C8}" presName="bgRect" presStyleLbl="bgShp" presStyleIdx="6" presStyleCnt="7"/>
+      <dgm:spPr/>
+    </dgm:pt>
+    <dgm:pt modelId="{80CB58DE-03CC-4EA1-A9B4-BC3E81FC0962}" type="pres">
+      <dgm:prSet presAssocID="{9B9AA99B-9689-4367-B103-5BF72DC9B1C8}" presName="iconRect" presStyleLbl="node1" presStyleIdx="6" presStyleCnt="7"/>
+      <dgm:spPr>
+        <a:blipFill>
+          <a:blip xmlns:r="http://schemas.openxmlformats.org/officeDocument/2006/relationships">
+            <a:extLst>
+              <a:ext uri="{28A0092B-C50C-407E-A947-70E740481C1C}">
+                <a14:useLocalDpi xmlns:a14="http://schemas.microsoft.com/office/drawing/2010/main" val="0"/>
+              </a:ext>
+              <a:ext uri="{96DAC541-7B7A-43D3-8B79-37D633B846F1}">
+                <asvg:svgBlip xmlns:asvg="http://schemas.microsoft.com/office/drawing/2016/SVG/main" r:embed="rId7"/>
+              </a:ext>
+            </a:extLst>
+          </a:blip>
+          <a:stretch>
+            <a:fillRect/>
+          </a:stretch>
+        </a:blipFill>
+      </dgm:spPr>
+      <dgm:extLst>
+        <a:ext uri="{E40237B7-FDA0-4F09-8148-C483321AD2D9}">
+          <dgm14:cNvPr xmlns:dgm14="http://schemas.microsoft.com/office/drawing/2010/diagram" id="0" name="" descr="Help"/>
+        </a:ext>
+      </dgm:extLst>
+    </dgm:pt>
+    <dgm:pt modelId="{2143AF6D-F495-4636-B70C-348640742C2A}" type="pres">
+      <dgm:prSet presAssocID="{9B9AA99B-9689-4367-B103-5BF72DC9B1C8}" presName="spaceRect" presStyleCnt="0"/>
+      <dgm:spPr/>
+    </dgm:pt>
+    <dgm:pt modelId="{9660B707-9E4A-4AB4-A17F-C27ED314F522}" type="pres">
+      <dgm:prSet presAssocID="{9B9AA99B-9689-4367-B103-5BF72DC9B1C8}" presName="parTx" presStyleLbl="revTx" presStyleIdx="6" presStyleCnt="7">
+        <dgm:presLayoutVars>
+          <dgm:chMax val="0"/>
+          <dgm:chPref val="0"/>
+        </dgm:presLayoutVars>
+      </dgm:prSet>
+      <dgm:spPr/>
+    </dgm:pt>
+  </dgm:ptLst>
+  <dgm:cxnLst>
+    <dgm:cxn modelId="{55D04705-846E-448C-9BCD-97C3ADCD92DA}" type="presOf" srcId="{237792B9-22AE-4C6B-9F9B-AA5A6C39D14B}" destId="{C33B42A8-691E-4300-A8DC-B5D23341F01A}" srcOrd="0" destOrd="0" presId="urn:microsoft.com/office/officeart/2018/2/layout/IconVerticalSolidList"/>
+    <dgm:cxn modelId="{F9F59621-E982-4426-A3E6-01C96E90D9D1}" srcId="{8FDB0886-292F-44AC-854B-750D64582871}" destId="{237792B9-22AE-4C6B-9F9B-AA5A6C39D14B}" srcOrd="4" destOrd="0" parTransId="{AD44202E-A939-46BC-BA5E-324452042EBA}" sibTransId="{7E6B485D-6925-4B32-AFFA-57C217D8F8C8}"/>
+    <dgm:cxn modelId="{8C255624-1A52-4956-969D-578163380921}" type="presOf" srcId="{5DF44757-E4A8-4B0D-9A86-1949644812F4}" destId="{49361EBA-B677-416C-9A05-006E21C6AA69}" srcOrd="0" destOrd="0" presId="urn:microsoft.com/office/officeart/2018/2/layout/IconVerticalSolidList"/>
+    <dgm:cxn modelId="{74A6DA46-0988-4A66-A952-086F7745E321}" type="presOf" srcId="{8FDB0886-292F-44AC-854B-750D64582871}" destId="{1B2C1D22-EE69-4277-A201-8853487C4A30}" srcOrd="0" destOrd="0" presId="urn:microsoft.com/office/officeart/2018/2/layout/IconVerticalSolidList"/>
+    <dgm:cxn modelId="{4716B66A-8C4B-41DC-945E-9238C7BC83BD}" srcId="{8FDB0886-292F-44AC-854B-750D64582871}" destId="{9B9AA99B-9689-4367-B103-5BF72DC9B1C8}" srcOrd="6" destOrd="0" parTransId="{8A9F27AD-B6D9-44B4-B42B-392CE6ACAEF3}" sibTransId="{01681013-659A-41E5-AE7A-7A1F5270EF5B}"/>
+    <dgm:cxn modelId="{CF4C416F-09D4-4625-8DB9-8F895A570BA9}" srcId="{8FDB0886-292F-44AC-854B-750D64582871}" destId="{6A3BF7C3-034D-4A00-BFD4-5701BBEB8B04}" srcOrd="2" destOrd="0" parTransId="{3DE1E7C9-642E-4DEC-AD87-C37957513B99}" sibTransId="{8C94980F-F379-4DFA-AE25-2AD9BCEA22DE}"/>
+    <dgm:cxn modelId="{11E09070-BF9F-40ED-8979-77E77736171C}" srcId="{8FDB0886-292F-44AC-854B-750D64582871}" destId="{D6BCAD8F-63AA-4CD2-AB59-099C7E3C729C}" srcOrd="0" destOrd="0" parTransId="{BADA598E-D9C3-4B88-88F4-52836F467915}" sibTransId="{8E8CB0F4-2CD7-4DA2-A0BB-A6C61778579D}"/>
+    <dgm:cxn modelId="{72CFE871-AF2D-4D00-993D-0FA091B62F4C}" srcId="{8FDB0886-292F-44AC-854B-750D64582871}" destId="{37A07D0B-3508-42F6-A5B9-8D3B88522005}" srcOrd="1" destOrd="0" parTransId="{FD2BF2EB-67CA-4D8F-A486-8ACCA10D3819}" sibTransId="{B924C114-DA05-4B05-91C5-7ABDFCEAAEE1}"/>
+    <dgm:cxn modelId="{4285D290-5E97-4F2D-B114-25242212F4EA}" type="presOf" srcId="{91817FF6-7E2E-4B64-BE6E-82ED021A7311}" destId="{95B1FD20-A8E8-415C-991D-E009863C752E}" srcOrd="0" destOrd="0" presId="urn:microsoft.com/office/officeart/2018/2/layout/IconVerticalSolidList"/>
+    <dgm:cxn modelId="{A1F5E2A2-FAF4-4C5A-B271-6CDD89226684}" srcId="{8FDB0886-292F-44AC-854B-750D64582871}" destId="{91817FF6-7E2E-4B64-BE6E-82ED021A7311}" srcOrd="5" destOrd="0" parTransId="{89A598BE-991F-4EDA-9F68-FE7BB7A16F69}" sibTransId="{99FAE7B8-8743-46BA-9247-0108F2664EA1}"/>
+    <dgm:cxn modelId="{9E4D5AA3-86EE-43DC-8991-4C1E09F4124D}" type="presOf" srcId="{D6BCAD8F-63AA-4CD2-AB59-099C7E3C729C}" destId="{AC04EAD7-4EBC-4F3A-8F0F-DDB354AEDD2B}" srcOrd="0" destOrd="0" presId="urn:microsoft.com/office/officeart/2018/2/layout/IconVerticalSolidList"/>
+    <dgm:cxn modelId="{5B5987AE-5DB1-4374-9425-B865F1028821}" type="presOf" srcId="{37A07D0B-3508-42F6-A5B9-8D3B88522005}" destId="{C5DAECE9-2613-4838-921E-4164BF1E1EFE}" srcOrd="0" destOrd="0" presId="urn:microsoft.com/office/officeart/2018/2/layout/IconVerticalSolidList"/>
+    <dgm:cxn modelId="{60756CC5-D054-431D-B9A2-DCAECCEE1E2E}" type="presOf" srcId="{9B9AA99B-9689-4367-B103-5BF72DC9B1C8}" destId="{9660B707-9E4A-4AB4-A17F-C27ED314F522}" srcOrd="0" destOrd="0" presId="urn:microsoft.com/office/officeart/2018/2/layout/IconVerticalSolidList"/>
+    <dgm:cxn modelId="{C253A6E1-31D1-4AD6-B7B3-3AF4D0C5C910}" srcId="{8FDB0886-292F-44AC-854B-750D64582871}" destId="{5DF44757-E4A8-4B0D-9A86-1949644812F4}" srcOrd="3" destOrd="0" parTransId="{39C9382B-E9E4-44BA-AC55-128A50E0EB82}" sibTransId="{2EDBE248-B0CC-47CB-A937-6FB992AA8D1B}"/>
+    <dgm:cxn modelId="{9C69E9E9-4003-47E4-B748-06BF9362879E}" type="presOf" srcId="{6A3BF7C3-034D-4A00-BFD4-5701BBEB8B04}" destId="{48C9CB7C-91B2-4126-9347-D5BC89ED2836}" srcOrd="0" destOrd="0" presId="urn:microsoft.com/office/officeart/2018/2/layout/IconVerticalSolidList"/>
+    <dgm:cxn modelId="{95F2597A-5E13-4AD0-8C42-59A24FDF0167}" type="presParOf" srcId="{1B2C1D22-EE69-4277-A201-8853487C4A30}" destId="{85370A5C-B80C-49E4-B607-045A1128E9A2}" srcOrd="0" destOrd="0" presId="urn:microsoft.com/office/officeart/2018/2/layout/IconVerticalSolidList"/>
+    <dgm:cxn modelId="{B7FCD86B-E982-478B-B1DD-83597AF75EF4}" type="presParOf" srcId="{85370A5C-B80C-49E4-B607-045A1128E9A2}" destId="{14E6579C-3E19-41AE-866B-753BC0F62D93}" srcOrd="0" destOrd="0" presId="urn:microsoft.com/office/officeart/2018/2/layout/IconVerticalSolidList"/>
+    <dgm:cxn modelId="{C364EA9F-F0DB-4869-9CCA-381C43033382}" type="presParOf" srcId="{85370A5C-B80C-49E4-B607-045A1128E9A2}" destId="{C8F68A96-47C1-4CFD-8292-1258E3250CAA}" srcOrd="1" destOrd="0" presId="urn:microsoft.com/office/officeart/2018/2/layout/IconVerticalSolidList"/>
+    <dgm:cxn modelId="{48EEB83C-3176-4C0E-9200-5BAD1EC71E56}" type="presParOf" srcId="{85370A5C-B80C-49E4-B607-045A1128E9A2}" destId="{FB14D7DA-3F31-49C8-B468-9F86E961400F}" srcOrd="2" destOrd="0" presId="urn:microsoft.com/office/officeart/2018/2/layout/IconVerticalSolidList"/>
+    <dgm:cxn modelId="{1A3BC675-3A01-429F-A75F-209753E0709C}" type="presParOf" srcId="{85370A5C-B80C-49E4-B607-045A1128E9A2}" destId="{AC04EAD7-4EBC-4F3A-8F0F-DDB354AEDD2B}" srcOrd="3" destOrd="0" presId="urn:microsoft.com/office/officeart/2018/2/layout/IconVerticalSolidList"/>
+    <dgm:cxn modelId="{783F0B59-BF75-4F4C-8814-CFA7D8DD280C}" type="presParOf" srcId="{1B2C1D22-EE69-4277-A201-8853487C4A30}" destId="{BA7ABD63-B038-484D-8007-8309B749ECEB}" srcOrd="1" destOrd="0" presId="urn:microsoft.com/office/officeart/2018/2/layout/IconVerticalSolidList"/>
+    <dgm:cxn modelId="{E6FE446D-E37F-45D1-AB6D-9CD6B4939605}" type="presParOf" srcId="{1B2C1D22-EE69-4277-A201-8853487C4A30}" destId="{4BC43810-5360-4DDD-93D7-59A2D60D3A7A}" srcOrd="2" destOrd="0" presId="urn:microsoft.com/office/officeart/2018/2/layout/IconVerticalSolidList"/>
+    <dgm:cxn modelId="{ED27B9E4-9292-4E10-A357-5F8A6E5492A6}" type="presParOf" srcId="{4BC43810-5360-4DDD-93D7-59A2D60D3A7A}" destId="{756F0C1B-8BB0-418C-AED3-D3ABC9F21A57}" srcOrd="0" destOrd="0" presId="urn:microsoft.com/office/officeart/2018/2/layout/IconVerticalSolidList"/>
+    <dgm:cxn modelId="{738AE332-AF2E-44FE-A256-9C1B4543FC24}" type="presParOf" srcId="{4BC43810-5360-4DDD-93D7-59A2D60D3A7A}" destId="{F78D7037-BAA7-4CF6-938F-4EF2D9774758}" srcOrd="1" destOrd="0" presId="urn:microsoft.com/office/officeart/2018/2/layout/IconVerticalSolidList"/>
+    <dgm:cxn modelId="{1C8B9CD0-E863-463C-99E8-D89740548283}" type="presParOf" srcId="{4BC43810-5360-4DDD-93D7-59A2D60D3A7A}" destId="{DC71B258-597B-4A4B-988D-DCF8BFF78E94}" srcOrd="2" destOrd="0" presId="urn:microsoft.com/office/officeart/2018/2/layout/IconVerticalSolidList"/>
+    <dgm:cxn modelId="{2D3F0BC5-DA75-41D3-A4FC-ED6D2CC46DAD}" type="presParOf" srcId="{4BC43810-5360-4DDD-93D7-59A2D60D3A7A}" destId="{C5DAECE9-2613-4838-921E-4164BF1E1EFE}" srcOrd="3" destOrd="0" presId="urn:microsoft.com/office/officeart/2018/2/layout/IconVerticalSolidList"/>
+    <dgm:cxn modelId="{32F4923B-4A0D-4083-824F-5CF3F9D23E60}" type="presParOf" srcId="{1B2C1D22-EE69-4277-A201-8853487C4A30}" destId="{D9A2C0D3-9F3E-46BF-8F5E-21F0AD315C11}" srcOrd="3" destOrd="0" presId="urn:microsoft.com/office/officeart/2018/2/layout/IconVerticalSolidList"/>
+    <dgm:cxn modelId="{065989DB-6162-4C23-991D-BC556328157B}" type="presParOf" srcId="{1B2C1D22-EE69-4277-A201-8853487C4A30}" destId="{C85AF081-350F-42F5-8B6A-5E8A55983093}" srcOrd="4" destOrd="0" presId="urn:microsoft.com/office/officeart/2018/2/layout/IconVerticalSolidList"/>
+    <dgm:cxn modelId="{48D05250-FD93-4E12-8CC4-1AE71CF6EAB2}" type="presParOf" srcId="{C85AF081-350F-42F5-8B6A-5E8A55983093}" destId="{5BC95C9D-44D5-46DA-8F61-3F588CA87C51}" srcOrd="0" destOrd="0" presId="urn:microsoft.com/office/officeart/2018/2/layout/IconVerticalSolidList"/>
+    <dgm:cxn modelId="{0E3FB387-65F6-4892-AA55-6CEDDF1E1424}" type="presParOf" srcId="{C85AF081-350F-42F5-8B6A-5E8A55983093}" destId="{66E5ED8F-8360-4FDB-9634-0E1D5FE2F66B}" srcOrd="1" destOrd="0" presId="urn:microsoft.com/office/officeart/2018/2/layout/IconVerticalSolidList"/>
+    <dgm:cxn modelId="{08EFFF9A-06A5-42C5-B549-1FAB7CEEFCB5}" type="presParOf" srcId="{C85AF081-350F-42F5-8B6A-5E8A55983093}" destId="{3D949ACD-1F5F-4FC3-82E2-030CBFF70C49}" srcOrd="2" destOrd="0" presId="urn:microsoft.com/office/officeart/2018/2/layout/IconVerticalSolidList"/>
+    <dgm:cxn modelId="{70AE4DAB-4A7B-4198-A4A4-4A80B045843D}" type="presParOf" srcId="{C85AF081-350F-42F5-8B6A-5E8A55983093}" destId="{48C9CB7C-91B2-4126-9347-D5BC89ED2836}" srcOrd="3" destOrd="0" presId="urn:microsoft.com/office/officeart/2018/2/layout/IconVerticalSolidList"/>
+    <dgm:cxn modelId="{89B7D6CF-D010-4E3F-994A-351260ED3F48}" type="presParOf" srcId="{1B2C1D22-EE69-4277-A201-8853487C4A30}" destId="{6D7AD63B-CE31-4C0D-9219-8C37D2F5692E}" srcOrd="5" destOrd="0" presId="urn:microsoft.com/office/officeart/2018/2/layout/IconVerticalSolidList"/>
+    <dgm:cxn modelId="{4E81CD6E-1AB4-47D2-8F69-74A8CF04D215}" type="presParOf" srcId="{1B2C1D22-EE69-4277-A201-8853487C4A30}" destId="{7A716C0F-F258-46EA-9390-903205B06056}" srcOrd="6" destOrd="0" presId="urn:microsoft.com/office/officeart/2018/2/layout/IconVerticalSolidList"/>
+    <dgm:cxn modelId="{C85FE47D-8C09-41E9-AB07-EAEA8244E0D5}" type="presParOf" srcId="{7A716C0F-F258-46EA-9390-903205B06056}" destId="{237C8F08-8C0C-4449-B9F6-6E949D40C75A}" srcOrd="0" destOrd="0" presId="urn:microsoft.com/office/officeart/2018/2/layout/IconVerticalSolidList"/>
+    <dgm:cxn modelId="{5811F2B8-4ECD-4C25-BAA2-3CCC146A5E42}" type="presParOf" srcId="{7A716C0F-F258-46EA-9390-903205B06056}" destId="{A314EBC4-D7A8-4F77-9166-61284BD65D95}" srcOrd="1" destOrd="0" presId="urn:microsoft.com/office/officeart/2018/2/layout/IconVerticalSolidList"/>
+    <dgm:cxn modelId="{E0869CF1-698A-48AF-B295-3FD27C218F41}" type="presParOf" srcId="{7A716C0F-F258-46EA-9390-903205B06056}" destId="{4427C3A4-FFDE-4614-A7C3-359513924316}" srcOrd="2" destOrd="0" presId="urn:microsoft.com/office/officeart/2018/2/layout/IconVerticalSolidList"/>
+    <dgm:cxn modelId="{E33E61BC-6178-46C1-A94F-09FDD9324E7C}" type="presParOf" srcId="{7A716C0F-F258-46EA-9390-903205B06056}" destId="{49361EBA-B677-416C-9A05-006E21C6AA69}" srcOrd="3" destOrd="0" presId="urn:microsoft.com/office/officeart/2018/2/layout/IconVerticalSolidList"/>
+    <dgm:cxn modelId="{EE60D643-7BCB-4033-B1FA-6ABD80CB9890}" type="presParOf" srcId="{1B2C1D22-EE69-4277-A201-8853487C4A30}" destId="{EF22EDA4-7A71-403D-8ED5-3F85BDB0EB03}" srcOrd="7" destOrd="0" presId="urn:microsoft.com/office/officeart/2018/2/layout/IconVerticalSolidList"/>
+    <dgm:cxn modelId="{9F0FA0CF-01AE-4902-9481-2BDE24ED3C97}" type="presParOf" srcId="{1B2C1D22-EE69-4277-A201-8853487C4A30}" destId="{8CDF518C-1F0D-4A09-8597-A98F16B08EC3}" srcOrd="8" destOrd="0" presId="urn:microsoft.com/office/officeart/2018/2/layout/IconVerticalSolidList"/>
+    <dgm:cxn modelId="{A02E46D4-6E0D-405D-A76B-8FAC4202A97A}" type="presParOf" srcId="{8CDF518C-1F0D-4A09-8597-A98F16B08EC3}" destId="{7AF8E85C-E302-408E-9FD6-F8A5FDCAFF51}" srcOrd="0" destOrd="0" presId="urn:microsoft.com/office/officeart/2018/2/layout/IconVerticalSolidList"/>
+    <dgm:cxn modelId="{72B60550-AE8C-4023-A6C3-3EE5883D5D8F}" type="presParOf" srcId="{8CDF518C-1F0D-4A09-8597-A98F16B08EC3}" destId="{C4BF7FC4-A9CA-46A0-B226-DEA231F2348B}" srcOrd="1" destOrd="0" presId="urn:microsoft.com/office/officeart/2018/2/layout/IconVerticalSolidList"/>
+    <dgm:cxn modelId="{5B868B69-5370-4D0B-ABA2-4303B8374136}" type="presParOf" srcId="{8CDF518C-1F0D-4A09-8597-A98F16B08EC3}" destId="{202633C6-FDFC-4450-83FC-B446EADFFF5F}" srcOrd="2" destOrd="0" presId="urn:microsoft.com/office/officeart/2018/2/layout/IconVerticalSolidList"/>
+    <dgm:cxn modelId="{0BF782DE-F261-4117-A7D0-9FE656F82A5A}" type="presParOf" srcId="{8CDF518C-1F0D-4A09-8597-A98F16B08EC3}" destId="{C33B42A8-691E-4300-A8DC-B5D23341F01A}" srcOrd="3" destOrd="0" presId="urn:microsoft.com/office/officeart/2018/2/layout/IconVerticalSolidList"/>
+    <dgm:cxn modelId="{EAB7460D-8319-4A19-9FC8-512E3AF22702}" type="presParOf" srcId="{1B2C1D22-EE69-4277-A201-8853487C4A30}" destId="{5B883B70-65E1-4556-9C41-CB6B7E3CDC01}" srcOrd="9" destOrd="0" presId="urn:microsoft.com/office/officeart/2018/2/layout/IconVerticalSolidList"/>
+    <dgm:cxn modelId="{869D850B-BC29-497A-B230-99BA677A98AE}" type="presParOf" srcId="{1B2C1D22-EE69-4277-A201-8853487C4A30}" destId="{E88FA586-B9F4-4976-AD0B-012A9B09C188}" srcOrd="10" destOrd="0" presId="urn:microsoft.com/office/officeart/2018/2/layout/IconVerticalSolidList"/>
+    <dgm:cxn modelId="{CACED508-9041-4658-A077-490CEA226F59}" type="presParOf" srcId="{E88FA586-B9F4-4976-AD0B-012A9B09C188}" destId="{F511A0DD-00BC-4FE4-8A42-393B9B047BAB}" srcOrd="0" destOrd="0" presId="urn:microsoft.com/office/officeart/2018/2/layout/IconVerticalSolidList"/>
+    <dgm:cxn modelId="{A5E6E6E7-AED2-4116-B8EB-FF9A9C7E0995}" type="presParOf" srcId="{E88FA586-B9F4-4976-AD0B-012A9B09C188}" destId="{007EEF87-C7EC-4FBD-A25B-8AA4F2D3EDB8}" srcOrd="1" destOrd="0" presId="urn:microsoft.com/office/officeart/2018/2/layout/IconVerticalSolidList"/>
+    <dgm:cxn modelId="{6659235D-DAD0-4145-851D-A52E46871BA9}" type="presParOf" srcId="{E88FA586-B9F4-4976-AD0B-012A9B09C188}" destId="{6E8762B6-F42D-4707-B5BF-8BF2A631AFF0}" srcOrd="2" destOrd="0" presId="urn:microsoft.com/office/officeart/2018/2/layout/IconVerticalSolidList"/>
+    <dgm:cxn modelId="{289FEC70-5A86-4A56-9996-13BF92F6CE9A}" type="presParOf" srcId="{E88FA586-B9F4-4976-AD0B-012A9B09C188}" destId="{95B1FD20-A8E8-415C-991D-E009863C752E}" srcOrd="3" destOrd="0" presId="urn:microsoft.com/office/officeart/2018/2/layout/IconVerticalSolidList"/>
+    <dgm:cxn modelId="{B1BFAE92-C4E2-4D7F-AAB2-BB3FAD2D43B3}" type="presParOf" srcId="{1B2C1D22-EE69-4277-A201-8853487C4A30}" destId="{57FA7E9F-28BF-45CF-BCFD-DB77168FB5CA}" srcOrd="11" destOrd="0" presId="urn:microsoft.com/office/officeart/2018/2/layout/IconVerticalSolidList"/>
+    <dgm:cxn modelId="{0138241E-F85B-4E9E-ABFF-02AE66CF4DE1}" type="presParOf" srcId="{1B2C1D22-EE69-4277-A201-8853487C4A30}" destId="{B44BACD7-5A33-4BFC-BD0C-C2B404BB24A1}" srcOrd="12" destOrd="0" presId="urn:microsoft.com/office/officeart/2018/2/layout/IconVerticalSolidList"/>
+    <dgm:cxn modelId="{7C679D1F-8FAE-474B-9C42-4CA54AA3971E}" type="presParOf" srcId="{B44BACD7-5A33-4BFC-BD0C-C2B404BB24A1}" destId="{9C1DBC89-ADCF-4330-A9CF-98215C0B818F}" srcOrd="0" destOrd="0" presId="urn:microsoft.com/office/officeart/2018/2/layout/IconVerticalSolidList"/>
+    <dgm:cxn modelId="{95AFCB1A-40F4-4751-8D99-AA053C519B4A}" type="presParOf" srcId="{B44BACD7-5A33-4BFC-BD0C-C2B404BB24A1}" destId="{80CB58DE-03CC-4EA1-A9B4-BC3E81FC0962}" srcOrd="1" destOrd="0" presId="urn:microsoft.com/office/officeart/2018/2/layout/IconVerticalSolidList"/>
+    <dgm:cxn modelId="{D1DE7919-F584-4728-8222-4E7E70951D7D}" type="presParOf" srcId="{B44BACD7-5A33-4BFC-BD0C-C2B404BB24A1}" destId="{2143AF6D-F495-4636-B70C-348640742C2A}" srcOrd="2" destOrd="0" presId="urn:microsoft.com/office/officeart/2018/2/layout/IconVerticalSolidList"/>
+    <dgm:cxn modelId="{9D3214DD-E18E-48DD-BD14-39480D4D00B4}" type="presParOf" srcId="{B44BACD7-5A33-4BFC-BD0C-C2B404BB24A1}" destId="{9660B707-9E4A-4AB4-A17F-C27ED314F522}" srcOrd="3" destOrd="0" presId="urn:microsoft.com/office/officeart/2018/2/layout/IconVerticalSolidList"/>
+  </dgm:cxnLst>
+  <dgm:bg/>
+  <dgm:whole/>
+  <dgm:extLst>
+    <a:ext uri="http://schemas.microsoft.com/office/drawing/2008/diagram">
+      <dsp:dataModelExt xmlns:dsp="http://schemas.microsoft.com/office/drawing/2008/diagram" relId="rId7" minVer="http://schemas.openxmlformats.org/drawingml/2006/diagram"/>
+    </a:ext>
+  </dgm:extLst>
+</dgm:dataModel>
+</file>
+
+<file path=ppt/diagrams/drawing1.xml><?xml version="1.0" encoding="utf-8"?>
+<dsp:drawing xmlns:dgm="http://schemas.openxmlformats.org/drawingml/2006/diagram" xmlns:dsp="http://schemas.microsoft.com/office/drawing/2008/diagram" xmlns:a="http://schemas.openxmlformats.org/drawingml/2006/main">
+  <dsp:spTree>
+    <dsp:nvGrpSpPr>
+      <dsp:cNvPr id="0" name=""/>
+      <dsp:cNvGrpSpPr/>
+    </dsp:nvGrpSpPr>
+    <dsp:grpSpPr/>
+    <dsp:sp modelId="{6209FA50-2E4A-4EBB-93D1-FD1C9B86FFA9}">
+      <dsp:nvSpPr>
+        <dsp:cNvPr id="0" name=""/>
+        <dsp:cNvSpPr/>
+      </dsp:nvSpPr>
+      <dsp:spPr>
+        <a:xfrm>
+          <a:off x="0" y="382"/>
+          <a:ext cx="11067288" cy="894387"/>
+        </a:xfrm>
+        <a:prstGeom prst="roundRect">
+          <a:avLst>
+            <a:gd name="adj" fmla="val 10000"/>
+          </a:avLst>
+        </a:prstGeom>
+        <a:solidFill>
+          <a:schemeClr val="accent1">
+            <a:tint val="40000"/>
+            <a:hueOff val="0"/>
+            <a:satOff val="0"/>
+            <a:lumOff val="0"/>
+            <a:alphaOff val="0"/>
+          </a:schemeClr>
+        </a:solidFill>
+        <a:ln>
+          <a:noFill/>
+        </a:ln>
+        <a:effectLst/>
+      </dsp:spPr>
+      <dsp:style>
+        <a:lnRef idx="0">
+          <a:scrgbClr r="0" g="0" b="0"/>
+        </a:lnRef>
+        <a:fillRef idx="1">
+          <a:scrgbClr r="0" g="0" b="0"/>
+        </a:fillRef>
+        <a:effectRef idx="0">
+          <a:scrgbClr r="0" g="0" b="0"/>
+        </a:effectRef>
+        <a:fontRef idx="minor"/>
+      </dsp:style>
+    </dsp:sp>
+    <dsp:sp modelId="{38EA3626-45E4-4E85-A212-06E43AAEC79F}">
+      <dsp:nvSpPr>
+        <dsp:cNvPr id="0" name=""/>
+        <dsp:cNvSpPr/>
+      </dsp:nvSpPr>
+      <dsp:spPr>
+        <a:xfrm>
+          <a:off x="270552" y="201619"/>
+          <a:ext cx="491913" cy="491913"/>
+        </a:xfrm>
+        <a:prstGeom prst="rect">
+          <a:avLst/>
+        </a:prstGeom>
+        <a:blipFill>
+          <a:blip xmlns:r="http://schemas.openxmlformats.org/officeDocument/2006/relationships">
+            <a:extLst>
+              <a:ext uri="{28A0092B-C50C-407E-A947-70E740481C1C}">
+                <a14:useLocalDpi xmlns:a14="http://schemas.microsoft.com/office/drawing/2010/main" val="0"/>
+              </a:ext>
+              <a:ext uri="{96DAC541-7B7A-43D3-8B79-37D633B846F1}">
+                <asvg:svgBlip xmlns:asvg="http://schemas.microsoft.com/office/drawing/2016/SVG/main" r:embed="rId1"/>
+              </a:ext>
+            </a:extLst>
+          </a:blip>
+          <a:stretch>
+            <a:fillRect/>
+          </a:stretch>
+        </a:blipFill>
+        <a:ln w="19050" cap="flat" cmpd="sng" algn="ctr">
+          <a:solidFill>
+            <a:schemeClr val="lt1">
+              <a:hueOff val="0"/>
+              <a:satOff val="0"/>
+              <a:lumOff val="0"/>
+              <a:alphaOff val="0"/>
+            </a:schemeClr>
+          </a:solidFill>
+          <a:prstDash val="solid"/>
+          <a:miter lim="800000"/>
+        </a:ln>
+        <a:effectLst/>
+      </dsp:spPr>
+      <dsp:style>
+        <a:lnRef idx="2">
+          <a:scrgbClr r="0" g="0" b="0"/>
+        </a:lnRef>
+        <a:fillRef idx="1">
+          <a:scrgbClr r="0" g="0" b="0"/>
+        </a:fillRef>
+        <a:effectRef idx="0">
+          <a:scrgbClr r="0" g="0" b="0"/>
+        </a:effectRef>
+        <a:fontRef idx="minor">
+          <a:schemeClr val="lt1"/>
+        </a:fontRef>
+      </dsp:style>
+    </dsp:sp>
+    <dsp:sp modelId="{2C56B0F7-8790-4F16-8FC7-0BA5426B67FA}">
+      <dsp:nvSpPr>
+        <dsp:cNvPr id="0" name=""/>
+        <dsp:cNvSpPr/>
+      </dsp:nvSpPr>
+      <dsp:spPr>
+        <a:xfrm>
+          <a:off x="1033017" y="382"/>
+          <a:ext cx="10034270" cy="894387"/>
+        </a:xfrm>
+        <a:prstGeom prst="rect">
+          <a:avLst/>
+        </a:prstGeom>
+        <a:noFill/>
+        <a:ln>
+          <a:noFill/>
+        </a:ln>
+        <a:effectLst/>
+      </dsp:spPr>
+      <dsp:style>
+        <a:lnRef idx="0">
+          <a:scrgbClr r="0" g="0" b="0"/>
+        </a:lnRef>
+        <a:fillRef idx="0">
+          <a:scrgbClr r="0" g="0" b="0"/>
+        </a:fillRef>
+        <a:effectRef idx="0">
+          <a:scrgbClr r="0" g="0" b="0"/>
+        </a:effectRef>
+        <a:fontRef idx="minor"/>
+      </dsp:style>
+      <dsp:txBody>
+        <a:bodyPr spcFirstLastPara="0" vert="horz" wrap="square" lIns="94656" tIns="94656" rIns="94656" bIns="94656" numCol="1" spcCol="1270" anchor="ctr" anchorCtr="0">
+          <a:noAutofit/>
+        </a:bodyPr>
+        <a:lstStyle/>
+        <a:p>
+          <a:pPr marL="0" lvl="0" indent="0" algn="l" defTabSz="1066800">
+            <a:lnSpc>
+              <a:spcPct val="100000"/>
+            </a:lnSpc>
+            <a:spcBef>
+              <a:spcPct val="0"/>
+            </a:spcBef>
+            <a:spcAft>
+              <a:spcPct val="35000"/>
+            </a:spcAft>
+            <a:buNone/>
+          </a:pPr>
+          <a:r>
+            <a:rPr lang="es-ES" sz="2400" kern="1200"/>
+            <a:t>Ámbito financiero particularidades propias, FinBERT o BloombergGPT</a:t>
+          </a:r>
+          <a:endParaRPr lang="en-US" sz="2400" kern="1200"/>
+        </a:p>
+      </dsp:txBody>
+      <dsp:txXfrm>
+        <a:off x="1033017" y="382"/>
+        <a:ext cx="10034270" cy="894387"/>
+      </dsp:txXfrm>
+    </dsp:sp>
+    <dsp:sp modelId="{14DCB071-223E-4CB2-AABA-B86298341860}">
+      <dsp:nvSpPr>
+        <dsp:cNvPr id="0" name=""/>
+        <dsp:cNvSpPr/>
+      </dsp:nvSpPr>
+      <dsp:spPr>
+        <a:xfrm>
+          <a:off x="0" y="1118367"/>
+          <a:ext cx="11067288" cy="894387"/>
+        </a:xfrm>
+        <a:prstGeom prst="roundRect">
+          <a:avLst>
+            <a:gd name="adj" fmla="val 10000"/>
+          </a:avLst>
+        </a:prstGeom>
+        <a:solidFill>
+          <a:schemeClr val="accent1">
+            <a:tint val="40000"/>
+            <a:hueOff val="0"/>
+            <a:satOff val="0"/>
+            <a:lumOff val="0"/>
+            <a:alphaOff val="0"/>
+          </a:schemeClr>
+        </a:solidFill>
+        <a:ln>
+          <a:noFill/>
+        </a:ln>
+        <a:effectLst/>
+      </dsp:spPr>
+      <dsp:style>
+        <a:lnRef idx="0">
+          <a:scrgbClr r="0" g="0" b="0"/>
+        </a:lnRef>
+        <a:fillRef idx="1">
+          <a:scrgbClr r="0" g="0" b="0"/>
+        </a:fillRef>
+        <a:effectRef idx="0">
+          <a:scrgbClr r="0" g="0" b="0"/>
+        </a:effectRef>
+        <a:fontRef idx="minor"/>
+      </dsp:style>
+    </dsp:sp>
+    <dsp:sp modelId="{095D5098-B5FB-4E88-8168-4CF30955674C}">
+      <dsp:nvSpPr>
+        <dsp:cNvPr id="0" name=""/>
+        <dsp:cNvSpPr/>
+      </dsp:nvSpPr>
+      <dsp:spPr>
+        <a:xfrm>
+          <a:off x="270552" y="1319604"/>
+          <a:ext cx="491913" cy="491913"/>
+        </a:xfrm>
+        <a:prstGeom prst="rect">
+          <a:avLst/>
+        </a:prstGeom>
+        <a:blipFill>
+          <a:blip xmlns:r="http://schemas.openxmlformats.org/officeDocument/2006/relationships">
+            <a:extLst>
+              <a:ext uri="{28A0092B-C50C-407E-A947-70E740481C1C}">
+                <a14:useLocalDpi xmlns:a14="http://schemas.microsoft.com/office/drawing/2010/main" val="0"/>
+              </a:ext>
+              <a:ext uri="{96DAC541-7B7A-43D3-8B79-37D633B846F1}">
+                <asvg:svgBlip xmlns:asvg="http://schemas.microsoft.com/office/drawing/2016/SVG/main" r:embed="rId2"/>
+              </a:ext>
+            </a:extLst>
+          </a:blip>
+          <a:stretch>
+            <a:fillRect/>
+          </a:stretch>
+        </a:blipFill>
+        <a:ln w="19050" cap="flat" cmpd="sng" algn="ctr">
+          <a:solidFill>
+            <a:schemeClr val="lt1">
+              <a:hueOff val="0"/>
+              <a:satOff val="0"/>
+              <a:lumOff val="0"/>
+              <a:alphaOff val="0"/>
+            </a:schemeClr>
+          </a:solidFill>
+          <a:prstDash val="solid"/>
+          <a:miter lim="800000"/>
+        </a:ln>
+        <a:effectLst/>
+      </dsp:spPr>
+      <dsp:style>
+        <a:lnRef idx="2">
+          <a:scrgbClr r="0" g="0" b="0"/>
+        </a:lnRef>
+        <a:fillRef idx="1">
+          <a:scrgbClr r="0" g="0" b="0"/>
+        </a:fillRef>
+        <a:effectRef idx="0">
+          <a:scrgbClr r="0" g="0" b="0"/>
+        </a:effectRef>
+        <a:fontRef idx="minor">
+          <a:schemeClr val="lt1"/>
+        </a:fontRef>
+      </dsp:style>
+    </dsp:sp>
+    <dsp:sp modelId="{85C21F44-41CE-47D9-BABA-06058595905F}">
+      <dsp:nvSpPr>
+        <dsp:cNvPr id="0" name=""/>
+        <dsp:cNvSpPr/>
+      </dsp:nvSpPr>
+      <dsp:spPr>
+        <a:xfrm>
+          <a:off x="1033017" y="1118367"/>
+          <a:ext cx="10034270" cy="894387"/>
+        </a:xfrm>
+        <a:prstGeom prst="rect">
+          <a:avLst/>
+        </a:prstGeom>
+        <a:noFill/>
+        <a:ln>
+          <a:noFill/>
+        </a:ln>
+        <a:effectLst/>
+      </dsp:spPr>
+      <dsp:style>
+        <a:lnRef idx="0">
+          <a:scrgbClr r="0" g="0" b="0"/>
+        </a:lnRef>
+        <a:fillRef idx="0">
+          <a:scrgbClr r="0" g="0" b="0"/>
+        </a:fillRef>
+        <a:effectRef idx="0">
+          <a:scrgbClr r="0" g="0" b="0"/>
+        </a:effectRef>
+        <a:fontRef idx="minor"/>
+      </dsp:style>
+      <dsp:txBody>
+        <a:bodyPr spcFirstLastPara="0" vert="horz" wrap="square" lIns="94656" tIns="94656" rIns="94656" bIns="94656" numCol="1" spcCol="1270" anchor="ctr" anchorCtr="0">
+          <a:noAutofit/>
+        </a:bodyPr>
+        <a:lstStyle/>
+        <a:p>
+          <a:pPr marL="0" lvl="0" indent="0" algn="l" defTabSz="1066800">
+            <a:lnSpc>
+              <a:spcPct val="100000"/>
+            </a:lnSpc>
+            <a:spcBef>
+              <a:spcPct val="0"/>
+            </a:spcBef>
+            <a:spcAft>
+              <a:spcPct val="35000"/>
+            </a:spcAft>
+            <a:buNone/>
+          </a:pPr>
+          <a:r>
+            <a:rPr lang="es-ES" sz="2400" kern="1200"/>
+            <a:t>Arquitecturas con agentes: separar tareas y combinar modelos</a:t>
+          </a:r>
+          <a:endParaRPr lang="en-US" sz="2400" kern="1200"/>
+        </a:p>
+      </dsp:txBody>
+      <dsp:txXfrm>
+        <a:off x="1033017" y="1118367"/>
+        <a:ext cx="10034270" cy="894387"/>
+      </dsp:txXfrm>
+    </dsp:sp>
+    <dsp:sp modelId="{88547637-DC38-4F9A-A948-CCD737C6F5BF}">
+      <dsp:nvSpPr>
+        <dsp:cNvPr id="0" name=""/>
+        <dsp:cNvSpPr/>
+      </dsp:nvSpPr>
+      <dsp:spPr>
+        <a:xfrm>
+          <a:off x="0" y="2236351"/>
+          <a:ext cx="11067288" cy="894387"/>
+        </a:xfrm>
+        <a:prstGeom prst="roundRect">
+          <a:avLst>
+            <a:gd name="adj" fmla="val 10000"/>
+          </a:avLst>
+        </a:prstGeom>
+        <a:solidFill>
+          <a:schemeClr val="accent1">
+            <a:tint val="40000"/>
+            <a:hueOff val="0"/>
+            <a:satOff val="0"/>
+            <a:lumOff val="0"/>
+            <a:alphaOff val="0"/>
+          </a:schemeClr>
+        </a:solidFill>
+        <a:ln>
+          <a:noFill/>
+        </a:ln>
+        <a:effectLst/>
+      </dsp:spPr>
+      <dsp:style>
+        <a:lnRef idx="0">
+          <a:scrgbClr r="0" g="0" b="0"/>
+        </a:lnRef>
+        <a:fillRef idx="1">
+          <a:scrgbClr r="0" g="0" b="0"/>
+        </a:fillRef>
+        <a:effectRef idx="0">
+          <a:scrgbClr r="0" g="0" b="0"/>
+        </a:effectRef>
+        <a:fontRef idx="minor"/>
+      </dsp:style>
+    </dsp:sp>
+    <dsp:sp modelId="{C4CA0B51-D89C-4B46-94D4-89D456D849EE}">
+      <dsp:nvSpPr>
+        <dsp:cNvPr id="0" name=""/>
+        <dsp:cNvSpPr/>
+      </dsp:nvSpPr>
+      <dsp:spPr>
+        <a:xfrm>
+          <a:off x="270552" y="2437589"/>
+          <a:ext cx="491913" cy="491913"/>
+        </a:xfrm>
+        <a:prstGeom prst="rect">
+          <a:avLst/>
+        </a:prstGeom>
+        <a:blipFill>
+          <a:blip xmlns:r="http://schemas.openxmlformats.org/officeDocument/2006/relationships">
+            <a:extLst>
+              <a:ext uri="{28A0092B-C50C-407E-A947-70E740481C1C}">
+                <a14:useLocalDpi xmlns:a14="http://schemas.microsoft.com/office/drawing/2010/main" val="0"/>
+              </a:ext>
+              <a:ext uri="{96DAC541-7B7A-43D3-8B79-37D633B846F1}">
+                <asvg:svgBlip xmlns:asvg="http://schemas.microsoft.com/office/drawing/2016/SVG/main" r:embed="rId3"/>
+              </a:ext>
+            </a:extLst>
+          </a:blip>
+          <a:stretch>
+            <a:fillRect/>
+          </a:stretch>
+        </a:blipFill>
+        <a:ln w="19050" cap="flat" cmpd="sng" algn="ctr">
+          <a:solidFill>
+            <a:schemeClr val="lt1">
+              <a:hueOff val="0"/>
+              <a:satOff val="0"/>
+              <a:lumOff val="0"/>
+              <a:alphaOff val="0"/>
+            </a:schemeClr>
+          </a:solidFill>
+          <a:prstDash val="solid"/>
+          <a:miter lim="800000"/>
+        </a:ln>
+        <a:effectLst/>
+      </dsp:spPr>
+      <dsp:style>
+        <a:lnRef idx="2">
+          <a:scrgbClr r="0" g="0" b="0"/>
+        </a:lnRef>
+        <a:fillRef idx="1">
+          <a:scrgbClr r="0" g="0" b="0"/>
+        </a:fillRef>
+        <a:effectRef idx="0">
+          <a:scrgbClr r="0" g="0" b="0"/>
+        </a:effectRef>
+        <a:fontRef idx="minor">
+          <a:schemeClr val="lt1"/>
+        </a:fontRef>
+      </dsp:style>
+    </dsp:sp>
+    <dsp:sp modelId="{B6A8BB1C-7DCE-4985-91DB-CA398B3E0FB3}">
+      <dsp:nvSpPr>
+        <dsp:cNvPr id="0" name=""/>
+        <dsp:cNvSpPr/>
+      </dsp:nvSpPr>
+      <dsp:spPr>
+        <a:xfrm>
+          <a:off x="1033017" y="2236351"/>
+          <a:ext cx="10034270" cy="894387"/>
+        </a:xfrm>
+        <a:prstGeom prst="rect">
+          <a:avLst/>
+        </a:prstGeom>
+        <a:noFill/>
+        <a:ln>
+          <a:noFill/>
+        </a:ln>
+        <a:effectLst/>
+      </dsp:spPr>
+      <dsp:style>
+        <a:lnRef idx="0">
+          <a:scrgbClr r="0" g="0" b="0"/>
+        </a:lnRef>
+        <a:fillRef idx="0">
+          <a:scrgbClr r="0" g="0" b="0"/>
+        </a:fillRef>
+        <a:effectRef idx="0">
+          <a:scrgbClr r="0" g="0" b="0"/>
+        </a:effectRef>
+        <a:fontRef idx="minor"/>
+      </dsp:style>
+      <dsp:txBody>
+        <a:bodyPr spcFirstLastPara="0" vert="horz" wrap="square" lIns="94656" tIns="94656" rIns="94656" bIns="94656" numCol="1" spcCol="1270" anchor="ctr" anchorCtr="0">
+          <a:noAutofit/>
+        </a:bodyPr>
+        <a:lstStyle/>
+        <a:p>
+          <a:pPr marL="0" lvl="0" indent="0" algn="l" defTabSz="1066800">
+            <a:lnSpc>
+              <a:spcPct val="100000"/>
+            </a:lnSpc>
+            <a:spcBef>
+              <a:spcPct val="0"/>
+            </a:spcBef>
+            <a:spcAft>
+              <a:spcPct val="35000"/>
+            </a:spcAft>
+            <a:buNone/>
+          </a:pPr>
+          <a:r>
+            <a:rPr lang="es-ES" sz="2400" kern="1200"/>
+            <a:t>Generación de código permite apoyar respuesta en cálculos observables</a:t>
+          </a:r>
+          <a:endParaRPr lang="en-US" sz="2400" kern="1200"/>
+        </a:p>
+      </dsp:txBody>
+      <dsp:txXfrm>
+        <a:off x="1033017" y="2236351"/>
+        <a:ext cx="10034270" cy="894387"/>
+      </dsp:txXfrm>
+    </dsp:sp>
+  </dsp:spTree>
+</dsp:drawing>
+</file>
+
+<file path=ppt/diagrams/drawing2.xml><?xml version="1.0" encoding="utf-8"?>
+<dsp:drawing xmlns:dgm="http://schemas.openxmlformats.org/drawingml/2006/diagram" xmlns:dsp="http://schemas.microsoft.com/office/drawing/2008/diagram" xmlns:a="http://schemas.openxmlformats.org/drawingml/2006/main">
+  <dsp:spTree>
+    <dsp:nvGrpSpPr>
+      <dsp:cNvPr id="0" name=""/>
+      <dsp:cNvGrpSpPr/>
+    </dsp:nvGrpSpPr>
+    <dsp:grpSpPr/>
+    <dsp:sp modelId="{14E6579C-3E19-41AE-866B-753BC0F62D93}">
+      <dsp:nvSpPr>
+        <dsp:cNvPr id="0" name=""/>
+        <dsp:cNvSpPr/>
+      </dsp:nvSpPr>
+      <dsp:spPr>
+        <a:xfrm>
+          <a:off x="0" y="420"/>
+          <a:ext cx="11131296" cy="579035"/>
+        </a:xfrm>
+        <a:prstGeom prst="roundRect">
+          <a:avLst>
+            <a:gd name="adj" fmla="val 10000"/>
+          </a:avLst>
+        </a:prstGeom>
+        <a:solidFill>
+          <a:schemeClr val="accent1">
+            <a:tint val="40000"/>
+            <a:hueOff val="0"/>
+            <a:satOff val="0"/>
+            <a:lumOff val="0"/>
+            <a:alphaOff val="0"/>
+          </a:schemeClr>
+        </a:solidFill>
+        <a:ln>
+          <a:noFill/>
+        </a:ln>
+        <a:effectLst/>
+      </dsp:spPr>
+      <dsp:style>
+        <a:lnRef idx="0">
+          <a:scrgbClr r="0" g="0" b="0"/>
+        </a:lnRef>
+        <a:fillRef idx="1">
+          <a:scrgbClr r="0" g="0" b="0"/>
+        </a:fillRef>
+        <a:effectRef idx="0">
+          <a:scrgbClr r="0" g="0" b="0"/>
+        </a:effectRef>
+        <a:fontRef idx="minor"/>
+      </dsp:style>
+    </dsp:sp>
+    <dsp:sp modelId="{C8F68A96-47C1-4CFD-8292-1258E3250CAA}">
+      <dsp:nvSpPr>
+        <dsp:cNvPr id="0" name=""/>
+        <dsp:cNvSpPr/>
+      </dsp:nvSpPr>
+      <dsp:spPr>
+        <a:xfrm>
+          <a:off x="175158" y="130703"/>
+          <a:ext cx="318469" cy="318469"/>
+        </a:xfrm>
+        <a:prstGeom prst="rect">
+          <a:avLst/>
+        </a:prstGeom>
+        <a:blipFill>
+          <a:blip xmlns:r="http://schemas.openxmlformats.org/officeDocument/2006/relationships">
+            <a:extLst>
+              <a:ext uri="{28A0092B-C50C-407E-A947-70E740481C1C}">
+                <a14:useLocalDpi xmlns:a14="http://schemas.microsoft.com/office/drawing/2010/main" val="0"/>
+              </a:ext>
+              <a:ext uri="{96DAC541-7B7A-43D3-8B79-37D633B846F1}">
+                <asvg:svgBlip xmlns:asvg="http://schemas.microsoft.com/office/drawing/2016/SVG/main" r:embed="rId1"/>
+              </a:ext>
+            </a:extLst>
+          </a:blip>
+          <a:stretch>
+            <a:fillRect/>
+          </a:stretch>
+        </a:blipFill>
+        <a:ln w="19050" cap="flat" cmpd="sng" algn="ctr">
+          <a:solidFill>
+            <a:schemeClr val="lt1">
+              <a:hueOff val="0"/>
+              <a:satOff val="0"/>
+              <a:lumOff val="0"/>
+              <a:alphaOff val="0"/>
+            </a:schemeClr>
+          </a:solidFill>
+          <a:prstDash val="solid"/>
+          <a:miter lim="800000"/>
+        </a:ln>
+        <a:effectLst/>
+      </dsp:spPr>
+      <dsp:style>
+        <a:lnRef idx="2">
+          <a:scrgbClr r="0" g="0" b="0"/>
+        </a:lnRef>
+        <a:fillRef idx="1">
+          <a:scrgbClr r="0" g="0" b="0"/>
+        </a:fillRef>
+        <a:effectRef idx="0">
+          <a:scrgbClr r="0" g="0" b="0"/>
+        </a:effectRef>
+        <a:fontRef idx="minor">
+          <a:schemeClr val="lt1"/>
+        </a:fontRef>
+      </dsp:style>
+    </dsp:sp>
+    <dsp:sp modelId="{AC04EAD7-4EBC-4F3A-8F0F-DDB354AEDD2B}">
+      <dsp:nvSpPr>
+        <dsp:cNvPr id="0" name=""/>
+        <dsp:cNvSpPr/>
+      </dsp:nvSpPr>
+      <dsp:spPr>
+        <a:xfrm>
+          <a:off x="668786" y="420"/>
+          <a:ext cx="10462509" cy="579035"/>
+        </a:xfrm>
+        <a:prstGeom prst="rect">
+          <a:avLst/>
+        </a:prstGeom>
+        <a:noFill/>
+        <a:ln>
+          <a:noFill/>
+        </a:ln>
+        <a:effectLst/>
+      </dsp:spPr>
+      <dsp:style>
+        <a:lnRef idx="0">
+          <a:scrgbClr r="0" g="0" b="0"/>
+        </a:lnRef>
+        <a:fillRef idx="0">
+          <a:scrgbClr r="0" g="0" b="0"/>
+        </a:fillRef>
+        <a:effectRef idx="0">
+          <a:scrgbClr r="0" g="0" b="0"/>
+        </a:effectRef>
+        <a:fontRef idx="minor"/>
+      </dsp:style>
+      <dsp:txBody>
+        <a:bodyPr spcFirstLastPara="0" vert="horz" wrap="square" lIns="61281" tIns="61281" rIns="61281" bIns="61281" numCol="1" spcCol="1270" anchor="ctr" anchorCtr="0">
+          <a:noAutofit/>
+        </a:bodyPr>
+        <a:lstStyle/>
+        <a:p>
+          <a:pPr marL="0" lvl="0" indent="0" algn="l" defTabSz="711200">
+            <a:lnSpc>
+              <a:spcPct val="100000"/>
+            </a:lnSpc>
+            <a:spcBef>
+              <a:spcPct val="0"/>
+            </a:spcBef>
+            <a:spcAft>
+              <a:spcPct val="35000"/>
+            </a:spcAft>
+            <a:buNone/>
+          </a:pPr>
+          <a:r>
+            <a:rPr lang="es-ES" sz="1600" kern="1200" dirty="0"/>
+            <a:t>1. Consulta</a:t>
+          </a:r>
+          <a:endParaRPr lang="en-US" sz="1600" kern="1200" dirty="0"/>
+        </a:p>
+      </dsp:txBody>
+      <dsp:txXfrm>
+        <a:off x="668786" y="420"/>
+        <a:ext cx="10462509" cy="579035"/>
+      </dsp:txXfrm>
+    </dsp:sp>
+    <dsp:sp modelId="{756F0C1B-8BB0-418C-AED3-D3ABC9F21A57}">
+      <dsp:nvSpPr>
+        <dsp:cNvPr id="0" name=""/>
+        <dsp:cNvSpPr/>
+      </dsp:nvSpPr>
+      <dsp:spPr>
+        <a:xfrm>
+          <a:off x="0" y="724215"/>
+          <a:ext cx="11131296" cy="579035"/>
+        </a:xfrm>
+        <a:prstGeom prst="roundRect">
+          <a:avLst>
+            <a:gd name="adj" fmla="val 10000"/>
+          </a:avLst>
+        </a:prstGeom>
+        <a:solidFill>
+          <a:schemeClr val="accent1">
+            <a:tint val="40000"/>
+            <a:hueOff val="0"/>
+            <a:satOff val="0"/>
+            <a:lumOff val="0"/>
+            <a:alphaOff val="0"/>
+          </a:schemeClr>
+        </a:solidFill>
+        <a:ln>
+          <a:noFill/>
+        </a:ln>
+        <a:effectLst/>
+      </dsp:spPr>
+      <dsp:style>
+        <a:lnRef idx="0">
+          <a:scrgbClr r="0" g="0" b="0"/>
+        </a:lnRef>
+        <a:fillRef idx="1">
+          <a:scrgbClr r="0" g="0" b="0"/>
+        </a:fillRef>
+        <a:effectRef idx="0">
+          <a:scrgbClr r="0" g="0" b="0"/>
+        </a:effectRef>
+        <a:fontRef idx="minor"/>
+      </dsp:style>
+    </dsp:sp>
+    <dsp:sp modelId="{F78D7037-BAA7-4CF6-938F-4EF2D9774758}">
+      <dsp:nvSpPr>
+        <dsp:cNvPr id="0" name=""/>
+        <dsp:cNvSpPr/>
+      </dsp:nvSpPr>
+      <dsp:spPr>
+        <a:xfrm>
+          <a:off x="175158" y="854498"/>
+          <a:ext cx="318469" cy="318469"/>
+        </a:xfrm>
+        <a:prstGeom prst="rect">
+          <a:avLst/>
+        </a:prstGeom>
+        <a:blipFill>
+          <a:blip xmlns:r="http://schemas.openxmlformats.org/officeDocument/2006/relationships">
+            <a:extLst>
+              <a:ext uri="{28A0092B-C50C-407E-A947-70E740481C1C}">
+                <a14:useLocalDpi xmlns:a14="http://schemas.microsoft.com/office/drawing/2010/main" val="0"/>
+              </a:ext>
+              <a:ext uri="{96DAC541-7B7A-43D3-8B79-37D633B846F1}">
+                <asvg:svgBlip xmlns:asvg="http://schemas.microsoft.com/office/drawing/2016/SVG/main" r:embed="rId2"/>
+              </a:ext>
+            </a:extLst>
+          </a:blip>
+          <a:stretch>
+            <a:fillRect/>
+          </a:stretch>
+        </a:blipFill>
+        <a:ln w="19050" cap="flat" cmpd="sng" algn="ctr">
+          <a:solidFill>
+            <a:schemeClr val="lt1">
+              <a:hueOff val="0"/>
+              <a:satOff val="0"/>
+              <a:lumOff val="0"/>
+              <a:alphaOff val="0"/>
+            </a:schemeClr>
+          </a:solidFill>
+          <a:prstDash val="solid"/>
+          <a:miter lim="800000"/>
+        </a:ln>
+        <a:effectLst/>
+      </dsp:spPr>
+      <dsp:style>
+        <a:lnRef idx="2">
+          <a:scrgbClr r="0" g="0" b="0"/>
+        </a:lnRef>
+        <a:fillRef idx="1">
+          <a:scrgbClr r="0" g="0" b="0"/>
+        </a:fillRef>
+        <a:effectRef idx="0">
+          <a:scrgbClr r="0" g="0" b="0"/>
+        </a:effectRef>
+        <a:fontRef idx="minor">
+          <a:schemeClr val="lt1"/>
+        </a:fontRef>
+      </dsp:style>
+    </dsp:sp>
+    <dsp:sp modelId="{C5DAECE9-2613-4838-921E-4164BF1E1EFE}">
+      <dsp:nvSpPr>
+        <dsp:cNvPr id="0" name=""/>
+        <dsp:cNvSpPr/>
+      </dsp:nvSpPr>
+      <dsp:spPr>
+        <a:xfrm>
+          <a:off x="668786" y="724215"/>
+          <a:ext cx="10462509" cy="579035"/>
+        </a:xfrm>
+        <a:prstGeom prst="rect">
+          <a:avLst/>
+        </a:prstGeom>
+        <a:noFill/>
+        <a:ln>
+          <a:noFill/>
+        </a:ln>
+        <a:effectLst/>
+      </dsp:spPr>
+      <dsp:style>
+        <a:lnRef idx="0">
+          <a:scrgbClr r="0" g="0" b="0"/>
+        </a:lnRef>
+        <a:fillRef idx="0">
+          <a:scrgbClr r="0" g="0" b="0"/>
+        </a:fillRef>
+        <a:effectRef idx="0">
+          <a:scrgbClr r="0" g="0" b="0"/>
+        </a:effectRef>
+        <a:fontRef idx="minor"/>
+      </dsp:style>
+      <dsp:txBody>
+        <a:bodyPr spcFirstLastPara="0" vert="horz" wrap="square" lIns="61281" tIns="61281" rIns="61281" bIns="61281" numCol="1" spcCol="1270" anchor="ctr" anchorCtr="0">
+          <a:noAutofit/>
+        </a:bodyPr>
+        <a:lstStyle/>
+        <a:p>
+          <a:pPr marL="0" lvl="0" indent="0" algn="l" defTabSz="711200">
+            <a:lnSpc>
+              <a:spcPct val="100000"/>
+            </a:lnSpc>
+            <a:spcBef>
+              <a:spcPct val="0"/>
+            </a:spcBef>
+            <a:spcAft>
+              <a:spcPct val="35000"/>
+            </a:spcAft>
+            <a:buNone/>
+          </a:pPr>
+          <a:r>
+            <a:rPr lang="es-ES" sz="1600" kern="1200" dirty="0"/>
+            <a:t>2. Validación</a:t>
+          </a:r>
+          <a:endParaRPr lang="en-US" sz="1600" kern="1200" dirty="0"/>
+        </a:p>
+      </dsp:txBody>
+      <dsp:txXfrm>
+        <a:off x="668786" y="724215"/>
+        <a:ext cx="10462509" cy="579035"/>
+      </dsp:txXfrm>
+    </dsp:sp>
+    <dsp:sp modelId="{5BC95C9D-44D5-46DA-8F61-3F588CA87C51}">
+      <dsp:nvSpPr>
+        <dsp:cNvPr id="0" name=""/>
+        <dsp:cNvSpPr/>
+      </dsp:nvSpPr>
+      <dsp:spPr>
+        <a:xfrm>
+          <a:off x="0" y="1448010"/>
+          <a:ext cx="11131296" cy="579035"/>
+        </a:xfrm>
+        <a:prstGeom prst="roundRect">
+          <a:avLst>
+            <a:gd name="adj" fmla="val 10000"/>
+          </a:avLst>
+        </a:prstGeom>
+        <a:solidFill>
+          <a:schemeClr val="accent1">
+            <a:tint val="40000"/>
+            <a:hueOff val="0"/>
+            <a:satOff val="0"/>
+            <a:lumOff val="0"/>
+            <a:alphaOff val="0"/>
+          </a:schemeClr>
+        </a:solidFill>
+        <a:ln>
+          <a:noFill/>
+        </a:ln>
+        <a:effectLst/>
+      </dsp:spPr>
+      <dsp:style>
+        <a:lnRef idx="0">
+          <a:scrgbClr r="0" g="0" b="0"/>
+        </a:lnRef>
+        <a:fillRef idx="1">
+          <a:scrgbClr r="0" g="0" b="0"/>
+        </a:fillRef>
+        <a:effectRef idx="0">
+          <a:scrgbClr r="0" g="0" b="0"/>
+        </a:effectRef>
+        <a:fontRef idx="minor"/>
+      </dsp:style>
+    </dsp:sp>
+    <dsp:sp modelId="{66E5ED8F-8360-4FDB-9634-0E1D5FE2F66B}">
+      <dsp:nvSpPr>
+        <dsp:cNvPr id="0" name=""/>
+        <dsp:cNvSpPr/>
+      </dsp:nvSpPr>
+      <dsp:spPr>
+        <a:xfrm>
+          <a:off x="175158" y="1578293"/>
+          <a:ext cx="318469" cy="318469"/>
+        </a:xfrm>
+        <a:prstGeom prst="rect">
+          <a:avLst/>
+        </a:prstGeom>
+        <a:blipFill>
+          <a:blip xmlns:r="http://schemas.openxmlformats.org/officeDocument/2006/relationships">
+            <a:extLst>
+              <a:ext uri="{28A0092B-C50C-407E-A947-70E740481C1C}">
+                <a14:useLocalDpi xmlns:a14="http://schemas.microsoft.com/office/drawing/2010/main" val="0"/>
+              </a:ext>
+              <a:ext uri="{96DAC541-7B7A-43D3-8B79-37D633B846F1}">
+                <asvg:svgBlip xmlns:asvg="http://schemas.microsoft.com/office/drawing/2016/SVG/main" r:embed="rId3"/>
+              </a:ext>
+            </a:extLst>
+          </a:blip>
+          <a:stretch>
+            <a:fillRect/>
+          </a:stretch>
+        </a:blipFill>
+        <a:ln w="19050" cap="flat" cmpd="sng" algn="ctr">
+          <a:solidFill>
+            <a:schemeClr val="lt1">
+              <a:hueOff val="0"/>
+              <a:satOff val="0"/>
+              <a:lumOff val="0"/>
+              <a:alphaOff val="0"/>
+            </a:schemeClr>
+          </a:solidFill>
+          <a:prstDash val="solid"/>
+          <a:miter lim="800000"/>
+        </a:ln>
+        <a:effectLst/>
+      </dsp:spPr>
+      <dsp:style>
+        <a:lnRef idx="2">
+          <a:scrgbClr r="0" g="0" b="0"/>
+        </a:lnRef>
+        <a:fillRef idx="1">
+          <a:scrgbClr r="0" g="0" b="0"/>
+        </a:fillRef>
+        <a:effectRef idx="0">
+          <a:scrgbClr r="0" g="0" b="0"/>
+        </a:effectRef>
+        <a:fontRef idx="minor">
+          <a:schemeClr val="lt1"/>
+        </a:fontRef>
+      </dsp:style>
+    </dsp:sp>
+    <dsp:sp modelId="{48C9CB7C-91B2-4126-9347-D5BC89ED2836}">
+      <dsp:nvSpPr>
+        <dsp:cNvPr id="0" name=""/>
+        <dsp:cNvSpPr/>
+      </dsp:nvSpPr>
+      <dsp:spPr>
+        <a:xfrm>
+          <a:off x="668786" y="1448010"/>
+          <a:ext cx="10462509" cy="579035"/>
+        </a:xfrm>
+        <a:prstGeom prst="rect">
+          <a:avLst/>
+        </a:prstGeom>
+        <a:noFill/>
+        <a:ln>
+          <a:noFill/>
+        </a:ln>
+        <a:effectLst/>
+      </dsp:spPr>
+      <dsp:style>
+        <a:lnRef idx="0">
+          <a:scrgbClr r="0" g="0" b="0"/>
+        </a:lnRef>
+        <a:fillRef idx="0">
+          <a:scrgbClr r="0" g="0" b="0"/>
+        </a:fillRef>
+        <a:effectRef idx="0">
+          <a:scrgbClr r="0" g="0" b="0"/>
+        </a:effectRef>
+        <a:fontRef idx="minor"/>
+      </dsp:style>
+      <dsp:txBody>
+        <a:bodyPr spcFirstLastPara="0" vert="horz" wrap="square" lIns="61281" tIns="61281" rIns="61281" bIns="61281" numCol="1" spcCol="1270" anchor="ctr" anchorCtr="0">
+          <a:noAutofit/>
+        </a:bodyPr>
+        <a:lstStyle/>
+        <a:p>
+          <a:pPr marL="0" lvl="0" indent="0" algn="l" defTabSz="711200">
+            <a:lnSpc>
+              <a:spcPct val="100000"/>
+            </a:lnSpc>
+            <a:spcBef>
+              <a:spcPct val="0"/>
+            </a:spcBef>
+            <a:spcAft>
+              <a:spcPct val="35000"/>
+            </a:spcAft>
+            <a:buNone/>
+          </a:pPr>
+          <a:r>
+            <a:rPr lang="es-ES" sz="1600" kern="1200"/>
+            <a:t>3. Resolucion de datos</a:t>
+          </a:r>
+          <a:endParaRPr lang="en-US" sz="1600" kern="1200"/>
+        </a:p>
+      </dsp:txBody>
+      <dsp:txXfrm>
+        <a:off x="668786" y="1448010"/>
+        <a:ext cx="10462509" cy="579035"/>
+      </dsp:txXfrm>
+    </dsp:sp>
+    <dsp:sp modelId="{237C8F08-8C0C-4449-B9F6-6E949D40C75A}">
+      <dsp:nvSpPr>
+        <dsp:cNvPr id="0" name=""/>
+        <dsp:cNvSpPr/>
+      </dsp:nvSpPr>
+      <dsp:spPr>
+        <a:xfrm>
+          <a:off x="0" y="2171805"/>
+          <a:ext cx="11131296" cy="579035"/>
+        </a:xfrm>
+        <a:prstGeom prst="roundRect">
+          <a:avLst>
+            <a:gd name="adj" fmla="val 10000"/>
+          </a:avLst>
+        </a:prstGeom>
+        <a:solidFill>
+          <a:schemeClr val="accent1">
+            <a:tint val="40000"/>
+            <a:hueOff val="0"/>
+            <a:satOff val="0"/>
+            <a:lumOff val="0"/>
+            <a:alphaOff val="0"/>
+          </a:schemeClr>
+        </a:solidFill>
+        <a:ln>
+          <a:noFill/>
+        </a:ln>
+        <a:effectLst/>
+      </dsp:spPr>
+      <dsp:style>
+        <a:lnRef idx="0">
+          <a:scrgbClr r="0" g="0" b="0"/>
+        </a:lnRef>
+        <a:fillRef idx="1">
+          <a:scrgbClr r="0" g="0" b="0"/>
+        </a:fillRef>
+        <a:effectRef idx="0">
+          <a:scrgbClr r="0" g="0" b="0"/>
+        </a:effectRef>
+        <a:fontRef idx="minor"/>
+      </dsp:style>
+    </dsp:sp>
+    <dsp:sp modelId="{A314EBC4-D7A8-4F77-9166-61284BD65D95}">
+      <dsp:nvSpPr>
+        <dsp:cNvPr id="0" name=""/>
+        <dsp:cNvSpPr/>
+      </dsp:nvSpPr>
+      <dsp:spPr>
+        <a:xfrm>
+          <a:off x="175158" y="2302088"/>
+          <a:ext cx="318469" cy="318469"/>
+        </a:xfrm>
+        <a:prstGeom prst="rect">
+          <a:avLst/>
+        </a:prstGeom>
+        <a:blipFill>
+          <a:blip xmlns:r="http://schemas.openxmlformats.org/officeDocument/2006/relationships">
+            <a:extLst>
+              <a:ext uri="{28A0092B-C50C-407E-A947-70E740481C1C}">
+                <a14:useLocalDpi xmlns:a14="http://schemas.microsoft.com/office/drawing/2010/main" val="0"/>
+              </a:ext>
+              <a:ext uri="{96DAC541-7B7A-43D3-8B79-37D633B846F1}">
+                <asvg:svgBlip xmlns:asvg="http://schemas.microsoft.com/office/drawing/2016/SVG/main" r:embed="rId4"/>
+              </a:ext>
+            </a:extLst>
+          </a:blip>
+          <a:stretch>
+            <a:fillRect/>
+          </a:stretch>
+        </a:blipFill>
+        <a:ln w="19050" cap="flat" cmpd="sng" algn="ctr">
+          <a:solidFill>
+            <a:schemeClr val="lt1">
+              <a:hueOff val="0"/>
+              <a:satOff val="0"/>
+              <a:lumOff val="0"/>
+              <a:alphaOff val="0"/>
+            </a:schemeClr>
+          </a:solidFill>
+          <a:prstDash val="solid"/>
+          <a:miter lim="800000"/>
+        </a:ln>
+        <a:effectLst/>
+      </dsp:spPr>
+      <dsp:style>
+        <a:lnRef idx="2">
+          <a:scrgbClr r="0" g="0" b="0"/>
+        </a:lnRef>
+        <a:fillRef idx="1">
+          <a:scrgbClr r="0" g="0" b="0"/>
+        </a:fillRef>
+        <a:effectRef idx="0">
+          <a:scrgbClr r="0" g="0" b="0"/>
+        </a:effectRef>
+        <a:fontRef idx="minor">
+          <a:schemeClr val="lt1"/>
+        </a:fontRef>
+      </dsp:style>
+    </dsp:sp>
+    <dsp:sp modelId="{49361EBA-B677-416C-9A05-006E21C6AA69}">
+      <dsp:nvSpPr>
+        <dsp:cNvPr id="0" name=""/>
+        <dsp:cNvSpPr/>
+      </dsp:nvSpPr>
+      <dsp:spPr>
+        <a:xfrm>
+          <a:off x="668786" y="2171805"/>
+          <a:ext cx="10462509" cy="579035"/>
+        </a:xfrm>
+        <a:prstGeom prst="rect">
+          <a:avLst/>
+        </a:prstGeom>
+        <a:noFill/>
+        <a:ln>
+          <a:noFill/>
+        </a:ln>
+        <a:effectLst/>
+      </dsp:spPr>
+      <dsp:style>
+        <a:lnRef idx="0">
+          <a:scrgbClr r="0" g="0" b="0"/>
+        </a:lnRef>
+        <a:fillRef idx="0">
+          <a:scrgbClr r="0" g="0" b="0"/>
+        </a:fillRef>
+        <a:effectRef idx="0">
+          <a:scrgbClr r="0" g="0" b="0"/>
+        </a:effectRef>
+        <a:fontRef idx="minor"/>
+      </dsp:style>
+      <dsp:txBody>
+        <a:bodyPr spcFirstLastPara="0" vert="horz" wrap="square" lIns="61281" tIns="61281" rIns="61281" bIns="61281" numCol="1" spcCol="1270" anchor="ctr" anchorCtr="0">
+          <a:noAutofit/>
+        </a:bodyPr>
+        <a:lstStyle/>
+        <a:p>
+          <a:pPr marL="0" lvl="0" indent="0" algn="l" defTabSz="711200">
+            <a:lnSpc>
+              <a:spcPct val="100000"/>
+            </a:lnSpc>
+            <a:spcBef>
+              <a:spcPct val="0"/>
+            </a:spcBef>
+            <a:spcAft>
+              <a:spcPct val="35000"/>
+            </a:spcAft>
+            <a:buNone/>
+          </a:pPr>
+          <a:r>
+            <a:rPr lang="es-ES" sz="1600" kern="1200"/>
+            <a:t>4. Planificacion analítica</a:t>
+          </a:r>
+          <a:endParaRPr lang="en-US" sz="1600" kern="1200"/>
+        </a:p>
+      </dsp:txBody>
+      <dsp:txXfrm>
+        <a:off x="668786" y="2171805"/>
+        <a:ext cx="10462509" cy="579035"/>
+      </dsp:txXfrm>
+    </dsp:sp>
+    <dsp:sp modelId="{7AF8E85C-E302-408E-9FD6-F8A5FDCAFF51}">
+      <dsp:nvSpPr>
+        <dsp:cNvPr id="0" name=""/>
+        <dsp:cNvSpPr/>
+      </dsp:nvSpPr>
+      <dsp:spPr>
+        <a:xfrm>
+          <a:off x="0" y="2895600"/>
+          <a:ext cx="11131296" cy="579035"/>
+        </a:xfrm>
+        <a:prstGeom prst="roundRect">
+          <a:avLst>
+            <a:gd name="adj" fmla="val 10000"/>
+          </a:avLst>
+        </a:prstGeom>
+        <a:solidFill>
+          <a:schemeClr val="accent1">
+            <a:tint val="40000"/>
+            <a:hueOff val="0"/>
+            <a:satOff val="0"/>
+            <a:lumOff val="0"/>
+            <a:alphaOff val="0"/>
+          </a:schemeClr>
+        </a:solidFill>
+        <a:ln>
+          <a:noFill/>
+        </a:ln>
+        <a:effectLst/>
+      </dsp:spPr>
+      <dsp:style>
+        <a:lnRef idx="0">
+          <a:scrgbClr r="0" g="0" b="0"/>
+        </a:lnRef>
+        <a:fillRef idx="1">
+          <a:scrgbClr r="0" g="0" b="0"/>
+        </a:fillRef>
+        <a:effectRef idx="0">
+          <a:scrgbClr r="0" g="0" b="0"/>
+        </a:effectRef>
+        <a:fontRef idx="minor"/>
+      </dsp:style>
+    </dsp:sp>
+    <dsp:sp modelId="{C4BF7FC4-A9CA-46A0-B226-DEA231F2348B}">
+      <dsp:nvSpPr>
+        <dsp:cNvPr id="0" name=""/>
+        <dsp:cNvSpPr/>
+      </dsp:nvSpPr>
+      <dsp:spPr>
+        <a:xfrm>
+          <a:off x="175158" y="3025883"/>
+          <a:ext cx="318469" cy="318469"/>
+        </a:xfrm>
+        <a:prstGeom prst="rect">
+          <a:avLst/>
+        </a:prstGeom>
+        <a:blipFill>
+          <a:blip xmlns:r="http://schemas.openxmlformats.org/officeDocument/2006/relationships">
+            <a:extLst>
+              <a:ext uri="{28A0092B-C50C-407E-A947-70E740481C1C}">
+                <a14:useLocalDpi xmlns:a14="http://schemas.microsoft.com/office/drawing/2010/main" val="0"/>
+              </a:ext>
+              <a:ext uri="{96DAC541-7B7A-43D3-8B79-37D633B846F1}">
+                <asvg:svgBlip xmlns:asvg="http://schemas.microsoft.com/office/drawing/2016/SVG/main" r:embed="rId5"/>
+              </a:ext>
+            </a:extLst>
+          </a:blip>
+          <a:stretch>
+            <a:fillRect/>
+          </a:stretch>
+        </a:blipFill>
+        <a:ln w="19050" cap="flat" cmpd="sng" algn="ctr">
+          <a:solidFill>
+            <a:schemeClr val="lt1">
+              <a:hueOff val="0"/>
+              <a:satOff val="0"/>
+              <a:lumOff val="0"/>
+              <a:alphaOff val="0"/>
+            </a:schemeClr>
+          </a:solidFill>
+          <a:prstDash val="solid"/>
+          <a:miter lim="800000"/>
+        </a:ln>
+        <a:effectLst/>
+      </dsp:spPr>
+      <dsp:style>
+        <a:lnRef idx="2">
+          <a:scrgbClr r="0" g="0" b="0"/>
+        </a:lnRef>
+        <a:fillRef idx="1">
+          <a:scrgbClr r="0" g="0" b="0"/>
+        </a:fillRef>
+        <a:effectRef idx="0">
+          <a:scrgbClr r="0" g="0" b="0"/>
+        </a:effectRef>
+        <a:fontRef idx="minor">
+          <a:schemeClr val="lt1"/>
+        </a:fontRef>
+      </dsp:style>
+    </dsp:sp>
+    <dsp:sp modelId="{C33B42A8-691E-4300-A8DC-B5D23341F01A}">
+      <dsp:nvSpPr>
+        <dsp:cNvPr id="0" name=""/>
+        <dsp:cNvSpPr/>
+      </dsp:nvSpPr>
+      <dsp:spPr>
+        <a:xfrm>
+          <a:off x="668786" y="2895600"/>
+          <a:ext cx="10462509" cy="579035"/>
+        </a:xfrm>
+        <a:prstGeom prst="rect">
+          <a:avLst/>
+        </a:prstGeom>
+        <a:noFill/>
+        <a:ln>
+          <a:noFill/>
+        </a:ln>
+        <a:effectLst/>
+      </dsp:spPr>
+      <dsp:style>
+        <a:lnRef idx="0">
+          <a:scrgbClr r="0" g="0" b="0"/>
+        </a:lnRef>
+        <a:fillRef idx="0">
+          <a:scrgbClr r="0" g="0" b="0"/>
+        </a:fillRef>
+        <a:effectRef idx="0">
+          <a:scrgbClr r="0" g="0" b="0"/>
+        </a:effectRef>
+        <a:fontRef idx="minor"/>
+      </dsp:style>
+      <dsp:txBody>
+        <a:bodyPr spcFirstLastPara="0" vert="horz" wrap="square" lIns="61281" tIns="61281" rIns="61281" bIns="61281" numCol="1" spcCol="1270" anchor="ctr" anchorCtr="0">
+          <a:noAutofit/>
+        </a:bodyPr>
+        <a:lstStyle/>
+        <a:p>
+          <a:pPr marL="0" lvl="0" indent="0" algn="l" defTabSz="711200">
+            <a:lnSpc>
+              <a:spcPct val="100000"/>
+            </a:lnSpc>
+            <a:spcBef>
+              <a:spcPct val="0"/>
+            </a:spcBef>
+            <a:spcAft>
+              <a:spcPct val="35000"/>
+            </a:spcAft>
+            <a:buNone/>
+          </a:pPr>
+          <a:r>
+            <a:rPr lang="es-ES" sz="1600" kern="1200"/>
+            <a:t>5. Generacion de código</a:t>
+          </a:r>
+          <a:endParaRPr lang="en-US" sz="1600" kern="1200"/>
+        </a:p>
+      </dsp:txBody>
+      <dsp:txXfrm>
+        <a:off x="668786" y="2895600"/>
+        <a:ext cx="10462509" cy="579035"/>
+      </dsp:txXfrm>
+    </dsp:sp>
+    <dsp:sp modelId="{F511A0DD-00BC-4FE4-8A42-393B9B047BAB}">
+      <dsp:nvSpPr>
+        <dsp:cNvPr id="0" name=""/>
+        <dsp:cNvSpPr/>
+      </dsp:nvSpPr>
+      <dsp:spPr>
+        <a:xfrm>
+          <a:off x="0" y="3619395"/>
+          <a:ext cx="11131296" cy="579035"/>
+        </a:xfrm>
+        <a:prstGeom prst="roundRect">
+          <a:avLst>
+            <a:gd name="adj" fmla="val 10000"/>
+          </a:avLst>
+        </a:prstGeom>
+        <a:solidFill>
+          <a:schemeClr val="accent1">
+            <a:tint val="40000"/>
+            <a:hueOff val="0"/>
+            <a:satOff val="0"/>
+            <a:lumOff val="0"/>
+            <a:alphaOff val="0"/>
+          </a:schemeClr>
+        </a:solidFill>
+        <a:ln>
+          <a:noFill/>
+        </a:ln>
+        <a:effectLst/>
+      </dsp:spPr>
+      <dsp:style>
+        <a:lnRef idx="0">
+          <a:scrgbClr r="0" g="0" b="0"/>
+        </a:lnRef>
+        <a:fillRef idx="1">
+          <a:scrgbClr r="0" g="0" b="0"/>
+        </a:fillRef>
+        <a:effectRef idx="0">
+          <a:scrgbClr r="0" g="0" b="0"/>
+        </a:effectRef>
+        <a:fontRef idx="minor"/>
+      </dsp:style>
+    </dsp:sp>
+    <dsp:sp modelId="{007EEF87-C7EC-4FBD-A25B-8AA4F2D3EDB8}">
+      <dsp:nvSpPr>
+        <dsp:cNvPr id="0" name=""/>
+        <dsp:cNvSpPr/>
+      </dsp:nvSpPr>
+      <dsp:spPr>
+        <a:xfrm>
+          <a:off x="175158" y="3749678"/>
+          <a:ext cx="318469" cy="318469"/>
+        </a:xfrm>
+        <a:prstGeom prst="rect">
+          <a:avLst/>
+        </a:prstGeom>
+        <a:blipFill>
+          <a:blip xmlns:r="http://schemas.openxmlformats.org/officeDocument/2006/relationships">
+            <a:extLst>
+              <a:ext uri="{28A0092B-C50C-407E-A947-70E740481C1C}">
+                <a14:useLocalDpi xmlns:a14="http://schemas.microsoft.com/office/drawing/2010/main" val="0"/>
+              </a:ext>
+              <a:ext uri="{96DAC541-7B7A-43D3-8B79-37D633B846F1}">
+                <asvg:svgBlip xmlns:asvg="http://schemas.microsoft.com/office/drawing/2016/SVG/main" r:embed="rId6"/>
+              </a:ext>
+            </a:extLst>
+          </a:blip>
+          <a:stretch>
+            <a:fillRect/>
+          </a:stretch>
+        </a:blipFill>
+        <a:ln w="19050" cap="flat" cmpd="sng" algn="ctr">
+          <a:solidFill>
+            <a:schemeClr val="lt1">
+              <a:hueOff val="0"/>
+              <a:satOff val="0"/>
+              <a:lumOff val="0"/>
+              <a:alphaOff val="0"/>
+            </a:schemeClr>
+          </a:solidFill>
+          <a:prstDash val="solid"/>
+          <a:miter lim="800000"/>
+        </a:ln>
+        <a:effectLst/>
+      </dsp:spPr>
+      <dsp:style>
+        <a:lnRef idx="2">
+          <a:scrgbClr r="0" g="0" b="0"/>
+        </a:lnRef>
+        <a:fillRef idx="1">
+          <a:scrgbClr r="0" g="0" b="0"/>
+        </a:fillRef>
+        <a:effectRef idx="0">
+          <a:scrgbClr r="0" g="0" b="0"/>
+        </a:effectRef>
+        <a:fontRef idx="minor">
+          <a:schemeClr val="lt1"/>
+        </a:fontRef>
+      </dsp:style>
+    </dsp:sp>
+    <dsp:sp modelId="{95B1FD20-A8E8-415C-991D-E009863C752E}">
+      <dsp:nvSpPr>
+        <dsp:cNvPr id="0" name=""/>
+        <dsp:cNvSpPr/>
+      </dsp:nvSpPr>
+      <dsp:spPr>
+        <a:xfrm>
+          <a:off x="668786" y="3619395"/>
+          <a:ext cx="10462509" cy="579035"/>
+        </a:xfrm>
+        <a:prstGeom prst="rect">
+          <a:avLst/>
+        </a:prstGeom>
+        <a:noFill/>
+        <a:ln>
+          <a:noFill/>
+        </a:ln>
+        <a:effectLst/>
+      </dsp:spPr>
+      <dsp:style>
+        <a:lnRef idx="0">
+          <a:scrgbClr r="0" g="0" b="0"/>
+        </a:lnRef>
+        <a:fillRef idx="0">
+          <a:scrgbClr r="0" g="0" b="0"/>
+        </a:fillRef>
+        <a:effectRef idx="0">
+          <a:scrgbClr r="0" g="0" b="0"/>
+        </a:effectRef>
+        <a:fontRef idx="minor"/>
+      </dsp:style>
+      <dsp:txBody>
+        <a:bodyPr spcFirstLastPara="0" vert="horz" wrap="square" lIns="61281" tIns="61281" rIns="61281" bIns="61281" numCol="1" spcCol="1270" anchor="ctr" anchorCtr="0">
+          <a:noAutofit/>
+        </a:bodyPr>
+        <a:lstStyle/>
+        <a:p>
+          <a:pPr marL="0" lvl="0" indent="0" algn="l" defTabSz="711200">
+            <a:lnSpc>
+              <a:spcPct val="100000"/>
+            </a:lnSpc>
+            <a:spcBef>
+              <a:spcPct val="0"/>
+            </a:spcBef>
+            <a:spcAft>
+              <a:spcPct val="35000"/>
+            </a:spcAft>
+            <a:buNone/>
+          </a:pPr>
+          <a:r>
+            <a:rPr lang="es-ES" sz="1600" kern="1200"/>
+            <a:t>6. Ejecuta</a:t>
+          </a:r>
+          <a:endParaRPr lang="en-US" sz="1600" kern="1200"/>
+        </a:p>
+      </dsp:txBody>
+      <dsp:txXfrm>
+        <a:off x="668786" y="3619395"/>
+        <a:ext cx="10462509" cy="579035"/>
+      </dsp:txXfrm>
+    </dsp:sp>
+    <dsp:sp modelId="{9C1DBC89-ADCF-4330-A9CF-98215C0B818F}">
+      <dsp:nvSpPr>
+        <dsp:cNvPr id="0" name=""/>
+        <dsp:cNvSpPr/>
+      </dsp:nvSpPr>
+      <dsp:spPr>
+        <a:xfrm>
+          <a:off x="0" y="4343190"/>
+          <a:ext cx="11131296" cy="579035"/>
+        </a:xfrm>
+        <a:prstGeom prst="roundRect">
+          <a:avLst>
+            <a:gd name="adj" fmla="val 10000"/>
+          </a:avLst>
+        </a:prstGeom>
+        <a:solidFill>
+          <a:schemeClr val="accent1">
+            <a:tint val="40000"/>
+            <a:hueOff val="0"/>
+            <a:satOff val="0"/>
+            <a:lumOff val="0"/>
+            <a:alphaOff val="0"/>
+          </a:schemeClr>
+        </a:solidFill>
+        <a:ln>
+          <a:noFill/>
+        </a:ln>
+        <a:effectLst/>
+      </dsp:spPr>
+      <dsp:style>
+        <a:lnRef idx="0">
+          <a:scrgbClr r="0" g="0" b="0"/>
+        </a:lnRef>
+        <a:fillRef idx="1">
+          <a:scrgbClr r="0" g="0" b="0"/>
+        </a:fillRef>
+        <a:effectRef idx="0">
+          <a:scrgbClr r="0" g="0" b="0"/>
+        </a:effectRef>
+        <a:fontRef idx="minor"/>
+      </dsp:style>
+    </dsp:sp>
+    <dsp:sp modelId="{80CB58DE-03CC-4EA1-A9B4-BC3E81FC0962}">
+      <dsp:nvSpPr>
+        <dsp:cNvPr id="0" name=""/>
+        <dsp:cNvSpPr/>
+      </dsp:nvSpPr>
+      <dsp:spPr>
+        <a:xfrm>
+          <a:off x="175158" y="4473473"/>
+          <a:ext cx="318469" cy="318469"/>
+        </a:xfrm>
+        <a:prstGeom prst="rect">
+          <a:avLst/>
+        </a:prstGeom>
+        <a:blipFill>
+          <a:blip xmlns:r="http://schemas.openxmlformats.org/officeDocument/2006/relationships">
+            <a:extLst>
+              <a:ext uri="{28A0092B-C50C-407E-A947-70E740481C1C}">
+                <a14:useLocalDpi xmlns:a14="http://schemas.microsoft.com/office/drawing/2010/main" val="0"/>
+              </a:ext>
+              <a:ext uri="{96DAC541-7B7A-43D3-8B79-37D633B846F1}">
+                <asvg:svgBlip xmlns:asvg="http://schemas.microsoft.com/office/drawing/2016/SVG/main" r:embed="rId7"/>
+              </a:ext>
+            </a:extLst>
+          </a:blip>
+          <a:stretch>
+            <a:fillRect/>
+          </a:stretch>
+        </a:blipFill>
+        <a:ln w="19050" cap="flat" cmpd="sng" algn="ctr">
+          <a:solidFill>
+            <a:schemeClr val="lt1">
+              <a:hueOff val="0"/>
+              <a:satOff val="0"/>
+              <a:lumOff val="0"/>
+              <a:alphaOff val="0"/>
+            </a:schemeClr>
+          </a:solidFill>
+          <a:prstDash val="solid"/>
+          <a:miter lim="800000"/>
+        </a:ln>
+        <a:effectLst/>
+      </dsp:spPr>
+      <dsp:style>
+        <a:lnRef idx="2">
+          <a:scrgbClr r="0" g="0" b="0"/>
+        </a:lnRef>
+        <a:fillRef idx="1">
+          <a:scrgbClr r="0" g="0" b="0"/>
+        </a:fillRef>
+        <a:effectRef idx="0">
+          <a:scrgbClr r="0" g="0" b="0"/>
+        </a:effectRef>
+        <a:fontRef idx="minor">
+          <a:schemeClr val="lt1"/>
+        </a:fontRef>
+      </dsp:style>
+    </dsp:sp>
+    <dsp:sp modelId="{9660B707-9E4A-4AB4-A17F-C27ED314F522}">
+      <dsp:nvSpPr>
+        <dsp:cNvPr id="0" name=""/>
+        <dsp:cNvSpPr/>
+      </dsp:nvSpPr>
+      <dsp:spPr>
+        <a:xfrm>
+          <a:off x="668786" y="4343190"/>
+          <a:ext cx="10462509" cy="579035"/>
+        </a:xfrm>
+        <a:prstGeom prst="rect">
+          <a:avLst/>
+        </a:prstGeom>
+        <a:noFill/>
+        <a:ln>
+          <a:noFill/>
+        </a:ln>
+        <a:effectLst/>
+      </dsp:spPr>
+      <dsp:style>
+        <a:lnRef idx="0">
+          <a:scrgbClr r="0" g="0" b="0"/>
+        </a:lnRef>
+        <a:fillRef idx="0">
+          <a:scrgbClr r="0" g="0" b="0"/>
+        </a:fillRef>
+        <a:effectRef idx="0">
+          <a:scrgbClr r="0" g="0" b="0"/>
+        </a:effectRef>
+        <a:fontRef idx="minor"/>
+      </dsp:style>
+      <dsp:txBody>
+        <a:bodyPr spcFirstLastPara="0" vert="horz" wrap="square" lIns="61281" tIns="61281" rIns="61281" bIns="61281" numCol="1" spcCol="1270" anchor="ctr" anchorCtr="0">
+          <a:noAutofit/>
+        </a:bodyPr>
+        <a:lstStyle/>
+        <a:p>
+          <a:pPr marL="0" lvl="0" indent="0" algn="l" defTabSz="711200">
+            <a:lnSpc>
+              <a:spcPct val="100000"/>
+            </a:lnSpc>
+            <a:spcBef>
+              <a:spcPct val="0"/>
+            </a:spcBef>
+            <a:spcAft>
+              <a:spcPct val="35000"/>
+            </a:spcAft>
+            <a:buNone/>
+          </a:pPr>
+          <a:r>
+            <a:rPr lang="es-ES" sz="1600" kern="1200" dirty="0"/>
+            <a:t>7. Interpretación de consulta</a:t>
+          </a:r>
+          <a:endParaRPr lang="en-US" sz="1600" kern="1200" dirty="0"/>
+        </a:p>
+      </dsp:txBody>
+      <dsp:txXfrm>
+        <a:off x="668786" y="4343190"/>
+        <a:ext cx="10462509" cy="579035"/>
+      </dsp:txXfrm>
+    </dsp:sp>
+  </dsp:spTree>
+</dsp:drawing>
+</file>
+
+<file path=ppt/diagrams/layout1.xml><?xml version="1.0" encoding="utf-8"?>
+<dgm:layoutDef xmlns:dgm="http://schemas.openxmlformats.org/drawingml/2006/diagram" xmlns:a="http://schemas.openxmlformats.org/drawingml/2006/main" uniqueId="urn:microsoft.com/office/officeart/2018/2/layout/IconVerticalSolidList">
+  <dgm:title val="Icon Vertical Solid List"/>
+  <dgm:desc val="Use to show a series of visuals from top to bottom with Level 1 or Level 1 and Level 2 text grouped in a shape. Works best with icons or small pictures with lengthier descriptions."/>
+  <dgm:catLst>
+    <dgm:cat type="icon" pri="500"/>
+  </dgm:catLst>
+  <dgm:sampData useDef="1">
+    <dgm:dataModel>
+      <dgm:ptLst/>
+      <dgm:bg/>
+      <dgm:whole/>
+    </dgm:dataModel>
+  </dgm:sampData>
+  <dgm:styleData useDef="1">
+    <dgm:dataModel>
+      <dgm:ptLst/>
+      <dgm:bg/>
+      <dgm:whole/>
+    </dgm:dataModel>
+  </dgm:styleData>
+  <dgm:clrData useDef="1">
+    <dgm:dataModel>
+      <dgm:ptLst/>
+      <dgm:bg/>
+      <dgm:whole/>
+    </dgm:dataModel>
+  </dgm:clrData>
+  <dgm:layoutNode name="root">
+    <dgm:varLst>
+      <dgm:dir/>
+      <dgm:resizeHandles val="exact"/>
+    </dgm:varLst>
+    <dgm:choose name="Name0">
+      <dgm:if name="Name1" axis="self" func="var" arg="dir" op="equ" val="norm">
+        <dgm:alg type="lin">
+          <dgm:param type="linDir" val="fromT"/>
+          <dgm:param type="nodeHorzAlign" val="l"/>
+        </dgm:alg>
+      </dgm:if>
+      <dgm:else name="Name2">
+        <dgm:alg type="lin">
+          <dgm:param type="linDir" val="fromT"/>
+          <dgm:param type="nodeHorzAlign" val="r"/>
+        </dgm:alg>
+      </dgm:else>
+    </dgm:choose>
+    <dgm:shape xmlns:r="http://schemas.openxmlformats.org/officeDocument/2006/relationships" r:blip="">
+      <dgm:adjLst/>
+    </dgm:shape>
+    <dgm:presOf/>
+    <dgm:choose name="Name3">
+      <dgm:if name="Name4" axis="ch" ptType="node" func="cnt" op="lte" val="3">
+        <dgm:constrLst>
+          <dgm:constr type="h" for="ch" forName="compNode" refType="h" fact="0.3"/>
+          <dgm:constr type="w" for="ch" forName="compNode" refType="w"/>
+          <dgm:constr type="h" for="ch" forName="sibTrans" refType="h" refFor="ch" refForName="compNode" fact="0.25"/>
+          <dgm:constr type="primFontSz" for="des" forName="parTx" val="25"/>
+          <dgm:constr type="primFontSz" for="des" forName="desTx" refType="primFontSz" refFor="des" refForName="parTx" op="lte" fact="0.75"/>
+          <dgm:constr type="h" for="des" forName="compNode" op="equ"/>
+          <dgm:constr type="h" for="des" forName="bgRect" op="equ"/>
+          <dgm:constr type="h" for="des" forName="iconRect" op="equ"/>
+          <dgm:constr type="w" for="des" forName="iconRect" op="equ"/>
+          <dgm:constr type="h" for="des" forName="spaceRect" op="equ"/>
+          <dgm:constr type="h" for="des" forName="parTx" op="equ"/>
+          <dgm:constr type="h" for="des" forName="desTx" op="equ"/>
+        </dgm:constrLst>
+      </dgm:if>
+      <dgm:if name="Name5" axis="ch" ptType="node" func="cnt" op="lte" val="4">
+        <dgm:constrLst>
+          <dgm:constr type="h" for="ch" forName="compNode" refType="h" fact="0.3"/>
+          <dgm:constr type="w" for="ch" forName="compNode" refType="w"/>
+          <dgm:constr type="h" for="ch" forName="sibTrans" refType="h" refFor="ch" refForName="compNode" fact="0.25"/>
+          <dgm:constr type="primFontSz" for="des" forName="parTx" val="22"/>
+          <dgm:constr type="primFontSz" for="des" forName="desTx" refType="primFontSz" refFor="des" refForName="parTx" op="lte" fact="0.75"/>
+          <dgm:constr type="h" for="des" forName="compNode" op="equ"/>
+          <dgm:constr type="h" for="des" forName="bgRect" op="equ"/>
+          <dgm:constr type="h" for="des" forName="iconRect" op="equ"/>
+          <dgm:constr type="w" for="des" forName="iconRect" op="equ"/>
+          <dgm:constr type="h" for="des" forName="spaceRect" op="equ"/>
+          <dgm:constr type="h" for="des" forName="parTx" op="equ"/>
+          <dgm:constr type="h" for="des" forName="desTx" op="equ"/>
+        </dgm:constrLst>
+      </dgm:if>
+      <dgm:if name="Name6" axis="ch" ptType="node" func="cnt" op="lte" val="6">
+        <dgm:constrLst>
+          <dgm:constr type="h" for="ch" forName="compNode" refType="h" fact="0.3"/>
+          <dgm:constr type="w" for="ch" forName="compNode" refType="w"/>
+          <dgm:constr type="h" for="ch" forName="sibTrans" refType="h" refFor="ch" refForName="compNode" fact="0.25"/>
+          <dgm:constr type="primFontSz" for="des" forName="parTx" val="19"/>
+          <dgm:constr type="primFontSz" for="des" forName="desTx" refType="primFontSz" refFor="des" refForName="parTx" op="lte" fact="0.75"/>
+          <dgm:constr type="h" for="des" forName="compNode" op="equ"/>
+          <dgm:constr type="h" for="des" forName="bgRect" op="equ"/>
+          <dgm:constr type="h" for="des" forName="iconRect" op="equ"/>
+          <dgm:constr type="w" for="des" forName="iconRect" op="equ"/>
+          <dgm:constr type="h" for="des" forName="spaceRect" op="equ"/>
+          <dgm:constr type="h" for="des" forName="parTx" op="equ"/>
+          <dgm:constr type="h" for="des" forName="desTx" op="equ"/>
+        </dgm:constrLst>
+      </dgm:if>
+      <dgm:else name="Name7">
+        <dgm:constrLst>
+          <dgm:constr type="h" for="ch" forName="compNode" refType="h" fact="0.3"/>
+          <dgm:constr type="w" for="ch" forName="compNode" refType="w"/>
+          <dgm:constr type="h" for="ch" forName="sibTrans" refType="h" refFor="ch" refForName="compNode" fact="0.25"/>
+          <dgm:constr type="primFontSz" for="des" forName="parTx" val="16"/>
+          <dgm:constr type="primFontSz" for="des" forName="desTx" refType="primFontSz" refFor="des" refForName="parTx" op="lte" fact="0.75"/>
+          <dgm:constr type="h" for="des" forName="compNode" op="equ"/>
+          <dgm:constr type="h" for="des" forName="bgRect" op="equ"/>
+          <dgm:constr type="h" for="des" forName="iconRect" op="equ"/>
+          <dgm:constr type="w" for="des" forName="iconRect" op="equ"/>
+          <dgm:constr type="h" for="des" forName="spaceRect" op="equ"/>
+          <dgm:constr type="h" for="des" forName="parTx" op="equ"/>
+          <dgm:constr type="h" for="des" forName="desTx" op="equ"/>
+        </dgm:constrLst>
+      </dgm:else>
+    </dgm:choose>
+    <dgm:ruleLst>
+      <dgm:rule type="h" for="ch" forName="compNode" val="0" fact="NaN" max="NaN"/>
+    </dgm:ruleLst>
+    <dgm:forEach name="Name8" axis="ch" ptType="node">
+      <dgm:layoutNode name="compNode">
+        <dgm:alg type="composite"/>
+        <dgm:shape xmlns:r="http://schemas.openxmlformats.org/officeDocument/2006/relationships" r:blip="">
+          <dgm:adjLst/>
+        </dgm:shape>
+        <dgm:presOf axis="self"/>
+        <dgm:choose name="Name9">
+          <dgm:if name="Name10" axis="ch" ptType="node" func="cnt" op="gte" val="1">
+            <dgm:constrLst>
+              <dgm:constr type="w" for="ch" forName="bgRect" refType="w"/>
+              <dgm:constr type="h" for="ch" forName="bgRect" refType="h"/>
+              <dgm:constr type="l" for="ch" forName="bgRect"/>
+              <dgm:constr type="t" for="ch" forName="bgRect"/>
+              <dgm:constr type="h" for="ch" forName="iconRect" refType="h" fact="0.55"/>
+              <dgm:constr type="w" for="ch" forName="iconRect" refType="h" refFor="ch" refForName="iconRect"/>
+              <dgm:constr type="l" for="ch" forName="iconRect" refType="h" refFor="ch" refForName="iconRect" fact="0.55"/>
+              <dgm:constr type="ctrY" for="ch" forName="iconRect" refType="ctrY" refFor="ch" refForName="bgRect"/>
+              <dgm:constr type="w" for="ch" forName="spaceRect" refType="l" refFor="ch" refForName="iconRect"/>
+              <dgm:constr type="h" for="ch" forName="spaceRect" refType="h"/>
+              <dgm:constr type="l" for="ch" forName="spaceRect" refType="r" refFor="ch" refForName="iconRect"/>
+              <dgm:constr type="t" for="ch" forName="spaceRect"/>
+              <dgm:constr type="w" for="ch" forName="parTx" refType="w" fact="0.45"/>
+              <dgm:constr type="h" for="ch" forName="parTx" refType="h"/>
+              <dgm:constr type="l" for="ch" forName="parTx" refType="r" refFor="ch" refForName="spaceRect"/>
+              <dgm:constr type="t" for="ch" forName="parTx"/>
+              <dgm:constr type="h" for="ch" forName="desTx" refType="h"/>
+              <dgm:constr type="l" for="ch" forName="desTx" refType="r" refFor="ch" refForName="parTx"/>
+              <dgm:constr type="t" for="ch" forName="desTx"/>
+            </dgm:constrLst>
+          </dgm:if>
+          <dgm:else name="Name11">
+            <dgm:constrLst>
+              <dgm:constr type="w" for="ch" forName="bgRect" refType="w"/>
+              <dgm:constr type="h" for="ch" forName="bgRect" refType="h"/>
+              <dgm:constr type="l" for="ch" forName="bgRect"/>
+              <dgm:constr type="t" for="ch" forName="bgRect"/>
+              <dgm:constr type="h" for="ch" forName="iconRect" refType="h" fact="0.55"/>
+              <dgm:constr type="w" for="ch" forName="iconRect" refType="h" refFor="ch" refForName="iconRect"/>
+              <dgm:constr type="l" for="ch" forName="iconRect" refType="h" refFor="ch" refForName="iconRect" fact="0.55"/>
+              <dgm:constr type="ctrY" for="ch" forName="iconRect" refType="ctrY" refFor="ch" refForName="bgRect"/>
+              <dgm:constr type="w" for="ch" forName="spaceRect" refType="l" refFor="ch" refForName="iconRect"/>
+              <dgm:constr type="h" for="ch" forName="spaceRect" refType="h"/>
+              <dgm:constr type="l" for="ch" forName="spaceRect" refType="r" refFor="ch" refForName="iconRect"/>
+              <dgm:constr type="t" for="ch" forName="spaceRect"/>
+              <dgm:constr type="h" for="ch" forName="parTx" refType="h"/>
+              <dgm:constr type="l" for="ch" forName="parTx" refType="r" refFor="ch" refForName="spaceRect"/>
+              <dgm:constr type="t" for="ch" forName="parTx"/>
+            </dgm:constrLst>
+          </dgm:else>
+        </dgm:choose>
+        <dgm:ruleLst>
+          <dgm:rule type="h" val="INF" fact="NaN" max="NaN"/>
+        </dgm:ruleLst>
+        <dgm:layoutNode name="bgRect" styleLbl="bgShp">
+          <dgm:alg type="sp"/>
+          <dgm:shape xmlns:r="http://schemas.openxmlformats.org/officeDocument/2006/relationships" type="roundRect" r:blip="">
+            <dgm:adjLst>
+              <dgm:adj idx="1" val="0.1"/>
+            </dgm:adjLst>
+          </dgm:shape>
+          <dgm:presOf/>
+          <dgm:constrLst/>
+          <dgm:ruleLst/>
+        </dgm:layoutNode>
+        <dgm:layoutNode name="iconRect" styleLbl="node1">
+          <dgm:alg type="sp"/>
+          <dgm:shape xmlns:r="http://schemas.openxmlformats.org/officeDocument/2006/relationships" type="rect" r:blip="" blipPhldr="1">
+            <dgm:adjLst/>
+          </dgm:shape>
+          <dgm:presOf/>
+          <dgm:constrLst/>
+          <dgm:ruleLst/>
+        </dgm:layoutNode>
+        <dgm:layoutNode name="spaceRect">
+          <dgm:alg type="sp"/>
+          <dgm:shape xmlns:r="http://schemas.openxmlformats.org/officeDocument/2006/relationships" r:blip="">
+            <dgm:adjLst/>
+          </dgm:shape>
+          <dgm:presOf/>
+          <dgm:constrLst/>
+          <dgm:ruleLst/>
+        </dgm:layoutNode>
+        <dgm:layoutNode name="parTx" styleLbl="revTx">
+          <dgm:varLst>
+            <dgm:chMax val="0"/>
+            <dgm:chPref val="0"/>
+          </dgm:varLst>
+          <dgm:alg type="tx">
+            <dgm:param type="txAnchorVert" val="mid"/>
+            <dgm:param type="parTxLTRAlign" val="l"/>
+            <dgm:param type="shpTxLTRAlignCh" val="l"/>
+            <dgm:param type="parTxRTLAlign" val="r"/>
+            <dgm:param type="shpTxRTLAlignCh" val="r"/>
+          </dgm:alg>
+          <dgm:shape xmlns:r="http://schemas.openxmlformats.org/officeDocument/2006/relationships" type="rect" r:blip="">
+            <dgm:adjLst/>
+          </dgm:shape>
+          <dgm:presOf axis="self" ptType="node"/>
+          <dgm:constrLst>
+            <dgm:constr type="lMarg" refType="h" fact="0.3"/>
+            <dgm:constr type="rMarg" refType="h" fact="0.3"/>
+            <dgm:constr type="tMarg" refType="h" fact="0.3"/>
+            <dgm:constr type="bMarg" refType="h" fact="0.3"/>
+          </dgm:constrLst>
+          <dgm:ruleLst>
+            <dgm:rule type="primFontSz" val="14" fact="NaN" max="NaN"/>
+            <dgm:rule type="h" val="INF" fact="NaN" max="NaN"/>
+          </dgm:ruleLst>
+        </dgm:layoutNode>
+        <dgm:choose name="Name12">
+          <dgm:if name="Name13" axis="ch" ptType="node" func="cnt" op="gte" val="1">
+            <dgm:layoutNode name="desTx" styleLbl="revTx">
+              <dgm:varLst/>
+              <dgm:alg type="tx">
+                <dgm:param type="txAnchorVertCh" val="mid"/>
+                <dgm:param type="parTxLTRAlign" val="l"/>
+                <dgm:param type="shpTxLTRAlignCh" val="l"/>
+                <dgm:param type="parTxRTLAlign" val="r"/>
+                <dgm:param type="shpTxRTLAlignCh" val="r"/>
+                <dgm:param type="stBulletLvl" val="0"/>
+              </dgm:alg>
+              <dgm:shape xmlns:r="http://schemas.openxmlformats.org/officeDocument/2006/relationships" type="rect" r:blip="">
+                <dgm:adjLst/>
+              </dgm:shape>
+              <dgm:presOf axis="des" ptType="node"/>
+              <dgm:constrLst>
+                <dgm:constr type="primFontSz" val="18"/>
+                <dgm:constr type="secFontSz" refType="primFontSz"/>
+                <dgm:constr type="lMarg" refType="h" fact="0.3"/>
+                <dgm:constr type="rMarg" refType="h" fact="0.3"/>
+                <dgm:constr type="tMarg" refType="h" fact="0.3"/>
+                <dgm:constr type="bMarg" refType="h" fact="0.3"/>
+              </dgm:constrLst>
+              <dgm:ruleLst>
+                <dgm:rule type="primFontSz" val="11" fact="NaN" max="NaN"/>
+              </dgm:ruleLst>
+            </dgm:layoutNode>
+          </dgm:if>
+          <dgm:else name="Name14"/>
+        </dgm:choose>
+      </dgm:layoutNode>
+      <dgm:forEach name="Name15" axis="followSib" ptType="sibTrans" cnt="1">
+        <dgm:layoutNode name="sibTrans">
+          <dgm:alg type="sp"/>
+          <dgm:shape xmlns:r="http://schemas.openxmlformats.org/officeDocument/2006/relationships" r:blip="">
+            <dgm:adjLst/>
+          </dgm:shape>
+          <dgm:presOf axis="self"/>
+          <dgm:constrLst/>
+          <dgm:ruleLst/>
+        </dgm:layoutNode>
+      </dgm:forEach>
+    </dgm:forEach>
+  </dgm:layoutNode>
+  <dgm:extLst>
+    <a:ext uri="{68A01E43-0DF5-4B5B-8FA6-DAF915123BFB}">
+      <dgm1612:lstStyle xmlns:dgm1612="http://schemas.microsoft.com/office/drawing/2016/12/diagram">
+        <a:lvl1pPr>
+          <a:lnSpc>
+            <a:spcPct val="100000"/>
+          </a:lnSpc>
+        </a:lvl1pPr>
+        <a:lvl2pPr>
+          <a:lnSpc>
+            <a:spcPct val="100000"/>
+          </a:lnSpc>
+        </a:lvl2pPr>
+      </dgm1612:lstStyle>
+    </a:ext>
+  </dgm:extLst>
+</dgm:layoutDef>
+</file>
+
+<file path=ppt/diagrams/layout2.xml><?xml version="1.0" encoding="utf-8"?>
+<dgm:layoutDef xmlns:dgm="http://schemas.openxmlformats.org/drawingml/2006/diagram" xmlns:a="http://schemas.openxmlformats.org/drawingml/2006/main" uniqueId="urn:microsoft.com/office/officeart/2018/2/layout/IconVerticalSolidList">
+  <dgm:title val="Icon Vertical Solid List"/>
+  <dgm:desc val="Use to show a series of visuals from top to bottom with Level 1 or Level 1 and Level 2 text grouped in a shape. Works best with icons or small pictures with lengthier descriptions."/>
+  <dgm:catLst>
+    <dgm:cat type="icon" pri="500"/>
+  </dgm:catLst>
+  <dgm:sampData useDef="1">
+    <dgm:dataModel>
+      <dgm:ptLst/>
+      <dgm:bg/>
+      <dgm:whole/>
+    </dgm:dataModel>
+  </dgm:sampData>
+  <dgm:styleData useDef="1">
+    <dgm:dataModel>
+      <dgm:ptLst/>
+      <dgm:bg/>
+      <dgm:whole/>
+    </dgm:dataModel>
+  </dgm:styleData>
+  <dgm:clrData useDef="1">
+    <dgm:dataModel>
+      <dgm:ptLst/>
+      <dgm:bg/>
+      <dgm:whole/>
+    </dgm:dataModel>
+  </dgm:clrData>
+  <dgm:layoutNode name="root">
+    <dgm:varLst>
+      <dgm:dir/>
+      <dgm:resizeHandles val="exact"/>
+    </dgm:varLst>
+    <dgm:choose name="Name0">
+      <dgm:if name="Name1" axis="self" func="var" arg="dir" op="equ" val="norm">
+        <dgm:alg type="lin">
+          <dgm:param type="linDir" val="fromT"/>
+          <dgm:param type="nodeHorzAlign" val="l"/>
+        </dgm:alg>
+      </dgm:if>
+      <dgm:else name="Name2">
+        <dgm:alg type="lin">
+          <dgm:param type="linDir" val="fromT"/>
+          <dgm:param type="nodeHorzAlign" val="r"/>
+        </dgm:alg>
+      </dgm:else>
+    </dgm:choose>
+    <dgm:shape xmlns:r="http://schemas.openxmlformats.org/officeDocument/2006/relationships" r:blip="">
+      <dgm:adjLst/>
+    </dgm:shape>
+    <dgm:presOf/>
+    <dgm:choose name="Name3">
+      <dgm:if name="Name4" axis="ch" ptType="node" func="cnt" op="lte" val="3">
+        <dgm:constrLst>
+          <dgm:constr type="h" for="ch" forName="compNode" refType="h" fact="0.3"/>
+          <dgm:constr type="w" for="ch" forName="compNode" refType="w"/>
+          <dgm:constr type="h" for="ch" forName="sibTrans" refType="h" refFor="ch" refForName="compNode" fact="0.25"/>
+          <dgm:constr type="primFontSz" for="des" forName="parTx" val="25"/>
+          <dgm:constr type="primFontSz" for="des" forName="desTx" refType="primFontSz" refFor="des" refForName="parTx" op="lte" fact="0.75"/>
+          <dgm:constr type="h" for="des" forName="compNode" op="equ"/>
+          <dgm:constr type="h" for="des" forName="bgRect" op="equ"/>
+          <dgm:constr type="h" for="des" forName="iconRect" op="equ"/>
+          <dgm:constr type="w" for="des" forName="iconRect" op="equ"/>
+          <dgm:constr type="h" for="des" forName="spaceRect" op="equ"/>
+          <dgm:constr type="h" for="des" forName="parTx" op="equ"/>
+          <dgm:constr type="h" for="des" forName="desTx" op="equ"/>
+        </dgm:constrLst>
+      </dgm:if>
+      <dgm:if name="Name5" axis="ch" ptType="node" func="cnt" op="lte" val="4">
+        <dgm:constrLst>
+          <dgm:constr type="h" for="ch" forName="compNode" refType="h" fact="0.3"/>
+          <dgm:constr type="w" for="ch" forName="compNode" refType="w"/>
+          <dgm:constr type="h" for="ch" forName="sibTrans" refType="h" refFor="ch" refForName="compNode" fact="0.25"/>
+          <dgm:constr type="primFontSz" for="des" forName="parTx" val="22"/>
+          <dgm:constr type="primFontSz" for="des" forName="desTx" refType="primFontSz" refFor="des" refForName="parTx" op="lte" fact="0.75"/>
+          <dgm:constr type="h" for="des" forName="compNode" op="equ"/>
+          <dgm:constr type="h" for="des" forName="bgRect" op="equ"/>
+          <dgm:constr type="h" for="des" forName="iconRect" op="equ"/>
+          <dgm:constr type="w" for="des" forName="iconRect" op="equ"/>
+          <dgm:constr type="h" for="des" forName="spaceRect" op="equ"/>
+          <dgm:constr type="h" for="des" forName="parTx" op="equ"/>
+          <dgm:constr type="h" for="des" forName="desTx" op="equ"/>
+        </dgm:constrLst>
+      </dgm:if>
+      <dgm:if name="Name6" axis="ch" ptType="node" func="cnt" op="lte" val="6">
+        <dgm:constrLst>
+          <dgm:constr type="h" for="ch" forName="compNode" refType="h" fact="0.3"/>
+          <dgm:constr type="w" for="ch" forName="compNode" refType="w"/>
+          <dgm:constr type="h" for="ch" forName="sibTrans" refType="h" refFor="ch" refForName="compNode" fact="0.25"/>
+          <dgm:constr type="primFontSz" for="des" forName="parTx" val="19"/>
+          <dgm:constr type="primFontSz" for="des" forName="desTx" refType="primFontSz" refFor="des" refForName="parTx" op="lte" fact="0.75"/>
+          <dgm:constr type="h" for="des" forName="compNode" op="equ"/>
+          <dgm:constr type="h" for="des" forName="bgRect" op="equ"/>
+          <dgm:constr type="h" for="des" forName="iconRect" op="equ"/>
+          <dgm:constr type="w" for="des" forName="iconRect" op="equ"/>
+          <dgm:constr type="h" for="des" forName="spaceRect" op="equ"/>
+          <dgm:constr type="h" for="des" forName="parTx" op="equ"/>
+          <dgm:constr type="h" for="des" forName="desTx" op="equ"/>
+        </dgm:constrLst>
+      </dgm:if>
+      <dgm:else name="Name7">
+        <dgm:constrLst>
+          <dgm:constr type="h" for="ch" forName="compNode" refType="h" fact="0.3"/>
+          <dgm:constr type="w" for="ch" forName="compNode" refType="w"/>
+          <dgm:constr type="h" for="ch" forName="sibTrans" refType="h" refFor="ch" refForName="compNode" fact="0.25"/>
+          <dgm:constr type="primFontSz" for="des" forName="parTx" val="16"/>
+          <dgm:constr type="primFontSz" for="des" forName="desTx" refType="primFontSz" refFor="des" refForName="parTx" op="lte" fact="0.75"/>
+          <dgm:constr type="h" for="des" forName="compNode" op="equ"/>
+          <dgm:constr type="h" for="des" forName="bgRect" op="equ"/>
+          <dgm:constr type="h" for="des" forName="iconRect" op="equ"/>
+          <dgm:constr type="w" for="des" forName="iconRect" op="equ"/>
+          <dgm:constr type="h" for="des" forName="spaceRect" op="equ"/>
+          <dgm:constr type="h" for="des" forName="parTx" op="equ"/>
+          <dgm:constr type="h" for="des" forName="desTx" op="equ"/>
+        </dgm:constrLst>
+      </dgm:else>
+    </dgm:choose>
+    <dgm:ruleLst>
+      <dgm:rule type="h" for="ch" forName="compNode" val="0" fact="NaN" max="NaN"/>
+    </dgm:ruleLst>
+    <dgm:forEach name="Name8" axis="ch" ptType="node">
+      <dgm:layoutNode name="compNode">
+        <dgm:alg type="composite"/>
+        <dgm:shape xmlns:r="http://schemas.openxmlformats.org/officeDocument/2006/relationships" r:blip="">
+          <dgm:adjLst/>
+        </dgm:shape>
+        <dgm:presOf axis="self"/>
+        <dgm:choose name="Name9">
+          <dgm:if name="Name10" axis="ch" ptType="node" func="cnt" op="gte" val="1">
+            <dgm:constrLst>
+              <dgm:constr type="w" for="ch" forName="bgRect" refType="w"/>
+              <dgm:constr type="h" for="ch" forName="bgRect" refType="h"/>
+              <dgm:constr type="l" for="ch" forName="bgRect"/>
+              <dgm:constr type="t" for="ch" forName="bgRect"/>
+              <dgm:constr type="h" for="ch" forName="iconRect" refType="h" fact="0.55"/>
+              <dgm:constr type="w" for="ch" forName="iconRect" refType="h" refFor="ch" refForName="iconRect"/>
+              <dgm:constr type="l" for="ch" forName="iconRect" refType="h" refFor="ch" refForName="iconRect" fact="0.55"/>
+              <dgm:constr type="ctrY" for="ch" forName="iconRect" refType="ctrY" refFor="ch" refForName="bgRect"/>
+              <dgm:constr type="w" for="ch" forName="spaceRect" refType="l" refFor="ch" refForName="iconRect"/>
+              <dgm:constr type="h" for="ch" forName="spaceRect" refType="h"/>
+              <dgm:constr type="l" for="ch" forName="spaceRect" refType="r" refFor="ch" refForName="iconRect"/>
+              <dgm:constr type="t" for="ch" forName="spaceRect"/>
+              <dgm:constr type="w" for="ch" forName="parTx" refType="w" fact="0.45"/>
+              <dgm:constr type="h" for="ch" forName="parTx" refType="h"/>
+              <dgm:constr type="l" for="ch" forName="parTx" refType="r" refFor="ch" refForName="spaceRect"/>
+              <dgm:constr type="t" for="ch" forName="parTx"/>
+              <dgm:constr type="h" for="ch" forName="desTx" refType="h"/>
+              <dgm:constr type="l" for="ch" forName="desTx" refType="r" refFor="ch" refForName="parTx"/>
+              <dgm:constr type="t" for="ch" forName="desTx"/>
+            </dgm:constrLst>
+          </dgm:if>
+          <dgm:else name="Name11">
+            <dgm:constrLst>
+              <dgm:constr type="w" for="ch" forName="bgRect" refType="w"/>
+              <dgm:constr type="h" for="ch" forName="bgRect" refType="h"/>
+              <dgm:constr type="l" for="ch" forName="bgRect"/>
+              <dgm:constr type="t" for="ch" forName="bgRect"/>
+              <dgm:constr type="h" for="ch" forName="iconRect" refType="h" fact="0.55"/>
+              <dgm:constr type="w" for="ch" forName="iconRect" refType="h" refFor="ch" refForName="iconRect"/>
+              <dgm:constr type="l" for="ch" forName="iconRect" refType="h" refFor="ch" refForName="iconRect" fact="0.55"/>
+              <dgm:constr type="ctrY" for="ch" forName="iconRect" refType="ctrY" refFor="ch" refForName="bgRect"/>
+              <dgm:constr type="w" for="ch" forName="spaceRect" refType="l" refFor="ch" refForName="iconRect"/>
+              <dgm:constr type="h" for="ch" forName="spaceRect" refType="h"/>
+              <dgm:constr type="l" for="ch" forName="spaceRect" refType="r" refFor="ch" refForName="iconRect"/>
+              <dgm:constr type="t" for="ch" forName="spaceRect"/>
+              <dgm:constr type="h" for="ch" forName="parTx" refType="h"/>
+              <dgm:constr type="l" for="ch" forName="parTx" refType="r" refFor="ch" refForName="spaceRect"/>
+              <dgm:constr type="t" for="ch" forName="parTx"/>
+            </dgm:constrLst>
+          </dgm:else>
+        </dgm:choose>
+        <dgm:ruleLst>
+          <dgm:rule type="h" val="INF" fact="NaN" max="NaN"/>
+        </dgm:ruleLst>
+        <dgm:layoutNode name="bgRect" styleLbl="bgShp">
+          <dgm:alg type="sp"/>
+          <dgm:shape xmlns:r="http://schemas.openxmlformats.org/officeDocument/2006/relationships" type="roundRect" r:blip="">
+            <dgm:adjLst>
+              <dgm:adj idx="1" val="0.1"/>
+            </dgm:adjLst>
+          </dgm:shape>
+          <dgm:presOf/>
+          <dgm:constrLst/>
+          <dgm:ruleLst/>
+        </dgm:layoutNode>
+        <dgm:layoutNode name="iconRect" styleLbl="node1">
+          <dgm:alg type="sp"/>
+          <dgm:shape xmlns:r="http://schemas.openxmlformats.org/officeDocument/2006/relationships" type="rect" r:blip="" blipPhldr="1">
+            <dgm:adjLst/>
+          </dgm:shape>
+          <dgm:presOf/>
+          <dgm:constrLst/>
+          <dgm:ruleLst/>
+        </dgm:layoutNode>
+        <dgm:layoutNode name="spaceRect">
+          <dgm:alg type="sp"/>
+          <dgm:shape xmlns:r="http://schemas.openxmlformats.org/officeDocument/2006/relationships" r:blip="">
+            <dgm:adjLst/>
+          </dgm:shape>
+          <dgm:presOf/>
+          <dgm:constrLst/>
+          <dgm:ruleLst/>
+        </dgm:layoutNode>
+        <dgm:layoutNode name="parTx" styleLbl="revTx">
+          <dgm:varLst>
+            <dgm:chMax val="0"/>
+            <dgm:chPref val="0"/>
+          </dgm:varLst>
+          <dgm:alg type="tx">
+            <dgm:param type="txAnchorVert" val="mid"/>
+            <dgm:param type="parTxLTRAlign" val="l"/>
+            <dgm:param type="shpTxLTRAlignCh" val="l"/>
+            <dgm:param type="parTxRTLAlign" val="r"/>
+            <dgm:param type="shpTxRTLAlignCh" val="r"/>
+          </dgm:alg>
+          <dgm:shape xmlns:r="http://schemas.openxmlformats.org/officeDocument/2006/relationships" type="rect" r:blip="">
+            <dgm:adjLst/>
+          </dgm:shape>
+          <dgm:presOf axis="self" ptType="node"/>
+          <dgm:constrLst>
+            <dgm:constr type="lMarg" refType="h" fact="0.3"/>
+            <dgm:constr type="rMarg" refType="h" fact="0.3"/>
+            <dgm:constr type="tMarg" refType="h" fact="0.3"/>
+            <dgm:constr type="bMarg" refType="h" fact="0.3"/>
+          </dgm:constrLst>
+          <dgm:ruleLst>
+            <dgm:rule type="primFontSz" val="14" fact="NaN" max="NaN"/>
+            <dgm:rule type="h" val="INF" fact="NaN" max="NaN"/>
+          </dgm:ruleLst>
+        </dgm:layoutNode>
+        <dgm:choose name="Name12">
+          <dgm:if name="Name13" axis="ch" ptType="node" func="cnt" op="gte" val="1">
+            <dgm:layoutNode name="desTx" styleLbl="revTx">
+              <dgm:varLst/>
+              <dgm:alg type="tx">
+                <dgm:param type="txAnchorVertCh" val="mid"/>
+                <dgm:param type="parTxLTRAlign" val="l"/>
+                <dgm:param type="shpTxLTRAlignCh" val="l"/>
+                <dgm:param type="parTxRTLAlign" val="r"/>
+                <dgm:param type="shpTxRTLAlignCh" val="r"/>
+                <dgm:param type="stBulletLvl" val="0"/>
+              </dgm:alg>
+              <dgm:shape xmlns:r="http://schemas.openxmlformats.org/officeDocument/2006/relationships" type="rect" r:blip="">
+                <dgm:adjLst/>
+              </dgm:shape>
+              <dgm:presOf axis="des" ptType="node"/>
+              <dgm:constrLst>
+                <dgm:constr type="primFontSz" val="18"/>
+                <dgm:constr type="secFontSz" refType="primFontSz"/>
+                <dgm:constr type="lMarg" refType="h" fact="0.3"/>
+                <dgm:constr type="rMarg" refType="h" fact="0.3"/>
+                <dgm:constr type="tMarg" refType="h" fact="0.3"/>
+                <dgm:constr type="bMarg" refType="h" fact="0.3"/>
+              </dgm:constrLst>
+              <dgm:ruleLst>
+                <dgm:rule type="primFontSz" val="11" fact="NaN" max="NaN"/>
+              </dgm:ruleLst>
+            </dgm:layoutNode>
+          </dgm:if>
+          <dgm:else name="Name14"/>
+        </dgm:choose>
+      </dgm:layoutNode>
+      <dgm:forEach name="Name15" axis="followSib" ptType="sibTrans" cnt="1">
+        <dgm:layoutNode name="sibTrans">
+          <dgm:alg type="sp"/>
+          <dgm:shape xmlns:r="http://schemas.openxmlformats.org/officeDocument/2006/relationships" r:blip="">
+            <dgm:adjLst/>
+          </dgm:shape>
+          <dgm:presOf axis="self"/>
+          <dgm:constrLst/>
+          <dgm:ruleLst/>
+        </dgm:layoutNode>
+      </dgm:forEach>
+    </dgm:forEach>
+  </dgm:layoutNode>
+  <dgm:extLst>
+    <a:ext uri="{68A01E43-0DF5-4B5B-8FA6-DAF915123BFB}">
+      <dgm1612:lstStyle xmlns:dgm1612="http://schemas.microsoft.com/office/drawing/2016/12/diagram">
+        <a:lvl1pPr>
+          <a:lnSpc>
+            <a:spcPct val="100000"/>
+          </a:lnSpc>
+        </a:lvl1pPr>
+        <a:lvl2pPr>
+          <a:lnSpc>
+            <a:spcPct val="100000"/>
+          </a:lnSpc>
+        </a:lvl2pPr>
+      </dgm1612:lstStyle>
+    </a:ext>
+  </dgm:extLst>
+</dgm:layoutDef>
+</file>
+
+<file path=ppt/diagrams/quickStyle1.xml><?xml version="1.0" encoding="utf-8"?>
+<dgm:styleDef xmlns:dgm="http://schemas.openxmlformats.org/drawingml/2006/diagram" xmlns:a="http://schemas.openxmlformats.org/drawingml/2006/main" uniqueId="urn:microsoft.com/office/officeart/2005/8/quickstyle/simple1">
+  <dgm:title val=""/>
+  <dgm:desc val=""/>
+  <dgm:catLst>
+    <dgm:cat type="simple" pri="10100"/>
+  </dgm:catLst>
+  <dgm:scene3d>
+    <a:camera prst="orthographicFront"/>
+    <a:lightRig rig="threePt" dir="t"/>
+  </dgm:scene3d>
+  <dgm:styleLbl name="node0">
+    <dgm:scene3d>
+      <a:camera prst="orthographicFront"/>
+      <a:lightRig rig="threePt" dir="t"/>
+    </dgm:scene3d>
+    <dgm:sp3d/>
+    <dgm:txPr/>
+    <dgm:style>
+      <a:lnRef idx="2">
+        <a:scrgbClr r="0" g="0" b="0"/>
+      </a:lnRef>
+      <a:fillRef idx="1">
+        <a:scrgbClr r="0" g="0" b="0"/>
+      </a:fillRef>
+      <a:effectRef idx="0">
+        <a:scrgbClr r="0" g="0" b="0"/>
+      </a:effectRef>
+      <a:fontRef idx="minor">
+        <a:schemeClr val="lt1"/>
+      </a:fontRef>
+    </dgm:style>
+  </dgm:styleLbl>
+  <dgm:styleLbl name="lnNode1">
+    <dgm:scene3d>
+      <a:camera prst="orthographicFront"/>
+      <a:lightRig rig="threePt" dir="t"/>
+    </dgm:scene3d>
+    <dgm:sp3d/>
+    <dgm:txPr/>
+    <dgm:style>
+      <a:lnRef idx="2">
+        <a:scrgbClr r="0" g="0" b="0"/>
+      </a:lnRef>
+      <a:fillRef idx="1">
+        <a:scrgbClr r="0" g="0" b="0"/>
+      </a:fillRef>
+      <a:effectRef idx="0">
+        <a:scrgbClr r="0" g="0" b="0"/>
+      </a:effectRef>
+      <a:fontRef idx="minor">
+        <a:schemeClr val="lt1"/>
+      </a:fontRef>
+    </dgm:style>
+  </dgm:styleLbl>
+  <dgm:styleLbl name="vennNode1">
+    <dgm:scene3d>
+      <a:camera prst="orthographicFront"/>
+      <a:lightRig rig="threePt" dir="t"/>
+    </dgm:scene3d>
+    <dgm:sp3d/>
+    <dgm:txPr/>
+    <dgm:style>
+      <a:lnRef idx="2">
+        <a:scrgbClr r="0" g="0" b="0"/>
+      </a:lnRef>
+      <a:fillRef idx="1">
+        <a:scrgbClr r="0" g="0" b="0"/>
+      </a:fillRef>
+      <a:effectRef idx="0">
+        <a:scrgbClr r="0" g="0" b="0"/>
+      </a:effectRef>
+      <a:fontRef idx="minor">
+        <a:schemeClr val="tx1"/>
+      </a:fontRef>
+    </dgm:style>
+  </dgm:styleLbl>
+  <dgm:styleLbl name="alignNode1">
+    <dgm:scene3d>
+      <a:camera prst="orthographicFront"/>
+      <a:lightRig rig="threePt" dir="t"/>
+    </dgm:scene3d>
+    <dgm:sp3d/>
+    <dgm:txPr/>
+    <dgm:style>
+      <a:lnRef idx="2">
+        <a:scrgbClr r="0" g="0" b="0"/>
+      </a:lnRef>
+      <a:fillRef idx="1">
+        <a:scrgbClr r="0" g="0" b="0"/>
+      </a:fillRef>
+      <a:effectRef idx="0">
+        <a:scrgbClr r="0" g="0" b="0"/>
+      </a:effectRef>
+      <a:fontRef idx="minor">
+        <a:schemeClr val="lt1"/>
+      </a:fontRef>
+    </dgm:style>
+  </dgm:styleLbl>
+  <dgm:styleLbl name="node1">
+    <dgm:scene3d>
+      <a:camera prst="orthographicFront"/>
+      <a:lightRig rig="threePt" dir="t"/>
+    </dgm:scene3d>
+    <dgm:sp3d/>
+    <dgm:txPr/>
+    <dgm:style>
+      <a:lnRef idx="2">
+        <a:scrgbClr r="0" g="0" b="0"/>
+      </a:lnRef>
+      <a:fillRef idx="1">
+        <a:scrgbClr r="0" g="0" b="0"/>
+      </a:fillRef>
+      <a:effectRef idx="0">
+        <a:scrgbClr r="0" g="0" b="0"/>
+      </a:effectRef>
+      <a:fontRef idx="minor">
+        <a:schemeClr val="lt1"/>
+      </a:fontRef>
+    </dgm:style>
+  </dgm:styleLbl>
+  <dgm:styleLbl name="node2">
+    <dgm:scene3d>
+      <a:camera prst="orthographicFront"/>
+      <a:lightRig rig="threePt" dir="t"/>
+    </dgm:scene3d>
+    <dgm:sp3d/>
+    <dgm:txPr/>
+    <dgm:style>
+      <a:lnRef idx="2">
+        <a:scrgbClr r="0" g="0" b="0"/>
+      </a:lnRef>
+      <a:fillRef idx="1">
+        <a:scrgbClr r="0" g="0" b="0"/>
+      </a:fillRef>
+      <a:effectRef idx="0">
+        <a:scrgbClr r="0" g="0" b="0"/>
+      </a:effectRef>
+      <a:fontRef idx="minor">
+        <a:schemeClr val="lt1"/>
+      </a:fontRef>
+    </dgm:style>
+  </dgm:styleLbl>
+  <dgm:styleLbl name="node3">
+    <dgm:scene3d>
+      <a:camera prst="orthographicFront"/>
+      <a:lightRig rig="threePt" dir="t"/>
+    </dgm:scene3d>
+    <dgm:sp3d/>
+    <dgm:txPr/>
+    <dgm:style>
+      <a:lnRef idx="2">
+        <a:scrgbClr r="0" g="0" b="0"/>
+      </a:lnRef>
+      <a:fillRef idx="1">
+        <a:scrgbClr r="0" g="0" b="0"/>
+      </a:fillRef>
+      <a:effectRef idx="0">
+        <a:scrgbClr r="0" g="0" b="0"/>
+      </a:effectRef>
+      <a:fontRef idx="minor">
+        <a:schemeClr val="lt1"/>
+      </a:fontRef>
+    </dgm:style>
+  </dgm:styleLbl>
+  <dgm:styleLbl name="node4">
+    <dgm:scene3d>
+      <a:camera prst="orthographicFront"/>
+      <a:lightRig rig="threePt" dir="t"/>
+    </dgm:scene3d>
+    <dgm:sp3d/>
+    <dgm:txPr/>
+    <dgm:style>
+      <a:lnRef idx="2">
+        <a:scrgbClr r="0" g="0" b="0"/>
+      </a:lnRef>
+      <a:fillRef idx="1">
+        <a:scrgbClr r="0" g="0" b="0"/>
+      </a:fillRef>
+      <a:effectRef idx="0">
+        <a:scrgbClr r="0" g="0" b="0"/>
+      </a:effectRef>
+      <a:fontRef idx="minor">
+        <a:schemeClr val="lt1"/>
+      </a:fontRef>
+    </dgm:style>
+  </dgm:styleLbl>
+  <dgm:styleLbl name="fgImgPlace1">
+    <dgm:scene3d>
+      <a:camera prst="orthographicFront"/>
+      <a:lightRig rig="threePt" dir="t"/>
+    </dgm:scene3d>
+    <dgm:sp3d/>
+    <dgm:txPr/>
+    <dgm:style>
+      <a:lnRef idx="2">
+        <a:scrgbClr r="0" g="0" b="0"/>
+      </a:lnRef>
+      <a:fillRef idx="1">
+        <a:scrgbClr r="0" g="0" b="0"/>
+      </a:fillRef>
+      <a:effectRef idx="0">
+        <a:scrgbClr r="0" g="0" b="0"/>
+      </a:effectRef>
+      <a:fontRef idx="minor"/>
+    </dgm:style>
+  </dgm:styleLbl>
+  <dgm:styleLbl name="alignImgPlace1">
+    <dgm:scene3d>
+      <a:camera prst="orthographicFront"/>
+      <a:lightRig rig="threePt" dir="t"/>
+    </dgm:scene3d>
+    <dgm:sp3d/>
+    <dgm:txPr/>
+    <dgm:style>
+      <a:lnRef idx="2">
+        <a:scrgbClr r="0" g="0" b="0"/>
+      </a:lnRef>
+      <a:fillRef idx="1">
+        <a:scrgbClr r="0" g="0" b="0"/>
+      </a:fillRef>
+      <a:effectRef idx="0">
+        <a:scrgbClr r="0" g="0" b="0"/>
+      </a:effectRef>
+      <a:fontRef idx="minor"/>
+    </dgm:style>
+  </dgm:styleLbl>
+  <dgm:styleLbl name="bgImgPlace1">
+    <dgm:scene3d>
+      <a:camera prst="orthographicFront"/>
+      <a:lightRig rig="threePt" dir="t"/>
+    </dgm:scene3d>
+    <dgm:sp3d/>
+    <dgm:txPr/>
+    <dgm:style>
+      <a:lnRef idx="2">
+        <a:scrgbClr r="0" g="0" b="0"/>
+      </a:lnRef>
+      <a:fillRef idx="1">
+        <a:scrgbClr r="0" g="0" b="0"/>
+      </a:fillRef>
+      <a:effectRef idx="0">
+        <a:scrgbClr r="0" g="0" b="0"/>
+      </a:effectRef>
+      <a:fontRef idx="minor"/>
+    </dgm:style>
+  </dgm:styleLbl>
+  <dgm:styleLbl name="sibTrans2D1">
+    <dgm:scene3d>
+      <a:camera prst="orthographicFront"/>
+      <a:lightRig rig="threePt" dir="t"/>
+    </dgm:scene3d>
+    <dgm:sp3d/>
+    <dgm:txPr/>
+    <dgm:style>
+      <a:lnRef idx="0">
+        <a:scrgbClr r="0" g="0" b="0"/>
+      </a:lnRef>
+      <a:fillRef idx="1">
+        <a:scrgbClr r="0" g="0" b="0"/>
+      </a:fillRef>
+      <a:effectRef idx="0">
+        <a:scrgbClr r="0" g="0" b="0"/>
+      </a:effectRef>
+      <a:fontRef idx="minor">
+        <a:schemeClr val="lt1"/>
+      </a:fontRef>
+    </dgm:style>
+  </dgm:styleLbl>
+  <dgm:styleLbl name="fgSibTrans2D1">
+    <dgm:scene3d>
+      <a:camera prst="orthographicFront"/>
+      <a:lightRig rig="threePt" dir="t"/>
+    </dgm:scene3d>
+    <dgm:sp3d/>
+    <dgm:txPr/>
+    <dgm:style>
+      <a:lnRef idx="0">
+        <a:scrgbClr r="0" g="0" b="0"/>
+      </a:lnRef>
+      <a:fillRef idx="1">
+        <a:scrgbClr r="0" g="0" b="0"/>
+      </a:fillRef>
+      <a:effectRef idx="0">
+        <a:scrgbClr r="0" g="0" b="0"/>
+      </a:effectRef>
+      <a:fontRef idx="minor">
+        <a:schemeClr val="lt1"/>
+      </a:fontRef>
+    </dgm:style>
+  </dgm:styleLbl>
+  <dgm:styleLbl name="bgSibTrans2D1">
+    <dgm:scene3d>
+      <a:camera prst="orthographicFront"/>
+      <a:lightRig rig="threePt" dir="t"/>
+    </dgm:scene3d>
+    <dgm:sp3d/>
+    <dgm:txPr/>
+    <dgm:style>
+      <a:lnRef idx="0">
+        <a:scrgbClr r="0" g="0" b="0"/>
+      </a:lnRef>
+      <a:fillRef idx="1">
+        <a:scrgbClr r="0" g="0" b="0"/>
+      </a:fillRef>
+      <a:effectRef idx="0">
+        <a:scrgbClr r="0" g="0" b="0"/>
+      </a:effectRef>
+      <a:fontRef idx="minor">
+        <a:schemeClr val="lt1"/>
+      </a:fontRef>
+    </dgm:style>
+  </dgm:styleLbl>
+  <dgm:styleLbl name="sibTrans1D1">
+    <dgm:scene3d>
+      <a:camera prst="orthographicFront"/>
+      <a:lightRig rig="threePt" dir="t"/>
+    </dgm:scene3d>
+    <dgm:sp3d/>
+    <dgm:txPr/>
+    <dgm:style>
+      <a:lnRef idx="1">
+        <a:scrgbClr r="0" g="0" b="0"/>
+      </a:lnRef>
+      <a:fillRef idx="0">
+        <a:scrgbClr r="0" g="0" b="0"/>
+      </a:fillRef>
+      <a:effectRef idx="0">
+        <a:scrgbClr r="0" g="0" b="0"/>
+      </a:effectRef>
+      <a:fontRef idx="minor"/>
+    </dgm:style>
+  </dgm:styleLbl>
+  <dgm:styleLbl name="callout">
+    <dgm:scene3d>
+      <a:camera prst="orthographicFront"/>
+      <a:lightRig rig="threePt" dir="t"/>
+    </dgm:scene3d>
+    <dgm:sp3d/>
+    <dgm:txPr/>
+    <dgm:style>
+      <a:lnRef idx="2">
+        <a:scrgbClr r="0" g="0" b="0"/>
+      </a:lnRef>
+      <a:fillRef idx="1">
+        <a:scrgbClr r="0" g="0" b="0"/>
+      </a:fillRef>
+      <a:effectRef idx="0">
+        <a:scrgbClr r="0" g="0" b="0"/>
+      </a:effectRef>
+      <a:fontRef idx="minor"/>
+    </dgm:style>
+  </dgm:styleLbl>
+  <dgm:styleLbl name="asst0">
+    <dgm:scene3d>
+      <a:camera prst="orthographicFront"/>
+      <a:lightRig rig="threePt" dir="t"/>
+    </dgm:scene3d>
+    <dgm:sp3d/>
+    <dgm:txPr/>
+    <dgm:style>
+      <a:lnRef idx="2">
+        <a:scrgbClr r="0" g="0" b="0"/>
+      </a:lnRef>
+      <a:fillRef idx="1">
+        <a:scrgbClr r="0" g="0" b="0"/>
+      </a:fillRef>
+      <a:effectRef idx="0">
+        <a:scrgbClr r="0" g="0" b="0"/>
+      </a:effectRef>
+      <a:fontRef idx="minor">
+        <a:schemeClr val="lt1"/>
+      </a:fontRef>
+    </dgm:style>
+  </dgm:styleLbl>
+  <dgm:styleLbl name="asst1">
+    <dgm:scene3d>
+      <a:camera prst="orthographicFront"/>
+      <a:lightRig rig="threePt" dir="t"/>
+    </dgm:scene3d>
+    <dgm:sp3d/>
+    <dgm:txPr/>
+    <dgm:style>
+      <a:lnRef idx="2">
+        <a:scrgbClr r="0" g="0" b="0"/>
+      </a:lnRef>
+      <a:fillRef idx="1">
+        <a:scrgbClr r="0" g="0" b="0"/>
+      </a:fillRef>
+      <a:effectRef idx="0">
+        <a:scrgbClr r="0" g="0" b="0"/>
+      </a:effectRef>
+      <a:fontRef idx="minor">
+        <a:schemeClr val="lt1"/>
+      </a:fontRef>
+    </dgm:style>
+  </dgm:styleLbl>
+  <dgm:styleLbl name="asst2">
+    <dgm:scene3d>
+      <a:camera prst="orthographicFront"/>
+      <a:lightRig rig="threePt" dir="t"/>
+    </dgm:scene3d>
+    <dgm:sp3d/>
+    <dgm:txPr/>
+    <dgm:style>
+      <a:lnRef idx="2">
+        <a:scrgbClr r="0" g="0" b="0"/>
+      </a:lnRef>
+      <a:fillRef idx="1">
+        <a:scrgbClr r="0" g="0" b="0"/>
+      </a:fillRef>
+      <a:effectRef idx="0">
+        <a:scrgbClr r="0" g="0" b="0"/>
+      </a:effectRef>
+      <a:fontRef idx="minor">
+        <a:schemeClr val="lt1"/>
+      </a:fontRef>
+    </dgm:style>
+  </dgm:styleLbl>
+  <dgm:styleLbl name="asst3">
+    <dgm:scene3d>
+      <a:camera prst="orthographicFront"/>
+      <a:lightRig rig="threePt" dir="t"/>
+    </dgm:scene3d>
+    <dgm:sp3d/>
+    <dgm:txPr/>
+    <dgm:style>
+      <a:lnRef idx="2">
+        <a:scrgbClr r="0" g="0" b="0"/>
+      </a:lnRef>
+      <a:fillRef idx="1">
+        <a:scrgbClr r="0" g="0" b="0"/>
+      </a:fillRef>
+      <a:effectRef idx="0">
+        <a:scrgbClr r="0" g="0" b="0"/>
+      </a:effectRef>
+      <a:fontRef idx="minor">
+        <a:schemeClr val="lt1"/>
+      </a:fontRef>
+    </dgm:style>
+  </dgm:styleLbl>
+  <dgm:styleLbl name="asst4">
+    <dgm:scene3d>
+      <a:camera prst="orthographicFront"/>
+      <a:lightRig rig="threePt" dir="t"/>
+    </dgm:scene3d>
+    <dgm:sp3d/>
+    <dgm:txPr/>
+    <dgm:style>
+      <a:lnRef idx="2">
+        <a:scrgbClr r="0" g="0" b="0"/>
+      </a:lnRef>
+      <a:fillRef idx="1">
+        <a:scrgbClr r="0" g="0" b="0"/>
+      </a:fillRef>
+      <a:effectRef idx="0">
+        <a:scrgbClr r="0" g="0" b="0"/>
+      </a:effectRef>
+      <a:fontRef idx="minor">
+        <a:schemeClr val="lt1"/>
+      </a:fontRef>
+    </dgm:style>
+  </dgm:styleLbl>
+  <dgm:styleLbl name="parChTrans2D1">
+    <dgm:scene3d>
+      <a:camera prst="orthographicFront"/>
+      <a:lightRig rig="threePt" dir="t"/>
+    </dgm:scene3d>
+    <dgm:sp3d/>
+    <dgm:txPr/>
+    <dgm:style>
+      <a:lnRef idx="2">
+        <a:scrgbClr r="0" g="0" b="0"/>
+      </a:lnRef>
+      <a:fillRef idx="1">
+        <a:scrgbClr r="0" g="0" b="0"/>
+      </a:fillRef>
+      <a:effectRef idx="0">
+        <a:scrgbClr r="0" g="0" b="0"/>
+      </a:effectRef>
+      <a:fontRef idx="minor">
+        <a:schemeClr val="lt1"/>
+      </a:fontRef>
+    </dgm:style>
+  </dgm:styleLbl>
+  <dgm:styleLbl name="parChTrans2D2">
+    <dgm:scene3d>
+      <a:camera prst="orthographicFront"/>
+      <a:lightRig rig="threePt" dir="t"/>
+    </dgm:scene3d>
+    <dgm:sp3d/>
+    <dgm:txPr/>
+    <dgm:style>
+      <a:lnRef idx="2">
+        <a:scrgbClr r="0" g="0" b="0"/>
+      </a:lnRef>
+      <a:fillRef idx="1">
+        <a:scrgbClr r="0" g="0" b="0"/>
+      </a:fillRef>
+      <a:effectRef idx="0">
+        <a:scrgbClr r="0" g="0" b="0"/>
+      </a:effectRef>
+      <a:fontRef idx="minor">
+        <a:schemeClr val="lt1"/>
+      </a:fontRef>
+    </dgm:style>
+  </dgm:styleLbl>
+  <dgm:styleLbl name="parChTrans2D3">
+    <dgm:scene3d>
+      <a:camera prst="orthographicFront"/>
+      <a:lightRig rig="threePt" dir="t"/>
+    </dgm:scene3d>
+    <dgm:sp3d/>
+    <dgm:txPr/>
+    <dgm:style>
+      <a:lnRef idx="2">
+        <a:scrgbClr r="0" g="0" b="0"/>
+      </a:lnRef>
+      <a:fillRef idx="1">
+        <a:scrgbClr r="0" g="0" b="0"/>
+      </a:fillRef>
+      <a:effectRef idx="0">
+        <a:scrgbClr r="0" g="0" b="0"/>
+      </a:effectRef>
+      <a:fontRef idx="minor">
+        <a:schemeClr val="lt1"/>
+      </a:fontRef>
+    </dgm:style>
+  </dgm:styleLbl>
+  <dgm:styleLbl name="parChTrans2D4">
+    <dgm:scene3d>
+      <a:camera prst="orthographicFront"/>
+      <a:lightRig rig="threePt" dir="t"/>
+    </dgm:scene3d>
+    <dgm:sp3d/>
+    <dgm:txPr/>
+    <dgm:style>
+      <a:lnRef idx="2">
+        <a:scrgbClr r="0" g="0" b="0"/>
+      </a:lnRef>
+      <a:fillRef idx="1">
+        <a:scrgbClr r="0" g="0" b="0"/>
+      </a:fillRef>
+      <a:effectRef idx="0">
+        <a:scrgbClr r="0" g="0" b="0"/>
+      </a:effectRef>
+      <a:fontRef idx="minor">
+        <a:schemeClr val="lt1"/>
+      </a:fontRef>
+    </dgm:style>
+  </dgm:styleLbl>
+  <dgm:styleLbl name="parChTrans1D1">
+    <dgm:scene3d>
+      <a:camera prst="orthographicFront"/>
+      <a:lightRig rig="threePt" dir="t"/>
+    </dgm:scene3d>
+    <dgm:sp3d/>
+    <dgm:txPr/>
+    <dgm:style>
+      <a:lnRef idx="2">
+        <a:scrgbClr r="0" g="0" b="0"/>
+      </a:lnRef>
+      <a:fillRef idx="0">
+        <a:scrgbClr r="0" g="0" b="0"/>
+      </a:fillRef>
+      <a:effectRef idx="0">
+        <a:scrgbClr r="0" g="0" b="0"/>
+      </a:effectRef>
+      <a:fontRef idx="minor"/>
+    </dgm:style>
+  </dgm:styleLbl>
+  <dgm:styleLbl name="parChTrans1D2">
+    <dgm:scene3d>
+      <a:camera prst="orthographicFront"/>
+      <a:lightRig rig="threePt" dir="t"/>
+    </dgm:scene3d>
+    <dgm:sp3d/>
+    <dgm:txPr/>
+    <dgm:style>
+      <a:lnRef idx="2">
+        <a:scrgbClr r="0" g="0" b="0"/>
+      </a:lnRef>
+      <a:fillRef idx="0">
+        <a:scrgbClr r="0" g="0" b="0"/>
+      </a:fillRef>
+      <a:effectRef idx="0">
+        <a:scrgbClr r="0" g="0" b="0"/>
+      </a:effectRef>
+      <a:fontRef idx="minor"/>
+    </dgm:style>
+  </dgm:styleLbl>
+  <dgm:styleLbl name="parChTrans1D3">
+    <dgm:scene3d>
+      <a:camera prst="orthographicFront"/>
+      <a:lightRig rig="threePt" dir="t"/>
+    </dgm:scene3d>
+    <dgm:sp3d/>
+    <dgm:txPr/>
+    <dgm:style>
+      <a:lnRef idx="2">
+        <a:scrgbClr r="0" g="0" b="0"/>
+      </a:lnRef>
+      <a:fillRef idx="0">
+        <a:scrgbClr r="0" g="0" b="0"/>
+      </a:fillRef>
+      <a:effectRef idx="0">
+        <a:scrgbClr r="0" g="0" b="0"/>
+      </a:effectRef>
+      <a:fontRef idx="minor"/>
+    </dgm:style>
+  </dgm:styleLbl>
+  <dgm:styleLbl name="parChTrans1D4">
+    <dgm:scene3d>
+      <a:camera prst="orthographicFront"/>
+      <a:lightRig rig="threePt" dir="t"/>
+    </dgm:scene3d>
+    <dgm:sp3d/>
+    <dgm:txPr/>
+    <dgm:style>
+      <a:lnRef idx="2">
+        <a:scrgbClr r="0" g="0" b="0"/>
+      </a:lnRef>
+      <a:fillRef idx="0">
+        <a:scrgbClr r="0" g="0" b="0"/>
+      </a:fillRef>
+      <a:effectRef idx="0">
+        <a:scrgbClr r="0" g="0" b="0"/>
+      </a:effectRef>
+      <a:fontRef idx="minor"/>
+    </dgm:style>
+  </dgm:styleLbl>
+  <dgm:styleLbl name="fgAcc1">
+    <dgm:scene3d>
+      <a:camera prst="orthographicFront"/>
+      <a:lightRig rig="threePt" dir="t"/>
+    </dgm:scene3d>
+    <dgm:sp3d/>
+    <dgm:txPr/>
+    <dgm:style>
+      <a:lnRef idx="2">
+        <a:scrgbClr r="0" g="0" b="0"/>
+      </a:lnRef>
+      <a:fillRef idx="1">
+        <a:scrgbClr r="0" g="0" b="0"/>
+      </a:fillRef>
+      <a:effectRef idx="0">
+        <a:scrgbClr r="0" g="0" b="0"/>
+      </a:effectRef>
+      <a:fontRef idx="minor"/>
+    </dgm:style>
+  </dgm:styleLbl>
+  <dgm:styleLbl name="conFgAcc1">
+    <dgm:scene3d>
+      <a:camera prst="orthographicFront"/>
+      <a:lightRig rig="threePt" dir="t"/>
+    </dgm:scene3d>
+    <dgm:sp3d/>
+    <dgm:txPr/>
+    <dgm:style>
+      <a:lnRef idx="2">
+        <a:scrgbClr r="0" g="0" b="0"/>
+      </a:lnRef>
+      <a:fillRef idx="1">
+        <a:scrgbClr r="0" g="0" b="0"/>
+      </a:fillRef>
+      <a:effectRef idx="0">
+        <a:scrgbClr r="0" g="0" b="0"/>
+      </a:effectRef>
+      <a:fontRef idx="minor"/>
+    </dgm:style>
+  </dgm:styleLbl>
+  <dgm:styleLbl name="alignAcc1">
+    <dgm:scene3d>
+      <a:camera prst="orthographicFront"/>
+      <a:lightRig rig="threePt" dir="t"/>
+    </dgm:scene3d>
+    <dgm:sp3d/>
+    <dgm:txPr/>
+    <dgm:style>
+      <a:lnRef idx="2">
+        <a:scrgbClr r="0" g="0" b="0"/>
+      </a:lnRef>
+      <a:fillRef idx="1">
+        <a:scrgbClr r="0" g="0" b="0"/>
+      </a:fillRef>
+      <a:effectRef idx="0">
+        <a:scrgbClr r="0" g="0" b="0"/>
+      </a:effectRef>
+      <a:fontRef idx="minor"/>
+    </dgm:style>
+  </dgm:styleLbl>
+  <dgm:styleLbl name="trAlignAcc1">
+    <dgm:scene3d>
+      <a:camera prst="orthographicFront"/>
+      <a:lightRig rig="threePt" dir="t"/>
+    </dgm:scene3d>
+    <dgm:sp3d/>
+    <dgm:txPr/>
+    <dgm:style>
+      <a:lnRef idx="1">
+        <a:scrgbClr r="0" g="0" b="0"/>
+      </a:lnRef>
+      <a:fillRef idx="1">
+        <a:scrgbClr r="0" g="0" b="0"/>
+      </a:fillRef>
+      <a:effectRef idx="0">
+        <a:scrgbClr r="0" g="0" b="0"/>
+      </a:effectRef>
+      <a:fontRef idx="minor"/>
+    </dgm:style>
+  </dgm:styleLbl>
+  <dgm:styleLbl name="bgAcc1">
+    <dgm:scene3d>
+      <a:camera prst="orthographicFront"/>
+      <a:lightRig rig="threePt" dir="t"/>
+    </dgm:scene3d>
+    <dgm:sp3d/>
+    <dgm:txPr/>
+    <dgm:style>
+      <a:lnRef idx="2">
+        <a:scrgbClr r="0" g="0" b="0"/>
+      </a:lnRef>
+      <a:fillRef idx="1">
+        <a:scrgbClr r="0" g="0" b="0"/>
+      </a:fillRef>
+      <a:effectRef idx="0">
+        <a:scrgbClr r="0" g="0" b="0"/>
+      </a:effectRef>
+      <a:fontRef idx="minor"/>
+    </dgm:style>
+  </dgm:styleLbl>
+  <dgm:styleLbl name="solidFgAcc1">
+    <dgm:scene3d>
+      <a:camera prst="orthographicFront"/>
+      <a:lightRig rig="threePt" dir="t"/>
+    </dgm:scene3d>
+    <dgm:sp3d/>
+    <dgm:txPr/>
+    <dgm:style>
+      <a:lnRef idx="2">
+        <a:scrgbClr r="0" g="0" b="0"/>
+      </a:lnRef>
+      <a:fillRef idx="1">
+        <a:scrgbClr r="0" g="0" b="0"/>
+      </a:fillRef>
+      <a:effectRef idx="0">
+        <a:scrgbClr r="0" g="0" b="0"/>
+      </a:effectRef>
+      <a:fontRef idx="minor"/>
+    </dgm:style>
+  </dgm:styleLbl>
+  <dgm:styleLbl name="solidAlignAcc1">
+    <dgm:scene3d>
+      <a:camera prst="orthographicFront"/>
+      <a:lightRig rig="threePt" dir="t"/>
+    </dgm:scene3d>
+    <dgm:sp3d/>
+    <dgm:txPr/>
+    <dgm:style>
+      <a:lnRef idx="2">
+        <a:scrgbClr r="0" g="0" b="0"/>
+      </a:lnRef>
+      <a:fillRef idx="1">
+        <a:scrgbClr r="0" g="0" b="0"/>
+      </a:fillRef>
+      <a:effectRef idx="0">
+        <a:scrgbClr r="0" g="0" b="0"/>
+      </a:effectRef>
+      <a:fontRef idx="minor"/>
+    </dgm:style>
+  </dgm:styleLbl>
+  <dgm:styleLbl name="solidBgAcc1">
+    <dgm:scene3d>
+      <a:camera prst="orthographicFront"/>
+      <a:lightRig rig="threePt" dir="t"/>
+    </dgm:scene3d>
+    <dgm:sp3d/>
+    <dgm:txPr/>
+    <dgm:style>
+      <a:lnRef idx="2">
+        <a:scrgbClr r="0" g="0" b="0"/>
+      </a:lnRef>
+      <a:fillRef idx="1">
+        <a:scrgbClr r="0" g="0" b="0"/>
+      </a:fillRef>
+      <a:effectRef idx="0">
+        <a:scrgbClr r="0" g="0" b="0"/>
+      </a:effectRef>
+      <a:fontRef idx="minor"/>
+    </dgm:style>
+  </dgm:styleLbl>
+  <dgm:styleLbl name="fgAccFollowNode1">
+    <dgm:scene3d>
+      <a:camera prst="orthographicFront"/>
+      <a:lightRig rig="threePt" dir="t"/>
+    </dgm:scene3d>
+    <dgm:sp3d/>
+    <dgm:txPr/>
+    <dgm:style>
+      <a:lnRef idx="2">
+        <a:scrgbClr r="0" g="0" b="0"/>
+      </a:lnRef>
+      <a:fillRef idx="1">
+        <a:scrgbClr r="0" g="0" b="0"/>
+      </a:fillRef>
+      <a:effectRef idx="0">
+        <a:scrgbClr r="0" g="0" b="0"/>
+      </a:effectRef>
+      <a:fontRef idx="minor"/>
+    </dgm:style>
+  </dgm:styleLbl>
+  <dgm:styleLbl name="alignAccFollowNode1">
+    <dgm:scene3d>
+      <a:camera prst="orthographicFront"/>
+      <a:lightRig rig="threePt" dir="t"/>
+    </dgm:scene3d>
+    <dgm:sp3d/>
+    <dgm:txPr/>
+    <dgm:style>
+      <a:lnRef idx="2">
+        <a:scrgbClr r="0" g="0" b="0"/>
+      </a:lnRef>
+      <a:fillRef idx="1">
+        <a:scrgbClr r="0" g="0" b="0"/>
+      </a:fillRef>
+      <a:effectRef idx="0">
+        <a:scrgbClr r="0" g="0" b="0"/>
+      </a:effectRef>
+      <a:fontRef idx="minor"/>
+    </dgm:style>
+  </dgm:styleLbl>
+  <dgm:styleLbl name="bgAccFollowNode1">
+    <dgm:scene3d>
+      <a:camera prst="orthographicFront"/>
+      <a:lightRig rig="threePt" dir="t"/>
+    </dgm:scene3d>
+    <dgm:sp3d/>
+    <dgm:txPr/>
+    <dgm:style>
+      <a:lnRef idx="2">
+        <a:scrgbClr r="0" g="0" b="0"/>
+      </a:lnRef>
+      <a:fillRef idx="1">
+        <a:scrgbClr r="0" g="0" b="0"/>
+      </a:fillRef>
+      <a:effectRef idx="0">
+        <a:scrgbClr r="0" g="0" b="0"/>
+      </a:effectRef>
+      <a:fontRef idx="minor"/>
+    </dgm:style>
+  </dgm:styleLbl>
+  <dgm:styleLbl name="fgAcc0">
+    <dgm:scene3d>
+      <a:camera prst="orthographicFront"/>
+      <a:lightRig rig="threePt" dir="t"/>
+    </dgm:scene3d>
+    <dgm:sp3d/>
+    <dgm:txPr/>
+    <dgm:style>
+      <a:lnRef idx="2">
+        <a:scrgbClr r="0" g="0" b="0"/>
+      </a:lnRef>
+      <a:fillRef idx="1">
+        <a:scrgbClr r="0" g="0" b="0"/>
+      </a:fillRef>
+      <a:effectRef idx="0">
+        <a:scrgbClr r="0" g="0" b="0"/>
+      </a:effectRef>
+      <a:fontRef idx="minor"/>
+    </dgm:style>
+  </dgm:styleLbl>
+  <dgm:styleLbl name="fgAcc2">
+    <dgm:scene3d>
+      <a:camera prst="orthographicFront"/>
+      <a:lightRig rig="threePt" dir="t"/>
+    </dgm:scene3d>
+    <dgm:sp3d/>
+    <dgm:txPr/>
+    <dgm:style>
+      <a:lnRef idx="2">
+        <a:scrgbClr r="0" g="0" b="0"/>
+      </a:lnRef>
+      <a:fillRef idx="1">
+        <a:scrgbClr r="0" g="0" b="0"/>
+      </a:fillRef>
+      <a:effectRef idx="0">
+        <a:scrgbClr r="0" g="0" b="0"/>
+      </a:effectRef>
+      <a:fontRef idx="minor"/>
+    </dgm:style>
+  </dgm:styleLbl>
+  <dgm:styleLbl name="fgAcc3">
+    <dgm:scene3d>
+      <a:camera prst="orthographicFront"/>
+      <a:lightRig rig="threePt" dir="t"/>
+    </dgm:scene3d>
+    <dgm:sp3d/>
+    <dgm:txPr/>
+    <dgm:style>
+      <a:lnRef idx="2">
+        <a:scrgbClr r="0" g="0" b="0"/>
+      </a:lnRef>
+      <a:fillRef idx="1">
+        <a:scrgbClr r="0" g="0" b="0"/>
+      </a:fillRef>
+      <a:effectRef idx="0">
+        <a:scrgbClr r="0" g="0" b="0"/>
+      </a:effectRef>
+      <a:fontRef idx="minor"/>
+    </dgm:style>
+  </dgm:styleLbl>
+  <dgm:styleLbl name="fgAcc4">
+    <dgm:scene3d>
+      <a:camera prst="orthographicFront"/>
+      <a:lightRig rig="threePt" dir="t"/>
+    </dgm:scene3d>
+    <dgm:sp3d/>
+    <dgm:txPr/>
+    <dgm:style>
+      <a:lnRef idx="2">
+        <a:scrgbClr r="0" g="0" b="0"/>
+      </a:lnRef>
+      <a:fillRef idx="1">
+        <a:scrgbClr r="0" g="0" b="0"/>
+      </a:fillRef>
+      <a:effectRef idx="0">
+        <a:scrgbClr r="0" g="0" b="0"/>
+      </a:effectRef>
+      <a:fontRef idx="minor"/>
+    </dgm:style>
+  </dgm:styleLbl>
+  <dgm:styleLbl name="bgShp">
+    <dgm:scene3d>
+      <a:camera prst="orthographicFront"/>
+      <a:lightRig rig="threePt" dir="t"/>
+    </dgm:scene3d>
+    <dgm:sp3d/>
+    <dgm:txPr/>
+    <dgm:style>
+      <a:lnRef idx="0">
+        <a:scrgbClr r="0" g="0" b="0"/>
+      </a:lnRef>
+      <a:fillRef idx="1">
+        <a:scrgbClr r="0" g="0" b="0"/>
+      </a:fillRef>
+      <a:effectRef idx="0">
+        <a:scrgbClr r="0" g="0" b="0"/>
+      </a:effectRef>
+      <a:fontRef idx="minor"/>
+    </dgm:style>
+  </dgm:styleLbl>
+  <dgm:styleLbl name="dkBgShp">
+    <dgm:scene3d>
+      <a:camera prst="orthographicFront"/>
+      <a:lightRig rig="threePt" dir="t"/>
+    </dgm:scene3d>
+    <dgm:sp3d/>
+    <dgm:txPr/>
+    <dgm:style>
+      <a:lnRef idx="0">
+        <a:scrgbClr r="0" g="0" b="0"/>
+      </a:lnRef>
+      <a:fillRef idx="1">
+        <a:scrgbClr r="0" g="0" b="0"/>
+      </a:fillRef>
+      <a:effectRef idx="0">
+        <a:scrgbClr r="0" g="0" b="0"/>
+      </a:effectRef>
+      <a:fontRef idx="minor"/>
+    </dgm:style>
+  </dgm:styleLbl>
+  <dgm:styleLbl name="trBgShp">
+    <dgm:scene3d>
+      <a:camera prst="orthographicFront"/>
+      <a:lightRig rig="threePt" dir="t"/>
+    </dgm:scene3d>
+    <dgm:sp3d/>
+    <dgm:txPr/>
+    <dgm:style>
+      <a:lnRef idx="0">
+        <a:scrgbClr r="0" g="0" b="0"/>
+      </a:lnRef>
+      <a:fillRef idx="1">
+        <a:scrgbClr r="0" g="0" b="0"/>
+      </a:fillRef>
+      <a:effectRef idx="0">
+        <a:scrgbClr r="0" g="0" b="0"/>
+      </a:effectRef>
+      <a:fontRef idx="minor"/>
+    </dgm:style>
+  </dgm:styleLbl>
+  <dgm:styleLbl name="fgShp">
+    <dgm:scene3d>
+      <a:camera prst="orthographicFront"/>
+      <a:lightRig rig="threePt" dir="t"/>
+    </dgm:scene3d>
+    <dgm:sp3d/>
+    <dgm:txPr/>
+    <dgm:style>
+      <a:lnRef idx="2">
+        <a:scrgbClr r="0" g="0" b="0"/>
+      </a:lnRef>
+      <a:fillRef idx="1">
+        <a:scrgbClr r="0" g="0" b="0"/>
+      </a:fillRef>
+      <a:effectRef idx="0">
+        <a:scrgbClr r="0" g="0" b="0"/>
+      </a:effectRef>
+      <a:fontRef idx="minor"/>
+    </dgm:style>
+  </dgm:styleLbl>
+  <dgm:styleLbl name="revTx">
+    <dgm:scene3d>
+      <a:camera prst="orthographicFront"/>
+      <a:lightRig rig="threePt" dir="t"/>
+    </dgm:scene3d>
+    <dgm:sp3d/>
+    <dgm:txPr/>
+    <dgm:style>
+      <a:lnRef idx="0">
+        <a:scrgbClr r="0" g="0" b="0"/>
+      </a:lnRef>
+      <a:fillRef idx="0">
+        <a:scrgbClr r="0" g="0" b="0"/>
+      </a:fillRef>
+      <a:effectRef idx="0">
+        <a:scrgbClr r="0" g="0" b="0"/>
+      </a:effectRef>
+      <a:fontRef idx="minor"/>
+    </dgm:style>
+  </dgm:styleLbl>
+</dgm:styleDef>
+</file>
+
+<file path=ppt/diagrams/quickStyle2.xml><?xml version="1.0" encoding="utf-8"?>
+<dgm:styleDef xmlns:dgm="http://schemas.openxmlformats.org/drawingml/2006/diagram" xmlns:a="http://schemas.openxmlformats.org/drawingml/2006/main" uniqueId="urn:microsoft.com/office/officeart/2005/8/quickstyle/simple1">
+  <dgm:title val=""/>
+  <dgm:desc val=""/>
+  <dgm:catLst>
+    <dgm:cat type="simple" pri="10100"/>
+  </dgm:catLst>
+  <dgm:scene3d>
+    <a:camera prst="orthographicFront"/>
+    <a:lightRig rig="threePt" dir="t"/>
+  </dgm:scene3d>
+  <dgm:styleLbl name="node0">
+    <dgm:scene3d>
+      <a:camera prst="orthographicFront"/>
+      <a:lightRig rig="threePt" dir="t"/>
+    </dgm:scene3d>
+    <dgm:sp3d/>
+    <dgm:txPr/>
+    <dgm:style>
+      <a:lnRef idx="2">
+        <a:scrgbClr r="0" g="0" b="0"/>
+      </a:lnRef>
+      <a:fillRef idx="1">
+        <a:scrgbClr r="0" g="0" b="0"/>
+      </a:fillRef>
+      <a:effectRef idx="0">
+        <a:scrgbClr r="0" g="0" b="0"/>
+      </a:effectRef>
+      <a:fontRef idx="minor">
+        <a:schemeClr val="lt1"/>
+      </a:fontRef>
+    </dgm:style>
+  </dgm:styleLbl>
+  <dgm:styleLbl name="lnNode1">
+    <dgm:scene3d>
+      <a:camera prst="orthographicFront"/>
+      <a:lightRig rig="threePt" dir="t"/>
+    </dgm:scene3d>
+    <dgm:sp3d/>
+    <dgm:txPr/>
+    <dgm:style>
+      <a:lnRef idx="2">
+        <a:scrgbClr r="0" g="0" b="0"/>
+      </a:lnRef>
+      <a:fillRef idx="1">
+        <a:scrgbClr r="0" g="0" b="0"/>
+      </a:fillRef>
+      <a:effectRef idx="0">
+        <a:scrgbClr r="0" g="0" b="0"/>
+      </a:effectRef>
+      <a:fontRef idx="minor">
+        <a:schemeClr val="lt1"/>
+      </a:fontRef>
+    </dgm:style>
+  </dgm:styleLbl>
+  <dgm:styleLbl name="vennNode1">
+    <dgm:scene3d>
+      <a:camera prst="orthographicFront"/>
+      <a:lightRig rig="threePt" dir="t"/>
+    </dgm:scene3d>
+    <dgm:sp3d/>
+    <dgm:txPr/>
+    <dgm:style>
+      <a:lnRef idx="2">
+        <a:scrgbClr r="0" g="0" b="0"/>
+      </a:lnRef>
+      <a:fillRef idx="1">
+        <a:scrgbClr r="0" g="0" b="0"/>
+      </a:fillRef>
+      <a:effectRef idx="0">
+        <a:scrgbClr r="0" g="0" b="0"/>
+      </a:effectRef>
+      <a:fontRef idx="minor">
+        <a:schemeClr val="tx1"/>
+      </a:fontRef>
+    </dgm:style>
+  </dgm:styleLbl>
+  <dgm:styleLbl name="alignNode1">
+    <dgm:scene3d>
+      <a:camera prst="orthographicFront"/>
+      <a:lightRig rig="threePt" dir="t"/>
+    </dgm:scene3d>
+    <dgm:sp3d/>
+    <dgm:txPr/>
+    <dgm:style>
+      <a:lnRef idx="2">
+        <a:scrgbClr r="0" g="0" b="0"/>
+      </a:lnRef>
+      <a:fillRef idx="1">
+        <a:scrgbClr r="0" g="0" b="0"/>
+      </a:fillRef>
+      <a:effectRef idx="0">
+        <a:scrgbClr r="0" g="0" b="0"/>
+      </a:effectRef>
+      <a:fontRef idx="minor">
+        <a:schemeClr val="lt1"/>
+      </a:fontRef>
+    </dgm:style>
+  </dgm:styleLbl>
+  <dgm:styleLbl name="node1">
+    <dgm:scene3d>
+      <a:camera prst="orthographicFront"/>
+      <a:lightRig rig="threePt" dir="t"/>
+    </dgm:scene3d>
+    <dgm:sp3d/>
+    <dgm:txPr/>
+    <dgm:style>
+      <a:lnRef idx="2">
+        <a:scrgbClr r="0" g="0" b="0"/>
+      </a:lnRef>
+      <a:fillRef idx="1">
+        <a:scrgbClr r="0" g="0" b="0"/>
+      </a:fillRef>
+      <a:effectRef idx="0">
+        <a:scrgbClr r="0" g="0" b="0"/>
+      </a:effectRef>
+      <a:fontRef idx="minor">
+        <a:schemeClr val="lt1"/>
+      </a:fontRef>
+    </dgm:style>
+  </dgm:styleLbl>
+  <dgm:styleLbl name="node2">
+    <dgm:scene3d>
+      <a:camera prst="orthographicFront"/>
+      <a:lightRig rig="threePt" dir="t"/>
+    </dgm:scene3d>
+    <dgm:sp3d/>
+    <dgm:txPr/>
+    <dgm:style>
+      <a:lnRef idx="2">
+        <a:scrgbClr r="0" g="0" b="0"/>
+      </a:lnRef>
+      <a:fillRef idx="1">
+        <a:scrgbClr r="0" g="0" b="0"/>
+      </a:fillRef>
+      <a:effectRef idx="0">
+        <a:scrgbClr r="0" g="0" b="0"/>
+      </a:effectRef>
+      <a:fontRef idx="minor">
+        <a:schemeClr val="lt1"/>
+      </a:fontRef>
+    </dgm:style>
+  </dgm:styleLbl>
+  <dgm:styleLbl name="node3">
+    <dgm:scene3d>
+      <a:camera prst="orthographicFront"/>
+      <a:lightRig rig="threePt" dir="t"/>
+    </dgm:scene3d>
+    <dgm:sp3d/>
+    <dgm:txPr/>
+    <dgm:style>
+      <a:lnRef idx="2">
+        <a:scrgbClr r="0" g="0" b="0"/>
+      </a:lnRef>
+      <a:fillRef idx="1">
+        <a:scrgbClr r="0" g="0" b="0"/>
+      </a:fillRef>
+      <a:effectRef idx="0">
+        <a:scrgbClr r="0" g="0" b="0"/>
+      </a:effectRef>
+      <a:fontRef idx="minor">
+        <a:schemeClr val="lt1"/>
+      </a:fontRef>
+    </dgm:style>
+  </dgm:styleLbl>
+  <dgm:styleLbl name="node4">
+    <dgm:scene3d>
+      <a:camera prst="orthographicFront"/>
+      <a:lightRig rig="threePt" dir="t"/>
+    </dgm:scene3d>
+    <dgm:sp3d/>
+    <dgm:txPr/>
+    <dgm:style>
+      <a:lnRef idx="2">
+        <a:scrgbClr r="0" g="0" b="0"/>
+      </a:lnRef>
+      <a:fillRef idx="1">
+        <a:scrgbClr r="0" g="0" b="0"/>
+      </a:fillRef>
+      <a:effectRef idx="0">
+        <a:scrgbClr r="0" g="0" b="0"/>
+      </a:effectRef>
+      <a:fontRef idx="minor">
+        <a:schemeClr val="lt1"/>
+      </a:fontRef>
+    </dgm:style>
+  </dgm:styleLbl>
+  <dgm:styleLbl name="fgImgPlace1">
+    <dgm:scene3d>
+      <a:camera prst="orthographicFront"/>
+      <a:lightRig rig="threePt" dir="t"/>
+    </dgm:scene3d>
+    <dgm:sp3d/>
+    <dgm:txPr/>
+    <dgm:style>
+      <a:lnRef idx="2">
+        <a:scrgbClr r="0" g="0" b="0"/>
+      </a:lnRef>
+      <a:fillRef idx="1">
+        <a:scrgbClr r="0" g="0" b="0"/>
+      </a:fillRef>
+      <a:effectRef idx="0">
+        <a:scrgbClr r="0" g="0" b="0"/>
+      </a:effectRef>
+      <a:fontRef idx="minor"/>
+    </dgm:style>
+  </dgm:styleLbl>
+  <dgm:styleLbl name="alignImgPlace1">
+    <dgm:scene3d>
+      <a:camera prst="orthographicFront"/>
+      <a:lightRig rig="threePt" dir="t"/>
+    </dgm:scene3d>
+    <dgm:sp3d/>
+    <dgm:txPr/>
+    <dgm:style>
+      <a:lnRef idx="2">
+        <a:scrgbClr r="0" g="0" b="0"/>
+      </a:lnRef>
+      <a:fillRef idx="1">
+        <a:scrgbClr r="0" g="0" b="0"/>
+      </a:fillRef>
+      <a:effectRef idx="0">
+        <a:scrgbClr r="0" g="0" b="0"/>
+      </a:effectRef>
+      <a:fontRef idx="minor"/>
+    </dgm:style>
+  </dgm:styleLbl>
+  <dgm:styleLbl name="bgImgPlace1">
+    <dgm:scene3d>
+      <a:camera prst="orthographicFront"/>
+      <a:lightRig rig="threePt" dir="t"/>
+    </dgm:scene3d>
+    <dgm:sp3d/>
+    <dgm:txPr/>
+    <dgm:style>
+      <a:lnRef idx="2">
+        <a:scrgbClr r="0" g="0" b="0"/>
+      </a:lnRef>
+      <a:fillRef idx="1">
+        <a:scrgbClr r="0" g="0" b="0"/>
+      </a:fillRef>
+      <a:effectRef idx="0">
+        <a:scrgbClr r="0" g="0" b="0"/>
+      </a:effectRef>
+      <a:fontRef idx="minor"/>
+    </dgm:style>
+  </dgm:styleLbl>
+  <dgm:styleLbl name="sibTrans2D1">
+    <dgm:scene3d>
+      <a:camera prst="orthographicFront"/>
+      <a:lightRig rig="threePt" dir="t"/>
+    </dgm:scene3d>
+    <dgm:sp3d/>
+    <dgm:txPr/>
+    <dgm:style>
+      <a:lnRef idx="0">
+        <a:scrgbClr r="0" g="0" b="0"/>
+      </a:lnRef>
+      <a:fillRef idx="1">
+        <a:scrgbClr r="0" g="0" b="0"/>
+      </a:fillRef>
+      <a:effectRef idx="0">
+        <a:scrgbClr r="0" g="0" b="0"/>
+      </a:effectRef>
+      <a:fontRef idx="minor">
+        <a:schemeClr val="lt1"/>
+      </a:fontRef>
+    </dgm:style>
+  </dgm:styleLbl>
+  <dgm:styleLbl name="fgSibTrans2D1">
+    <dgm:scene3d>
+      <a:camera prst="orthographicFront"/>
+      <a:lightRig rig="threePt" dir="t"/>
+    </dgm:scene3d>
+    <dgm:sp3d/>
+    <dgm:txPr/>
+    <dgm:style>
+      <a:lnRef idx="0">
+        <a:scrgbClr r="0" g="0" b="0"/>
+      </a:lnRef>
+      <a:fillRef idx="1">
+        <a:scrgbClr r="0" g="0" b="0"/>
+      </a:fillRef>
+      <a:effectRef idx="0">
+        <a:scrgbClr r="0" g="0" b="0"/>
+      </a:effectRef>
+      <a:fontRef idx="minor">
+        <a:schemeClr val="lt1"/>
+      </a:fontRef>
+    </dgm:style>
+  </dgm:styleLbl>
+  <dgm:styleLbl name="bgSibTrans2D1">
+    <dgm:scene3d>
+      <a:camera prst="orthographicFront"/>
+      <a:lightRig rig="threePt" dir="t"/>
+    </dgm:scene3d>
+    <dgm:sp3d/>
+    <dgm:txPr/>
+    <dgm:style>
+      <a:lnRef idx="0">
+        <a:scrgbClr r="0" g="0" b="0"/>
+      </a:lnRef>
+      <a:fillRef idx="1">
+        <a:scrgbClr r="0" g="0" b="0"/>
+      </a:fillRef>
+      <a:effectRef idx="0">
+        <a:scrgbClr r="0" g="0" b="0"/>
+      </a:effectRef>
+      <a:fontRef idx="minor">
+        <a:schemeClr val="lt1"/>
+      </a:fontRef>
+    </dgm:style>
+  </dgm:styleLbl>
+  <dgm:styleLbl name="sibTrans1D1">
+    <dgm:scene3d>
+      <a:camera prst="orthographicFront"/>
+      <a:lightRig rig="threePt" dir="t"/>
+    </dgm:scene3d>
+    <dgm:sp3d/>
+    <dgm:txPr/>
+    <dgm:style>
+      <a:lnRef idx="1">
+        <a:scrgbClr r="0" g="0" b="0"/>
+      </a:lnRef>
+      <a:fillRef idx="0">
+        <a:scrgbClr r="0" g="0" b="0"/>
+      </a:fillRef>
+      <a:effectRef idx="0">
+        <a:scrgbClr r="0" g="0" b="0"/>
+      </a:effectRef>
+      <a:fontRef idx="minor"/>
+    </dgm:style>
+  </dgm:styleLbl>
+  <dgm:styleLbl name="callout">
+    <dgm:scene3d>
+      <a:camera prst="orthographicFront"/>
+      <a:lightRig rig="threePt" dir="t"/>
+    </dgm:scene3d>
+    <dgm:sp3d/>
+    <dgm:txPr/>
+    <dgm:style>
+      <a:lnRef idx="2">
+        <a:scrgbClr r="0" g="0" b="0"/>
+      </a:lnRef>
+      <a:fillRef idx="1">
+        <a:scrgbClr r="0" g="0" b="0"/>
+      </a:fillRef>
+      <a:effectRef idx="0">
+        <a:scrgbClr r="0" g="0" b="0"/>
+      </a:effectRef>
+      <a:fontRef idx="minor"/>
+    </dgm:style>
+  </dgm:styleLbl>
+  <dgm:styleLbl name="asst0">
+    <dgm:scene3d>
+      <a:camera prst="orthographicFront"/>
+      <a:lightRig rig="threePt" dir="t"/>
+    </dgm:scene3d>
+    <dgm:sp3d/>
+    <dgm:txPr/>
+    <dgm:style>
+      <a:lnRef idx="2">
+        <a:scrgbClr r="0" g="0" b="0"/>
+      </a:lnRef>
+      <a:fillRef idx="1">
+        <a:scrgbClr r="0" g="0" b="0"/>
+      </a:fillRef>
+      <a:effectRef idx="0">
+        <a:scrgbClr r="0" g="0" b="0"/>
+      </a:effectRef>
+      <a:fontRef idx="minor">
+        <a:schemeClr val="lt1"/>
+      </a:fontRef>
+    </dgm:style>
+  </dgm:styleLbl>
+  <dgm:styleLbl name="asst1">
+    <dgm:scene3d>
+      <a:camera prst="orthographicFront"/>
+      <a:lightRig rig="threePt" dir="t"/>
+    </dgm:scene3d>
+    <dgm:sp3d/>
+    <dgm:txPr/>
+    <dgm:style>
+      <a:lnRef idx="2">
+        <a:scrgbClr r="0" g="0" b="0"/>
+      </a:lnRef>
+      <a:fillRef idx="1">
+        <a:scrgbClr r="0" g="0" b="0"/>
+      </a:fillRef>
+      <a:effectRef idx="0">
+        <a:scrgbClr r="0" g="0" b="0"/>
+      </a:effectRef>
+      <a:fontRef idx="minor">
+        <a:schemeClr val="lt1"/>
+      </a:fontRef>
+    </dgm:style>
+  </dgm:styleLbl>
+  <dgm:styleLbl name="asst2">
+    <dgm:scene3d>
+      <a:camera prst="orthographicFront"/>
+      <a:lightRig rig="threePt" dir="t"/>
+    </dgm:scene3d>
+    <dgm:sp3d/>
+    <dgm:txPr/>
+    <dgm:style>
+      <a:lnRef idx="2">
+        <a:scrgbClr r="0" g="0" b="0"/>
+      </a:lnRef>
+      <a:fillRef idx="1">
+        <a:scrgbClr r="0" g="0" b="0"/>
+      </a:fillRef>
+      <a:effectRef idx="0">
+        <a:scrgbClr r="0" g="0" b="0"/>
+      </a:effectRef>
+      <a:fontRef idx="minor">
+        <a:schemeClr val="lt1"/>
+      </a:fontRef>
+    </dgm:style>
+  </dgm:styleLbl>
+  <dgm:styleLbl name="asst3">
+    <dgm:scene3d>
+      <a:camera prst="orthographicFront"/>
+      <a:lightRig rig="threePt" dir="t"/>
+    </dgm:scene3d>
+    <dgm:sp3d/>
+    <dgm:txPr/>
+    <dgm:style>
+      <a:lnRef idx="2">
+        <a:scrgbClr r="0" g="0" b="0"/>
+      </a:lnRef>
+      <a:fillRef idx="1">
+        <a:scrgbClr r="0" g="0" b="0"/>
+      </a:fillRef>
+      <a:effectRef idx="0">
+        <a:scrgbClr r="0" g="0" b="0"/>
+      </a:effectRef>
+      <a:fontRef idx="minor">
+        <a:schemeClr val="lt1"/>
+      </a:fontRef>
+    </dgm:style>
+  </dgm:styleLbl>
+  <dgm:styleLbl name="asst4">
+    <dgm:scene3d>
+      <a:camera prst="orthographicFront"/>
+      <a:lightRig rig="threePt" dir="t"/>
+    </dgm:scene3d>
+    <dgm:sp3d/>
+    <dgm:txPr/>
+    <dgm:style>
+      <a:lnRef idx="2">
+        <a:scrgbClr r="0" g="0" b="0"/>
+      </a:lnRef>
+      <a:fillRef idx="1">
+        <a:scrgbClr r="0" g="0" b="0"/>
+      </a:fillRef>
+      <a:effectRef idx="0">
+        <a:scrgbClr r="0" g="0" b="0"/>
+      </a:effectRef>
+      <a:fontRef idx="minor">
+        <a:schemeClr val="lt1"/>
+      </a:fontRef>
+    </dgm:style>
+  </dgm:styleLbl>
+  <dgm:styleLbl name="parChTrans2D1">
+    <dgm:scene3d>
+      <a:camera prst="orthographicFront"/>
+      <a:lightRig rig="threePt" dir="t"/>
+    </dgm:scene3d>
+    <dgm:sp3d/>
+    <dgm:txPr/>
+    <dgm:style>
+      <a:lnRef idx="2">
+        <a:scrgbClr r="0" g="0" b="0"/>
+      </a:lnRef>
+      <a:fillRef idx="1">
+        <a:scrgbClr r="0" g="0" b="0"/>
+      </a:fillRef>
+      <a:effectRef idx="0">
+        <a:scrgbClr r="0" g="0" b="0"/>
+      </a:effectRef>
+      <a:fontRef idx="minor">
+        <a:schemeClr val="lt1"/>
+      </a:fontRef>
+    </dgm:style>
+  </dgm:styleLbl>
+  <dgm:styleLbl name="parChTrans2D2">
+    <dgm:scene3d>
+      <a:camera prst="orthographicFront"/>
+      <a:lightRig rig="threePt" dir="t"/>
+    </dgm:scene3d>
+    <dgm:sp3d/>
+    <dgm:txPr/>
+    <dgm:style>
+      <a:lnRef idx="2">
+        <a:scrgbClr r="0" g="0" b="0"/>
+      </a:lnRef>
+      <a:fillRef idx="1">
+        <a:scrgbClr r="0" g="0" b="0"/>
+      </a:fillRef>
+      <a:effectRef idx="0">
+        <a:scrgbClr r="0" g="0" b="0"/>
+      </a:effectRef>
+      <a:fontRef idx="minor">
+        <a:schemeClr val="lt1"/>
+      </a:fontRef>
+    </dgm:style>
+  </dgm:styleLbl>
+  <dgm:styleLbl name="parChTrans2D3">
+    <dgm:scene3d>
+      <a:camera prst="orthographicFront"/>
+      <a:lightRig rig="threePt" dir="t"/>
+    </dgm:scene3d>
+    <dgm:sp3d/>
+    <dgm:txPr/>
+    <dgm:style>
+      <a:lnRef idx="2">
+        <a:scrgbClr r="0" g="0" b="0"/>
+      </a:lnRef>
+      <a:fillRef idx="1">
+        <a:scrgbClr r="0" g="0" b="0"/>
+      </a:fillRef>
+      <a:effectRef idx="0">
+        <a:scrgbClr r="0" g="0" b="0"/>
+      </a:effectRef>
+      <a:fontRef idx="minor">
+        <a:schemeClr val="lt1"/>
+      </a:fontRef>
+    </dgm:style>
+  </dgm:styleLbl>
+  <dgm:styleLbl name="parChTrans2D4">
+    <dgm:scene3d>
+      <a:camera prst="orthographicFront"/>
+      <a:lightRig rig="threePt" dir="t"/>
+    </dgm:scene3d>
+    <dgm:sp3d/>
+    <dgm:txPr/>
+    <dgm:style>
+      <a:lnRef idx="2">
+        <a:scrgbClr r="0" g="0" b="0"/>
+      </a:lnRef>
+      <a:fillRef idx="1">
+        <a:scrgbClr r="0" g="0" b="0"/>
+      </a:fillRef>
+      <a:effectRef idx="0">
+        <a:scrgbClr r="0" g="0" b="0"/>
+      </a:effectRef>
+      <a:fontRef idx="minor">
+        <a:schemeClr val="lt1"/>
+      </a:fontRef>
+    </dgm:style>
+  </dgm:styleLbl>
+  <dgm:styleLbl name="parChTrans1D1">
+    <dgm:scene3d>
+      <a:camera prst="orthographicFront"/>
+      <a:lightRig rig="threePt" dir="t"/>
+    </dgm:scene3d>
+    <dgm:sp3d/>
+    <dgm:txPr/>
+    <dgm:style>
+      <a:lnRef idx="2">
+        <a:scrgbClr r="0" g="0" b="0"/>
+      </a:lnRef>
+      <a:fillRef idx="0">
+        <a:scrgbClr r="0" g="0" b="0"/>
+      </a:fillRef>
+      <a:effectRef idx="0">
+        <a:scrgbClr r="0" g="0" b="0"/>
+      </a:effectRef>
+      <a:fontRef idx="minor"/>
+    </dgm:style>
+  </dgm:styleLbl>
+  <dgm:styleLbl name="parChTrans1D2">
+    <dgm:scene3d>
+      <a:camera prst="orthographicFront"/>
+      <a:lightRig rig="threePt" dir="t"/>
+    </dgm:scene3d>
+    <dgm:sp3d/>
+    <dgm:txPr/>
+    <dgm:style>
+      <a:lnRef idx="2">
+        <a:scrgbClr r="0" g="0" b="0"/>
+      </a:lnRef>
+      <a:fillRef idx="0">
+        <a:scrgbClr r="0" g="0" b="0"/>
+      </a:fillRef>
+      <a:effectRef idx="0">
+        <a:scrgbClr r="0" g="0" b="0"/>
+      </a:effectRef>
+      <a:fontRef idx="minor"/>
+    </dgm:style>
+  </dgm:styleLbl>
+  <dgm:styleLbl name="parChTrans1D3">
+    <dgm:scene3d>
+      <a:camera prst="orthographicFront"/>
+      <a:lightRig rig="threePt" dir="t"/>
+    </dgm:scene3d>
+    <dgm:sp3d/>
+    <dgm:txPr/>
+    <dgm:style>
+      <a:lnRef idx="2">
+        <a:scrgbClr r="0" g="0" b="0"/>
+      </a:lnRef>
+      <a:fillRef idx="0">
+        <a:scrgbClr r="0" g="0" b="0"/>
+      </a:fillRef>
+      <a:effectRef idx="0">
+        <a:scrgbClr r="0" g="0" b="0"/>
+      </a:effectRef>
+      <a:fontRef idx="minor"/>
+    </dgm:style>
+  </dgm:styleLbl>
+  <dgm:styleLbl name="parChTrans1D4">
+    <dgm:scene3d>
+      <a:camera prst="orthographicFront"/>
+      <a:lightRig rig="threePt" dir="t"/>
+    </dgm:scene3d>
+    <dgm:sp3d/>
+    <dgm:txPr/>
+    <dgm:style>
+      <a:lnRef idx="2">
+        <a:scrgbClr r="0" g="0" b="0"/>
+      </a:lnRef>
+      <a:fillRef idx="0">
+        <a:scrgbClr r="0" g="0" b="0"/>
+      </a:fillRef>
+      <a:effectRef idx="0">
+        <a:scrgbClr r="0" g="0" b="0"/>
+      </a:effectRef>
+      <a:fontRef idx="minor"/>
+    </dgm:style>
+  </dgm:styleLbl>
+  <dgm:styleLbl name="fgAcc1">
+    <dgm:scene3d>
+      <a:camera prst="orthographicFront"/>
+      <a:lightRig rig="threePt" dir="t"/>
+    </dgm:scene3d>
+    <dgm:sp3d/>
+    <dgm:txPr/>
+    <dgm:style>
+      <a:lnRef idx="2">
+        <a:scrgbClr r="0" g="0" b="0"/>
+      </a:lnRef>
+      <a:fillRef idx="1">
+        <a:scrgbClr r="0" g="0" b="0"/>
+      </a:fillRef>
+      <a:effectRef idx="0">
+        <a:scrgbClr r="0" g="0" b="0"/>
+      </a:effectRef>
+      <a:fontRef idx="minor"/>
+    </dgm:style>
+  </dgm:styleLbl>
+  <dgm:styleLbl name="conFgAcc1">
+    <dgm:scene3d>
+      <a:camera prst="orthographicFront"/>
+      <a:lightRig rig="threePt" dir="t"/>
+    </dgm:scene3d>
+    <dgm:sp3d/>
+    <dgm:txPr/>
+    <dgm:style>
+      <a:lnRef idx="2">
+        <a:scrgbClr r="0" g="0" b="0"/>
+      </a:lnRef>
+      <a:fillRef idx="1">
+        <a:scrgbClr r="0" g="0" b="0"/>
+      </a:fillRef>
+      <a:effectRef idx="0">
+        <a:scrgbClr r="0" g="0" b="0"/>
+      </a:effectRef>
+      <a:fontRef idx="minor"/>
+    </dgm:style>
+  </dgm:styleLbl>
+  <dgm:styleLbl name="alignAcc1">
+    <dgm:scene3d>
+      <a:camera prst="orthographicFront"/>
+      <a:lightRig rig="threePt" dir="t"/>
+    </dgm:scene3d>
+    <dgm:sp3d/>
+    <dgm:txPr/>
+    <dgm:style>
+      <a:lnRef idx="2">
+        <a:scrgbClr r="0" g="0" b="0"/>
+      </a:lnRef>
+      <a:fillRef idx="1">
+        <a:scrgbClr r="0" g="0" b="0"/>
+      </a:fillRef>
+      <a:effectRef idx="0">
+        <a:scrgbClr r="0" g="0" b="0"/>
+      </a:effectRef>
+      <a:fontRef idx="minor"/>
+    </dgm:style>
+  </dgm:styleLbl>
+  <dgm:styleLbl name="trAlignAcc1">
+    <dgm:scene3d>
+      <a:camera prst="orthographicFront"/>
+      <a:lightRig rig="threePt" dir="t"/>
+    </dgm:scene3d>
+    <dgm:sp3d/>
+    <dgm:txPr/>
+    <dgm:style>
+      <a:lnRef idx="1">
+        <a:scrgbClr r="0" g="0" b="0"/>
+      </a:lnRef>
+      <a:fillRef idx="1">
+        <a:scrgbClr r="0" g="0" b="0"/>
+      </a:fillRef>
+      <a:effectRef idx="0">
+        <a:scrgbClr r="0" g="0" b="0"/>
+      </a:effectRef>
+      <a:fontRef idx="minor"/>
+    </dgm:style>
+  </dgm:styleLbl>
+  <dgm:styleLbl name="bgAcc1">
+    <dgm:scene3d>
+      <a:camera prst="orthographicFront"/>
+      <a:lightRig rig="threePt" dir="t"/>
+    </dgm:scene3d>
+    <dgm:sp3d/>
+    <dgm:txPr/>
+    <dgm:style>
+      <a:lnRef idx="2">
+        <a:scrgbClr r="0" g="0" b="0"/>
+      </a:lnRef>
+      <a:fillRef idx="1">
+        <a:scrgbClr r="0" g="0" b="0"/>
+      </a:fillRef>
+      <a:effectRef idx="0">
+        <a:scrgbClr r="0" g="0" b="0"/>
+      </a:effectRef>
+      <a:fontRef idx="minor"/>
+    </dgm:style>
+  </dgm:styleLbl>
+  <dgm:styleLbl name="solidFgAcc1">
+    <dgm:scene3d>
+      <a:camera prst="orthographicFront"/>
+      <a:lightRig rig="threePt" dir="t"/>
+    </dgm:scene3d>
+    <dgm:sp3d/>
+    <dgm:txPr/>
+    <dgm:style>
+      <a:lnRef idx="2">
+        <a:scrgbClr r="0" g="0" b="0"/>
+      </a:lnRef>
+      <a:fillRef idx="1">
+        <a:scrgbClr r="0" g="0" b="0"/>
+      </a:fillRef>
+      <a:effectRef idx="0">
+        <a:scrgbClr r="0" g="0" b="0"/>
+      </a:effectRef>
+      <a:fontRef idx="minor"/>
+    </dgm:style>
+  </dgm:styleLbl>
+  <dgm:styleLbl name="solidAlignAcc1">
+    <dgm:scene3d>
+      <a:camera prst="orthographicFront"/>
+      <a:lightRig rig="threePt" dir="t"/>
+    </dgm:scene3d>
+    <dgm:sp3d/>
+    <dgm:txPr/>
+    <dgm:style>
+      <a:lnRef idx="2">
+        <a:scrgbClr r="0" g="0" b="0"/>
+      </a:lnRef>
+      <a:fillRef idx="1">
+        <a:scrgbClr r="0" g="0" b="0"/>
+      </a:fillRef>
+      <a:effectRef idx="0">
+        <a:scrgbClr r="0" g="0" b="0"/>
+      </a:effectRef>
+      <a:fontRef idx="minor"/>
+    </dgm:style>
+  </dgm:styleLbl>
+  <dgm:styleLbl name="solidBgAcc1">
+    <dgm:scene3d>
+      <a:camera prst="orthographicFront"/>
+      <a:lightRig rig="threePt" dir="t"/>
+    </dgm:scene3d>
+    <dgm:sp3d/>
+    <dgm:txPr/>
+    <dgm:style>
+      <a:lnRef idx="2">
+        <a:scrgbClr r="0" g="0" b="0"/>
+      </a:lnRef>
+      <a:fillRef idx="1">
+        <a:scrgbClr r="0" g="0" b="0"/>
+      </a:fillRef>
+      <a:effectRef idx="0">
+        <a:scrgbClr r="0" g="0" b="0"/>
+      </a:effectRef>
+      <a:fontRef idx="minor"/>
+    </dgm:style>
+  </dgm:styleLbl>
+  <dgm:styleLbl name="fgAccFollowNode1">
+    <dgm:scene3d>
+      <a:camera prst="orthographicFront"/>
+      <a:lightRig rig="threePt" dir="t"/>
+    </dgm:scene3d>
+    <dgm:sp3d/>
+    <dgm:txPr/>
+    <dgm:style>
+      <a:lnRef idx="2">
+        <a:scrgbClr r="0" g="0" b="0"/>
+      </a:lnRef>
+      <a:fillRef idx="1">
+        <a:scrgbClr r="0" g="0" b="0"/>
+      </a:fillRef>
+      <a:effectRef idx="0">
+        <a:scrgbClr r="0" g="0" b="0"/>
+      </a:effectRef>
+      <a:fontRef idx="minor"/>
+    </dgm:style>
+  </dgm:styleLbl>
+  <dgm:styleLbl name="alignAccFollowNode1">
+    <dgm:scene3d>
+      <a:camera prst="orthographicFront"/>
+      <a:lightRig rig="threePt" dir="t"/>
+    </dgm:scene3d>
+    <dgm:sp3d/>
+    <dgm:txPr/>
+    <dgm:style>
+      <a:lnRef idx="2">
+        <a:scrgbClr r="0" g="0" b="0"/>
+      </a:lnRef>
+      <a:fillRef idx="1">
+        <a:scrgbClr r="0" g="0" b="0"/>
+      </a:fillRef>
+      <a:effectRef idx="0">
+        <a:scrgbClr r="0" g="0" b="0"/>
+      </a:effectRef>
+      <a:fontRef idx="minor"/>
+    </dgm:style>
+  </dgm:styleLbl>
+  <dgm:styleLbl name="bgAccFollowNode1">
+    <dgm:scene3d>
+      <a:camera prst="orthographicFront"/>
+      <a:lightRig rig="threePt" dir="t"/>
+    </dgm:scene3d>
+    <dgm:sp3d/>
+    <dgm:txPr/>
+    <dgm:style>
+      <a:lnRef idx="2">
+        <a:scrgbClr r="0" g="0" b="0"/>
+      </a:lnRef>
+      <a:fillRef idx="1">
+        <a:scrgbClr r="0" g="0" b="0"/>
+      </a:fillRef>
+      <a:effectRef idx="0">
+        <a:scrgbClr r="0" g="0" b="0"/>
+      </a:effectRef>
+      <a:fontRef idx="minor"/>
+    </dgm:style>
+  </dgm:styleLbl>
+  <dgm:styleLbl name="fgAcc0">
+    <dgm:scene3d>
+      <a:camera prst="orthographicFront"/>
+      <a:lightRig rig="threePt" dir="t"/>
+    </dgm:scene3d>
+    <dgm:sp3d/>
+    <dgm:txPr/>
+    <dgm:style>
+      <a:lnRef idx="2">
+        <a:scrgbClr r="0" g="0" b="0"/>
+      </a:lnRef>
+      <a:fillRef idx="1">
+        <a:scrgbClr r="0" g="0" b="0"/>
+      </a:fillRef>
+      <a:effectRef idx="0">
+        <a:scrgbClr r="0" g="0" b="0"/>
+      </a:effectRef>
+      <a:fontRef idx="minor"/>
+    </dgm:style>
+  </dgm:styleLbl>
+  <dgm:styleLbl name="fgAcc2">
+    <dgm:scene3d>
+      <a:camera prst="orthographicFront"/>
+      <a:lightRig rig="threePt" dir="t"/>
+    </dgm:scene3d>
+    <dgm:sp3d/>
+    <dgm:txPr/>
+    <dgm:style>
+      <a:lnRef idx="2">
+        <a:scrgbClr r="0" g="0" b="0"/>
+      </a:lnRef>
+      <a:fillRef idx="1">
+        <a:scrgbClr r="0" g="0" b="0"/>
+      </a:fillRef>
+      <a:effectRef idx="0">
+        <a:scrgbClr r="0" g="0" b="0"/>
+      </a:effectRef>
+      <a:fontRef idx="minor"/>
+    </dgm:style>
+  </dgm:styleLbl>
+  <dgm:styleLbl name="fgAcc3">
+    <dgm:scene3d>
+      <a:camera prst="orthographicFront"/>
+      <a:lightRig rig="threePt" dir="t"/>
+    </dgm:scene3d>
+    <dgm:sp3d/>
+    <dgm:txPr/>
+    <dgm:style>
+      <a:lnRef idx="2">
+        <a:scrgbClr r="0" g="0" b="0"/>
+      </a:lnRef>
+      <a:fillRef idx="1">
+        <a:scrgbClr r="0" g="0" b="0"/>
+      </a:fillRef>
+      <a:effectRef idx="0">
+        <a:scrgbClr r="0" g="0" b="0"/>
+      </a:effectRef>
+      <a:fontRef idx="minor"/>
+    </dgm:style>
+  </dgm:styleLbl>
+  <dgm:styleLbl name="fgAcc4">
+    <dgm:scene3d>
+      <a:camera prst="orthographicFront"/>
+      <a:lightRig rig="threePt" dir="t"/>
+    </dgm:scene3d>
+    <dgm:sp3d/>
+    <dgm:txPr/>
+    <dgm:style>
+      <a:lnRef idx="2">
+        <a:scrgbClr r="0" g="0" b="0"/>
+      </a:lnRef>
+      <a:fillRef idx="1">
+        <a:scrgbClr r="0" g="0" b="0"/>
+      </a:fillRef>
+      <a:effectRef idx="0">
+        <a:scrgbClr r="0" g="0" b="0"/>
+      </a:effectRef>
+      <a:fontRef idx="minor"/>
+    </dgm:style>
+  </dgm:styleLbl>
+  <dgm:styleLbl name="bgShp">
+    <dgm:scene3d>
+      <a:camera prst="orthographicFront"/>
+      <a:lightRig rig="threePt" dir="t"/>
+    </dgm:scene3d>
+    <dgm:sp3d/>
+    <dgm:txPr/>
+    <dgm:style>
+      <a:lnRef idx="0">
+        <a:scrgbClr r="0" g="0" b="0"/>
+      </a:lnRef>
+      <a:fillRef idx="1">
+        <a:scrgbClr r="0" g="0" b="0"/>
+      </a:fillRef>
+      <a:effectRef idx="0">
+        <a:scrgbClr r="0" g="0" b="0"/>
+      </a:effectRef>
+      <a:fontRef idx="minor"/>
+    </dgm:style>
+  </dgm:styleLbl>
+  <dgm:styleLbl name="dkBgShp">
+    <dgm:scene3d>
+      <a:camera prst="orthographicFront"/>
+      <a:lightRig rig="threePt" dir="t"/>
+    </dgm:scene3d>
+    <dgm:sp3d/>
+    <dgm:txPr/>
+    <dgm:style>
+      <a:lnRef idx="0">
+        <a:scrgbClr r="0" g="0" b="0"/>
+      </a:lnRef>
+      <a:fillRef idx="1">
+        <a:scrgbClr r="0" g="0" b="0"/>
+      </a:fillRef>
+      <a:effectRef idx="0">
+        <a:scrgbClr r="0" g="0" b="0"/>
+      </a:effectRef>
+      <a:fontRef idx="minor"/>
+    </dgm:style>
+  </dgm:styleLbl>
+  <dgm:styleLbl name="trBgShp">
+    <dgm:scene3d>
+      <a:camera prst="orthographicFront"/>
+      <a:lightRig rig="threePt" dir="t"/>
+    </dgm:scene3d>
+    <dgm:sp3d/>
+    <dgm:txPr/>
+    <dgm:style>
+      <a:lnRef idx="0">
+        <a:scrgbClr r="0" g="0" b="0"/>
+      </a:lnRef>
+      <a:fillRef idx="1">
+        <a:scrgbClr r="0" g="0" b="0"/>
+      </a:fillRef>
+      <a:effectRef idx="0">
+        <a:scrgbClr r="0" g="0" b="0"/>
+      </a:effectRef>
+      <a:fontRef idx="minor"/>
+    </dgm:style>
+  </dgm:styleLbl>
+  <dgm:styleLbl name="fgShp">
+    <dgm:scene3d>
+      <a:camera prst="orthographicFront"/>
+      <a:lightRig rig="threePt" dir="t"/>
+    </dgm:scene3d>
+    <dgm:sp3d/>
+    <dgm:txPr/>
+    <dgm:style>
+      <a:lnRef idx="2">
+        <a:scrgbClr r="0" g="0" b="0"/>
+      </a:lnRef>
+      <a:fillRef idx="1">
+        <a:scrgbClr r="0" g="0" b="0"/>
+      </a:fillRef>
+      <a:effectRef idx="0">
+        <a:scrgbClr r="0" g="0" b="0"/>
+      </a:effectRef>
+      <a:fontRef idx="minor"/>
+    </dgm:style>
+  </dgm:styleLbl>
+  <dgm:styleLbl name="revTx">
+    <dgm:scene3d>
+      <a:camera prst="orthographicFront"/>
+      <a:lightRig rig="threePt" dir="t"/>
+    </dgm:scene3d>
+    <dgm:sp3d/>
+    <dgm:txPr/>
+    <dgm:style>
+      <a:lnRef idx="0">
+        <a:scrgbClr r="0" g="0" b="0"/>
+      </a:lnRef>
+      <a:fillRef idx="0">
+        <a:scrgbClr r="0" g="0" b="0"/>
+      </a:fillRef>
+      <a:effectRef idx="0">
+        <a:scrgbClr r="0" g="0" b="0"/>
+      </a:effectRef>
+      <a:fontRef idx="minor"/>
+    </dgm:style>
+  </dgm:styleLbl>
+</dgm:styleDef>
+</file>
+
 <file path=ppt/notesMasters/notesMaster1.xml><?xml version="1.0" encoding="utf-8"?>
 <p:notesMaster xmlns:a="http://schemas.openxmlformats.org/drawingml/2006/main" xmlns:r="http://schemas.openxmlformats.org/officeDocument/2006/relationships" xmlns:p="http://schemas.openxmlformats.org/presentationml/2006/main">
   <p:cSld>
@@ -5519,7 +12357,7 @@
         </p:nvSpPr>
         <p:spPr>
           <a:xfrm>
-            <a:off x="812800" y="3429000"/>
+            <a:off x="812800" y="3648456"/>
             <a:ext cx="2959100" cy="914400"/>
           </a:xfrm>
           <a:prstGeom prst="roundRect">
@@ -5593,7 +12431,7 @@
         </p:nvSpPr>
         <p:spPr>
           <a:xfrm>
-            <a:off x="812800" y="4707692"/>
+            <a:off x="4114800" y="3648456"/>
             <a:ext cx="2959100" cy="914400"/>
           </a:xfrm>
           <a:prstGeom prst="roundRect">
@@ -5665,6 +12503,42 @@
           </a:p>
         </p:txBody>
       </p:sp>
+      <p:pic>
+        <p:nvPicPr>
+          <p:cNvPr id="9" name="Imagen 8">
+            <a:extLst>
+              <a:ext uri="{FF2B5EF4-FFF2-40B4-BE49-F238E27FC236}">
+                <a16:creationId xmlns:a16="http://schemas.microsoft.com/office/drawing/2014/main" id="{7AC26B47-52A8-999E-CEB3-2D3E8A88ADE8}"/>
+              </a:ext>
+            </a:extLst>
+          </p:cNvPr>
+          <p:cNvPicPr>
+            <a:picLocks noChangeAspect="1"/>
+          </p:cNvPicPr>
+          <p:nvPr/>
+        </p:nvPicPr>
+        <p:blipFill>
+          <a:blip r:embed="rId3">
+            <a:extLst>
+              <a:ext uri="{28A0092B-C50C-407E-A947-70E740481C1C}">
+                <a14:useLocalDpi xmlns:a14="http://schemas.microsoft.com/office/drawing/2010/main" val="0"/>
+              </a:ext>
+            </a:extLst>
+          </a:blip>
+          <a:stretch>
+            <a:fillRect/>
+          </a:stretch>
+        </p:blipFill>
+        <p:spPr>
+          <a:xfrm>
+            <a:off x="7255759" y="4562856"/>
+            <a:ext cx="4032001" cy="1872175"/>
+          </a:xfrm>
+          <a:prstGeom prst="rect">
+            <a:avLst/>
+          </a:prstGeom>
+        </p:spPr>
+      </p:pic>
     </p:spTree>
     <p:extLst>
       <p:ext uri="{BB962C8B-B14F-4D97-AF65-F5344CB8AC3E}">
@@ -8508,7 +15382,7 @@
         <p:spPr>
           <a:xfrm>
             <a:off x="1041400" y="5130800"/>
-            <a:ext cx="9652000" cy="1128514"/>
+            <a:ext cx="9652000" cy="369332"/>
           </a:xfrm>
           <a:prstGeom prst="rect">
             <a:avLst/>
@@ -8520,42 +15394,6 @@
             <a:spAutoFit/>
           </a:bodyPr>
           <a:lstStyle/>
-          <a:p>
-            <a:pPr marL="342900" indent="-342900">
-              <a:spcAft>
-                <a:spcPts val="800"/>
-              </a:spcAft>
-              <a:buFont typeface="+mj-lt"/>
-              <a:buChar char="•"/>
-            </a:pPr>
-            <a:r>
-              <a:rPr lang="es-ES" dirty="0">
-                <a:solidFill>
-                  <a:srgbClr val="2B2B2B"/>
-                </a:solidFill>
-                <a:latin typeface="Aptos" panose="020B0004020202020204" pitchFamily="34" charset="0"/>
-              </a:rPr>
-              <a:t>Uso de agentes para dividir el trabajo en fases.</a:t>
-            </a:r>
-          </a:p>
-          <a:p>
-            <a:pPr marL="342900" indent="-342900">
-              <a:spcAft>
-                <a:spcPts val="800"/>
-              </a:spcAft>
-              <a:buFont typeface="+mj-lt"/>
-              <a:buChar char="•"/>
-            </a:pPr>
-            <a:r>
-              <a:rPr lang="es-ES" dirty="0">
-                <a:solidFill>
-                  <a:srgbClr val="2B2B2B"/>
-                </a:solidFill>
-                <a:latin typeface="Aptos" panose="020B0004020202020204" pitchFamily="34" charset="0"/>
-              </a:rPr>
-              <a:t>Artefactos intermedios que puedan revisarse.</a:t>
-            </a:r>
-          </a:p>
           <a:p>
             <a:pPr marL="342900" indent="-342900">
               <a:spcAft>
@@ -8754,243 +15592,38 @@
           </a:p>
         </p:txBody>
       </p:sp>
-      <p:sp>
-        <p:nvSpPr>
-          <p:cNvPr id="5" name="Rectángulo: esquinas redondeadas 4">
+      <p:graphicFrame>
+        <p:nvGraphicFramePr>
+          <p:cNvPr id="14" name="Marcador de contenido 9">
             <a:extLst>
               <a:ext uri="{FF2B5EF4-FFF2-40B4-BE49-F238E27FC236}">
-                <a16:creationId xmlns:a16="http://schemas.microsoft.com/office/drawing/2014/main" id="{4F4A14CF-0E78-2C01-832B-56B36A596B75}"/>
+                <a16:creationId xmlns:a16="http://schemas.microsoft.com/office/drawing/2014/main" id="{9B32EB19-1012-EA74-5EF5-CCC2034D445D}"/>
               </a:ext>
             </a:extLst>
           </p:cNvPr>
-          <p:cNvSpPr/>
-          <p:nvPr/>
-        </p:nvSpPr>
-        <p:spPr>
-          <a:xfrm>
-            <a:off x="736600" y="1676400"/>
-            <a:ext cx="3175000" cy="1727200"/>
-          </a:xfrm>
-          <a:prstGeom prst="roundRect">
-            <a:avLst/>
-          </a:prstGeom>
-          <a:solidFill>
-            <a:srgbClr val="FAF4EE"/>
-          </a:solidFill>
-          <a:ln w="12700">
-            <a:solidFill>
-              <a:srgbClr val="DDD3C8"/>
-            </a:solidFill>
-          </a:ln>
-        </p:spPr>
-        <p:style>
-          <a:lnRef idx="2">
-            <a:schemeClr val="accent1">
-              <a:shade val="15000"/>
-            </a:schemeClr>
-          </a:lnRef>
-          <a:fillRef idx="1">
-            <a:schemeClr val="accent1"/>
-          </a:fillRef>
-          <a:effectRef idx="0">
-            <a:schemeClr val="accent1"/>
-          </a:effectRef>
-          <a:fontRef idx="minor">
-            <a:schemeClr val="lt1"/>
-          </a:fontRef>
-        </p:style>
-        <p:txBody>
-          <a:bodyPr wrap="square" lIns="152400" tIns="127000" rIns="152400" bIns="127000" rtlCol="0" anchor="ctr"/>
-          <a:lstStyle/>
-          <a:p>
-            <a:pPr algn="ctr"/>
-            <a:r>
-              <a:rPr lang="es-ES" sz="1700" b="1" dirty="0" err="1">
-                <a:solidFill>
-                  <a:srgbClr val="4D3217"/>
-                </a:solidFill>
-                <a:latin typeface="Aptos Display" panose="020B0004020202020204" pitchFamily="34" charset="0"/>
-              </a:rPr>
-              <a:t>LLMs</a:t>
-            </a:r>
-            <a:r>
-              <a:rPr lang="es-ES" sz="1700" b="1" dirty="0">
-                <a:solidFill>
-                  <a:srgbClr val="4D3217"/>
-                </a:solidFill>
-                <a:latin typeface="Aptos Display" panose="020B0004020202020204" pitchFamily="34" charset="0"/>
-              </a:rPr>
-              <a:t> y código</a:t>
-            </a:r>
-          </a:p>
-          <a:p>
-            <a:pPr algn="ctr"/>
-            <a:r>
-              <a:rPr lang="es-ES" sz="1500" dirty="0">
-                <a:solidFill>
-                  <a:srgbClr val="2B2B2B"/>
-                </a:solidFill>
-                <a:latin typeface="Aptos" panose="020B0004020202020204" pitchFamily="34" charset="0"/>
-              </a:rPr>
-              <a:t>Los modelos actuales no solo generan texto: también pueden interpretar instrucciones y producir cÃ³digo ejecutable.</a:t>
-            </a:r>
-          </a:p>
-        </p:txBody>
-      </p:sp>
-      <p:sp>
-        <p:nvSpPr>
-          <p:cNvPr id="6" name="Rectángulo: esquinas redondeadas 5">
+          <p:cNvGraphicFramePr>
+            <a:graphicFrameLocks noGrp="1"/>
+          </p:cNvGraphicFramePr>
+          <p:nvPr>
+            <p:ph idx="1"/>
+          </p:nvPr>
+        </p:nvGraphicFramePr>
+        <p:xfrm>
+          <a:off x="655320" y="1465262"/>
+          <a:ext cx="11067288" cy="3131122"/>
+        </p:xfrm>
+        <a:graphic>
+          <a:graphicData uri="http://schemas.openxmlformats.org/drawingml/2006/diagram">
+            <dgm:relIds xmlns:dgm="http://schemas.openxmlformats.org/drawingml/2006/diagram" xmlns:r="http://schemas.openxmlformats.org/officeDocument/2006/relationships" r:dm="rId3" r:lo="rId4" r:qs="rId5" r:cs="rId6"/>
+          </a:graphicData>
+        </a:graphic>
+      </p:graphicFrame>
+      <p:sp>
+        <p:nvSpPr>
+          <p:cNvPr id="12" name="CuadroTexto 11">
             <a:extLst>
               <a:ext uri="{FF2B5EF4-FFF2-40B4-BE49-F238E27FC236}">
-                <a16:creationId xmlns:a16="http://schemas.microsoft.com/office/drawing/2014/main" id="{011D478A-AA08-9103-E5A1-30B97B1B0F5E}"/>
-              </a:ext>
-            </a:extLst>
-          </p:cNvPr>
-          <p:cNvSpPr/>
-          <p:nvPr/>
-        </p:nvSpPr>
-        <p:spPr>
-          <a:xfrm>
-            <a:off x="4292600" y="1676400"/>
-            <a:ext cx="3175000" cy="1727200"/>
-          </a:xfrm>
-          <a:prstGeom prst="roundRect">
-            <a:avLst/>
-          </a:prstGeom>
-          <a:solidFill>
-            <a:srgbClr val="F1F6EF"/>
-          </a:solidFill>
-          <a:ln w="12700">
-            <a:solidFill>
-              <a:srgbClr val="DDD3C8"/>
-            </a:solidFill>
-          </a:ln>
-        </p:spPr>
-        <p:style>
-          <a:lnRef idx="2">
-            <a:schemeClr val="accent1">
-              <a:shade val="15000"/>
-            </a:schemeClr>
-          </a:lnRef>
-          <a:fillRef idx="1">
-            <a:schemeClr val="accent1"/>
-          </a:fillRef>
-          <a:effectRef idx="0">
-            <a:schemeClr val="accent1"/>
-          </a:effectRef>
-          <a:fontRef idx="minor">
-            <a:schemeClr val="lt1"/>
-          </a:fontRef>
-        </p:style>
-        <p:txBody>
-          <a:bodyPr wrap="square" lIns="152400" tIns="127000" rIns="152400" bIns="127000" rtlCol="0" anchor="ctr"/>
-          <a:lstStyle/>
-          <a:p>
-            <a:pPr algn="ctr"/>
-            <a:r>
-              <a:rPr lang="es-ES" sz="1700" b="1" dirty="0">
-                <a:solidFill>
-                  <a:srgbClr val="4D3217"/>
-                </a:solidFill>
-                <a:latin typeface="Aptos Display" panose="020B0004020202020204" pitchFamily="34" charset="0"/>
-              </a:rPr>
-              <a:t>Análisis de datos</a:t>
-            </a:r>
-          </a:p>
-          <a:p>
-            <a:pPr algn="ctr"/>
-            <a:r>
-              <a:rPr lang="es-ES" sz="1500" dirty="0">
-                <a:solidFill>
-                  <a:srgbClr val="2B2B2B"/>
-                </a:solidFill>
-                <a:latin typeface="Aptos" panose="020B0004020202020204" pitchFamily="34" charset="0"/>
-              </a:rPr>
-              <a:t>Esto resulta útil cuando una consulta en lenguaje natural debe convertirse en operaciones de carga, filtrado y cálculo.</a:t>
-            </a:r>
-          </a:p>
-        </p:txBody>
-      </p:sp>
-      <p:sp>
-        <p:nvSpPr>
-          <p:cNvPr id="7" name="Rectángulo: esquinas redondeadas 6">
-            <a:extLst>
-              <a:ext uri="{FF2B5EF4-FFF2-40B4-BE49-F238E27FC236}">
-                <a16:creationId xmlns:a16="http://schemas.microsoft.com/office/drawing/2014/main" id="{5CF268B0-BC92-281B-A1D6-0209D5338880}"/>
-              </a:ext>
-            </a:extLst>
-          </p:cNvPr>
-          <p:cNvSpPr/>
-          <p:nvPr/>
-        </p:nvSpPr>
-        <p:spPr>
-          <a:xfrm>
-            <a:off x="7848600" y="1676400"/>
-            <a:ext cx="3175000" cy="1727200"/>
-          </a:xfrm>
-          <a:prstGeom prst="roundRect">
-            <a:avLst/>
-          </a:prstGeom>
-          <a:solidFill>
-            <a:srgbClr val="E2F1FB"/>
-          </a:solidFill>
-          <a:ln w="12700">
-            <a:solidFill>
-              <a:srgbClr val="DDD3C8"/>
-            </a:solidFill>
-          </a:ln>
-        </p:spPr>
-        <p:style>
-          <a:lnRef idx="2">
-            <a:schemeClr val="accent1">
-              <a:shade val="15000"/>
-            </a:schemeClr>
-          </a:lnRef>
-          <a:fillRef idx="1">
-            <a:schemeClr val="accent1"/>
-          </a:fillRef>
-          <a:effectRef idx="0">
-            <a:schemeClr val="accent1"/>
-          </a:effectRef>
-          <a:fontRef idx="minor">
-            <a:schemeClr val="lt1"/>
-          </a:fontRef>
-        </p:style>
-        <p:txBody>
-          <a:bodyPr wrap="square" lIns="152400" tIns="127000" rIns="152400" bIns="127000" rtlCol="0" anchor="ctr"/>
-          <a:lstStyle/>
-          <a:p>
-            <a:pPr algn="ctr"/>
-            <a:r>
-              <a:rPr lang="es-ES" sz="1700" b="1">
-                <a:solidFill>
-                  <a:srgbClr val="4D3217"/>
-                </a:solidFill>
-                <a:latin typeface="Aptos Display" panose="020B0004020202020204" pitchFamily="34" charset="0"/>
-              </a:rPr>
-              <a:t>Problema en finanzas</a:t>
-            </a:r>
-          </a:p>
-          <a:p>
-            <a:pPr algn="ctr"/>
-            <a:r>
-              <a:rPr lang="es-ES" sz="1500">
-                <a:solidFill>
-                  <a:srgbClr val="2B2B2B"/>
-                </a:solidFill>
-                <a:latin typeface="Aptos" panose="020B0004020202020204" pitchFamily="34" charset="0"/>
-              </a:rPr>
-              <a:t>Una respuesta convincente no garantiza trazabilidad ni fiabilidad, y ese riesgo es especialmente delicado en este dominio.</a:t>
-            </a:r>
-          </a:p>
-        </p:txBody>
-      </p:sp>
-      <p:sp>
-        <p:nvSpPr>
-          <p:cNvPr id="8" name="CuadroTexto 7">
-            <a:extLst>
-              <a:ext uri="{FF2B5EF4-FFF2-40B4-BE49-F238E27FC236}">
-                <a16:creationId xmlns:a16="http://schemas.microsoft.com/office/drawing/2014/main" id="{9C36944E-EB62-7B89-1A58-6A09A7B4E671}"/>
+                <a16:creationId xmlns:a16="http://schemas.microsoft.com/office/drawing/2014/main" id="{9D04697A-7AAD-8591-BC18-8A4F009150A8}"/>
               </a:ext>
             </a:extLst>
           </p:cNvPr>
@@ -8999,8 +15632,8 @@
         </p:nvSpPr>
         <p:spPr>
           <a:xfrm>
-            <a:off x="762000" y="4191000"/>
-            <a:ext cx="10312400" cy="677108"/>
+            <a:off x="584200" y="5106626"/>
+            <a:ext cx="11138408" cy="830997"/>
           </a:xfrm>
           <a:prstGeom prst="rect">
             <a:avLst/>
@@ -9008,19 +15641,19 @@
           <a:noFill/>
         </p:spPr>
         <p:txBody>
-          <a:bodyPr vert="horz" wrap="square" rtlCol="0">
+          <a:bodyPr wrap="square">
             <a:spAutoFit/>
           </a:bodyPr>
           <a:lstStyle/>
           <a:p>
             <a:r>
-              <a:rPr lang="es-ES" sz="1900" dirty="0">
+              <a:rPr lang="es-ES" sz="2400" b="1" dirty="0">
                 <a:solidFill>
-                  <a:srgbClr val="2B2B2B"/>
+                  <a:srgbClr val="4D3217"/>
                 </a:solidFill>
-                <a:latin typeface="Aptos" panose="020B0004020202020204" pitchFamily="34" charset="0"/>
+                <a:latin typeface="Aptos Display" panose="020B0004020202020204" pitchFamily="34" charset="0"/>
               </a:rPr>
-              <a:t>El hueco que cubre este trabajo no es entrenar un modelo nuevo, sino integrarlo en una arquitectura que ayude a interpretar y explicar mejor los datos con más control.</a:t>
+              <a:t>La propuesta: : usar un modelo generalista dentro de un flujo fijo, con validaciones, ejecución controlada y trazabilidad.</a:t>
             </a:r>
           </a:p>
         </p:txBody>
@@ -9203,394 +15836,37 @@
           </a:p>
         </p:txBody>
       </p:sp>
-      <p:sp>
-        <p:nvSpPr>
-          <p:cNvPr id="5" name="Rectángulo: esquinas redondeadas 4">
+      <p:graphicFrame>
+        <p:nvGraphicFramePr>
+          <p:cNvPr id="14" name="Marcador de contenido 11">
             <a:extLst>
               <a:ext uri="{FF2B5EF4-FFF2-40B4-BE49-F238E27FC236}">
-                <a16:creationId xmlns:a16="http://schemas.microsoft.com/office/drawing/2014/main" id="{F5CC1F57-344A-4243-D600-BEFCA690BA10}"/>
+                <a16:creationId xmlns:a16="http://schemas.microsoft.com/office/drawing/2014/main" id="{10D7A18A-D50A-F0CA-AB1A-531D06576596}"/>
               </a:ext>
             </a:extLst>
           </p:cNvPr>
-          <p:cNvSpPr/>
-          <p:nvPr/>
-        </p:nvSpPr>
-        <p:spPr>
-          <a:xfrm>
-            <a:off x="762000" y="1981200"/>
-            <a:ext cx="2159000" cy="1219200"/>
-          </a:xfrm>
-          <a:prstGeom prst="roundRect">
-            <a:avLst/>
-          </a:prstGeom>
-          <a:solidFill>
-            <a:srgbClr val="FAF4EE"/>
-          </a:solidFill>
-          <a:ln w="12700">
-            <a:solidFill>
-              <a:srgbClr val="DDD3C8"/>
-            </a:solidFill>
-          </a:ln>
-        </p:spPr>
-        <p:style>
-          <a:lnRef idx="2">
-            <a:schemeClr val="accent1">
-              <a:shade val="15000"/>
-            </a:schemeClr>
-          </a:lnRef>
-          <a:fillRef idx="1">
-            <a:schemeClr val="accent1"/>
-          </a:fillRef>
-          <a:effectRef idx="0">
-            <a:schemeClr val="accent1"/>
-          </a:effectRef>
-          <a:fontRef idx="minor">
-            <a:schemeClr val="lt1"/>
-          </a:fontRef>
-        </p:style>
-        <p:txBody>
-          <a:bodyPr wrap="square" lIns="152400" tIns="127000" rIns="152400" bIns="127000" rtlCol="0" anchor="ctr"/>
-          <a:lstStyle/>
-          <a:p>
-            <a:pPr algn="ctr"/>
-            <a:r>
-              <a:rPr lang="es-ES" sz="1700" b="1">
-                <a:solidFill>
-                  <a:srgbClr val="4D3217"/>
-                </a:solidFill>
-                <a:latin typeface="Aptos Display" panose="020B0004020202020204" pitchFamily="34" charset="0"/>
-              </a:rPr>
-              <a:t>Entrada</a:t>
-            </a:r>
-          </a:p>
-          <a:p>
-            <a:pPr algn="ctr"/>
-            <a:r>
-              <a:rPr lang="es-ES" sz="1500">
-                <a:solidFill>
-                  <a:srgbClr val="2B2B2B"/>
-                </a:solidFill>
-                <a:latin typeface="Aptos" panose="020B0004020202020204" pitchFamily="34" charset="0"/>
-              </a:rPr>
-              <a:t>Consulta del usuario en lenguaje natural.</a:t>
-            </a:r>
-          </a:p>
-        </p:txBody>
-      </p:sp>
-      <p:sp>
-        <p:nvSpPr>
-          <p:cNvPr id="6" name="Rectángulo: esquinas redondeadas 5">
-            <a:extLst>
-              <a:ext uri="{FF2B5EF4-FFF2-40B4-BE49-F238E27FC236}">
-                <a16:creationId xmlns:a16="http://schemas.microsoft.com/office/drawing/2014/main" id="{C56136A0-1759-D5D2-6DF5-8FF57DC5D563}"/>
-              </a:ext>
-            </a:extLst>
-          </p:cNvPr>
-          <p:cNvSpPr/>
-          <p:nvPr/>
-        </p:nvSpPr>
-        <p:spPr>
-          <a:xfrm>
-            <a:off x="3378200" y="1727200"/>
-            <a:ext cx="4953000" cy="1727200"/>
-          </a:xfrm>
-          <a:prstGeom prst="roundRect">
-            <a:avLst/>
-          </a:prstGeom>
-          <a:solidFill>
-            <a:srgbClr val="F1F6EF"/>
-          </a:solidFill>
-          <a:ln w="12700">
-            <a:solidFill>
-              <a:srgbClr val="DDD3C8"/>
-            </a:solidFill>
-          </a:ln>
-        </p:spPr>
-        <p:style>
-          <a:lnRef idx="2">
-            <a:schemeClr val="accent1">
-              <a:shade val="15000"/>
-            </a:schemeClr>
-          </a:lnRef>
-          <a:fillRef idx="1">
-            <a:schemeClr val="accent1"/>
-          </a:fillRef>
-          <a:effectRef idx="0">
-            <a:schemeClr val="accent1"/>
-          </a:effectRef>
-          <a:fontRef idx="minor">
-            <a:schemeClr val="lt1"/>
-          </a:fontRef>
-        </p:style>
-        <p:txBody>
-          <a:bodyPr wrap="square" lIns="152400" tIns="127000" rIns="152400" bIns="127000" rtlCol="0" anchor="ctr"/>
-          <a:lstStyle/>
-          <a:p>
-            <a:pPr algn="ctr"/>
-            <a:r>
-              <a:rPr lang="pt-BR" sz="1700" b="1" dirty="0" err="1">
-                <a:solidFill>
-                  <a:srgbClr val="4D3217"/>
-                </a:solidFill>
-                <a:latin typeface="Aptos Display" panose="020B0004020202020204" pitchFamily="34" charset="0"/>
-              </a:rPr>
-              <a:t>NÃºcleo</a:t>
-            </a:r>
-            <a:r>
-              <a:rPr lang="pt-BR" sz="1700" b="1" dirty="0">
-                <a:solidFill>
-                  <a:srgbClr val="4D3217"/>
-                </a:solidFill>
-                <a:latin typeface="Aptos Display" panose="020B0004020202020204" pitchFamily="34" charset="0"/>
-              </a:rPr>
-              <a:t> multiagente</a:t>
-            </a:r>
-          </a:p>
-          <a:p>
-            <a:pPr algn="ctr"/>
-            <a:r>
-              <a:rPr lang="pt-BR" sz="1500" dirty="0" err="1">
-                <a:solidFill>
-                  <a:srgbClr val="2B2B2B"/>
-                </a:solidFill>
-                <a:latin typeface="Aptos" panose="020B0004020202020204" pitchFamily="34" charset="0"/>
-              </a:rPr>
-              <a:t>Datos</a:t>
-            </a:r>
-            <a:r>
-              <a:rPr lang="pt-BR" sz="1500" dirty="0">
-                <a:solidFill>
-                  <a:srgbClr val="2B2B2B"/>
-                </a:solidFill>
-                <a:latin typeface="Aptos" panose="020B0004020202020204" pitchFamily="34" charset="0"/>
-              </a:rPr>
-              <a:t>, planificaciÃ³n, cÃ³digo, validaciÃ³n, ejecuciÃ³n e interpretaciÃ³n.</a:t>
-            </a:r>
-            <a:endParaRPr lang="es-ES" sz="1500" dirty="0">
-              <a:solidFill>
-                <a:srgbClr val="2B2B2B"/>
-              </a:solidFill>
-              <a:latin typeface="Aptos" panose="020B0004020202020204" pitchFamily="34" charset="0"/>
-            </a:endParaRPr>
-          </a:p>
-        </p:txBody>
-      </p:sp>
-      <p:sp>
-        <p:nvSpPr>
-          <p:cNvPr id="7" name="Rectángulo: esquinas redondeadas 6">
-            <a:extLst>
-              <a:ext uri="{FF2B5EF4-FFF2-40B4-BE49-F238E27FC236}">
-                <a16:creationId xmlns:a16="http://schemas.microsoft.com/office/drawing/2014/main" id="{97C484F5-0EA3-5CDD-C892-BE958475A84E}"/>
-              </a:ext>
-            </a:extLst>
-          </p:cNvPr>
-          <p:cNvSpPr/>
-          <p:nvPr/>
-        </p:nvSpPr>
-        <p:spPr>
-          <a:xfrm>
-            <a:off x="8788400" y="1981200"/>
-            <a:ext cx="2235200" cy="1219200"/>
-          </a:xfrm>
-          <a:prstGeom prst="roundRect">
-            <a:avLst/>
-          </a:prstGeom>
-          <a:solidFill>
-            <a:srgbClr val="E2F1FB"/>
-          </a:solidFill>
-          <a:ln w="12700">
-            <a:solidFill>
-              <a:srgbClr val="DDD3C8"/>
-            </a:solidFill>
-          </a:ln>
-        </p:spPr>
-        <p:style>
-          <a:lnRef idx="2">
-            <a:schemeClr val="accent1">
-              <a:shade val="15000"/>
-            </a:schemeClr>
-          </a:lnRef>
-          <a:fillRef idx="1">
-            <a:schemeClr val="accent1"/>
-          </a:fillRef>
-          <a:effectRef idx="0">
-            <a:schemeClr val="accent1"/>
-          </a:effectRef>
-          <a:fontRef idx="minor">
-            <a:schemeClr val="lt1"/>
-          </a:fontRef>
-        </p:style>
-        <p:txBody>
-          <a:bodyPr wrap="square" lIns="152400" tIns="127000" rIns="152400" bIns="127000" rtlCol="0" anchor="ctr"/>
-          <a:lstStyle/>
-          <a:p>
-            <a:pPr algn="ctr"/>
-            <a:r>
-              <a:rPr lang="es-ES" sz="1700" b="1" dirty="0">
-                <a:solidFill>
-                  <a:srgbClr val="4D3217"/>
-                </a:solidFill>
-                <a:latin typeface="Aptos Display" panose="020B0004020202020204" pitchFamily="34" charset="0"/>
-              </a:rPr>
-              <a:t>Salida</a:t>
-            </a:r>
-          </a:p>
-          <a:p>
-            <a:pPr algn="ctr"/>
-            <a:r>
-              <a:rPr lang="es-ES" sz="1500" dirty="0">
-                <a:solidFill>
-                  <a:srgbClr val="2B2B2B"/>
-                </a:solidFill>
-                <a:latin typeface="Aptos" panose="020B0004020202020204" pitchFamily="34" charset="0"/>
-              </a:rPr>
-              <a:t>Respuesta final legible y apoyada en </a:t>
-            </a:r>
-            <a:r>
-              <a:rPr lang="es-ES" sz="1500" dirty="0" err="1">
-                <a:solidFill>
-                  <a:srgbClr val="2B2B2B"/>
-                </a:solidFill>
-                <a:latin typeface="Aptos" panose="020B0004020202020204" pitchFamily="34" charset="0"/>
-              </a:rPr>
-              <a:t>cÃ¡lculos</a:t>
-            </a:r>
-            <a:r>
-              <a:rPr lang="es-ES" sz="1500" dirty="0">
-                <a:solidFill>
-                  <a:srgbClr val="2B2B2B"/>
-                </a:solidFill>
-                <a:latin typeface="Aptos" panose="020B0004020202020204" pitchFamily="34" charset="0"/>
-              </a:rPr>
-              <a:t> observables.</a:t>
-            </a:r>
-          </a:p>
-        </p:txBody>
-      </p:sp>
-      <p:cxnSp>
-        <p:nvCxnSpPr>
-          <p:cNvPr id="8" name="Conector recto 7">
-            <a:extLst>
-              <a:ext uri="{FF2B5EF4-FFF2-40B4-BE49-F238E27FC236}">
-                <a16:creationId xmlns:a16="http://schemas.microsoft.com/office/drawing/2014/main" id="{8970D468-BFF2-1C53-8B54-B7F20B2C6752}"/>
-              </a:ext>
-            </a:extLst>
-          </p:cNvPr>
-          <p:cNvCxnSpPr/>
-          <p:nvPr/>
-        </p:nvCxnSpPr>
-        <p:spPr>
-          <a:xfrm>
-            <a:off x="2921000" y="2590800"/>
-            <a:ext cx="457200" cy="0"/>
-          </a:xfrm>
-          <a:prstGeom prst="line">
-            <a:avLst/>
-          </a:prstGeom>
-          <a:ln w="22860">
-            <a:solidFill>
-              <a:srgbClr val="958270"/>
-            </a:solidFill>
-            <a:tailEnd type="arrow"/>
-          </a:ln>
-        </p:spPr>
-        <p:style>
-          <a:lnRef idx="2">
-            <a:schemeClr val="accent1"/>
-          </a:lnRef>
-          <a:fillRef idx="0">
-            <a:schemeClr val="accent1"/>
-          </a:fillRef>
-          <a:effectRef idx="1">
-            <a:schemeClr val="accent1"/>
-          </a:effectRef>
-          <a:fontRef idx="minor">
-            <a:schemeClr val="tx1"/>
-          </a:fontRef>
-        </p:style>
-      </p:cxnSp>
-      <p:cxnSp>
-        <p:nvCxnSpPr>
-          <p:cNvPr id="9" name="Conector recto 8">
-            <a:extLst>
-              <a:ext uri="{FF2B5EF4-FFF2-40B4-BE49-F238E27FC236}">
-                <a16:creationId xmlns:a16="http://schemas.microsoft.com/office/drawing/2014/main" id="{CE0647E2-C74D-FCBB-B4B4-ED3701116439}"/>
-              </a:ext>
-            </a:extLst>
-          </p:cNvPr>
-          <p:cNvCxnSpPr/>
-          <p:nvPr/>
-        </p:nvCxnSpPr>
-        <p:spPr>
-          <a:xfrm>
-            <a:off x="8331200" y="2590800"/>
-            <a:ext cx="457200" cy="0"/>
-          </a:xfrm>
-          <a:prstGeom prst="line">
-            <a:avLst/>
-          </a:prstGeom>
-          <a:ln w="22860">
-            <a:solidFill>
-              <a:srgbClr val="958270"/>
-            </a:solidFill>
-            <a:tailEnd type="arrow"/>
-          </a:ln>
-        </p:spPr>
-        <p:style>
-          <a:lnRef idx="2">
-            <a:schemeClr val="accent1"/>
-          </a:lnRef>
-          <a:fillRef idx="0">
-            <a:schemeClr val="accent1"/>
-          </a:fillRef>
-          <a:effectRef idx="1">
-            <a:schemeClr val="accent1"/>
-          </a:effectRef>
-          <a:fontRef idx="minor">
-            <a:schemeClr val="tx1"/>
-          </a:fontRef>
-        </p:style>
-      </p:cxnSp>
-      <p:sp>
-        <p:nvSpPr>
-          <p:cNvPr id="10" name="CuadroTexto 9">
-            <a:extLst>
-              <a:ext uri="{FF2B5EF4-FFF2-40B4-BE49-F238E27FC236}">
-                <a16:creationId xmlns:a16="http://schemas.microsoft.com/office/drawing/2014/main" id="{723F9943-E647-D37E-AA53-55FAC5C47A43}"/>
-              </a:ext>
-            </a:extLst>
-          </p:cNvPr>
-          <p:cNvSpPr txBox="1"/>
-          <p:nvPr/>
-        </p:nvSpPr>
-        <p:spPr>
-          <a:xfrm>
-            <a:off x="787400" y="4241800"/>
-            <a:ext cx="10287000" cy="707886"/>
-          </a:xfrm>
-          <a:prstGeom prst="rect">
-            <a:avLst/>
-          </a:prstGeom>
-          <a:noFill/>
-        </p:spPr>
-        <p:txBody>
-          <a:bodyPr vert="horz" wrap="square" rtlCol="0">
-            <a:spAutoFit/>
-          </a:bodyPr>
-          <a:lstStyle/>
-          <a:p>
-            <a:r>
-              <a:rPr lang="es-ES" sz="2000">
-                <a:solidFill>
-                  <a:srgbClr val="2B2B2B"/>
-                </a:solidFill>
-                <a:latin typeface="Aptos" panose="020B0004020202020204" pitchFamily="34" charset="0"/>
-              </a:rPr>
-              <a:t>La ayuda al usuario no surge de una Ãºnica llamada al modelo, sino de un recorrido completo con fases diferenciadas y artefactos inspeccionables.</a:t>
-            </a:r>
-          </a:p>
-        </p:txBody>
-      </p:sp>
+          <p:cNvGraphicFramePr>
+            <a:graphicFrameLocks noGrp="1"/>
+          </p:cNvGraphicFramePr>
+          <p:nvPr>
+            <p:ph idx="1"/>
+            <p:extLst>
+              <p:ext uri="{D42A27DB-BD31-4B8C-83A1-F6EECF244321}">
+                <p14:modId xmlns:p14="http://schemas.microsoft.com/office/powerpoint/2010/main" val="4007303774"/>
+              </p:ext>
+            </p:extLst>
+          </p:nvPr>
+        </p:nvGraphicFramePr>
+        <p:xfrm>
+          <a:off x="673608" y="1350136"/>
+          <a:ext cx="11131296" cy="4922647"/>
+        </p:xfrm>
+        <a:graphic>
+          <a:graphicData uri="http://schemas.openxmlformats.org/drawingml/2006/diagram">
+            <dgm:relIds xmlns:dgm="http://schemas.openxmlformats.org/drawingml/2006/diagram" xmlns:r="http://schemas.openxmlformats.org/officeDocument/2006/relationships" r:dm="rId3" r:lo="rId4" r:qs="rId5" r:cs="rId6"/>
+          </a:graphicData>
+        </a:graphic>
+      </p:graphicFrame>
     </p:spTree>
     <p:extLst>
       <p:ext uri="{BB962C8B-B14F-4D97-AF65-F5344CB8AC3E}">
@@ -9769,425 +16045,36 @@
           </a:p>
         </p:txBody>
       </p:sp>
-      <p:sp>
-        <p:nvSpPr>
-          <p:cNvPr id="5" name="Rectángulo: esquinas redondeadas 4">
+      <p:pic>
+        <p:nvPicPr>
+          <p:cNvPr id="12" name="Imagen 11">
             <a:extLst>
               <a:ext uri="{FF2B5EF4-FFF2-40B4-BE49-F238E27FC236}">
-                <a16:creationId xmlns:a16="http://schemas.microsoft.com/office/drawing/2014/main" id="{8CA647FE-F4EB-1B2A-F9D2-F3745F274E1D}"/>
+                <a16:creationId xmlns:a16="http://schemas.microsoft.com/office/drawing/2014/main" id="{B51DDD71-8C0F-5B3D-9D84-3B185B1505ED}"/>
               </a:ext>
             </a:extLst>
           </p:cNvPr>
-          <p:cNvSpPr/>
+          <p:cNvPicPr>
+            <a:picLocks noChangeAspect="1"/>
+          </p:cNvPicPr>
           <p:nvPr/>
-        </p:nvSpPr>
+        </p:nvPicPr>
+        <p:blipFill>
+          <a:blip r:embed="rId3"/>
+          <a:stretch>
+            <a:fillRect/>
+          </a:stretch>
+        </p:blipFill>
         <p:spPr>
           <a:xfrm>
-            <a:off x="685800" y="1625600"/>
-            <a:ext cx="2489200" cy="1473200"/>
-          </a:xfrm>
-          <a:prstGeom prst="roundRect">
-            <a:avLst/>
-          </a:prstGeom>
-          <a:solidFill>
-            <a:srgbClr val="FAF4EE"/>
-          </a:solidFill>
-          <a:ln w="12700">
-            <a:solidFill>
-              <a:srgbClr val="DDD3C8"/>
-            </a:solidFill>
-          </a:ln>
-        </p:spPr>
-        <p:style>
-          <a:lnRef idx="2">
-            <a:schemeClr val="accent1">
-              <a:shade val="15000"/>
-            </a:schemeClr>
-          </a:lnRef>
-          <a:fillRef idx="1">
-            <a:schemeClr val="accent1"/>
-          </a:fillRef>
-          <a:effectRef idx="0">
-            <a:schemeClr val="accent1"/>
-          </a:effectRef>
-          <a:fontRef idx="minor">
-            <a:schemeClr val="lt1"/>
-          </a:fontRef>
-        </p:style>
-        <p:txBody>
-          <a:bodyPr wrap="square" lIns="152400" tIns="127000" rIns="152400" bIns="127000" rtlCol="0" anchor="ctr"/>
-          <a:lstStyle/>
-          <a:p>
-            <a:pPr algn="ctr"/>
-            <a:r>
-              <a:rPr lang="es-ES" sz="1700" b="1">
-                <a:solidFill>
-                  <a:srgbClr val="4D3217"/>
-                </a:solidFill>
-                <a:latin typeface="Aptos Display" panose="020B0004020202020204" pitchFamily="34" charset="0"/>
-              </a:rPr>
-              <a:t>Fase 1</a:t>
-            </a:r>
-          </a:p>
-          <a:p>
-            <a:pPr algn="ctr"/>
-            <a:r>
-              <a:rPr lang="es-ES" sz="1500">
-                <a:solidFill>
-                  <a:srgbClr val="2B2B2B"/>
-                </a:solidFill>
-                <a:latin typeface="Aptos" panose="020B0004020202020204" pitchFamily="34" charset="0"/>
-              </a:rPr>
-              <a:t>ConstrucciÃ³n y validaciÃ³n del FinancialDataRequest, descarga y normalizaciÃ³n de datos histÃ³ricos.</a:t>
-            </a:r>
-          </a:p>
-        </p:txBody>
-      </p:sp>
-      <p:sp>
-        <p:nvSpPr>
-          <p:cNvPr id="6" name="Rectángulo: esquinas redondeadas 5">
-            <a:extLst>
-              <a:ext uri="{FF2B5EF4-FFF2-40B4-BE49-F238E27FC236}">
-                <a16:creationId xmlns:a16="http://schemas.microsoft.com/office/drawing/2014/main" id="{3553F9B4-3A5B-3A06-B1B7-81EE86085B76}"/>
-              </a:ext>
-            </a:extLst>
-          </p:cNvPr>
-          <p:cNvSpPr/>
-          <p:nvPr/>
-        </p:nvSpPr>
-        <p:spPr>
-          <a:xfrm>
-            <a:off x="3403600" y="1625600"/>
-            <a:ext cx="2489200" cy="1473200"/>
-          </a:xfrm>
-          <a:prstGeom prst="roundRect">
-            <a:avLst/>
-          </a:prstGeom>
-          <a:solidFill>
-            <a:srgbClr val="F1F6EF"/>
-          </a:solidFill>
-          <a:ln w="12700">
-            <a:solidFill>
-              <a:srgbClr val="DDD3C8"/>
-            </a:solidFill>
-          </a:ln>
-        </p:spPr>
-        <p:style>
-          <a:lnRef idx="2">
-            <a:schemeClr val="accent1">
-              <a:shade val="15000"/>
-            </a:schemeClr>
-          </a:lnRef>
-          <a:fillRef idx="1">
-            <a:schemeClr val="accent1"/>
-          </a:fillRef>
-          <a:effectRef idx="0">
-            <a:schemeClr val="accent1"/>
-          </a:effectRef>
-          <a:fontRef idx="minor">
-            <a:schemeClr val="lt1"/>
-          </a:fontRef>
-        </p:style>
-        <p:txBody>
-          <a:bodyPr wrap="square" lIns="152400" tIns="127000" rIns="152400" bIns="127000" rtlCol="0" anchor="ctr"/>
-          <a:lstStyle/>
-          <a:p>
-            <a:pPr algn="ctr"/>
-            <a:r>
-              <a:rPr lang="es-ES" sz="1700" b="1">
-                <a:solidFill>
-                  <a:srgbClr val="4D3217"/>
-                </a:solidFill>
-                <a:latin typeface="Aptos Display" panose="020B0004020202020204" pitchFamily="34" charset="0"/>
-              </a:rPr>
-              <a:t>Fase 2</a:t>
-            </a:r>
-          </a:p>
-          <a:p>
-            <a:pPr algn="ctr"/>
-            <a:r>
-              <a:rPr lang="es-ES" sz="1500">
-                <a:solidFill>
-                  <a:srgbClr val="2B2B2B"/>
-                </a:solidFill>
-                <a:latin typeface="Aptos" panose="020B0004020202020204" pitchFamily="34" charset="0"/>
-              </a:rPr>
-              <a:t>DefiniciÃ³n de mÃ©tricas, columnas necesarias y requisitos de salida.</a:t>
-            </a:r>
-          </a:p>
-        </p:txBody>
-      </p:sp>
-      <p:sp>
-        <p:nvSpPr>
-          <p:cNvPr id="7" name="Rectángulo: esquinas redondeadas 6">
-            <a:extLst>
-              <a:ext uri="{FF2B5EF4-FFF2-40B4-BE49-F238E27FC236}">
-                <a16:creationId xmlns:a16="http://schemas.microsoft.com/office/drawing/2014/main" id="{B8E71FB8-B667-C4CC-F5CA-0EB1BB004AED}"/>
-              </a:ext>
-            </a:extLst>
-          </p:cNvPr>
-          <p:cNvSpPr/>
-          <p:nvPr/>
-        </p:nvSpPr>
-        <p:spPr>
-          <a:xfrm>
-            <a:off x="6121400" y="1625600"/>
-            <a:ext cx="2489200" cy="1473200"/>
-          </a:xfrm>
-          <a:prstGeom prst="roundRect">
-            <a:avLst/>
-          </a:prstGeom>
-          <a:solidFill>
-            <a:srgbClr val="E2F1FB"/>
-          </a:solidFill>
-          <a:ln w="12700">
-            <a:solidFill>
-              <a:srgbClr val="DDD3C8"/>
-            </a:solidFill>
-          </a:ln>
-        </p:spPr>
-        <p:style>
-          <a:lnRef idx="2">
-            <a:schemeClr val="accent1">
-              <a:shade val="15000"/>
-            </a:schemeClr>
-          </a:lnRef>
-          <a:fillRef idx="1">
-            <a:schemeClr val="accent1"/>
-          </a:fillRef>
-          <a:effectRef idx="0">
-            <a:schemeClr val="accent1"/>
-          </a:effectRef>
-          <a:fontRef idx="minor">
-            <a:schemeClr val="lt1"/>
-          </a:fontRef>
-        </p:style>
-        <p:txBody>
-          <a:bodyPr wrap="square" lIns="152400" tIns="127000" rIns="152400" bIns="127000" rtlCol="0" anchor="ctr"/>
-          <a:lstStyle/>
-          <a:p>
-            <a:pPr algn="ctr"/>
-            <a:r>
-              <a:rPr lang="es-ES" sz="1700" b="1">
-                <a:solidFill>
-                  <a:srgbClr val="4D3217"/>
-                </a:solidFill>
-                <a:latin typeface="Aptos Display" panose="020B0004020202020204" pitchFamily="34" charset="0"/>
-              </a:rPr>
-              <a:t>Fase 3</a:t>
-            </a:r>
-          </a:p>
-          <a:p>
-            <a:pPr algn="ctr"/>
-            <a:r>
-              <a:rPr lang="es-ES" sz="1500">
-                <a:solidFill>
-                  <a:srgbClr val="2B2B2B"/>
-                </a:solidFill>
-                <a:latin typeface="Aptos" panose="020B0004020202020204" pitchFamily="34" charset="0"/>
-              </a:rPr>
-              <a:t>GeneraciÃ³n del script Python ejecutable a partir del plan analÃ­tico.</a:t>
-            </a:r>
-          </a:p>
-        </p:txBody>
-      </p:sp>
-      <p:sp>
-        <p:nvSpPr>
-          <p:cNvPr id="8" name="Rectángulo: esquinas redondeadas 7">
-            <a:extLst>
-              <a:ext uri="{FF2B5EF4-FFF2-40B4-BE49-F238E27FC236}">
-                <a16:creationId xmlns:a16="http://schemas.microsoft.com/office/drawing/2014/main" id="{353AB6CF-396F-575B-94A3-B6907860C954}"/>
-              </a:ext>
-            </a:extLst>
-          </p:cNvPr>
-          <p:cNvSpPr/>
-          <p:nvPr/>
-        </p:nvSpPr>
-        <p:spPr>
-          <a:xfrm>
-            <a:off x="8839200" y="1625600"/>
-            <a:ext cx="2235200" cy="1473200"/>
-          </a:xfrm>
-          <a:prstGeom prst="roundRect">
-            <a:avLst/>
-          </a:prstGeom>
-          <a:solidFill>
-            <a:srgbClr val="FBECF3"/>
-          </a:solidFill>
-          <a:ln w="12700">
-            <a:solidFill>
-              <a:srgbClr val="DDD3C8"/>
-            </a:solidFill>
-          </a:ln>
-        </p:spPr>
-        <p:style>
-          <a:lnRef idx="2">
-            <a:schemeClr val="accent1">
-              <a:shade val="15000"/>
-            </a:schemeClr>
-          </a:lnRef>
-          <a:fillRef idx="1">
-            <a:schemeClr val="accent1"/>
-          </a:fillRef>
-          <a:effectRef idx="0">
-            <a:schemeClr val="accent1"/>
-          </a:effectRef>
-          <a:fontRef idx="minor">
-            <a:schemeClr val="lt1"/>
-          </a:fontRef>
-        </p:style>
-        <p:txBody>
-          <a:bodyPr wrap="square" lIns="152400" tIns="127000" rIns="152400" bIns="127000" rtlCol="0" anchor="ctr"/>
-          <a:lstStyle/>
-          <a:p>
-            <a:pPr algn="ctr"/>
-            <a:r>
-              <a:rPr lang="es-ES" sz="1700" b="1">
-                <a:solidFill>
-                  <a:srgbClr val="4D3217"/>
-                </a:solidFill>
-                <a:latin typeface="Aptos Display" panose="020B0004020202020204" pitchFamily="34" charset="0"/>
-              </a:rPr>
-              <a:t>Fases 4 y 5</a:t>
-            </a:r>
-          </a:p>
-          <a:p>
-            <a:pPr algn="ctr"/>
-            <a:r>
-              <a:rPr lang="es-ES" sz="1500">
-                <a:solidFill>
-                  <a:srgbClr val="2B2B2B"/>
-                </a:solidFill>
-                <a:latin typeface="Aptos" panose="020B0004020202020204" pitchFamily="34" charset="0"/>
-              </a:rPr>
-              <a:t>ValidaciÃ³n del cÃ³digo, comprobaciÃ³n de la salida real e interpretaciÃ³n final.</a:t>
-            </a:r>
-          </a:p>
-        </p:txBody>
-      </p:sp>
-      <p:sp>
-        <p:nvSpPr>
-          <p:cNvPr id="9" name="CuadroTexto 8">
-            <a:extLst>
-              <a:ext uri="{FF2B5EF4-FFF2-40B4-BE49-F238E27FC236}">
-                <a16:creationId xmlns:a16="http://schemas.microsoft.com/office/drawing/2014/main" id="{89E498EB-37F2-8715-F337-C00B0AB42D98}"/>
-              </a:ext>
-            </a:extLst>
-          </p:cNvPr>
-          <p:cNvSpPr txBox="1"/>
-          <p:nvPr/>
-        </p:nvSpPr>
-        <p:spPr>
-          <a:xfrm>
-            <a:off x="1041400" y="3733800"/>
-            <a:ext cx="9652000" cy="1467068"/>
+            <a:off x="1740529" y="1158220"/>
+            <a:ext cx="9049391" cy="5457081"/>
           </a:xfrm>
           <a:prstGeom prst="rect">
             <a:avLst/>
           </a:prstGeom>
-          <a:noFill/>
         </p:spPr>
-        <p:txBody>
-          <a:bodyPr vert="horz" wrap="square" rtlCol="0">
-            <a:spAutoFit/>
-          </a:bodyPr>
-          <a:lstStyle/>
-          <a:p>
-            <a:pPr marL="457200" indent="-457200">
-              <a:spcAft>
-                <a:spcPts val="800"/>
-              </a:spcAft>
-              <a:buFont typeface="+mj-lt"/>
-              <a:buChar char="•"/>
-            </a:pPr>
-            <a:r>
-              <a:rPr lang="es-ES" sz="1900">
-                <a:solidFill>
-                  <a:srgbClr val="2B2B2B"/>
-                </a:solidFill>
-                <a:latin typeface="Aptos" panose="020B0004020202020204" pitchFamily="34" charset="0"/>
-              </a:rPr>
-              <a:t>La arquitectura separa razonamiento, cÃ¡lculo e interpretaciÃ³n.</a:t>
-            </a:r>
-          </a:p>
-          <a:p>
-            <a:pPr marL="457200" indent="-457200">
-              <a:spcAft>
-                <a:spcPts val="800"/>
-              </a:spcAft>
-              <a:buFont typeface="+mj-lt"/>
-              <a:buChar char="•"/>
-            </a:pPr>
-            <a:r>
-              <a:rPr lang="es-ES" sz="1900">
-                <a:solidFill>
-                  <a:srgbClr val="2B2B2B"/>
-                </a:solidFill>
-                <a:latin typeface="Aptos" panose="020B0004020202020204" pitchFamily="34" charset="0"/>
-              </a:rPr>
-              <a:t>No basta con que el cÃ³digo parezca razonable: debe ejecutarse bien y dejar una salida Ãºtil.</a:t>
-            </a:r>
-          </a:p>
-          <a:p>
-            <a:pPr marL="457200" indent="-457200">
-              <a:spcAft>
-                <a:spcPts val="800"/>
-              </a:spcAft>
-              <a:buFont typeface="+mj-lt"/>
-              <a:buChar char="•"/>
-            </a:pPr>
-            <a:r>
-              <a:rPr lang="es-ES" sz="1900">
-                <a:solidFill>
-                  <a:srgbClr val="2B2B2B"/>
-                </a:solidFill>
-                <a:latin typeface="Aptos" panose="020B0004020202020204" pitchFamily="34" charset="0"/>
-              </a:rPr>
-              <a:t>Si una fase falla, se activan rutas de reparaciÃ³n especÃ­ficas y acotadas.</a:t>
-            </a:r>
-          </a:p>
-        </p:txBody>
-      </p:sp>
-      <p:sp>
-        <p:nvSpPr>
-          <p:cNvPr id="10" name="CuadroTexto 9">
-            <a:extLst>
-              <a:ext uri="{FF2B5EF4-FFF2-40B4-BE49-F238E27FC236}">
-                <a16:creationId xmlns:a16="http://schemas.microsoft.com/office/drawing/2014/main" id="{01B816CE-7D1D-FE6F-AF5B-4E924C2D9315}"/>
-              </a:ext>
-            </a:extLst>
-          </p:cNvPr>
-          <p:cNvSpPr txBox="1"/>
-          <p:nvPr/>
-        </p:nvSpPr>
-        <p:spPr>
-          <a:xfrm>
-            <a:off x="762000" y="5537200"/>
-            <a:ext cx="10312400" cy="646331"/>
-          </a:xfrm>
-          <a:prstGeom prst="rect">
-            <a:avLst/>
-          </a:prstGeom>
-          <a:noFill/>
-        </p:spPr>
-        <p:txBody>
-          <a:bodyPr vert="horz" wrap="square" rtlCol="0">
-            <a:spAutoFit/>
-          </a:bodyPr>
-          <a:lstStyle/>
-          <a:p>
-            <a:r>
-              <a:rPr lang="es-ES" b="1">
-                <a:solidFill>
-                  <a:srgbClr val="4D3217"/>
-                </a:solidFill>
-                <a:latin typeface="Aptos" panose="020B0004020202020204" pitchFamily="34" charset="0"/>
-              </a:rPr>
-              <a:t>La aportaciÃ³n principal es que la respuesta final queda respaldada por contratos intermedios, validaciones explÃ­citas y evidencia persistida.</a:t>
-            </a:r>
-          </a:p>
-        </p:txBody>
-      </p:sp>
+      </p:pic>
     </p:spTree>
     <p:extLst>
       <p:ext uri="{BB962C8B-B14F-4D97-AF65-F5344CB8AC3E}">
@@ -10380,8 +16267,8 @@
         </p:nvSpPr>
         <p:spPr>
           <a:xfrm>
-            <a:off x="736600" y="1752600"/>
-            <a:ext cx="4978400" cy="1422400"/>
+            <a:off x="3093720" y="1696710"/>
+            <a:ext cx="6004560" cy="1732290"/>
           </a:xfrm>
           <a:prstGeom prst="roundRect">
             <a:avLst/>
@@ -10417,7 +16304,7 @@
           <a:p>
             <a:pPr algn="ctr"/>
             <a:r>
-              <a:rPr lang="es-ES" sz="1700" b="1">
+              <a:rPr lang="es-ES" sz="2400" b="1" dirty="0">
                 <a:solidFill>
                   <a:srgbClr val="4D3217"/>
                 </a:solidFill>
@@ -10429,13 +16316,13 @@
           <a:p>
             <a:pPr algn="ctr"/>
             <a:r>
-              <a:rPr lang="es-ES" sz="1500">
+              <a:rPr lang="es-ES" dirty="0">
                 <a:solidFill>
                   <a:srgbClr val="2B2B2B"/>
                 </a:solidFill>
                 <a:latin typeface="Aptos" panose="020B0004020202020204" pitchFamily="34" charset="0"/>
               </a:rPr>
-              <a:t>Analiza AAPL en 3 meses y explica quÃ© se puede concluir solo con estos datos histÃ³ricos.</a:t>
+              <a:t>Analiza AAPL en 3 meses y explica qué se puede concluir solo con estos datos históricos.</a:t>
             </a:r>
           </a:p>
         </p:txBody>
@@ -10445,7 +16332,7 @@
           <p:cNvPr id="6" name="Rectángulo: esquinas redondeadas 5">
             <a:extLst>
               <a:ext uri="{FF2B5EF4-FFF2-40B4-BE49-F238E27FC236}">
-                <a16:creationId xmlns:a16="http://schemas.microsoft.com/office/drawing/2014/main" id="{EF9C30CB-5D75-AB3F-A781-DF305568442F}"/>
+                <a16:creationId xmlns:a16="http://schemas.microsoft.com/office/drawing/2014/main" id="{D1385A51-F993-12BF-1F36-27BB367D9780}"/>
               </a:ext>
             </a:extLst>
           </p:cNvPr>
@@ -10454,8 +16341,70 @@
         </p:nvSpPr>
         <p:spPr>
           <a:xfrm>
-            <a:off x="6121400" y="1752600"/>
-            <a:ext cx="4953000" cy="1422400"/>
+            <a:off x="948944" y="4170690"/>
+            <a:ext cx="3175000" cy="1320800"/>
+          </a:xfrm>
+          <a:prstGeom prst="roundRect">
+            <a:avLst/>
+          </a:prstGeom>
+          <a:solidFill>
+            <a:srgbClr val="FAF4EE"/>
+          </a:solidFill>
+          <a:ln w="12700">
+            <a:solidFill>
+              <a:srgbClr val="DDD3C8"/>
+            </a:solidFill>
+          </a:ln>
+        </p:spPr>
+        <p:style>
+          <a:lnRef idx="2">
+            <a:schemeClr val="accent1">
+              <a:shade val="15000"/>
+            </a:schemeClr>
+          </a:lnRef>
+          <a:fillRef idx="1">
+            <a:schemeClr val="accent1"/>
+          </a:fillRef>
+          <a:effectRef idx="0">
+            <a:schemeClr val="accent1"/>
+          </a:effectRef>
+          <a:fontRef idx="minor">
+            <a:schemeClr val="lt1"/>
+          </a:fontRef>
+        </p:style>
+        <p:txBody>
+          <a:bodyPr wrap="square" lIns="152400" tIns="127000" rIns="152400" bIns="127000" rtlCol="0" anchor="ctr"/>
+          <a:lstStyle/>
+          <a:p>
+            <a:pPr algn="ctr"/>
+            <a:r>
+              <a:rPr lang="es-ES" sz="1700" b="1" dirty="0">
+                <a:solidFill>
+                  <a:srgbClr val="4D3217"/>
+                </a:solidFill>
+                <a:latin typeface="Aptos Display" panose="020B0004020202020204" pitchFamily="34" charset="0"/>
+              </a:rPr>
+              <a:t>Agente 1 en fase de datos</a:t>
+            </a:r>
+          </a:p>
+        </p:txBody>
+      </p:sp>
+      <p:sp>
+        <p:nvSpPr>
+          <p:cNvPr id="8" name="Rectángulo: esquinas redondeadas 7">
+            <a:extLst>
+              <a:ext uri="{FF2B5EF4-FFF2-40B4-BE49-F238E27FC236}">
+                <a16:creationId xmlns:a16="http://schemas.microsoft.com/office/drawing/2014/main" id="{3BC16D69-3F09-10BF-5875-5ED41645CB8D}"/>
+              </a:ext>
+            </a:extLst>
+          </p:cNvPr>
+          <p:cNvSpPr/>
+          <p:nvPr/>
+        </p:nvSpPr>
+        <p:spPr>
+          <a:xfrm>
+            <a:off x="4457700" y="4170690"/>
+            <a:ext cx="3175000" cy="1320800"/>
           </a:xfrm>
           <a:prstGeom prst="roundRect">
             <a:avLst/>
@@ -10489,150 +16438,85 @@
           <a:bodyPr wrap="square" lIns="152400" tIns="127000" rIns="152400" bIns="127000" rtlCol="0" anchor="ctr"/>
           <a:lstStyle/>
           <a:p>
-            <a:pPr algn="ctr"/>
-            <a:r>
-              <a:rPr lang="es-ES" sz="1700" b="1">
+            <a:pPr algn="ctr">
+              <a:spcAft>
+                <a:spcPts val="800"/>
+              </a:spcAft>
+            </a:pPr>
+            <a:r>
+              <a:rPr lang="es-ES" sz="1700" b="1" dirty="0">
                 <a:solidFill>
                   <a:srgbClr val="4D3217"/>
                 </a:solidFill>
                 <a:latin typeface="Aptos Display" panose="020B0004020202020204" pitchFamily="34" charset="0"/>
               </a:rPr>
-              <a:t>QuÃ© voy a enseÃ±ar</a:t>
-            </a:r>
-          </a:p>
-          <a:p>
-            <a:pPr algn="ctr"/>
-            <a:r>
-              <a:rPr lang="es-ES" sz="1500">
-                <a:solidFill>
-                  <a:srgbClr val="2B2B2B"/>
-                </a:solidFill>
-                <a:latin typeface="Aptos" panose="020B0004020202020204" pitchFamily="34" charset="0"/>
-              </a:rPr>
-              <a:t>1) Salida del Agente 1. 2) Fragmento del Agente 3. 3) Respuesta final del Agente 5.</a:t>
-            </a:r>
-          </a:p>
-        </p:txBody>
-      </p:sp>
-      <p:sp>
-        <p:nvSpPr>
-          <p:cNvPr id="7" name="CuadroTexto 6">
+              <a:t>Agente 3 en fase de código</a:t>
+            </a:r>
+          </a:p>
+        </p:txBody>
+      </p:sp>
+      <p:sp>
+        <p:nvSpPr>
+          <p:cNvPr id="9" name="Rectángulo: esquinas redondeadas 8">
             <a:extLst>
               <a:ext uri="{FF2B5EF4-FFF2-40B4-BE49-F238E27FC236}">
-                <a16:creationId xmlns:a16="http://schemas.microsoft.com/office/drawing/2014/main" id="{166B3E71-2DC1-C7F1-ACED-639C88132BAE}"/>
+                <a16:creationId xmlns:a16="http://schemas.microsoft.com/office/drawing/2014/main" id="{A05D2F16-8A7C-6117-1236-BEB4AB1D9442}"/>
               </a:ext>
             </a:extLst>
           </p:cNvPr>
-          <p:cNvSpPr txBox="1"/>
+          <p:cNvSpPr/>
           <p:nvPr/>
         </p:nvSpPr>
         <p:spPr>
           <a:xfrm>
-            <a:off x="1092200" y="3860800"/>
-            <a:ext cx="9550400" cy="1174681"/>
+            <a:off x="8060944" y="4170690"/>
+            <a:ext cx="3175000" cy="1320800"/>
           </a:xfrm>
-          <a:prstGeom prst="rect">
+          <a:prstGeom prst="roundRect">
             <a:avLst/>
           </a:prstGeom>
-          <a:noFill/>
+          <a:solidFill>
+            <a:srgbClr val="E2F1FB"/>
+          </a:solidFill>
+          <a:ln w="12700">
+            <a:solidFill>
+              <a:srgbClr val="DDD3C8"/>
+            </a:solidFill>
+          </a:ln>
         </p:spPr>
-        <p:txBody>
-          <a:bodyPr vert="horz" wrap="square" rtlCol="0">
-            <a:spAutoFit/>
-          </a:bodyPr>
+        <p:style>
+          <a:lnRef idx="2">
+            <a:schemeClr val="accent1">
+              <a:shade val="15000"/>
+            </a:schemeClr>
+          </a:lnRef>
+          <a:fillRef idx="1">
+            <a:schemeClr val="accent1"/>
+          </a:fillRef>
+          <a:effectRef idx="0">
+            <a:schemeClr val="accent1"/>
+          </a:effectRef>
+          <a:fontRef idx="minor">
+            <a:schemeClr val="lt1"/>
+          </a:fontRef>
+        </p:style>
+        <p:txBody>
+          <a:bodyPr wrap="square" lIns="152400" tIns="127000" rIns="152400" bIns="127000" rtlCol="0" anchor="ctr"/>
           <a:lstStyle/>
           <a:p>
-            <a:pPr marL="457200" indent="-457200">
+            <a:pPr algn="ctr">
               <a:spcAft>
                 <a:spcPts val="800"/>
               </a:spcAft>
-              <a:buFont typeface="+mj-lt"/>
-              <a:buChar char="•"/>
             </a:pPr>
             <a:r>
-              <a:rPr lang="es-ES" sz="1900">
-                <a:solidFill>
-                  <a:srgbClr val="2B2B2B"/>
-                </a:solidFill>
-                <a:latin typeface="Aptos" panose="020B0004020202020204" pitchFamily="34" charset="0"/>
-              </a:rPr>
-              <a:t>No voy a recorrer todas las trazas del sistema.</a:t>
-            </a:r>
-          </a:p>
-          <a:p>
-            <a:pPr marL="457200" indent="-457200">
-              <a:spcAft>
-                <a:spcPts val="800"/>
-              </a:spcAft>
-              <a:buFont typeface="+mj-lt"/>
-              <a:buChar char="•"/>
-            </a:pPr>
-            <a:r>
-              <a:rPr lang="es-ES" sz="1900">
-                <a:solidFill>
-                  <a:srgbClr val="2B2B2B"/>
-                </a:solidFill>
-                <a:latin typeface="Aptos" panose="020B0004020202020204" pitchFamily="34" charset="0"/>
-              </a:rPr>
-              <a:t>La idea es enseÃ±ar tres artefactos representativos del recorrido completo.</a:t>
-            </a:r>
-          </a:p>
-          <a:p>
-            <a:pPr marL="457200" indent="-457200">
-              <a:spcAft>
-                <a:spcPts val="800"/>
-              </a:spcAft>
-              <a:buFont typeface="+mj-lt"/>
-              <a:buChar char="•"/>
-            </a:pPr>
-            <a:r>
-              <a:rPr lang="es-ES" sz="1900">
-                <a:solidFill>
-                  <a:srgbClr val="2B2B2B"/>
-                </a:solidFill>
-                <a:latin typeface="Aptos" panose="020B0004020202020204" pitchFamily="34" charset="0"/>
-              </a:rPr>
-              <a:t>AsÃ­ el tribunal puede ver ejemplos concretos del flujo.</a:t>
-            </a:r>
-          </a:p>
-        </p:txBody>
-      </p:sp>
-      <p:sp>
-        <p:nvSpPr>
-          <p:cNvPr id="8" name="CuadroTexto 7">
-            <a:extLst>
-              <a:ext uri="{FF2B5EF4-FFF2-40B4-BE49-F238E27FC236}">
-                <a16:creationId xmlns:a16="http://schemas.microsoft.com/office/drawing/2014/main" id="{F16830B4-6136-45D2-F01B-EECB60F396FB}"/>
-              </a:ext>
-            </a:extLst>
-          </p:cNvPr>
-          <p:cNvSpPr txBox="1"/>
-          <p:nvPr/>
-        </p:nvSpPr>
-        <p:spPr>
-          <a:xfrm>
-            <a:off x="762000" y="5562600"/>
-            <a:ext cx="10312400" cy="369332"/>
-          </a:xfrm>
-          <a:prstGeom prst="rect">
-            <a:avLst/>
-          </a:prstGeom>
-          <a:noFill/>
-        </p:spPr>
-        <p:txBody>
-          <a:bodyPr vert="horz" wrap="square" rtlCol="0">
-            <a:spAutoFit/>
-          </a:bodyPr>
-          <a:lstStyle/>
-          <a:p>
-            <a:r>
-              <a:rPr lang="es-ES" b="1">
+              <a:rPr lang="es-ES" sz="1700" b="1" dirty="0">
                 <a:solidFill>
                   <a:srgbClr val="4D3217"/>
                 </a:solidFill>
-                <a:latin typeface="Aptos" panose="020B0004020202020204" pitchFamily="34" charset="0"/>
+                <a:latin typeface="Aptos Display" panose="020B0004020202020204" pitchFamily="34" charset="0"/>
               </a:rPr>
-              <a:t>Esto sirve como transiciÃ³n entre la arquitectura abstracta y una ejecuciÃ³n real.</a:t>
+              <a:t>Agente 5 produce como respuesta final</a:t>
             </a:r>
           </a:p>
         </p:txBody>
@@ -10830,7 +16714,7 @@
         <p:spPr>
           <a:xfrm>
             <a:off x="685800" y="1625600"/>
-            <a:ext cx="5943600" cy="3175000"/>
+            <a:ext cx="5943600" cy="2794000"/>
           </a:xfrm>
           <a:prstGeom prst="roundRect">
             <a:avLst/>
@@ -11051,19 +16935,19 @@
           <a:p>
             <a:pPr algn="ctr"/>
             <a:r>
-              <a:rPr lang="es-ES" sz="1700" b="1">
+              <a:rPr lang="es-ES" sz="1700" b="1" dirty="0">
                 <a:solidFill>
                   <a:srgbClr val="4D3217"/>
                 </a:solidFill>
                 <a:latin typeface="Aptos Display" panose="020B0004020202020204" pitchFamily="34" charset="0"/>
               </a:rPr>
-              <a:t>QuÃ© hace este agente</a:t>
+              <a:t>Qué hace este agente</a:t>
             </a:r>
           </a:p>
           <a:p>
             <a:pPr algn="ctr"/>
             <a:r>
-              <a:rPr lang="es-ES" sz="1500">
+              <a:rPr lang="es-ES" sz="1500" dirty="0">
                 <a:solidFill>
                   <a:srgbClr val="2B2B2B"/>
                 </a:solidFill>
@@ -11125,25 +17009,43 @@
           <a:p>
             <a:pPr algn="ctr"/>
             <a:r>
-              <a:rPr lang="es-ES" sz="1700" b="1">
+              <a:rPr lang="es-ES" sz="1700" b="1" dirty="0">
                 <a:solidFill>
                   <a:srgbClr val="4D3217"/>
                 </a:solidFill>
                 <a:latin typeface="Aptos Display" panose="020B0004020202020204" pitchFamily="34" charset="0"/>
               </a:rPr>
-              <a:t>Por quÃ© importa</a:t>
+              <a:t>Por qué importa</a:t>
             </a:r>
           </a:p>
           <a:p>
             <a:pPr algn="ctr"/>
             <a:r>
-              <a:rPr lang="es-ES" sz="1500">
+              <a:rPr lang="es-ES" sz="1500" dirty="0">
                 <a:solidFill>
                   <a:srgbClr val="2B2B2B"/>
                 </a:solidFill>
                 <a:latin typeface="Aptos" panose="020B0004020202020204" pitchFamily="34" charset="0"/>
               </a:rPr>
-              <a:t>Antes de analizar nada, fija ticker, proveedor, contexto temporal y campos necesarios.</a:t>
+              <a:t>Antes de analizar nada, fija </a:t>
+            </a:r>
+            <a:r>
+              <a:rPr lang="es-ES" sz="1500" dirty="0" err="1">
+                <a:solidFill>
+                  <a:srgbClr val="2B2B2B"/>
+                </a:solidFill>
+                <a:latin typeface="Aptos" panose="020B0004020202020204" pitchFamily="34" charset="0"/>
+              </a:rPr>
+              <a:t>ticker</a:t>
+            </a:r>
+            <a:r>
+              <a:rPr lang="es-ES" sz="1500" dirty="0">
+                <a:solidFill>
+                  <a:srgbClr val="2B2B2B"/>
+                </a:solidFill>
+                <a:latin typeface="Aptos" panose="020B0004020202020204" pitchFamily="34" charset="0"/>
+              </a:rPr>
+              <a:t>, proveedor, contexto temporal y campos necesarios.</a:t>
             </a:r>
           </a:p>
         </p:txBody>
@@ -11162,7 +17064,7 @@
         </p:nvSpPr>
         <p:spPr>
           <a:xfrm>
-            <a:off x="762000" y="5207000"/>
+            <a:off x="685800" y="5051455"/>
             <a:ext cx="10312400" cy="400110"/>
           </a:xfrm>
           <a:prstGeom prst="rect">
@@ -11177,13 +17079,13 @@
           <a:lstStyle/>
           <a:p>
             <a:r>
-              <a:rPr lang="es-ES" sz="2000" b="1">
+              <a:rPr lang="es-ES" sz="2000" b="1" dirty="0">
                 <a:solidFill>
                   <a:srgbClr val="4D3217"/>
                 </a:solidFill>
                 <a:latin typeface="Aptos" panose="020B0004020202020204" pitchFamily="34" charset="0"/>
               </a:rPr>
-              <a:t>La consulta deja de ser texto libre y pasa a ser una peticiÃ³n de datos estructurada.</a:t>
+              <a:t>La consulta deja de ser texto libre y pasa a ser una petición de datos estructurada.</a:t>
             </a:r>
           </a:p>
         </p:txBody>
@@ -11594,25 +17496,25 @@
           <a:p>
             <a:pPr algn="ctr"/>
             <a:r>
-              <a:rPr lang="es-ES" sz="1700" b="1">
+              <a:rPr lang="es-ES" sz="1700" b="1" dirty="0">
                 <a:solidFill>
                   <a:srgbClr val="4D3217"/>
                 </a:solidFill>
                 <a:latin typeface="Aptos Display" panose="020B0004020202020204" pitchFamily="34" charset="0"/>
               </a:rPr>
-              <a:t>QuÃ© se ve aquÃ­</a:t>
+              <a:t>Qué se ve aquí</a:t>
             </a:r>
           </a:p>
           <a:p>
             <a:pPr algn="ctr"/>
             <a:r>
-              <a:rPr lang="es-ES" sz="1500">
+              <a:rPr lang="es-ES" sz="1500" dirty="0">
                 <a:solidFill>
                   <a:srgbClr val="2B2B2B"/>
                 </a:solidFill>
                 <a:latin typeface="Aptos" panose="020B0004020202020204" pitchFamily="34" charset="0"/>
               </a:rPr>
-              <a:t>El plan analÃ­tico se convierte en un script Python ejecutable.</a:t>
+              <a:t>El plan analítico se convierte en un script Python ejecutable.</a:t>
             </a:r>
           </a:p>
         </p:txBody>
@@ -11668,7 +17570,7 @@
           <a:p>
             <a:pPr algn="ctr"/>
             <a:r>
-              <a:rPr lang="es-ES" sz="1700" b="1">
+              <a:rPr lang="es-ES" sz="1700" b="1" dirty="0">
                 <a:solidFill>
                   <a:srgbClr val="4D3217"/>
                 </a:solidFill>
@@ -11680,13 +17582,13 @@
           <a:p>
             <a:pPr algn="ctr"/>
             <a:r>
-              <a:rPr lang="es-ES" sz="1500">
+              <a:rPr lang="es-ES" sz="1500" dirty="0">
                 <a:solidFill>
                   <a:srgbClr val="2B2B2B"/>
                 </a:solidFill>
                 <a:latin typeface="Aptos" panose="020B0004020202020204" pitchFamily="34" charset="0"/>
               </a:rPr>
-              <a:t>La interpretaciÃ³n final no sale de una opiniÃ³n verbal, sino de cÃ¡lculos implementados y verificables.</a:t>
+              <a:t>La interpretación final no sale de una opinión verbal, sino de cálculos implementados y verificables.</a:t>
             </a:r>
           </a:p>
         </p:txBody>
@@ -11706,7 +17608,7 @@
         <p:spPr>
           <a:xfrm>
             <a:off x="736600" y="5207000"/>
-            <a:ext cx="10261600" cy="707886"/>
+            <a:ext cx="10261600" cy="400110"/>
           </a:xfrm>
           <a:prstGeom prst="rect">
             <a:avLst/>
@@ -11720,13 +17622,13 @@
           <a:lstStyle/>
           <a:p>
             <a:r>
-              <a:rPr lang="es-ES" sz="2000" b="1">
+              <a:rPr lang="es-ES" sz="2000" b="1" dirty="0">
                 <a:solidFill>
                   <a:srgbClr val="4D3217"/>
                 </a:solidFill>
                 <a:latin typeface="Aptos" panose="020B0004020202020204" pitchFamily="34" charset="0"/>
               </a:rPr>
-              <a:t>AquÃ­ el sistema ya no estÃ¡ describiendo el anÃ¡lisis: lo estÃ¡ materializando en cÃ³digo.</a:t>
+              <a:t>Aquí­ el sistema ya no está describiendo el análisis, lo está materializando en código.</a:t>
             </a:r>
           </a:p>
         </p:txBody>
@@ -11923,8 +17825,8 @@
         </p:nvSpPr>
         <p:spPr>
           <a:xfrm>
-            <a:off x="685800" y="1549400"/>
-            <a:ext cx="6197600" cy="3302000"/>
+            <a:off x="685800" y="1532763"/>
+            <a:ext cx="6197600" cy="4138169"/>
           </a:xfrm>
           <a:prstGeom prst="roundRect">
             <a:avLst/>
@@ -11977,8 +17879,8 @@
         </p:nvSpPr>
         <p:spPr>
           <a:xfrm>
-            <a:off x="685800" y="1549400"/>
-            <a:ext cx="6197600" cy="355600"/>
+            <a:off x="685800" y="1454257"/>
+            <a:ext cx="6197600" cy="450743"/>
           </a:xfrm>
           <a:prstGeom prst="rect">
             <a:avLst/>
@@ -12054,7 +17956,7 @@
         <p:spPr>
           <a:xfrm>
             <a:off x="838200" y="2032000"/>
-            <a:ext cx="5892800" cy="2092881"/>
+            <a:ext cx="5892800" cy="3493264"/>
           </a:xfrm>
           <a:prstGeom prst="rect">
             <a:avLst/>
@@ -12068,20 +17970,150 @@
           <a:lstStyle/>
           <a:p>
             <a:r>
-              <a:rPr lang="es-ES" sz="1300">
+              <a:rPr lang="es-ES" sz="1300" dirty="0">
                 <a:solidFill>
                   <a:srgbClr val="34271B"/>
                 </a:solidFill>
                 <a:latin typeface="Consolas" panose="020B0609020204030204" pitchFamily="49" charset="0"/>
               </a:rPr>
-              <a:t>AnÃ¡lisis de AAPL (Ãºltimos 3 meses)
+              <a:t>Análisis de AAPL (Últimos 3 meses)
 - Precio de cierre promedio: 278.00
-- MÃ¡ximo: 315.20
-- MÃ­nimo: 246.63
+- Máximo: 315.20
+- Mínimo: 246.63
 - Retorno total: 16.40 %
 - Volatilidad diaria: 1.45 %
-- Drawdown mÃ¡ximo: -7.82 %
-Conclusiones y limitaciones...</a:t>
+- </a:t>
+            </a:r>
+            <a:r>
+              <a:rPr lang="es-ES" sz="1300" dirty="0" err="1">
+                <a:solidFill>
+                  <a:srgbClr val="34271B"/>
+                </a:solidFill>
+                <a:latin typeface="Consolas" panose="020B0609020204030204" pitchFamily="49" charset="0"/>
+              </a:rPr>
+              <a:t>Drawdown</a:t>
+            </a:r>
+            <a:r>
+              <a:rPr lang="es-ES" sz="1300" dirty="0">
+                <a:solidFill>
+                  <a:srgbClr val="34271B"/>
+                </a:solidFill>
+                <a:latin typeface="Consolas" panose="020B0609020204030204" pitchFamily="49" charset="0"/>
+              </a:rPr>
+              <a:t> máximo: -7.82 %
+**Conclusiones basadas únicamente en los datos históricos**</a:t>
+            </a:r>
+          </a:p>
+          <a:p>
+            <a:pPr marL="285750" indent="-285750">
+              <a:buFontTx/>
+              <a:buChar char="-"/>
+            </a:pPr>
+            <a:r>
+              <a:rPr lang="es-ES" sz="1300" dirty="0">
+                <a:solidFill>
+                  <a:srgbClr val="34271B"/>
+                </a:solidFill>
+                <a:latin typeface="Consolas" panose="020B0609020204030204" pitchFamily="49" charset="0"/>
+              </a:rPr>
+              <a:t>El precio de AAPL ha mostrado una tendencia alcista, con…</a:t>
+            </a:r>
+          </a:p>
+          <a:p>
+            <a:pPr marL="285750" indent="-285750">
+              <a:buFontTx/>
+              <a:buChar char="-"/>
+            </a:pPr>
+            <a:r>
+              <a:rPr lang="es-ES" sz="1300" dirty="0">
+                <a:solidFill>
+                  <a:srgbClr val="34271B"/>
+                </a:solidFill>
+                <a:latin typeface="Consolas" panose="020B0609020204030204" pitchFamily="49" charset="0"/>
+              </a:rPr>
+              <a:t>La volatilidad diaria de alrededor del 1.45 % indica que…</a:t>
+            </a:r>
+          </a:p>
+          <a:p>
+            <a:pPr marL="285750" indent="-285750">
+              <a:buFontTx/>
+              <a:buChar char="-"/>
+            </a:pPr>
+            <a:r>
+              <a:rPr lang="es-ES" sz="1300" dirty="0">
+                <a:solidFill>
+                  <a:srgbClr val="34271B"/>
+                </a:solidFill>
+                <a:latin typeface="Consolas" panose="020B0609020204030204" pitchFamily="49" charset="0"/>
+              </a:rPr>
+              <a:t>El </a:t>
+            </a:r>
+            <a:r>
+              <a:rPr lang="es-ES" sz="1300" dirty="0" err="1">
+                <a:solidFill>
+                  <a:srgbClr val="34271B"/>
+                </a:solidFill>
+                <a:latin typeface="Consolas" panose="020B0609020204030204" pitchFamily="49" charset="0"/>
+              </a:rPr>
+              <a:t>drawdown</a:t>
+            </a:r>
+            <a:r>
+              <a:rPr lang="es-ES" sz="1300" dirty="0">
+                <a:solidFill>
+                  <a:srgbClr val="34271B"/>
+                </a:solidFill>
+                <a:latin typeface="Consolas" panose="020B0609020204030204" pitchFamily="49" charset="0"/>
+              </a:rPr>
+              <a:t> máximo de -7.82 % sugiere que la mayor cada… </a:t>
+            </a:r>
+          </a:p>
+          <a:p>
+            <a:endParaRPr lang="es-ES" sz="1300" dirty="0">
+              <a:solidFill>
+                <a:srgbClr val="34271B"/>
+              </a:solidFill>
+              <a:latin typeface="Consolas" panose="020B0609020204030204" pitchFamily="49" charset="0"/>
+            </a:endParaRPr>
+          </a:p>
+          <a:p>
+            <a:r>
+              <a:rPr lang="es-ES" sz="1300" dirty="0">
+                <a:solidFill>
+                  <a:srgbClr val="34271B"/>
+                </a:solidFill>
+                <a:latin typeface="Consolas" panose="020B0609020204030204" pitchFamily="49" charset="0"/>
+              </a:rPr>
+              <a:t>**Limitaciones**</a:t>
+            </a:r>
+          </a:p>
+          <a:p>
+            <a:pPr marL="285750" indent="-285750">
+              <a:buFontTx/>
+              <a:buChar char="-"/>
+            </a:pPr>
+            <a:r>
+              <a:rPr lang="es-ES" sz="1300" dirty="0">
+                <a:solidFill>
+                  <a:srgbClr val="34271B"/>
+                </a:solidFill>
+                <a:latin typeface="Consolas" panose="020B0609020204030204" pitchFamily="49" charset="0"/>
+              </a:rPr>
+              <a:t>Los datos corresponden únicamente a precios de cierre… </a:t>
+            </a:r>
+          </a:p>
+          <a:p>
+            <a:pPr marL="285750" indent="-285750">
+              <a:buFontTx/>
+              <a:buChar char="-"/>
+            </a:pPr>
+            <a:r>
+              <a:rPr lang="es-ES" sz="1300" dirty="0">
+                <a:solidFill>
+                  <a:srgbClr val="34271B"/>
+                </a:solidFill>
+                <a:latin typeface="Consolas" panose="020B0609020204030204" pitchFamily="49" charset="0"/>
+              </a:rPr>
+              <a:t>No se han considerado factores externos ni noticias que…</a:t>
             </a:r>
           </a:p>
         </p:txBody>
@@ -12137,25 +18169,25 @@
           <a:p>
             <a:pPr algn="ctr"/>
             <a:r>
-              <a:rPr lang="es-ES" sz="1700" b="1">
+              <a:rPr lang="es-ES" sz="1700" b="1" dirty="0">
                 <a:solidFill>
                   <a:srgbClr val="4D3217"/>
                 </a:solidFill>
                 <a:latin typeface="Aptos Display" panose="020B0004020202020204" pitchFamily="34" charset="0"/>
               </a:rPr>
-              <a:t>QuÃ© recibe el usuario</a:t>
+              <a:t>Qué recibe el usuario</a:t>
             </a:r>
           </a:p>
           <a:p>
             <a:pPr algn="ctr"/>
             <a:r>
-              <a:rPr lang="es-ES" sz="1500">
+              <a:rPr lang="es-ES" sz="1500" dirty="0">
                 <a:solidFill>
                   <a:srgbClr val="2B2B2B"/>
                 </a:solidFill>
                 <a:latin typeface="Aptos" panose="020B0004020202020204" pitchFamily="34" charset="0"/>
               </a:rPr>
-              <a:t>MÃ©tricas principales, interpretaciÃ³n del periodo y limitaciones del anÃ¡lisis.</a:t>
+              <a:t>Métricas principales, interpretación del agente y limitaciones del análisis.</a:t>
             </a:r>
           </a:p>
         </p:txBody>
@@ -12211,25 +18243,25 @@
           <a:p>
             <a:pPr algn="ctr"/>
             <a:r>
-              <a:rPr lang="es-ES" sz="1700" b="1">
+              <a:rPr lang="es-ES" sz="1700" b="1" dirty="0">
                 <a:solidFill>
                   <a:srgbClr val="4D3217"/>
                 </a:solidFill>
                 <a:latin typeface="Aptos Display" panose="020B0004020202020204" pitchFamily="34" charset="0"/>
               </a:rPr>
-              <a:t>QuÃ© demuestra</a:t>
+              <a:t>Qué demuestra</a:t>
             </a:r>
           </a:p>
           <a:p>
             <a:pPr algn="ctr"/>
             <a:r>
-              <a:rPr lang="es-ES" sz="1500">
+              <a:rPr lang="es-ES" sz="1500" dirty="0">
                 <a:solidFill>
                   <a:srgbClr val="2B2B2B"/>
                 </a:solidFill>
                 <a:latin typeface="Aptos" panose="020B0004020202020204" pitchFamily="34" charset="0"/>
               </a:rPr>
-              <a:t>La respuesta visible es la Ãºltima capa de un proceso previo de datos, plan, cÃ³digo y validaciÃ³n.</a:t>
+              <a:t>La respuesta visible es la última capa de un proceso previo de datos, plan, código y validación.</a:t>
             </a:r>
           </a:p>
         </p:txBody>
@@ -12248,7 +18280,7 @@
         </p:nvSpPr>
         <p:spPr>
           <a:xfrm>
-            <a:off x="762000" y="5232400"/>
+            <a:off x="685800" y="5816600"/>
             <a:ext cx="10312400" cy="677108"/>
           </a:xfrm>
           <a:prstGeom prst="rect">
@@ -12263,7 +18295,7 @@
           <a:lstStyle/>
           <a:p>
             <a:r>
-              <a:rPr lang="es-ES" sz="1900" b="1">
+              <a:rPr lang="es-ES" sz="1900" b="1" dirty="0">
                 <a:solidFill>
                   <a:srgbClr val="4D3217"/>
                 </a:solidFill>

--- a/docs/presentacion_tfm_15min_v4.pptx
+++ b/docs/presentacion_tfm_15min_v4.pptx
@@ -7443,7 +7443,7 @@
           <a:p>
             <a:fld id="{EF86E45A-C90F-4ED4-8B48-9EEDA5495BF8}" type="datetimeFigureOut">
               <a:rPr lang="es-ES" smtClean="0"/>
-              <a:t>25/06/2026</a:t>
+              <a:t>26/06/2026</a:t>
             </a:fld>
             <a:endParaRPr lang="es-ES"/>
           </a:p>
@@ -7843,15 +7843,12 @@
           <a:bodyPr/>
           <a:lstStyle/>
           <a:p>
-            <a:r>
-              <a:rPr lang="es-ES" sz="1400">
-                <a:solidFill>
-                  <a:srgbClr val="2B2B2B"/>
-                </a:solidFill>
-                <a:latin typeface="Aptos" panose="020B0004020202020204" pitchFamily="34" charset="0"/>
-              </a:rPr>
-              <a:t>Explicar con claridad cÃ³mo se juzga el sistema.</a:t>
-            </a:r>
+            <a:endParaRPr lang="es-ES" sz="1400" dirty="0">
+              <a:solidFill>
+                <a:srgbClr val="2B2B2B"/>
+              </a:solidFill>
+              <a:latin typeface="Aptos" panose="020B0004020202020204" pitchFamily="34" charset="0"/>
+            </a:endParaRPr>
           </a:p>
         </p:txBody>
       </p:sp>
@@ -7935,15 +7932,12 @@
           <a:bodyPr/>
           <a:lstStyle/>
           <a:p>
-            <a:r>
-              <a:rPr lang="es-ES" sz="1400">
-                <a:solidFill>
-                  <a:srgbClr val="2B2B2B"/>
-                </a:solidFill>
-                <a:latin typeface="Aptos" panose="020B0004020202020204" pitchFamily="34" charset="0"/>
-              </a:rPr>
-              <a:t>Leer la tendencia con honestidad y remarcar el matiz de calidad en los casos completados.</a:t>
-            </a:r>
+            <a:endParaRPr lang="es-ES" sz="1400" dirty="0">
+              <a:solidFill>
+                <a:srgbClr val="2B2B2B"/>
+              </a:solidFill>
+              <a:latin typeface="Aptos" panose="020B0004020202020204" pitchFamily="34" charset="0"/>
+            </a:endParaRPr>
           </a:p>
         </p:txBody>
       </p:sp>
@@ -8027,15 +8021,12 @@
           <a:bodyPr/>
           <a:lstStyle/>
           <a:p>
-            <a:r>
-              <a:rPr lang="es-ES" sz="1400">
-                <a:solidFill>
-                  <a:srgbClr val="2B2B2B"/>
-                </a:solidFill>
-                <a:latin typeface="Aptos" panose="020B0004020202020204" pitchFamily="34" charset="0"/>
-              </a:rPr>
-              <a:t>Slide breve de honestidad metodolÃ³gica.</a:t>
-            </a:r>
+            <a:endParaRPr lang="es-ES" sz="1400" dirty="0">
+              <a:solidFill>
+                <a:srgbClr val="2B2B2B"/>
+              </a:solidFill>
+              <a:latin typeface="Aptos" panose="020B0004020202020204" pitchFamily="34" charset="0"/>
+            </a:endParaRPr>
           </a:p>
         </p:txBody>
       </p:sp>
@@ -8119,15 +8110,12 @@
           <a:bodyPr/>
           <a:lstStyle/>
           <a:p>
-            <a:r>
-              <a:rPr lang="es-ES" sz="1400">
-                <a:solidFill>
-                  <a:srgbClr val="2B2B2B"/>
-                </a:solidFill>
-                <a:latin typeface="Aptos" panose="020B0004020202020204" pitchFamily="34" charset="0"/>
-              </a:rPr>
-              <a:t>Cerrar con una frase clara y fÃ¡cil de recordar.</a:t>
-            </a:r>
+            <a:endParaRPr lang="es-ES" sz="1400" dirty="0">
+              <a:solidFill>
+                <a:srgbClr val="2B2B2B"/>
+              </a:solidFill>
+              <a:latin typeface="Aptos" panose="020B0004020202020204" pitchFamily="34" charset="0"/>
+            </a:endParaRPr>
           </a:p>
         </p:txBody>
       </p:sp>
@@ -8573,15 +8561,12 @@
           <a:bodyPr/>
           <a:lstStyle/>
           <a:p>
-            <a:r>
-              <a:rPr lang="es-ES" sz="1400">
-                <a:solidFill>
-                  <a:srgbClr val="2B2B2B"/>
-                </a:solidFill>
-                <a:latin typeface="Aptos" panose="020B0004020202020204" pitchFamily="34" charset="0"/>
-              </a:rPr>
-              <a:t>Slide de transiciÃ³n. Solo anunciar el caso.</a:t>
-            </a:r>
+            <a:endParaRPr lang="es-ES" sz="1400" dirty="0">
+              <a:solidFill>
+                <a:srgbClr val="2B2B2B"/>
+              </a:solidFill>
+              <a:latin typeface="Aptos" panose="020B0004020202020204" pitchFamily="34" charset="0"/>
+            </a:endParaRPr>
           </a:p>
         </p:txBody>
       </p:sp>
@@ -8665,15 +8650,12 @@
           <a:bodyPr/>
           <a:lstStyle/>
           <a:p>
-            <a:r>
-              <a:rPr lang="es-ES" sz="1400">
-                <a:solidFill>
-                  <a:srgbClr val="2B2B2B"/>
-                </a:solidFill>
-                <a:latin typeface="Aptos" panose="020B0004020202020204" pitchFamily="34" charset="0"/>
-              </a:rPr>
-              <a:t>Explicar que el Agente 1 no analiza aÃºn. Primero formaliza el problema de datos.</a:t>
-            </a:r>
+            <a:endParaRPr lang="es-ES" sz="1400" dirty="0">
+              <a:solidFill>
+                <a:srgbClr val="2B2B2B"/>
+              </a:solidFill>
+              <a:latin typeface="Aptos" panose="020B0004020202020204" pitchFamily="34" charset="0"/>
+            </a:endParaRPr>
           </a:p>
         </p:txBody>
       </p:sp>
@@ -8757,15 +8739,12 @@
           <a:bodyPr/>
           <a:lstStyle/>
           <a:p>
-            <a:r>
-              <a:rPr lang="es-ES" sz="1400">
-                <a:solidFill>
-                  <a:srgbClr val="2B2B2B"/>
-                </a:solidFill>
-                <a:latin typeface="Aptos" panose="020B0004020202020204" pitchFamily="34" charset="0"/>
-              </a:rPr>
-              <a:t>Remarcar la conexiÃ³n entre razonamiento analÃ­tico y ejecuciÃ³n verificable.</a:t>
-            </a:r>
+            <a:endParaRPr lang="es-ES" sz="1400" dirty="0">
+              <a:solidFill>
+                <a:srgbClr val="2B2B2B"/>
+              </a:solidFill>
+              <a:latin typeface="Aptos" panose="020B0004020202020204" pitchFamily="34" charset="0"/>
+            </a:endParaRPr>
           </a:p>
         </p:txBody>
       </p:sp>
@@ -9044,7 +9023,7 @@
           <a:p>
             <a:fld id="{51C7751C-6D08-4291-8D2B-3017B01D7C95}" type="datetimeFigureOut">
               <a:rPr lang="es-ES" smtClean="0"/>
-              <a:t>25/06/2026</a:t>
+              <a:t>26/06/2026</a:t>
             </a:fld>
             <a:endParaRPr lang="es-ES"/>
           </a:p>
@@ -9242,7 +9221,7 @@
           <a:p>
             <a:fld id="{51C7751C-6D08-4291-8D2B-3017B01D7C95}" type="datetimeFigureOut">
               <a:rPr lang="es-ES" smtClean="0"/>
-              <a:t>25/06/2026</a:t>
+              <a:t>26/06/2026</a:t>
             </a:fld>
             <a:endParaRPr lang="es-ES"/>
           </a:p>
@@ -9450,7 +9429,7 @@
           <a:p>
             <a:fld id="{51C7751C-6D08-4291-8D2B-3017B01D7C95}" type="datetimeFigureOut">
               <a:rPr lang="es-ES" smtClean="0"/>
-              <a:t>25/06/2026</a:t>
+              <a:t>26/06/2026</a:t>
             </a:fld>
             <a:endParaRPr lang="es-ES"/>
           </a:p>
@@ -9648,7 +9627,7 @@
           <a:p>
             <a:fld id="{51C7751C-6D08-4291-8D2B-3017B01D7C95}" type="datetimeFigureOut">
               <a:rPr lang="es-ES" smtClean="0"/>
-              <a:t>25/06/2026</a:t>
+              <a:t>26/06/2026</a:t>
             </a:fld>
             <a:endParaRPr lang="es-ES"/>
           </a:p>
@@ -9923,7 +9902,7 @@
           <a:p>
             <a:fld id="{51C7751C-6D08-4291-8D2B-3017B01D7C95}" type="datetimeFigureOut">
               <a:rPr lang="es-ES" smtClean="0"/>
-              <a:t>25/06/2026</a:t>
+              <a:t>26/06/2026</a:t>
             </a:fld>
             <a:endParaRPr lang="es-ES"/>
           </a:p>
@@ -10188,7 +10167,7 @@
           <a:p>
             <a:fld id="{51C7751C-6D08-4291-8D2B-3017B01D7C95}" type="datetimeFigureOut">
               <a:rPr lang="es-ES" smtClean="0"/>
-              <a:t>25/06/2026</a:t>
+              <a:t>26/06/2026</a:t>
             </a:fld>
             <a:endParaRPr lang="es-ES"/>
           </a:p>
@@ -10600,7 +10579,7 @@
           <a:p>
             <a:fld id="{51C7751C-6D08-4291-8D2B-3017B01D7C95}" type="datetimeFigureOut">
               <a:rPr lang="es-ES" smtClean="0"/>
-              <a:t>25/06/2026</a:t>
+              <a:t>26/06/2026</a:t>
             </a:fld>
             <a:endParaRPr lang="es-ES"/>
           </a:p>
@@ -10741,7 +10720,7 @@
           <a:p>
             <a:fld id="{51C7751C-6D08-4291-8D2B-3017B01D7C95}" type="datetimeFigureOut">
               <a:rPr lang="es-ES" smtClean="0"/>
-              <a:t>25/06/2026</a:t>
+              <a:t>26/06/2026</a:t>
             </a:fld>
             <a:endParaRPr lang="es-ES"/>
           </a:p>
@@ -10854,7 +10833,7 @@
           <a:p>
             <a:fld id="{51C7751C-6D08-4291-8D2B-3017B01D7C95}" type="datetimeFigureOut">
               <a:rPr lang="es-ES" smtClean="0"/>
-              <a:t>25/06/2026</a:t>
+              <a:t>26/06/2026</a:t>
             </a:fld>
             <a:endParaRPr lang="es-ES"/>
           </a:p>
@@ -11165,7 +11144,7 @@
           <a:p>
             <a:fld id="{51C7751C-6D08-4291-8D2B-3017B01D7C95}" type="datetimeFigureOut">
               <a:rPr lang="es-ES" smtClean="0"/>
-              <a:t>25/06/2026</a:t>
+              <a:t>26/06/2026</a:t>
             </a:fld>
             <a:endParaRPr lang="es-ES"/>
           </a:p>
@@ -11453,7 +11432,7 @@
           <a:p>
             <a:fld id="{51C7751C-6D08-4291-8D2B-3017B01D7C95}" type="datetimeFigureOut">
               <a:rPr lang="es-ES" smtClean="0"/>
-              <a:t>25/06/2026</a:t>
+              <a:t>26/06/2026</a:t>
             </a:fld>
             <a:endParaRPr lang="es-ES"/>
           </a:p>
@@ -11694,7 +11673,7 @@
           <a:p>
             <a:fld id="{51C7751C-6D08-4291-8D2B-3017B01D7C95}" type="datetimeFigureOut">
               <a:rPr lang="es-ES" smtClean="0"/>
-              <a:t>25/06/2026</a:t>
+              <a:t>26/06/2026</a:t>
             </a:fld>
             <a:endParaRPr lang="es-ES"/>
           </a:p>
@@ -14025,8 +14004,8 @@
         </p:nvSpPr>
         <p:spPr>
           <a:xfrm>
-            <a:off x="6934200" y="3687633"/>
-            <a:ext cx="4572000" cy="1200329"/>
+            <a:off x="7071360" y="3445331"/>
+            <a:ext cx="4572000" cy="1323439"/>
           </a:xfrm>
           <a:prstGeom prst="rect">
             <a:avLst/>
@@ -14040,31 +14019,58 @@
           <a:lstStyle/>
           <a:p>
             <a:r>
-              <a:rPr lang="es-ES" dirty="0">
+              <a:rPr lang="es-ES" sz="2000" dirty="0">
                 <a:solidFill>
                   <a:srgbClr val="2B2B2B"/>
                 </a:solidFill>
                 <a:latin typeface="Aptos" panose="020B0004020202020204" pitchFamily="34" charset="0"/>
               </a:rPr>
-              <a:t>La dificultad creciente tensiona sobre todo las fases previas del </a:t>
-            </a:r>
-            <a:r>
-              <a:rPr lang="es-ES" dirty="0" err="1">
+              <a:t>Media casos completados: </a:t>
+            </a:r>
+          </a:p>
+          <a:p>
+            <a:pPr marL="285750" indent="-285750">
+              <a:buFont typeface="Arial" panose="020B0604020202020204" pitchFamily="34" charset="0"/>
+              <a:buChar char="•"/>
+            </a:pPr>
+            <a:r>
+              <a:rPr lang="es-ES" sz="2000" dirty="0">
                 <a:solidFill>
                   <a:srgbClr val="2B2B2B"/>
                 </a:solidFill>
                 <a:latin typeface="Aptos" panose="020B0004020202020204" pitchFamily="34" charset="0"/>
               </a:rPr>
-              <a:t>workflow</a:t>
-            </a:r>
-            <a:r>
-              <a:rPr lang="es-ES" dirty="0">
+              <a:t>Nivel A: 8,5</a:t>
+            </a:r>
+          </a:p>
+          <a:p>
+            <a:pPr marL="285750" indent="-285750">
+              <a:buFont typeface="Arial" panose="020B0604020202020204" pitchFamily="34" charset="0"/>
+              <a:buChar char="•"/>
+            </a:pPr>
+            <a:r>
+              <a:rPr lang="es-ES" sz="2000" dirty="0">
                 <a:solidFill>
                   <a:srgbClr val="2B2B2B"/>
                 </a:solidFill>
                 <a:latin typeface="Aptos" panose="020B0004020202020204" pitchFamily="34" charset="0"/>
               </a:rPr>
-              <a:t>: resolución de datos, validación del análisis y estabilidad de ejecución.</a:t>
+              <a:t>Nivel B: 8,67</a:t>
+            </a:r>
+          </a:p>
+          <a:p>
+            <a:pPr marL="285750" indent="-285750">
+              <a:buFont typeface="Arial" panose="020B0604020202020204" pitchFamily="34" charset="0"/>
+              <a:buChar char="•"/>
+            </a:pPr>
+            <a:r>
+              <a:rPr lang="es-ES" sz="2000" dirty="0">
+                <a:solidFill>
+                  <a:srgbClr val="2B2B2B"/>
+                </a:solidFill>
+                <a:latin typeface="Aptos" panose="020B0004020202020204" pitchFamily="34" charset="0"/>
+              </a:rPr>
+              <a:t>Nivel C: 8,43</a:t>
             </a:r>
           </a:p>
         </p:txBody>
@@ -15653,7 +15659,7 @@
                 </a:solidFill>
                 <a:latin typeface="Aptos Display" panose="020B0004020202020204" pitchFamily="34" charset="0"/>
               </a:rPr>
-              <a:t>La propuesta: : usar un modelo generalista dentro de un flujo fijo, con validaciones, ejecución controlada y trazabilidad.</a:t>
+              <a:t>La propuesta: usar un modelo generalista dentro de un flujo fijo, con validaciones, ejecución controlada y trazabilidad.</a:t>
             </a:r>
           </a:p>
         </p:txBody>
@@ -15897,6 +15903,36 @@
           <a:chExt cx="0" cy="0"/>
         </a:xfrm>
       </p:grpSpPr>
+      <p:pic>
+        <p:nvPicPr>
+          <p:cNvPr id="12" name="Imagen 11">
+            <a:extLst>
+              <a:ext uri="{FF2B5EF4-FFF2-40B4-BE49-F238E27FC236}">
+                <a16:creationId xmlns:a16="http://schemas.microsoft.com/office/drawing/2014/main" id="{B51DDD71-8C0F-5B3D-9D84-3B185B1505ED}"/>
+              </a:ext>
+            </a:extLst>
+          </p:cNvPr>
+          <p:cNvPicPr>
+            <a:picLocks noChangeAspect="1"/>
+          </p:cNvPicPr>
+          <p:nvPr/>
+        </p:nvPicPr>
+        <p:blipFill>
+          <a:blip r:embed="rId3"/>
+          <a:stretch>
+            <a:fillRect/>
+          </a:stretch>
+        </p:blipFill>
+        <p:spPr>
+          <a:xfrm>
+            <a:off x="976376" y="555383"/>
+            <a:ext cx="9877552" cy="5956489"/>
+          </a:xfrm>
+          <a:prstGeom prst="rect">
+            <a:avLst/>
+          </a:prstGeom>
+        </p:spPr>
+      </p:pic>
       <p:sp>
         <p:nvSpPr>
           <p:cNvPr id="2" name="CuadroTexto 1">
@@ -16045,36 +16081,6 @@
           </a:p>
         </p:txBody>
       </p:sp>
-      <p:pic>
-        <p:nvPicPr>
-          <p:cNvPr id="12" name="Imagen 11">
-            <a:extLst>
-              <a:ext uri="{FF2B5EF4-FFF2-40B4-BE49-F238E27FC236}">
-                <a16:creationId xmlns:a16="http://schemas.microsoft.com/office/drawing/2014/main" id="{B51DDD71-8C0F-5B3D-9D84-3B185B1505ED}"/>
-              </a:ext>
-            </a:extLst>
-          </p:cNvPr>
-          <p:cNvPicPr>
-            <a:picLocks noChangeAspect="1"/>
-          </p:cNvPicPr>
-          <p:nvPr/>
-        </p:nvPicPr>
-        <p:blipFill>
-          <a:blip r:embed="rId3"/>
-          <a:stretch>
-            <a:fillRect/>
-          </a:stretch>
-        </p:blipFill>
-        <p:spPr>
-          <a:xfrm>
-            <a:off x="1740529" y="1158220"/>
-            <a:ext cx="9049391" cy="5457081"/>
-          </a:xfrm>
-          <a:prstGeom prst="rect">
-            <a:avLst/>
-          </a:prstGeom>
-        </p:spPr>
-      </p:pic>
     </p:spTree>
     <p:extLst>
       <p:ext uri="{BB962C8B-B14F-4D97-AF65-F5344CB8AC3E}">
